--- a/Asp.NetCore/2.C#/Presentation/c#.pptx
+++ b/Asp.NetCore/2.C#/Presentation/c#.pptx
@@ -5,45 +5,45 @@
     <p:sldMasterId id="2147483648" r:id="rId1"/>
   </p:sldMasterIdLst>
   <p:sldIdLst>
-    <p:sldId id="257" r:id="rId3"/>
-    <p:sldId id="261" r:id="rId4"/>
-    <p:sldId id="259" r:id="rId5"/>
-    <p:sldId id="264" r:id="rId6"/>
-    <p:sldId id="265" r:id="rId7"/>
-    <p:sldId id="258" r:id="rId8"/>
-    <p:sldId id="266" r:id="rId9"/>
-    <p:sldId id="267" r:id="rId10"/>
-    <p:sldId id="303" r:id="rId11"/>
-    <p:sldId id="269" r:id="rId12"/>
-    <p:sldId id="270" r:id="rId13"/>
-    <p:sldId id="271" r:id="rId14"/>
-    <p:sldId id="272" r:id="rId15"/>
-    <p:sldId id="273" r:id="rId16"/>
-    <p:sldId id="274" r:id="rId17"/>
-    <p:sldId id="275" r:id="rId18"/>
-    <p:sldId id="304" r:id="rId19"/>
-    <p:sldId id="278" r:id="rId20"/>
-    <p:sldId id="279" r:id="rId21"/>
-    <p:sldId id="280" r:id="rId22"/>
-    <p:sldId id="282" r:id="rId23"/>
-    <p:sldId id="283" r:id="rId24"/>
-    <p:sldId id="284" r:id="rId25"/>
-    <p:sldId id="286" r:id="rId26"/>
-    <p:sldId id="287" r:id="rId27"/>
-    <p:sldId id="288" r:id="rId28"/>
-    <p:sldId id="290" r:id="rId29"/>
-    <p:sldId id="285" r:id="rId30"/>
-    <p:sldId id="291" r:id="rId31"/>
-    <p:sldId id="292" r:id="rId32"/>
-    <p:sldId id="293" r:id="rId33"/>
-    <p:sldId id="294" r:id="rId34"/>
-    <p:sldId id="295" r:id="rId35"/>
-    <p:sldId id="296" r:id="rId36"/>
-    <p:sldId id="297" r:id="rId37"/>
-    <p:sldId id="299" r:id="rId38"/>
-    <p:sldId id="300" r:id="rId39"/>
-    <p:sldId id="301" r:id="rId40"/>
-    <p:sldId id="302" r:id="rId41"/>
+    <p:sldId id="257" r:id="rId2"/>
+    <p:sldId id="261" r:id="rId3"/>
+    <p:sldId id="259" r:id="rId4"/>
+    <p:sldId id="264" r:id="rId5"/>
+    <p:sldId id="265" r:id="rId6"/>
+    <p:sldId id="258" r:id="rId7"/>
+    <p:sldId id="266" r:id="rId8"/>
+    <p:sldId id="267" r:id="rId9"/>
+    <p:sldId id="303" r:id="rId10"/>
+    <p:sldId id="269" r:id="rId11"/>
+    <p:sldId id="270" r:id="rId12"/>
+    <p:sldId id="271" r:id="rId13"/>
+    <p:sldId id="272" r:id="rId14"/>
+    <p:sldId id="273" r:id="rId15"/>
+    <p:sldId id="274" r:id="rId16"/>
+    <p:sldId id="275" r:id="rId17"/>
+    <p:sldId id="304" r:id="rId18"/>
+    <p:sldId id="278" r:id="rId19"/>
+    <p:sldId id="279" r:id="rId20"/>
+    <p:sldId id="280" r:id="rId21"/>
+    <p:sldId id="282" r:id="rId22"/>
+    <p:sldId id="283" r:id="rId23"/>
+    <p:sldId id="284" r:id="rId24"/>
+    <p:sldId id="286" r:id="rId25"/>
+    <p:sldId id="287" r:id="rId26"/>
+    <p:sldId id="288" r:id="rId27"/>
+    <p:sldId id="290" r:id="rId28"/>
+    <p:sldId id="285" r:id="rId29"/>
+    <p:sldId id="291" r:id="rId30"/>
+    <p:sldId id="292" r:id="rId31"/>
+    <p:sldId id="293" r:id="rId32"/>
+    <p:sldId id="294" r:id="rId33"/>
+    <p:sldId id="295" r:id="rId34"/>
+    <p:sldId id="296" r:id="rId35"/>
+    <p:sldId id="297" r:id="rId36"/>
+    <p:sldId id="299" r:id="rId37"/>
+    <p:sldId id="300" r:id="rId38"/>
+    <p:sldId id="301" r:id="rId39"/>
+    <p:sldId id="302" r:id="rId40"/>
   </p:sldIdLst>
   <p:sldSz cx="12192000" cy="6858000"/>
   <p:notesSz cx="6858000" cy="9144000"/>
@@ -142,11 +142,37 @@
       </a:defRPr>
     </a:lvl9pPr>
   </p:defaultTextStyle>
+  <p:extLst>
+    <p:ext uri="{EFAFB233-063F-42B5-8137-9DF3F51BA10A}">
+      <p15:sldGuideLst xmlns:p15="http://schemas.microsoft.com/office/powerpoint/2012/main"/>
+    </p:ext>
+  </p:extLst>
 </p:presentation>
 </file>
 
+<file path=ppt/changesInfos/changesInfo1.xml><?xml version="1.0" encoding="utf-8"?>
+<pc:chgInfo xmlns:a="http://schemas.openxmlformats.org/drawingml/2006/main" xmlns:r="http://schemas.openxmlformats.org/officeDocument/2006/relationships" xmlns:ac="http://schemas.microsoft.com/office/drawing/2013/main/command" xmlns:pc="http://schemas.microsoft.com/office/powerpoint/2013/main/command">
+  <pc:docChgLst>
+    <pc:chgData name="prinitta jaison" userId="434810f05702f336" providerId="LiveId" clId="{ECA9CFA9-8467-4CA3-8E0B-E626DD5B1385}"/>
+    <pc:docChg chg="modSld sldOrd">
+      <pc:chgData name="prinitta jaison" userId="434810f05702f336" providerId="LiveId" clId="{ECA9CFA9-8467-4CA3-8E0B-E626DD5B1385}" dt="2025-10-21T04:42:46.017" v="3"/>
+      <pc:docMkLst>
+        <pc:docMk/>
+      </pc:docMkLst>
+      <pc:sldChg chg="ord">
+        <pc:chgData name="prinitta jaison" userId="434810f05702f336" providerId="LiveId" clId="{ECA9CFA9-8467-4CA3-8E0B-E626DD5B1385}" dt="2025-10-21T04:42:46.017" v="3"/>
+        <pc:sldMkLst>
+          <pc:docMk/>
+          <pc:sldMk cId="0" sldId="274"/>
+        </pc:sldMkLst>
+      </pc:sldChg>
+    </pc:docChg>
+  </pc:docChgLst>
+</pc:chgInfo>
+</file>
+
 <file path=ppt/diagrams/colors1.xml><?xml version="1.0" encoding="utf-8"?>
-<dgm:colorsDef xmlns:dgm="http://schemas.openxmlformats.org/drawingml/2006/diagram" xmlns:a="http://schemas.openxmlformats.org/drawingml/2006/main" uniqueId="urn:microsoft.com/office/officeart/2005/8/colors/accent1_2">
+<dgm:colorsDef xmlns:dgm="http://schemas.openxmlformats.org/drawingml/2006/diagram" xmlns:a="http://schemas.openxmlformats.org/drawingml/2006/main" uniqueId="urn:microsoft.com/office/officeart/2005/8/colors/accent1_2#1">
   <dgm:title val=""/>
   <dgm:desc val=""/>
   <dgm:catLst>
@@ -893,7 +919,7 @@
 </file>
 
 <file path=ppt/diagrams/colors2.xml><?xml version="1.0" encoding="utf-8"?>
-<dgm:colorsDef xmlns:dgm="http://schemas.openxmlformats.org/drawingml/2006/diagram" xmlns:a="http://schemas.openxmlformats.org/drawingml/2006/main" uniqueId="urn:microsoft.com/office/officeart/2005/8/colors/accent4_2">
+<dgm:colorsDef xmlns:dgm="http://schemas.openxmlformats.org/drawingml/2006/diagram" xmlns:a="http://schemas.openxmlformats.org/drawingml/2006/main" uniqueId="urn:microsoft.com/office/officeart/2005/8/colors/accent4_2#1">
   <dgm:title val=""/>
   <dgm:desc val=""/>
   <dgm:catLst>
@@ -1640,7 +1666,7 @@
 </file>
 
 <file path=ppt/diagrams/colors3.xml><?xml version="1.0" encoding="utf-8"?>
-<dgm:colorsDef xmlns:dgm="http://schemas.openxmlformats.org/drawingml/2006/diagram" xmlns:a="http://schemas.openxmlformats.org/drawingml/2006/main" uniqueId="urn:microsoft.com/office/officeart/2005/8/colors/colorful1">
+<dgm:colorsDef xmlns:dgm="http://schemas.openxmlformats.org/drawingml/2006/diagram" xmlns:a="http://schemas.openxmlformats.org/drawingml/2006/main" uniqueId="urn:microsoft.com/office/officeart/2005/8/colors/colorful1#1">
   <dgm:title val=""/>
   <dgm:desc val=""/>
   <dgm:catLst>
@@ -2559,7 +2585,7 @@
 </file>
 
 <file path=ppt/diagrams/colors4.xml><?xml version="1.0" encoding="utf-8"?>
-<dgm:colorsDef xmlns:dgm="http://schemas.openxmlformats.org/drawingml/2006/diagram" xmlns:a="http://schemas.openxmlformats.org/drawingml/2006/main" uniqueId="urn:microsoft.com/office/officeart/2005/8/colors/colorful1">
+<dgm:colorsDef xmlns:dgm="http://schemas.openxmlformats.org/drawingml/2006/diagram" xmlns:a="http://schemas.openxmlformats.org/drawingml/2006/main" uniqueId="urn:microsoft.com/office/officeart/2005/8/colors/colorful1#2">
   <dgm:title val=""/>
   <dgm:desc val=""/>
   <dgm:catLst>
@@ -3478,7 +3504,7 @@
 </file>
 
 <file path=ppt/diagrams/colors5.xml><?xml version="1.0" encoding="utf-8"?>
-<dgm:colorsDef xmlns:dgm="http://schemas.openxmlformats.org/drawingml/2006/diagram" xmlns:a="http://schemas.openxmlformats.org/drawingml/2006/main" uniqueId="urn:microsoft.com/office/officeart/2005/8/colors/colorful1">
+<dgm:colorsDef xmlns:dgm="http://schemas.openxmlformats.org/drawingml/2006/diagram" xmlns:a="http://schemas.openxmlformats.org/drawingml/2006/main" uniqueId="urn:microsoft.com/office/officeart/2005/8/colors/colorful1#3">
   <dgm:title val=""/>
   <dgm:desc val=""/>
   <dgm:catLst>
@@ -4397,7 +4423,7 @@
 </file>
 
 <file path=ppt/diagrams/colors6.xml><?xml version="1.0" encoding="utf-8"?>
-<dgm:colorsDef xmlns:dgm="http://schemas.openxmlformats.org/drawingml/2006/diagram" xmlns:a="http://schemas.openxmlformats.org/drawingml/2006/main" uniqueId="urn:microsoft.com/office/officeart/2005/8/colors/accent4_2">
+<dgm:colorsDef xmlns:dgm="http://schemas.openxmlformats.org/drawingml/2006/diagram" xmlns:a="http://schemas.openxmlformats.org/drawingml/2006/main" uniqueId="urn:microsoft.com/office/officeart/2005/8/colors/accent4_2#2">
   <dgm:title val=""/>
   <dgm:desc val=""/>
   <dgm:catLst>
@@ -5147,7 +5173,7 @@
 <dgm:dataModel xmlns:dgm="http://schemas.openxmlformats.org/drawingml/2006/diagram" xmlns:a="http://schemas.openxmlformats.org/drawingml/2006/main">
   <dgm:ptLst>
     <dgm:pt modelId="{BC1E5A37-8B7E-4F84-B5F8-259F27F88903}" type="doc">
-      <dgm:prSet loTypeId="urn:microsoft.com/office/officeart/2005/8/layout/hierarchy1" loCatId="hierarchy" qsTypeId="urn:microsoft.com/office/officeart/2005/8/quickstyle/simple1" qsCatId="simple" csTypeId="urn:microsoft.com/office/officeart/2005/8/colors/accent1_2" csCatId="accent1"/>
+      <dgm:prSet loTypeId="urn:microsoft.com/office/officeart/2005/8/layout/hierarchy1#1" loCatId="hierarchy" qsTypeId="urn:microsoft.com/office/officeart/2005/8/quickstyle/simple1#1" qsCatId="simple" csTypeId="urn:microsoft.com/office/officeart/2005/8/colors/accent1_2#1" csCatId="accent1"/>
       <dgm:spPr/>
       <dgm:t>
         <a:bodyPr/>
@@ -5171,7 +5197,7 @@
         </a:p>
       </dgm:t>
     </dgm:pt>
-    <dgm:pt modelId="{62A74C03-748B-45DB-AB4A-2283695BBD83}" cxnId="{5A3BDF9F-E107-46D1-80B4-BFD7F23CDA09}" type="parTrans">
+    <dgm:pt modelId="{62A74C03-748B-45DB-AB4A-2283695BBD83}" type="parTrans" cxnId="{5A3BDF9F-E107-46D1-80B4-BFD7F23CDA09}">
       <dgm:prSet/>
       <dgm:spPr/>
       <dgm:t>
@@ -5182,7 +5208,7 @@
         </a:p>
       </dgm:t>
     </dgm:pt>
-    <dgm:pt modelId="{19178239-0624-4330-A3EB-06C73113745E}" cxnId="{5A3BDF9F-E107-46D1-80B4-BFD7F23CDA09}" type="sibTrans">
+    <dgm:pt modelId="{19178239-0624-4330-A3EB-06C73113745E}" type="sibTrans" cxnId="{5A3BDF9F-E107-46D1-80B4-BFD7F23CDA09}">
       <dgm:prSet/>
       <dgm:spPr/>
       <dgm:t>
@@ -5207,7 +5233,7 @@
         </a:p>
       </dgm:t>
     </dgm:pt>
-    <dgm:pt modelId="{258965DC-06B3-4DB4-90D8-B520DFC7C37B}" cxnId="{65494C51-4D91-4AD4-B2F4-400E5A228D67}" type="parTrans">
+    <dgm:pt modelId="{258965DC-06B3-4DB4-90D8-B520DFC7C37B}" type="parTrans" cxnId="{65494C51-4D91-4AD4-B2F4-400E5A228D67}">
       <dgm:prSet/>
       <dgm:spPr/>
       <dgm:t>
@@ -5218,7 +5244,7 @@
         </a:p>
       </dgm:t>
     </dgm:pt>
-    <dgm:pt modelId="{E3D85907-C365-49C4-86E2-4CFCBD0F0E15}" cxnId="{65494C51-4D91-4AD4-B2F4-400E5A228D67}" type="sibTrans">
+    <dgm:pt modelId="{E3D85907-C365-49C4-86E2-4CFCBD0F0E15}" type="sibTrans" cxnId="{65494C51-4D91-4AD4-B2F4-400E5A228D67}">
       <dgm:prSet/>
       <dgm:spPr/>
       <dgm:t>
@@ -5291,27 +5317,27 @@
     </dgm:pt>
   </dgm:ptLst>
   <dgm:cxnLst>
-    <dgm:cxn modelId="{4AFA5B00-D543-4D70-97FE-043F1A176E65}" type="presOf" srcId="{6C68D178-5A55-44B3-B9DB-54690566C922}" destId="{FD99FD76-C729-421F-9BD3-2B4AD54A7C48}" srcOrd="0" destOrd="0" presId="urn:microsoft.com/office/officeart/2005/8/layout/hierarchy1"/>
+    <dgm:cxn modelId="{4AFA5B00-D543-4D70-97FE-043F1A176E65}" type="presOf" srcId="{6C68D178-5A55-44B3-B9DB-54690566C922}" destId="{FD99FD76-C729-421F-9BD3-2B4AD54A7C48}" srcOrd="0" destOrd="0" presId="urn:microsoft.com/office/officeart/2005/8/layout/hierarchy1#1"/>
     <dgm:cxn modelId="{65494C51-4D91-4AD4-B2F4-400E5A228D67}" srcId="{BC1E5A37-8B7E-4F84-B5F8-259F27F88903}" destId="{6C68D178-5A55-44B3-B9DB-54690566C922}" srcOrd="1" destOrd="0" parTransId="{258965DC-06B3-4DB4-90D8-B520DFC7C37B}" sibTransId="{E3D85907-C365-49C4-86E2-4CFCBD0F0E15}"/>
     <dgm:cxn modelId="{5A3BDF9F-E107-46D1-80B4-BFD7F23CDA09}" srcId="{BC1E5A37-8B7E-4F84-B5F8-259F27F88903}" destId="{776F9CA5-6983-4733-9EB6-353A6DEB2C2D}" srcOrd="0" destOrd="0" parTransId="{62A74C03-748B-45DB-AB4A-2283695BBD83}" sibTransId="{19178239-0624-4330-A3EB-06C73113745E}"/>
-    <dgm:cxn modelId="{767BD9AF-6232-406B-AD19-A201753C8E37}" type="presOf" srcId="{776F9CA5-6983-4733-9EB6-353A6DEB2C2D}" destId="{3B1AD05F-F088-48C1-ABAC-BC0CF832F62B}" srcOrd="0" destOrd="0" presId="urn:microsoft.com/office/officeart/2005/8/layout/hierarchy1"/>
-    <dgm:cxn modelId="{B975AEE7-760B-4099-B7AC-A839A6699389}" type="presOf" srcId="{BC1E5A37-8B7E-4F84-B5F8-259F27F88903}" destId="{3FFA2CE9-E323-4778-8B0A-7B5069A08A84}" srcOrd="0" destOrd="0" presId="urn:microsoft.com/office/officeart/2005/8/layout/hierarchy1"/>
-    <dgm:cxn modelId="{A3769583-F200-4170-A0F3-0B7797484FB2}" type="presParOf" srcId="{3FFA2CE9-E323-4778-8B0A-7B5069A08A84}" destId="{E87FADB6-0214-41AA-8D2C-CC2DB3C8F137}" srcOrd="0" destOrd="0" presId="urn:microsoft.com/office/officeart/2005/8/layout/hierarchy1"/>
-    <dgm:cxn modelId="{A706AF17-FD7A-4C0A-BC3F-E812B7B32616}" type="presParOf" srcId="{E87FADB6-0214-41AA-8D2C-CC2DB3C8F137}" destId="{3FE0ED17-3E87-4C1F-B9EE-032CDAA9CDD5}" srcOrd="0" destOrd="0" presId="urn:microsoft.com/office/officeart/2005/8/layout/hierarchy1"/>
-    <dgm:cxn modelId="{BED59548-9FD4-4E6F-9768-464E54814C22}" type="presParOf" srcId="{3FE0ED17-3E87-4C1F-B9EE-032CDAA9CDD5}" destId="{06F812D9-200B-4F96-B54B-B928BFB32A3D}" srcOrd="0" destOrd="0" presId="urn:microsoft.com/office/officeart/2005/8/layout/hierarchy1"/>
-    <dgm:cxn modelId="{714F61B8-6B1F-41B4-9D57-F1CCBEC0254C}" type="presParOf" srcId="{3FE0ED17-3E87-4C1F-B9EE-032CDAA9CDD5}" destId="{3B1AD05F-F088-48C1-ABAC-BC0CF832F62B}" srcOrd="1" destOrd="0" presId="urn:microsoft.com/office/officeart/2005/8/layout/hierarchy1"/>
-    <dgm:cxn modelId="{78194BB8-21CD-4475-81A8-9FF622E4A535}" type="presParOf" srcId="{E87FADB6-0214-41AA-8D2C-CC2DB3C8F137}" destId="{46BD8A6D-432F-40D9-9C80-6E5D9123CB9B}" srcOrd="1" destOrd="0" presId="urn:microsoft.com/office/officeart/2005/8/layout/hierarchy1"/>
-    <dgm:cxn modelId="{E088923E-CCF7-48AE-927C-0C05DB57E91E}" type="presParOf" srcId="{3FFA2CE9-E323-4778-8B0A-7B5069A08A84}" destId="{419367C5-E380-4F16-BC57-27C0E09C7C5E}" srcOrd="1" destOrd="0" presId="urn:microsoft.com/office/officeart/2005/8/layout/hierarchy1"/>
-    <dgm:cxn modelId="{9D0C774B-AEBF-469A-AABA-DEF4BB8A23C4}" type="presParOf" srcId="{419367C5-E380-4F16-BC57-27C0E09C7C5E}" destId="{9DB5AA00-F94D-4F1B-BE2E-463AF926258D}" srcOrd="0" destOrd="0" presId="urn:microsoft.com/office/officeart/2005/8/layout/hierarchy1"/>
-    <dgm:cxn modelId="{11D4C941-841B-4C98-A28F-00466864ADAF}" type="presParOf" srcId="{9DB5AA00-F94D-4F1B-BE2E-463AF926258D}" destId="{AD2BFD88-D60F-4A3F-A288-680EC0E1B39F}" srcOrd="0" destOrd="0" presId="urn:microsoft.com/office/officeart/2005/8/layout/hierarchy1"/>
-    <dgm:cxn modelId="{3A602B76-5F1D-4F49-9170-F8AA170BAE51}" type="presParOf" srcId="{9DB5AA00-F94D-4F1B-BE2E-463AF926258D}" destId="{FD99FD76-C729-421F-9BD3-2B4AD54A7C48}" srcOrd="1" destOrd="0" presId="urn:microsoft.com/office/officeart/2005/8/layout/hierarchy1"/>
-    <dgm:cxn modelId="{3ADA80E8-1228-4C78-BAF9-A8EAD039DDF8}" type="presParOf" srcId="{419367C5-E380-4F16-BC57-27C0E09C7C5E}" destId="{D8C06E96-7ADA-4C39-9612-528028CCE868}" srcOrd="1" destOrd="0" presId="urn:microsoft.com/office/officeart/2005/8/layout/hierarchy1"/>
+    <dgm:cxn modelId="{767BD9AF-6232-406B-AD19-A201753C8E37}" type="presOf" srcId="{776F9CA5-6983-4733-9EB6-353A6DEB2C2D}" destId="{3B1AD05F-F088-48C1-ABAC-BC0CF832F62B}" srcOrd="0" destOrd="0" presId="urn:microsoft.com/office/officeart/2005/8/layout/hierarchy1#1"/>
+    <dgm:cxn modelId="{B975AEE7-760B-4099-B7AC-A839A6699389}" type="presOf" srcId="{BC1E5A37-8B7E-4F84-B5F8-259F27F88903}" destId="{3FFA2CE9-E323-4778-8B0A-7B5069A08A84}" srcOrd="0" destOrd="0" presId="urn:microsoft.com/office/officeart/2005/8/layout/hierarchy1#1"/>
+    <dgm:cxn modelId="{A3769583-F200-4170-A0F3-0B7797484FB2}" type="presParOf" srcId="{3FFA2CE9-E323-4778-8B0A-7B5069A08A84}" destId="{E87FADB6-0214-41AA-8D2C-CC2DB3C8F137}" srcOrd="0" destOrd="0" presId="urn:microsoft.com/office/officeart/2005/8/layout/hierarchy1#1"/>
+    <dgm:cxn modelId="{A706AF17-FD7A-4C0A-BC3F-E812B7B32616}" type="presParOf" srcId="{E87FADB6-0214-41AA-8D2C-CC2DB3C8F137}" destId="{3FE0ED17-3E87-4C1F-B9EE-032CDAA9CDD5}" srcOrd="0" destOrd="0" presId="urn:microsoft.com/office/officeart/2005/8/layout/hierarchy1#1"/>
+    <dgm:cxn modelId="{BED59548-9FD4-4E6F-9768-464E54814C22}" type="presParOf" srcId="{3FE0ED17-3E87-4C1F-B9EE-032CDAA9CDD5}" destId="{06F812D9-200B-4F96-B54B-B928BFB32A3D}" srcOrd="0" destOrd="0" presId="urn:microsoft.com/office/officeart/2005/8/layout/hierarchy1#1"/>
+    <dgm:cxn modelId="{714F61B8-6B1F-41B4-9D57-F1CCBEC0254C}" type="presParOf" srcId="{3FE0ED17-3E87-4C1F-B9EE-032CDAA9CDD5}" destId="{3B1AD05F-F088-48C1-ABAC-BC0CF832F62B}" srcOrd="1" destOrd="0" presId="urn:microsoft.com/office/officeart/2005/8/layout/hierarchy1#1"/>
+    <dgm:cxn modelId="{78194BB8-21CD-4475-81A8-9FF622E4A535}" type="presParOf" srcId="{E87FADB6-0214-41AA-8D2C-CC2DB3C8F137}" destId="{46BD8A6D-432F-40D9-9C80-6E5D9123CB9B}" srcOrd="1" destOrd="0" presId="urn:microsoft.com/office/officeart/2005/8/layout/hierarchy1#1"/>
+    <dgm:cxn modelId="{E088923E-CCF7-48AE-927C-0C05DB57E91E}" type="presParOf" srcId="{3FFA2CE9-E323-4778-8B0A-7B5069A08A84}" destId="{419367C5-E380-4F16-BC57-27C0E09C7C5E}" srcOrd="1" destOrd="0" presId="urn:microsoft.com/office/officeart/2005/8/layout/hierarchy1#1"/>
+    <dgm:cxn modelId="{9D0C774B-AEBF-469A-AABA-DEF4BB8A23C4}" type="presParOf" srcId="{419367C5-E380-4F16-BC57-27C0E09C7C5E}" destId="{9DB5AA00-F94D-4F1B-BE2E-463AF926258D}" srcOrd="0" destOrd="0" presId="urn:microsoft.com/office/officeart/2005/8/layout/hierarchy1#1"/>
+    <dgm:cxn modelId="{11D4C941-841B-4C98-A28F-00466864ADAF}" type="presParOf" srcId="{9DB5AA00-F94D-4F1B-BE2E-463AF926258D}" destId="{AD2BFD88-D60F-4A3F-A288-680EC0E1B39F}" srcOrd="0" destOrd="0" presId="urn:microsoft.com/office/officeart/2005/8/layout/hierarchy1#1"/>
+    <dgm:cxn modelId="{3A602B76-5F1D-4F49-9170-F8AA170BAE51}" type="presParOf" srcId="{9DB5AA00-F94D-4F1B-BE2E-463AF926258D}" destId="{FD99FD76-C729-421F-9BD3-2B4AD54A7C48}" srcOrd="1" destOrd="0" presId="urn:microsoft.com/office/officeart/2005/8/layout/hierarchy1#1"/>
+    <dgm:cxn modelId="{3ADA80E8-1228-4C78-BAF9-A8EAD039DDF8}" type="presParOf" srcId="{419367C5-E380-4F16-BC57-27C0E09C7C5E}" destId="{D8C06E96-7ADA-4C39-9612-528028CCE868}" srcOrd="1" destOrd="0" presId="urn:microsoft.com/office/officeart/2005/8/layout/hierarchy1#1"/>
   </dgm:cxnLst>
   <dgm:bg/>
   <dgm:whole/>
   <dgm:extLst>
     <a:ext uri="http://schemas.microsoft.com/office/drawing/2008/diagram">
-      <dsp:dataModelExt xmlns:dsp="http://schemas.microsoft.com/office/drawing/2008/diagram" relId="rId5" minVer="http://schemas.openxmlformats.org/drawingml/2006/diagram"/>
+      <dsp:dataModelExt xmlns:dsp="http://schemas.microsoft.com/office/drawing/2008/diagram" relId="rId6" minVer="http://schemas.openxmlformats.org/drawingml/2006/diagram"/>
     </a:ext>
   </dgm:extLst>
 </dgm:dataModel>
@@ -5321,7 +5347,7 @@
 <dgm:dataModel xmlns:dgm="http://schemas.openxmlformats.org/drawingml/2006/diagram" xmlns:a="http://schemas.openxmlformats.org/drawingml/2006/main">
   <dgm:ptLst>
     <dgm:pt modelId="{D3B59CBF-67C2-4594-B2BA-BE13126576BD}" type="doc">
-      <dgm:prSet loTypeId="urn:microsoft.com/office/officeart/2005/8/layout/vList2" loCatId="list" qsTypeId="urn:microsoft.com/office/officeart/2005/8/quickstyle/simple1" qsCatId="simple" csTypeId="urn:microsoft.com/office/officeart/2005/8/colors/accent4_2" csCatId="accent4"/>
+      <dgm:prSet loTypeId="urn:microsoft.com/office/officeart/2005/8/layout/vList2#1" loCatId="list" qsTypeId="urn:microsoft.com/office/officeart/2005/8/quickstyle/simple1#2" qsCatId="simple" csTypeId="urn:microsoft.com/office/officeart/2005/8/colors/accent4_2#1" csCatId="accent4"/>
       <dgm:spPr/>
       <dgm:t>
         <a:bodyPr/>
@@ -5345,7 +5371,7 @@
         </a:p>
       </dgm:t>
     </dgm:pt>
-    <dgm:pt modelId="{5CB4313E-1832-4174-AA44-ACB8EE66F61E}" cxnId="{4C472C3E-7E9E-4EF7-BACD-710461163F67}" type="parTrans">
+    <dgm:pt modelId="{5CB4313E-1832-4174-AA44-ACB8EE66F61E}" type="parTrans" cxnId="{4C472C3E-7E9E-4EF7-BACD-710461163F67}">
       <dgm:prSet/>
       <dgm:spPr/>
       <dgm:t>
@@ -5356,7 +5382,7 @@
         </a:p>
       </dgm:t>
     </dgm:pt>
-    <dgm:pt modelId="{71AF638C-EE53-4034-9C38-C56520CCAA7A}" cxnId="{4C472C3E-7E9E-4EF7-BACD-710461163F67}" type="sibTrans">
+    <dgm:pt modelId="{71AF638C-EE53-4034-9C38-C56520CCAA7A}" type="sibTrans" cxnId="{4C472C3E-7E9E-4EF7-BACD-710461163F67}">
       <dgm:prSet/>
       <dgm:spPr/>
       <dgm:t>
@@ -5381,7 +5407,7 @@
         </a:p>
       </dgm:t>
     </dgm:pt>
-    <dgm:pt modelId="{EA568404-5DF3-42F0-9400-2A6CB5B0DACE}" cxnId="{ED4F9F57-1BD6-4A07-9F29-80BE53740691}" type="parTrans">
+    <dgm:pt modelId="{EA568404-5DF3-42F0-9400-2A6CB5B0DACE}" type="parTrans" cxnId="{ED4F9F57-1BD6-4A07-9F29-80BE53740691}">
       <dgm:prSet/>
       <dgm:spPr/>
       <dgm:t>
@@ -5392,7 +5418,7 @@
         </a:p>
       </dgm:t>
     </dgm:pt>
-    <dgm:pt modelId="{6B499B5F-1291-40F0-A7E2-7A5CFC55DC23}" cxnId="{ED4F9F57-1BD6-4A07-9F29-80BE53740691}" type="sibTrans">
+    <dgm:pt modelId="{6B499B5F-1291-40F0-A7E2-7A5CFC55DC23}" type="sibTrans" cxnId="{ED4F9F57-1BD6-4A07-9F29-80BE53740691}">
       <dgm:prSet/>
       <dgm:spPr/>
       <dgm:t>
@@ -5421,7 +5447,7 @@
         </a:p>
       </dgm:t>
     </dgm:pt>
-    <dgm:pt modelId="{F42B72DE-C31B-498C-A1D8-336E36AA003D}" cxnId="{20631975-7EBA-40A9-A950-3766931936ED}" type="parTrans">
+    <dgm:pt modelId="{F42B72DE-C31B-498C-A1D8-336E36AA003D}" type="parTrans" cxnId="{20631975-7EBA-40A9-A950-3766931936ED}">
       <dgm:prSet/>
       <dgm:spPr/>
       <dgm:t>
@@ -5432,7 +5458,7 @@
         </a:p>
       </dgm:t>
     </dgm:pt>
-    <dgm:pt modelId="{0AF2CE14-AA0B-4FAE-9532-066CE1276177}" cxnId="{20631975-7EBA-40A9-A950-3766931936ED}" type="sibTrans">
+    <dgm:pt modelId="{0AF2CE14-AA0B-4FAE-9532-066CE1276177}" type="sibTrans" cxnId="{20631975-7EBA-40A9-A950-3766931936ED}">
       <dgm:prSet/>
       <dgm:spPr/>
       <dgm:t>
@@ -5461,7 +5487,7 @@
         </a:p>
       </dgm:t>
     </dgm:pt>
-    <dgm:pt modelId="{ED7F4903-105A-462E-9C53-3AF0051CF4AC}" cxnId="{08938A1E-6280-46FA-8A2A-3E6F3CA33B66}" type="parTrans">
+    <dgm:pt modelId="{ED7F4903-105A-462E-9C53-3AF0051CF4AC}" type="parTrans" cxnId="{08938A1E-6280-46FA-8A2A-3E6F3CA33B66}">
       <dgm:prSet/>
       <dgm:spPr/>
       <dgm:t>
@@ -5472,7 +5498,7 @@
         </a:p>
       </dgm:t>
     </dgm:pt>
-    <dgm:pt modelId="{A8C3C64E-DD22-4BC9-A750-7CDBA2DFFFCB}" cxnId="{08938A1E-6280-46FA-8A2A-3E6F3CA33B66}" type="sibTrans">
+    <dgm:pt modelId="{A8C3C64E-DD22-4BC9-A750-7CDBA2DFFFCB}" type="sibTrans" cxnId="{08938A1E-6280-46FA-8A2A-3E6F3CA33B66}">
       <dgm:prSet/>
       <dgm:spPr/>
       <dgm:t>
@@ -5497,7 +5523,7 @@
         </a:p>
       </dgm:t>
     </dgm:pt>
-    <dgm:pt modelId="{79792F6D-F572-4FC0-A166-5889706F7EAD}" cxnId="{0E610F9B-E5DF-45BE-ADE1-66F467A0A0C4}" type="parTrans">
+    <dgm:pt modelId="{79792F6D-F572-4FC0-A166-5889706F7EAD}" type="parTrans" cxnId="{0E610F9B-E5DF-45BE-ADE1-66F467A0A0C4}">
       <dgm:prSet/>
       <dgm:spPr/>
       <dgm:t>
@@ -5508,7 +5534,7 @@
         </a:p>
       </dgm:t>
     </dgm:pt>
-    <dgm:pt modelId="{6267A727-C1C3-40D6-A42B-C0D0F89855E7}" cxnId="{0E610F9B-E5DF-45BE-ADE1-66F467A0A0C4}" type="sibTrans">
+    <dgm:pt modelId="{6267A727-C1C3-40D6-A42B-C0D0F89855E7}" type="sibTrans" cxnId="{0E610F9B-E5DF-45BE-ADE1-66F467A0A0C4}">
       <dgm:prSet/>
       <dgm:spPr/>
       <dgm:t>
@@ -5592,31 +5618,31 @@
   </dgm:ptLst>
   <dgm:cxnLst>
     <dgm:cxn modelId="{08938A1E-6280-46FA-8A2A-3E6F3CA33B66}" srcId="{D3B59CBF-67C2-4594-B2BA-BE13126576BD}" destId="{EE1B05AF-A7D3-48C6-8B4C-8DDA55CDB513}" srcOrd="3" destOrd="0" parTransId="{ED7F4903-105A-462E-9C53-3AF0051CF4AC}" sibTransId="{A8C3C64E-DD22-4BC9-A750-7CDBA2DFFFCB}"/>
-    <dgm:cxn modelId="{1FA1EA2D-405A-43E0-975A-E4B3FC1D1574}" type="presOf" srcId="{D3B59CBF-67C2-4594-B2BA-BE13126576BD}" destId="{D355F512-C033-4866-AC13-D8CF3BEEFA52}" srcOrd="0" destOrd="0" presId="urn:microsoft.com/office/officeart/2005/8/layout/vList2"/>
+    <dgm:cxn modelId="{1FA1EA2D-405A-43E0-975A-E4B3FC1D1574}" type="presOf" srcId="{D3B59CBF-67C2-4594-B2BA-BE13126576BD}" destId="{D355F512-C033-4866-AC13-D8CF3BEEFA52}" srcOrd="0" destOrd="0" presId="urn:microsoft.com/office/officeart/2005/8/layout/vList2#1"/>
     <dgm:cxn modelId="{4C472C3E-7E9E-4EF7-BACD-710461163F67}" srcId="{D3B59CBF-67C2-4594-B2BA-BE13126576BD}" destId="{45D6CB2F-1E2A-42C5-8D62-F250D30C0B78}" srcOrd="0" destOrd="0" parTransId="{5CB4313E-1832-4174-AA44-ACB8EE66F61E}" sibTransId="{71AF638C-EE53-4034-9C38-C56520CCAA7A}"/>
-    <dgm:cxn modelId="{60C8533F-6758-4C39-A351-F8F570C390A3}" type="presOf" srcId="{EE1B05AF-A7D3-48C6-8B4C-8DDA55CDB513}" destId="{5985FA55-D32D-45DB-9B7C-FD1E35061EAD}" srcOrd="0" destOrd="0" presId="urn:microsoft.com/office/officeart/2005/8/layout/vList2"/>
-    <dgm:cxn modelId="{AD9B5A4B-0B90-4CA4-9E4E-E240160D5298}" type="presOf" srcId="{45D6CB2F-1E2A-42C5-8D62-F250D30C0B78}" destId="{AAC018E5-2DA9-46F7-B114-5D708CB92E35}" srcOrd="0" destOrd="0" presId="urn:microsoft.com/office/officeart/2005/8/layout/vList2"/>
+    <dgm:cxn modelId="{60C8533F-6758-4C39-A351-F8F570C390A3}" type="presOf" srcId="{EE1B05AF-A7D3-48C6-8B4C-8DDA55CDB513}" destId="{5985FA55-D32D-45DB-9B7C-FD1E35061EAD}" srcOrd="0" destOrd="0" presId="urn:microsoft.com/office/officeart/2005/8/layout/vList2#1"/>
+    <dgm:cxn modelId="{AD9B5A4B-0B90-4CA4-9E4E-E240160D5298}" type="presOf" srcId="{45D6CB2F-1E2A-42C5-8D62-F250D30C0B78}" destId="{AAC018E5-2DA9-46F7-B114-5D708CB92E35}" srcOrd="0" destOrd="0" presId="urn:microsoft.com/office/officeart/2005/8/layout/vList2#1"/>
     <dgm:cxn modelId="{20631975-7EBA-40A9-A950-3766931936ED}" srcId="{D3B59CBF-67C2-4594-B2BA-BE13126576BD}" destId="{54BCFB57-C46F-4C72-ADCF-6336CAC99909}" srcOrd="2" destOrd="0" parTransId="{F42B72DE-C31B-498C-A1D8-336E36AA003D}" sibTransId="{0AF2CE14-AA0B-4FAE-9532-066CE1276177}"/>
     <dgm:cxn modelId="{ED4F9F57-1BD6-4A07-9F29-80BE53740691}" srcId="{D3B59CBF-67C2-4594-B2BA-BE13126576BD}" destId="{AAD33260-0441-4971-9BCD-C343AAF988C9}" srcOrd="1" destOrd="0" parTransId="{EA568404-5DF3-42F0-9400-2A6CB5B0DACE}" sibTransId="{6B499B5F-1291-40F0-A7E2-7A5CFC55DC23}"/>
-    <dgm:cxn modelId="{1F223790-6FF6-4A6C-81AF-7C9261887F80}" type="presOf" srcId="{54BCFB57-C46F-4C72-ADCF-6336CAC99909}" destId="{D48F633E-C89C-4BE1-AE92-A20CAA7CAB33}" srcOrd="0" destOrd="0" presId="urn:microsoft.com/office/officeart/2005/8/layout/vList2"/>
+    <dgm:cxn modelId="{1F223790-6FF6-4A6C-81AF-7C9261887F80}" type="presOf" srcId="{54BCFB57-C46F-4C72-ADCF-6336CAC99909}" destId="{D48F633E-C89C-4BE1-AE92-A20CAA7CAB33}" srcOrd="0" destOrd="0" presId="urn:microsoft.com/office/officeart/2005/8/layout/vList2#1"/>
     <dgm:cxn modelId="{0E610F9B-E5DF-45BE-ADE1-66F467A0A0C4}" srcId="{D3B59CBF-67C2-4594-B2BA-BE13126576BD}" destId="{58F9F9AD-F08D-40C3-A73D-99EA8CBA229D}" srcOrd="4" destOrd="0" parTransId="{79792F6D-F572-4FC0-A166-5889706F7EAD}" sibTransId="{6267A727-C1C3-40D6-A42B-C0D0F89855E7}"/>
-    <dgm:cxn modelId="{9648B3A2-D2BF-4585-B387-7149C9927D1E}" type="presOf" srcId="{AAD33260-0441-4971-9BCD-C343AAF988C9}" destId="{82B9378C-E2BA-4C2A-BEBE-F9794C051F6B}" srcOrd="0" destOrd="0" presId="urn:microsoft.com/office/officeart/2005/8/layout/vList2"/>
-    <dgm:cxn modelId="{75F5B6A6-63D6-4BCC-978E-4EBD2CDC21D4}" type="presOf" srcId="{58F9F9AD-F08D-40C3-A73D-99EA8CBA229D}" destId="{8985D69E-6F82-4ED5-91F5-67E793476F29}" srcOrd="0" destOrd="0" presId="urn:microsoft.com/office/officeart/2005/8/layout/vList2"/>
-    <dgm:cxn modelId="{2C8FE0C3-4DDE-48E4-8A2B-85710E7A278C}" type="presParOf" srcId="{D355F512-C033-4866-AC13-D8CF3BEEFA52}" destId="{AAC018E5-2DA9-46F7-B114-5D708CB92E35}" srcOrd="0" destOrd="0" presId="urn:microsoft.com/office/officeart/2005/8/layout/vList2"/>
-    <dgm:cxn modelId="{47CE5DE6-4753-4366-9DA1-C1522BBF3942}" type="presParOf" srcId="{D355F512-C033-4866-AC13-D8CF3BEEFA52}" destId="{63859629-72A4-4B5D-B877-8E2A32985942}" srcOrd="1" destOrd="0" presId="urn:microsoft.com/office/officeart/2005/8/layout/vList2"/>
-    <dgm:cxn modelId="{00432796-27AF-4A44-A497-17975B81DA89}" type="presParOf" srcId="{D355F512-C033-4866-AC13-D8CF3BEEFA52}" destId="{82B9378C-E2BA-4C2A-BEBE-F9794C051F6B}" srcOrd="2" destOrd="0" presId="urn:microsoft.com/office/officeart/2005/8/layout/vList2"/>
-    <dgm:cxn modelId="{4BB06B86-13ED-471D-AF3D-7C4D6CF54A5D}" type="presParOf" srcId="{D355F512-C033-4866-AC13-D8CF3BEEFA52}" destId="{22C0449F-3E2B-48E3-8475-ABFB65C45C9A}" srcOrd="3" destOrd="0" presId="urn:microsoft.com/office/officeart/2005/8/layout/vList2"/>
-    <dgm:cxn modelId="{DCE31490-9C2F-438E-B38F-41C55C683C7F}" type="presParOf" srcId="{D355F512-C033-4866-AC13-D8CF3BEEFA52}" destId="{D48F633E-C89C-4BE1-AE92-A20CAA7CAB33}" srcOrd="4" destOrd="0" presId="urn:microsoft.com/office/officeart/2005/8/layout/vList2"/>
-    <dgm:cxn modelId="{C323F50B-46D0-4C15-A723-FD7FB8676AD0}" type="presParOf" srcId="{D355F512-C033-4866-AC13-D8CF3BEEFA52}" destId="{9A529067-0D00-4AED-970F-62D0C53C4061}" srcOrd="5" destOrd="0" presId="urn:microsoft.com/office/officeart/2005/8/layout/vList2"/>
-    <dgm:cxn modelId="{FF3F69BC-BBD4-41C5-A9A2-1541B8781A71}" type="presParOf" srcId="{D355F512-C033-4866-AC13-D8CF3BEEFA52}" destId="{5985FA55-D32D-45DB-9B7C-FD1E35061EAD}" srcOrd="6" destOrd="0" presId="urn:microsoft.com/office/officeart/2005/8/layout/vList2"/>
-    <dgm:cxn modelId="{2FB2DEB7-60C2-4403-9D8A-0025FF4B8B8A}" type="presParOf" srcId="{D355F512-C033-4866-AC13-D8CF3BEEFA52}" destId="{D7B7207A-AD3D-4A8D-81FF-B9BBCC4B7F9D}" srcOrd="7" destOrd="0" presId="urn:microsoft.com/office/officeart/2005/8/layout/vList2"/>
-    <dgm:cxn modelId="{19359D6C-4289-47B0-9C21-65DA86EE1540}" type="presParOf" srcId="{D355F512-C033-4866-AC13-D8CF3BEEFA52}" destId="{8985D69E-6F82-4ED5-91F5-67E793476F29}" srcOrd="8" destOrd="0" presId="urn:microsoft.com/office/officeart/2005/8/layout/vList2"/>
+    <dgm:cxn modelId="{9648B3A2-D2BF-4585-B387-7149C9927D1E}" type="presOf" srcId="{AAD33260-0441-4971-9BCD-C343AAF988C9}" destId="{82B9378C-E2BA-4C2A-BEBE-F9794C051F6B}" srcOrd="0" destOrd="0" presId="urn:microsoft.com/office/officeart/2005/8/layout/vList2#1"/>
+    <dgm:cxn modelId="{75F5B6A6-63D6-4BCC-978E-4EBD2CDC21D4}" type="presOf" srcId="{58F9F9AD-F08D-40C3-A73D-99EA8CBA229D}" destId="{8985D69E-6F82-4ED5-91F5-67E793476F29}" srcOrd="0" destOrd="0" presId="urn:microsoft.com/office/officeart/2005/8/layout/vList2#1"/>
+    <dgm:cxn modelId="{2C8FE0C3-4DDE-48E4-8A2B-85710E7A278C}" type="presParOf" srcId="{D355F512-C033-4866-AC13-D8CF3BEEFA52}" destId="{AAC018E5-2DA9-46F7-B114-5D708CB92E35}" srcOrd="0" destOrd="0" presId="urn:microsoft.com/office/officeart/2005/8/layout/vList2#1"/>
+    <dgm:cxn modelId="{47CE5DE6-4753-4366-9DA1-C1522BBF3942}" type="presParOf" srcId="{D355F512-C033-4866-AC13-D8CF3BEEFA52}" destId="{63859629-72A4-4B5D-B877-8E2A32985942}" srcOrd="1" destOrd="0" presId="urn:microsoft.com/office/officeart/2005/8/layout/vList2#1"/>
+    <dgm:cxn modelId="{00432796-27AF-4A44-A497-17975B81DA89}" type="presParOf" srcId="{D355F512-C033-4866-AC13-D8CF3BEEFA52}" destId="{82B9378C-E2BA-4C2A-BEBE-F9794C051F6B}" srcOrd="2" destOrd="0" presId="urn:microsoft.com/office/officeart/2005/8/layout/vList2#1"/>
+    <dgm:cxn modelId="{4BB06B86-13ED-471D-AF3D-7C4D6CF54A5D}" type="presParOf" srcId="{D355F512-C033-4866-AC13-D8CF3BEEFA52}" destId="{22C0449F-3E2B-48E3-8475-ABFB65C45C9A}" srcOrd="3" destOrd="0" presId="urn:microsoft.com/office/officeart/2005/8/layout/vList2#1"/>
+    <dgm:cxn modelId="{DCE31490-9C2F-438E-B38F-41C55C683C7F}" type="presParOf" srcId="{D355F512-C033-4866-AC13-D8CF3BEEFA52}" destId="{D48F633E-C89C-4BE1-AE92-A20CAA7CAB33}" srcOrd="4" destOrd="0" presId="urn:microsoft.com/office/officeart/2005/8/layout/vList2#1"/>
+    <dgm:cxn modelId="{C323F50B-46D0-4C15-A723-FD7FB8676AD0}" type="presParOf" srcId="{D355F512-C033-4866-AC13-D8CF3BEEFA52}" destId="{9A529067-0D00-4AED-970F-62D0C53C4061}" srcOrd="5" destOrd="0" presId="urn:microsoft.com/office/officeart/2005/8/layout/vList2#1"/>
+    <dgm:cxn modelId="{FF3F69BC-BBD4-41C5-A9A2-1541B8781A71}" type="presParOf" srcId="{D355F512-C033-4866-AC13-D8CF3BEEFA52}" destId="{5985FA55-D32D-45DB-9B7C-FD1E35061EAD}" srcOrd="6" destOrd="0" presId="urn:microsoft.com/office/officeart/2005/8/layout/vList2#1"/>
+    <dgm:cxn modelId="{2FB2DEB7-60C2-4403-9D8A-0025FF4B8B8A}" type="presParOf" srcId="{D355F512-C033-4866-AC13-D8CF3BEEFA52}" destId="{D7B7207A-AD3D-4A8D-81FF-B9BBCC4B7F9D}" srcOrd="7" destOrd="0" presId="urn:microsoft.com/office/officeart/2005/8/layout/vList2#1"/>
+    <dgm:cxn modelId="{19359D6C-4289-47B0-9C21-65DA86EE1540}" type="presParOf" srcId="{D355F512-C033-4866-AC13-D8CF3BEEFA52}" destId="{8985D69E-6F82-4ED5-91F5-67E793476F29}" srcOrd="8" destOrd="0" presId="urn:microsoft.com/office/officeart/2005/8/layout/vList2#1"/>
   </dgm:cxnLst>
   <dgm:bg/>
   <dgm:whole/>
   <dgm:extLst>
     <a:ext uri="http://schemas.microsoft.com/office/drawing/2008/diagram">
-      <dsp:dataModelExt xmlns:dsp="http://schemas.microsoft.com/office/drawing/2008/diagram" relId="rId5" minVer="http://schemas.openxmlformats.org/drawingml/2006/diagram"/>
+      <dsp:dataModelExt xmlns:dsp="http://schemas.microsoft.com/office/drawing/2008/diagram" relId="rId6" minVer="http://schemas.openxmlformats.org/drawingml/2006/diagram"/>
     </a:ext>
   </dgm:extLst>
 </dgm:dataModel>
@@ -5626,7 +5652,7 @@
 <dgm:dataModel xmlns:dgm="http://schemas.openxmlformats.org/drawingml/2006/diagram" xmlns:a="http://schemas.openxmlformats.org/drawingml/2006/main">
   <dgm:ptLst>
     <dgm:pt modelId="{754CA004-A69A-43A7-A8A1-1378D05D7383}" type="doc">
-      <dgm:prSet loTypeId="urn:microsoft.com/office/officeart/2005/8/layout/cycle5" loCatId="cycle" qsTypeId="urn:microsoft.com/office/officeart/2005/8/quickstyle/simple1" qsCatId="simple" csTypeId="urn:microsoft.com/office/officeart/2005/8/colors/colorful1" csCatId="colorful"/>
+      <dgm:prSet loTypeId="urn:microsoft.com/office/officeart/2005/8/layout/cycle5" loCatId="cycle" qsTypeId="urn:microsoft.com/office/officeart/2005/8/quickstyle/simple1#3" qsCatId="simple" csTypeId="urn:microsoft.com/office/officeart/2005/8/colors/colorful1#1" csCatId="colorful"/>
       <dgm:spPr/>
       <dgm:t>
         <a:bodyPr/>
@@ -5650,7 +5676,7 @@
         </a:p>
       </dgm:t>
     </dgm:pt>
-    <dgm:pt modelId="{82356A86-708C-400F-86AC-0249FEAAE193}" cxnId="{96015CFE-0ED9-49B8-BF0B-2F56B72F6261}" type="parTrans">
+    <dgm:pt modelId="{82356A86-708C-400F-86AC-0249FEAAE193}" type="parTrans" cxnId="{96015CFE-0ED9-49B8-BF0B-2F56B72F6261}">
       <dgm:prSet/>
       <dgm:spPr/>
       <dgm:t>
@@ -5661,7 +5687,7 @@
         </a:p>
       </dgm:t>
     </dgm:pt>
-    <dgm:pt modelId="{881FE121-8FB4-4DAD-A9C1-4DAA41D65AC9}" cxnId="{96015CFE-0ED9-49B8-BF0B-2F56B72F6261}" type="sibTrans">
+    <dgm:pt modelId="{881FE121-8FB4-4DAD-A9C1-4DAA41D65AC9}" type="sibTrans" cxnId="{96015CFE-0ED9-49B8-BF0B-2F56B72F6261}">
       <dgm:prSet/>
       <dgm:spPr/>
       <dgm:t>
@@ -5686,7 +5712,7 @@
         </a:p>
       </dgm:t>
     </dgm:pt>
-    <dgm:pt modelId="{530C3BC0-CE10-42C0-BEE2-9E99FAC9AECA}" cxnId="{C7B0937D-8F10-4528-9AA6-6BF7BA93DD03}" type="parTrans">
+    <dgm:pt modelId="{530C3BC0-CE10-42C0-BEE2-9E99FAC9AECA}" type="parTrans" cxnId="{C7B0937D-8F10-4528-9AA6-6BF7BA93DD03}">
       <dgm:prSet/>
       <dgm:spPr/>
       <dgm:t>
@@ -5697,7 +5723,7 @@
         </a:p>
       </dgm:t>
     </dgm:pt>
-    <dgm:pt modelId="{44790689-81E8-45EB-A17D-3FC1C90191D1}" cxnId="{C7B0937D-8F10-4528-9AA6-6BF7BA93DD03}" type="sibTrans">
+    <dgm:pt modelId="{44790689-81E8-45EB-A17D-3FC1C90191D1}" type="sibTrans" cxnId="{C7B0937D-8F10-4528-9AA6-6BF7BA93DD03}">
       <dgm:prSet/>
       <dgm:spPr/>
       <dgm:t>
@@ -5722,7 +5748,7 @@
         </a:p>
       </dgm:t>
     </dgm:pt>
-    <dgm:pt modelId="{AAB364D5-4C20-4C05-A735-1F42FB8B3314}" cxnId="{D9BE9E91-C8BF-4BE6-860D-9D937774D823}" type="parTrans">
+    <dgm:pt modelId="{AAB364D5-4C20-4C05-A735-1F42FB8B3314}" type="parTrans" cxnId="{D9BE9E91-C8BF-4BE6-860D-9D937774D823}">
       <dgm:prSet/>
       <dgm:spPr/>
       <dgm:t>
@@ -5733,7 +5759,7 @@
         </a:p>
       </dgm:t>
     </dgm:pt>
-    <dgm:pt modelId="{FEE8005B-E860-4C5E-93FD-B3F2C3927124}" cxnId="{D9BE9E91-C8BF-4BE6-860D-9D937774D823}" type="sibTrans">
+    <dgm:pt modelId="{FEE8005B-E860-4C5E-93FD-B3F2C3927124}" type="sibTrans" cxnId="{D9BE9E91-C8BF-4BE6-860D-9D937774D823}">
       <dgm:prSet/>
       <dgm:spPr/>
       <dgm:t>
@@ -5758,7 +5784,7 @@
         </a:p>
       </dgm:t>
     </dgm:pt>
-    <dgm:pt modelId="{87FBB14C-5D72-4EFB-9D94-93FC4829EFDC}" cxnId="{8E036C7B-9523-4CBA-BB80-B5CDCBE49756}" type="parTrans">
+    <dgm:pt modelId="{87FBB14C-5D72-4EFB-9D94-93FC4829EFDC}" type="parTrans" cxnId="{8E036C7B-9523-4CBA-BB80-B5CDCBE49756}">
       <dgm:prSet/>
       <dgm:spPr/>
       <dgm:t>
@@ -5769,7 +5795,7 @@
         </a:p>
       </dgm:t>
     </dgm:pt>
-    <dgm:pt modelId="{36200218-F0E9-43CE-8D94-C3367D3A8C02}" cxnId="{8E036C7B-9523-4CBA-BB80-B5CDCBE49756}" type="sibTrans">
+    <dgm:pt modelId="{36200218-F0E9-43CE-8D94-C3367D3A8C02}" type="sibTrans" cxnId="{8E036C7B-9523-4CBA-BB80-B5CDCBE49756}">
       <dgm:prSet/>
       <dgm:spPr/>
       <dgm:t>
@@ -5794,7 +5820,7 @@
         </a:p>
       </dgm:t>
     </dgm:pt>
-    <dgm:pt modelId="{D04E33EF-E698-4170-8507-F3C7E151A8FC}" cxnId="{1EE20846-88EE-46EF-8FD4-3A1E98ABE355}" type="parTrans">
+    <dgm:pt modelId="{D04E33EF-E698-4170-8507-F3C7E151A8FC}" type="parTrans" cxnId="{1EE20846-88EE-46EF-8FD4-3A1E98ABE355}">
       <dgm:prSet/>
       <dgm:spPr/>
       <dgm:t>
@@ -5805,7 +5831,7 @@
         </a:p>
       </dgm:t>
     </dgm:pt>
-    <dgm:pt modelId="{23F4CDE7-3C98-44C2-BA81-D2D2F0A496FF}" cxnId="{1EE20846-88EE-46EF-8FD4-3A1E98ABE355}" type="sibTrans">
+    <dgm:pt modelId="{23F4CDE7-3C98-44C2-BA81-D2D2F0A496FF}" type="sibTrans" cxnId="{1EE20846-88EE-46EF-8FD4-3A1E98ABE355}">
       <dgm:prSet/>
       <dgm:spPr/>
       <dgm:t>
@@ -5830,7 +5856,7 @@
         </a:p>
       </dgm:t>
     </dgm:pt>
-    <dgm:pt modelId="{E49FA16A-8D14-4B89-94F9-7475DED8B9D3}" cxnId="{0D45DC7C-3719-406F-905C-60A10BE9123A}" type="parTrans">
+    <dgm:pt modelId="{E49FA16A-8D14-4B89-94F9-7475DED8B9D3}" type="parTrans" cxnId="{0D45DC7C-3719-406F-905C-60A10BE9123A}">
       <dgm:prSet/>
       <dgm:spPr/>
       <dgm:t>
@@ -5841,7 +5867,7 @@
         </a:p>
       </dgm:t>
     </dgm:pt>
-    <dgm:pt modelId="{B6D69626-9794-4FAD-B538-FB7134AFFC36}" cxnId="{0D45DC7C-3719-406F-905C-60A10BE9123A}" type="sibTrans">
+    <dgm:pt modelId="{B6D69626-9794-4FAD-B538-FB7134AFFC36}" type="sibTrans" cxnId="{0D45DC7C-3719-406F-905C-60A10BE9123A}">
       <dgm:prSet/>
       <dgm:spPr/>
       <dgm:t>
@@ -5866,7 +5892,7 @@
         </a:p>
       </dgm:t>
     </dgm:pt>
-    <dgm:pt modelId="{C7214D4D-8DB5-47AF-AE3D-EC15A12A0586}" cxnId="{C301C5FC-781D-4013-A71C-72738EFC2643}" type="parTrans">
+    <dgm:pt modelId="{C7214D4D-8DB5-47AF-AE3D-EC15A12A0586}" type="parTrans" cxnId="{C301C5FC-781D-4013-A71C-72738EFC2643}">
       <dgm:prSet/>
       <dgm:spPr/>
       <dgm:t>
@@ -5877,7 +5903,7 @@
         </a:p>
       </dgm:t>
     </dgm:pt>
-    <dgm:pt modelId="{94467537-506E-4089-A94E-B6F8B2281138}" cxnId="{C301C5FC-781D-4013-A71C-72738EFC2643}" type="sibTrans">
+    <dgm:pt modelId="{94467537-506E-4089-A94E-B6F8B2281138}" type="sibTrans" cxnId="{C301C5FC-781D-4013-A71C-72738EFC2643}">
       <dgm:prSet/>
       <dgm:spPr/>
       <dgm:t>
@@ -5902,7 +5928,7 @@
         </a:p>
       </dgm:t>
     </dgm:pt>
-    <dgm:pt modelId="{245FC2DE-49EF-4BDA-B79F-ED2F97C0E370}" cxnId="{D7303300-ABB5-420E-B095-9500C879750D}" type="parTrans">
+    <dgm:pt modelId="{245FC2DE-49EF-4BDA-B79F-ED2F97C0E370}" type="parTrans" cxnId="{D7303300-ABB5-420E-B095-9500C879750D}">
       <dgm:prSet/>
       <dgm:spPr/>
       <dgm:t>
@@ -5913,7 +5939,7 @@
         </a:p>
       </dgm:t>
     </dgm:pt>
-    <dgm:pt modelId="{4FE7632E-BD47-40BF-9100-46C6BCB14A6D}" cxnId="{D7303300-ABB5-420E-B095-9500C879750D}" type="sibTrans">
+    <dgm:pt modelId="{4FE7632E-BD47-40BF-9100-46C6BCB14A6D}" type="sibTrans" cxnId="{D7303300-ABB5-420E-B095-9500C879750D}">
       <dgm:prSet/>
       <dgm:spPr/>
       <dgm:t>
@@ -6017,7 +6043,7 @@
   <dgm:whole/>
   <dgm:extLst>
     <a:ext uri="http://schemas.microsoft.com/office/drawing/2008/diagram">
-      <dsp:dataModelExt xmlns:dsp="http://schemas.microsoft.com/office/drawing/2008/diagram" relId="rId5" minVer="http://schemas.openxmlformats.org/drawingml/2006/diagram"/>
+      <dsp:dataModelExt xmlns:dsp="http://schemas.microsoft.com/office/drawing/2008/diagram" relId="rId6" minVer="http://schemas.openxmlformats.org/drawingml/2006/diagram"/>
     </a:ext>
   </dgm:extLst>
 </dgm:dataModel>
@@ -6027,7 +6053,7 @@
 <dgm:dataModel xmlns:dgm="http://schemas.openxmlformats.org/drawingml/2006/diagram" xmlns:a="http://schemas.openxmlformats.org/drawingml/2006/main">
   <dgm:ptLst>
     <dgm:pt modelId="{52EFEF03-BB7C-4F6D-A76D-534B086DDB8A}" type="doc">
-      <dgm:prSet loTypeId="urn:microsoft.com/office/officeart/2005/8/layout/chart3" loCatId="cycle" qsTypeId="urn:microsoft.com/office/officeart/2005/8/quickstyle/simple1" qsCatId="simple" csTypeId="urn:microsoft.com/office/officeart/2005/8/colors/colorful1" csCatId="colorful"/>
+      <dgm:prSet loTypeId="urn:microsoft.com/office/officeart/2005/8/layout/chart3#1" loCatId="cycle" qsTypeId="urn:microsoft.com/office/officeart/2005/8/quickstyle/simple1#4" qsCatId="simple" csTypeId="urn:microsoft.com/office/officeart/2005/8/colors/colorful1#2" csCatId="colorful"/>
       <dgm:spPr/>
       <dgm:t>
         <a:bodyPr/>
@@ -6051,7 +6077,7 @@
         </a:p>
       </dgm:t>
     </dgm:pt>
-    <dgm:pt modelId="{F2BDA25D-33E6-4A30-AA03-60848156FD05}" cxnId="{6C1B511D-1C2D-426B-AE17-CF71669B6DA1}" type="parTrans">
+    <dgm:pt modelId="{F2BDA25D-33E6-4A30-AA03-60848156FD05}" type="parTrans" cxnId="{6C1B511D-1C2D-426B-AE17-CF71669B6DA1}">
       <dgm:prSet/>
       <dgm:spPr/>
       <dgm:t>
@@ -6062,7 +6088,7 @@
         </a:p>
       </dgm:t>
     </dgm:pt>
-    <dgm:pt modelId="{CB484013-92EA-49D6-84C8-B489B5077DF8}" cxnId="{6C1B511D-1C2D-426B-AE17-CF71669B6DA1}" type="sibTrans">
+    <dgm:pt modelId="{CB484013-92EA-49D6-84C8-B489B5077DF8}" type="sibTrans" cxnId="{6C1B511D-1C2D-426B-AE17-CF71669B6DA1}">
       <dgm:prSet/>
       <dgm:spPr/>
       <dgm:t>
@@ -6087,7 +6113,7 @@
         </a:p>
       </dgm:t>
     </dgm:pt>
-    <dgm:pt modelId="{E4E31992-F91F-4BC7-8423-1102CB93720F}" cxnId="{84CF0E3A-5F39-45FA-A2BE-097E4D778348}" type="parTrans">
+    <dgm:pt modelId="{E4E31992-F91F-4BC7-8423-1102CB93720F}" type="parTrans" cxnId="{84CF0E3A-5F39-45FA-A2BE-097E4D778348}">
       <dgm:prSet/>
       <dgm:spPr/>
       <dgm:t>
@@ -6098,7 +6124,7 @@
         </a:p>
       </dgm:t>
     </dgm:pt>
-    <dgm:pt modelId="{C50A13CB-14B0-40D2-A737-7C07F451DE4B}" cxnId="{84CF0E3A-5F39-45FA-A2BE-097E4D778348}" type="sibTrans">
+    <dgm:pt modelId="{C50A13CB-14B0-40D2-A737-7C07F451DE4B}" type="sibTrans" cxnId="{84CF0E3A-5F39-45FA-A2BE-097E4D778348}">
       <dgm:prSet/>
       <dgm:spPr/>
       <dgm:t>
@@ -6123,7 +6149,7 @@
         </a:p>
       </dgm:t>
     </dgm:pt>
-    <dgm:pt modelId="{EB183AC5-2CC3-4A17-9512-116F4E31CC2C}" cxnId="{AFF3490C-A9D6-425B-AA07-5016BD11380D}" type="parTrans">
+    <dgm:pt modelId="{EB183AC5-2CC3-4A17-9512-116F4E31CC2C}" type="parTrans" cxnId="{AFF3490C-A9D6-425B-AA07-5016BD11380D}">
       <dgm:prSet/>
       <dgm:spPr/>
       <dgm:t>
@@ -6134,7 +6160,7 @@
         </a:p>
       </dgm:t>
     </dgm:pt>
-    <dgm:pt modelId="{8A15BE7F-2720-4686-806D-C1F6490554F2}" cxnId="{AFF3490C-A9D6-425B-AA07-5016BD11380D}" type="sibTrans">
+    <dgm:pt modelId="{8A15BE7F-2720-4686-806D-C1F6490554F2}" type="sibTrans" cxnId="{AFF3490C-A9D6-425B-AA07-5016BD11380D}">
       <dgm:prSet/>
       <dgm:spPr/>
       <dgm:t>
@@ -6201,26 +6227,26 @@
   <dgm:cxnLst>
     <dgm:cxn modelId="{AFF3490C-A9D6-425B-AA07-5016BD11380D}" srcId="{52EFEF03-BB7C-4F6D-A76D-534B086DDB8A}" destId="{55B9012D-5FFD-4BCC-ABB1-B1913086B7EE}" srcOrd="2" destOrd="0" parTransId="{EB183AC5-2CC3-4A17-9512-116F4E31CC2C}" sibTransId="{8A15BE7F-2720-4686-806D-C1F6490554F2}"/>
     <dgm:cxn modelId="{6C1B511D-1C2D-426B-AE17-CF71669B6DA1}" srcId="{52EFEF03-BB7C-4F6D-A76D-534B086DDB8A}" destId="{E17ED77A-67A2-4365-B4C4-4CF0019C52D2}" srcOrd="0" destOrd="0" parTransId="{F2BDA25D-33E6-4A30-AA03-60848156FD05}" sibTransId="{CB484013-92EA-49D6-84C8-B489B5077DF8}"/>
-    <dgm:cxn modelId="{BD6CBB28-0DE7-4860-901F-D336D98EF954}" type="presOf" srcId="{E17ED77A-67A2-4365-B4C4-4CF0019C52D2}" destId="{8399E1FA-BD11-4C91-9151-70488BA589C6}" srcOrd="0" destOrd="0" presId="urn:microsoft.com/office/officeart/2005/8/layout/chart3"/>
-    <dgm:cxn modelId="{98354D2C-B9AB-4AD3-9B91-D13C90ABC2AD}" type="presOf" srcId="{55B9012D-5FFD-4BCC-ABB1-B1913086B7EE}" destId="{2EDF9FB6-FFCF-4240-8C95-07D0C57A917C}" srcOrd="1" destOrd="0" presId="urn:microsoft.com/office/officeart/2005/8/layout/chart3"/>
+    <dgm:cxn modelId="{BD6CBB28-0DE7-4860-901F-D336D98EF954}" type="presOf" srcId="{E17ED77A-67A2-4365-B4C4-4CF0019C52D2}" destId="{8399E1FA-BD11-4C91-9151-70488BA589C6}" srcOrd="0" destOrd="0" presId="urn:microsoft.com/office/officeart/2005/8/layout/chart3#1"/>
+    <dgm:cxn modelId="{98354D2C-B9AB-4AD3-9B91-D13C90ABC2AD}" type="presOf" srcId="{55B9012D-5FFD-4BCC-ABB1-B1913086B7EE}" destId="{2EDF9FB6-FFCF-4240-8C95-07D0C57A917C}" srcOrd="1" destOrd="0" presId="urn:microsoft.com/office/officeart/2005/8/layout/chart3#1"/>
     <dgm:cxn modelId="{84CF0E3A-5F39-45FA-A2BE-097E4D778348}" srcId="{52EFEF03-BB7C-4F6D-A76D-534B086DDB8A}" destId="{E9278283-81C9-4A80-8121-D37A9650A434}" srcOrd="1" destOrd="0" parTransId="{E4E31992-F91F-4BC7-8423-1102CB93720F}" sibTransId="{C50A13CB-14B0-40D2-A737-7C07F451DE4B}"/>
-    <dgm:cxn modelId="{627EEC46-283E-4EC5-B468-7DAAA0D797DD}" type="presOf" srcId="{E9278283-81C9-4A80-8121-D37A9650A434}" destId="{F7FB1B8D-9A56-492F-AEA7-846F2650C228}" srcOrd="1" destOrd="0" presId="urn:microsoft.com/office/officeart/2005/8/layout/chart3"/>
-    <dgm:cxn modelId="{B33FD780-4FAD-4FC2-9A78-E60592DD7181}" type="presOf" srcId="{55B9012D-5FFD-4BCC-ABB1-B1913086B7EE}" destId="{14FD8F79-13DD-4B49-958A-E6EFF890B894}" srcOrd="0" destOrd="0" presId="urn:microsoft.com/office/officeart/2005/8/layout/chart3"/>
-    <dgm:cxn modelId="{B72BB1B1-AEAD-446A-934B-A2C6FB78D832}" type="presOf" srcId="{52EFEF03-BB7C-4F6D-A76D-534B086DDB8A}" destId="{31866DA5-DF45-4888-91CF-4C904EC36685}" srcOrd="0" destOrd="0" presId="urn:microsoft.com/office/officeart/2005/8/layout/chart3"/>
-    <dgm:cxn modelId="{340CCCB7-F458-4E76-9A6C-63988E6B1E24}" type="presOf" srcId="{E17ED77A-67A2-4365-B4C4-4CF0019C52D2}" destId="{1F0BF288-07A0-4E5E-9B1A-0D38AF7DE74E}" srcOrd="1" destOrd="0" presId="urn:microsoft.com/office/officeart/2005/8/layout/chart3"/>
-    <dgm:cxn modelId="{58F9E3E9-0D5E-4752-A3E7-9C67E11EDCF5}" type="presOf" srcId="{E9278283-81C9-4A80-8121-D37A9650A434}" destId="{B23142B4-EDC1-4DDF-9454-D85B03D9BBCC}" srcOrd="0" destOrd="0" presId="urn:microsoft.com/office/officeart/2005/8/layout/chart3"/>
-    <dgm:cxn modelId="{25FF6F2B-9801-4DF5-9091-FF28DE9327BF}" type="presParOf" srcId="{31866DA5-DF45-4888-91CF-4C904EC36685}" destId="{8399E1FA-BD11-4C91-9151-70488BA589C6}" srcOrd="0" destOrd="0" presId="urn:microsoft.com/office/officeart/2005/8/layout/chart3"/>
-    <dgm:cxn modelId="{A8E5936B-ECBC-46A6-9281-12D87EE87ADD}" type="presParOf" srcId="{31866DA5-DF45-4888-91CF-4C904EC36685}" destId="{1F0BF288-07A0-4E5E-9B1A-0D38AF7DE74E}" srcOrd="1" destOrd="0" presId="urn:microsoft.com/office/officeart/2005/8/layout/chart3"/>
-    <dgm:cxn modelId="{5CFEE153-5EBD-4654-BA98-0C9B28DA4D8E}" type="presParOf" srcId="{31866DA5-DF45-4888-91CF-4C904EC36685}" destId="{B23142B4-EDC1-4DDF-9454-D85B03D9BBCC}" srcOrd="2" destOrd="0" presId="urn:microsoft.com/office/officeart/2005/8/layout/chart3"/>
-    <dgm:cxn modelId="{656DDE7A-4C87-4AFB-BE53-88E0506D1400}" type="presParOf" srcId="{31866DA5-DF45-4888-91CF-4C904EC36685}" destId="{F7FB1B8D-9A56-492F-AEA7-846F2650C228}" srcOrd="3" destOrd="0" presId="urn:microsoft.com/office/officeart/2005/8/layout/chart3"/>
-    <dgm:cxn modelId="{ADEE0838-C354-481C-910D-B530B9ADD522}" type="presParOf" srcId="{31866DA5-DF45-4888-91CF-4C904EC36685}" destId="{14FD8F79-13DD-4B49-958A-E6EFF890B894}" srcOrd="4" destOrd="0" presId="urn:microsoft.com/office/officeart/2005/8/layout/chart3"/>
-    <dgm:cxn modelId="{DB18CB61-09D0-4891-A0EE-61DE36FA84BC}" type="presParOf" srcId="{31866DA5-DF45-4888-91CF-4C904EC36685}" destId="{2EDF9FB6-FFCF-4240-8C95-07D0C57A917C}" srcOrd="5" destOrd="0" presId="urn:microsoft.com/office/officeart/2005/8/layout/chart3"/>
+    <dgm:cxn modelId="{627EEC46-283E-4EC5-B468-7DAAA0D797DD}" type="presOf" srcId="{E9278283-81C9-4A80-8121-D37A9650A434}" destId="{F7FB1B8D-9A56-492F-AEA7-846F2650C228}" srcOrd="1" destOrd="0" presId="urn:microsoft.com/office/officeart/2005/8/layout/chart3#1"/>
+    <dgm:cxn modelId="{B33FD780-4FAD-4FC2-9A78-E60592DD7181}" type="presOf" srcId="{55B9012D-5FFD-4BCC-ABB1-B1913086B7EE}" destId="{14FD8F79-13DD-4B49-958A-E6EFF890B894}" srcOrd="0" destOrd="0" presId="urn:microsoft.com/office/officeart/2005/8/layout/chart3#1"/>
+    <dgm:cxn modelId="{B72BB1B1-AEAD-446A-934B-A2C6FB78D832}" type="presOf" srcId="{52EFEF03-BB7C-4F6D-A76D-534B086DDB8A}" destId="{31866DA5-DF45-4888-91CF-4C904EC36685}" srcOrd="0" destOrd="0" presId="urn:microsoft.com/office/officeart/2005/8/layout/chart3#1"/>
+    <dgm:cxn modelId="{340CCCB7-F458-4E76-9A6C-63988E6B1E24}" type="presOf" srcId="{E17ED77A-67A2-4365-B4C4-4CF0019C52D2}" destId="{1F0BF288-07A0-4E5E-9B1A-0D38AF7DE74E}" srcOrd="1" destOrd="0" presId="urn:microsoft.com/office/officeart/2005/8/layout/chart3#1"/>
+    <dgm:cxn modelId="{58F9E3E9-0D5E-4752-A3E7-9C67E11EDCF5}" type="presOf" srcId="{E9278283-81C9-4A80-8121-D37A9650A434}" destId="{B23142B4-EDC1-4DDF-9454-D85B03D9BBCC}" srcOrd="0" destOrd="0" presId="urn:microsoft.com/office/officeart/2005/8/layout/chart3#1"/>
+    <dgm:cxn modelId="{25FF6F2B-9801-4DF5-9091-FF28DE9327BF}" type="presParOf" srcId="{31866DA5-DF45-4888-91CF-4C904EC36685}" destId="{8399E1FA-BD11-4C91-9151-70488BA589C6}" srcOrd="0" destOrd="0" presId="urn:microsoft.com/office/officeart/2005/8/layout/chart3#1"/>
+    <dgm:cxn modelId="{A8E5936B-ECBC-46A6-9281-12D87EE87ADD}" type="presParOf" srcId="{31866DA5-DF45-4888-91CF-4C904EC36685}" destId="{1F0BF288-07A0-4E5E-9B1A-0D38AF7DE74E}" srcOrd="1" destOrd="0" presId="urn:microsoft.com/office/officeart/2005/8/layout/chart3#1"/>
+    <dgm:cxn modelId="{5CFEE153-5EBD-4654-BA98-0C9B28DA4D8E}" type="presParOf" srcId="{31866DA5-DF45-4888-91CF-4C904EC36685}" destId="{B23142B4-EDC1-4DDF-9454-D85B03D9BBCC}" srcOrd="2" destOrd="0" presId="urn:microsoft.com/office/officeart/2005/8/layout/chart3#1"/>
+    <dgm:cxn modelId="{656DDE7A-4C87-4AFB-BE53-88E0506D1400}" type="presParOf" srcId="{31866DA5-DF45-4888-91CF-4C904EC36685}" destId="{F7FB1B8D-9A56-492F-AEA7-846F2650C228}" srcOrd="3" destOrd="0" presId="urn:microsoft.com/office/officeart/2005/8/layout/chart3#1"/>
+    <dgm:cxn modelId="{ADEE0838-C354-481C-910D-B530B9ADD522}" type="presParOf" srcId="{31866DA5-DF45-4888-91CF-4C904EC36685}" destId="{14FD8F79-13DD-4B49-958A-E6EFF890B894}" srcOrd="4" destOrd="0" presId="urn:microsoft.com/office/officeart/2005/8/layout/chart3#1"/>
+    <dgm:cxn modelId="{DB18CB61-09D0-4891-A0EE-61DE36FA84BC}" type="presParOf" srcId="{31866DA5-DF45-4888-91CF-4C904EC36685}" destId="{2EDF9FB6-FFCF-4240-8C95-07D0C57A917C}" srcOrd="5" destOrd="0" presId="urn:microsoft.com/office/officeart/2005/8/layout/chart3#1"/>
   </dgm:cxnLst>
   <dgm:bg/>
   <dgm:whole/>
   <dgm:extLst>
     <a:ext uri="http://schemas.microsoft.com/office/drawing/2008/diagram">
-      <dsp:dataModelExt xmlns:dsp="http://schemas.microsoft.com/office/drawing/2008/diagram" relId="rId5" minVer="http://schemas.openxmlformats.org/drawingml/2006/diagram"/>
+      <dsp:dataModelExt xmlns:dsp="http://schemas.microsoft.com/office/drawing/2008/diagram" relId="rId6" minVer="http://schemas.openxmlformats.org/drawingml/2006/diagram"/>
     </a:ext>
   </dgm:extLst>
 </dgm:dataModel>
@@ -6230,7 +6256,7 @@
 <dgm:dataModel xmlns:dgm="http://schemas.openxmlformats.org/drawingml/2006/diagram" xmlns:a="http://schemas.openxmlformats.org/drawingml/2006/main">
   <dgm:ptLst>
     <dgm:pt modelId="{89566EB6-6288-4089-ABDC-7CC4F8192F8E}" type="doc">
-      <dgm:prSet loTypeId="urn:microsoft.com/office/officeart/2005/8/layout/cycle2" loCatId="cycle" qsTypeId="urn:microsoft.com/office/officeart/2005/8/quickstyle/simple1" qsCatId="simple" csTypeId="urn:microsoft.com/office/officeart/2005/8/colors/colorful1" csCatId="colorful"/>
+      <dgm:prSet loTypeId="urn:microsoft.com/office/officeart/2005/8/layout/cycle2" loCatId="cycle" qsTypeId="urn:microsoft.com/office/officeart/2005/8/quickstyle/simple1#5" qsCatId="simple" csTypeId="urn:microsoft.com/office/officeart/2005/8/colors/colorful1#3" csCatId="colorful"/>
       <dgm:spPr/>
       <dgm:t>
         <a:bodyPr/>
@@ -6254,7 +6280,7 @@
         </a:p>
       </dgm:t>
     </dgm:pt>
-    <dgm:pt modelId="{C4030454-8D14-4C23-8EEE-096315964358}" cxnId="{C8B70299-A431-4F10-A644-E21E6512F716}" type="parTrans">
+    <dgm:pt modelId="{C4030454-8D14-4C23-8EEE-096315964358}" type="parTrans" cxnId="{C8B70299-A431-4F10-A644-E21E6512F716}">
       <dgm:prSet/>
       <dgm:spPr/>
       <dgm:t>
@@ -6265,7 +6291,7 @@
         </a:p>
       </dgm:t>
     </dgm:pt>
-    <dgm:pt modelId="{B0FB864C-71F8-40C8-925B-85970A91B17F}" cxnId="{C8B70299-A431-4F10-A644-E21E6512F716}" type="sibTrans">
+    <dgm:pt modelId="{B0FB864C-71F8-40C8-925B-85970A91B17F}" type="sibTrans" cxnId="{C8B70299-A431-4F10-A644-E21E6512F716}">
       <dgm:prSet/>
       <dgm:spPr/>
       <dgm:t>
@@ -6290,7 +6316,7 @@
         </a:p>
       </dgm:t>
     </dgm:pt>
-    <dgm:pt modelId="{61ADB759-2FCC-4FBF-8B68-8F446ACE5406}" cxnId="{64314A78-03EB-41F1-A3EE-8283FC44D674}" type="parTrans">
+    <dgm:pt modelId="{61ADB759-2FCC-4FBF-8B68-8F446ACE5406}" type="parTrans" cxnId="{64314A78-03EB-41F1-A3EE-8283FC44D674}">
       <dgm:prSet/>
       <dgm:spPr/>
       <dgm:t>
@@ -6301,7 +6327,7 @@
         </a:p>
       </dgm:t>
     </dgm:pt>
-    <dgm:pt modelId="{590AC7B6-39BE-4424-8A92-DDBD01A5F399}" cxnId="{64314A78-03EB-41F1-A3EE-8283FC44D674}" type="sibTrans">
+    <dgm:pt modelId="{590AC7B6-39BE-4424-8A92-DDBD01A5F399}" type="sibTrans" cxnId="{64314A78-03EB-41F1-A3EE-8283FC44D674}">
       <dgm:prSet/>
       <dgm:spPr/>
       <dgm:t>
@@ -6326,7 +6352,7 @@
         </a:p>
       </dgm:t>
     </dgm:pt>
-    <dgm:pt modelId="{985DBD64-5DB4-472B-9EED-6E6F6DF0C21D}" cxnId="{3ED0CF2A-A5F4-4237-9B6C-6E1A34D15A94}" type="parTrans">
+    <dgm:pt modelId="{985DBD64-5DB4-472B-9EED-6E6F6DF0C21D}" type="parTrans" cxnId="{3ED0CF2A-A5F4-4237-9B6C-6E1A34D15A94}">
       <dgm:prSet/>
       <dgm:spPr/>
       <dgm:t>
@@ -6337,7 +6363,7 @@
         </a:p>
       </dgm:t>
     </dgm:pt>
-    <dgm:pt modelId="{ED71259C-22F3-4F90-B572-DFDF5D01FE40}" cxnId="{3ED0CF2A-A5F4-4237-9B6C-6E1A34D15A94}" type="sibTrans">
+    <dgm:pt modelId="{ED71259C-22F3-4F90-B572-DFDF5D01FE40}" type="sibTrans" cxnId="{3ED0CF2A-A5F4-4237-9B6C-6E1A34D15A94}">
       <dgm:prSet/>
       <dgm:spPr/>
       <dgm:t>
@@ -6434,7 +6460,7 @@
   <dgm:whole/>
   <dgm:extLst>
     <a:ext uri="http://schemas.microsoft.com/office/drawing/2008/diagram">
-      <dsp:dataModelExt xmlns:dsp="http://schemas.microsoft.com/office/drawing/2008/diagram" relId="rId5" minVer="http://schemas.openxmlformats.org/drawingml/2006/diagram"/>
+      <dsp:dataModelExt xmlns:dsp="http://schemas.microsoft.com/office/drawing/2008/diagram" relId="rId6" minVer="http://schemas.openxmlformats.org/drawingml/2006/diagram"/>
     </a:ext>
   </dgm:extLst>
 </dgm:dataModel>
@@ -6444,7 +6470,7 @@
 <dgm:dataModel xmlns:dgm="http://schemas.openxmlformats.org/drawingml/2006/diagram" xmlns:a="http://schemas.openxmlformats.org/drawingml/2006/main">
   <dgm:ptLst>
     <dgm:pt modelId="{1CF457D4-5D5F-4520-A01B-BF41AF83AA12}" type="doc">
-      <dgm:prSet loTypeId="urn:microsoft.com/office/officeart/2005/8/layout/vList2" loCatId="list" qsTypeId="urn:microsoft.com/office/officeart/2005/8/quickstyle/simple2" qsCatId="simple" csTypeId="urn:microsoft.com/office/officeart/2005/8/colors/accent4_2" csCatId="accent4"/>
+      <dgm:prSet loTypeId="urn:microsoft.com/office/officeart/2005/8/layout/vList2#2" loCatId="list" qsTypeId="urn:microsoft.com/office/officeart/2005/8/quickstyle/simple2#1" qsCatId="simple" csTypeId="urn:microsoft.com/office/officeart/2005/8/colors/accent4_2#2" csCatId="accent4"/>
       <dgm:spPr/>
       <dgm:t>
         <a:bodyPr/>
@@ -6468,7 +6494,7 @@
         </a:p>
       </dgm:t>
     </dgm:pt>
-    <dgm:pt modelId="{4FC33FF4-34D9-4489-B1E9-A89DEBAE9E6E}" cxnId="{51A7C1EE-3C20-4A96-9B24-E7E1448CBF37}" type="parTrans">
+    <dgm:pt modelId="{4FC33FF4-34D9-4489-B1E9-A89DEBAE9E6E}" type="parTrans" cxnId="{51A7C1EE-3C20-4A96-9B24-E7E1448CBF37}">
       <dgm:prSet/>
       <dgm:spPr/>
       <dgm:t>
@@ -6479,7 +6505,7 @@
         </a:p>
       </dgm:t>
     </dgm:pt>
-    <dgm:pt modelId="{DD1F815E-60DC-4F3A-936B-E23FCD182D12}" cxnId="{51A7C1EE-3C20-4A96-9B24-E7E1448CBF37}" type="sibTrans">
+    <dgm:pt modelId="{DD1F815E-60DC-4F3A-936B-E23FCD182D12}" type="sibTrans" cxnId="{51A7C1EE-3C20-4A96-9B24-E7E1448CBF37}">
       <dgm:prSet/>
       <dgm:spPr/>
       <dgm:t>
@@ -6504,7 +6530,7 @@
         </a:p>
       </dgm:t>
     </dgm:pt>
-    <dgm:pt modelId="{C4460A08-5BB8-4845-B55B-C054B9B6F54F}" cxnId="{A5E09D40-C386-4E9A-8173-114F7078F2AF}" type="parTrans">
+    <dgm:pt modelId="{C4460A08-5BB8-4845-B55B-C054B9B6F54F}" type="parTrans" cxnId="{A5E09D40-C386-4E9A-8173-114F7078F2AF}">
       <dgm:prSet/>
       <dgm:spPr/>
       <dgm:t>
@@ -6515,7 +6541,7 @@
         </a:p>
       </dgm:t>
     </dgm:pt>
-    <dgm:pt modelId="{81C457C6-C51E-423D-B48C-57D0907C39A6}" cxnId="{A5E09D40-C386-4E9A-8173-114F7078F2AF}" type="sibTrans">
+    <dgm:pt modelId="{81C457C6-C51E-423D-B48C-57D0907C39A6}" type="sibTrans" cxnId="{A5E09D40-C386-4E9A-8173-114F7078F2AF}">
       <dgm:prSet/>
       <dgm:spPr/>
       <dgm:t>
@@ -6540,7 +6566,7 @@
         </a:p>
       </dgm:t>
     </dgm:pt>
-    <dgm:pt modelId="{0E8ED937-857B-4A36-BE8B-2854F86C0F1F}" cxnId="{B460B851-711B-4430-A761-614A96EF9B96}" type="parTrans">
+    <dgm:pt modelId="{0E8ED937-857B-4A36-BE8B-2854F86C0F1F}" type="parTrans" cxnId="{B460B851-711B-4430-A761-614A96EF9B96}">
       <dgm:prSet/>
       <dgm:spPr/>
       <dgm:t>
@@ -6551,7 +6577,7 @@
         </a:p>
       </dgm:t>
     </dgm:pt>
-    <dgm:pt modelId="{F4D62477-08C4-4BB5-91C8-77FE23232A39}" cxnId="{B460B851-711B-4430-A761-614A96EF9B96}" type="sibTrans">
+    <dgm:pt modelId="{F4D62477-08C4-4BB5-91C8-77FE23232A39}" type="sibTrans" cxnId="{B460B851-711B-4430-A761-614A96EF9B96}">
       <dgm:prSet/>
       <dgm:spPr/>
       <dgm:t>
@@ -6576,7 +6602,7 @@
         </a:p>
       </dgm:t>
     </dgm:pt>
-    <dgm:pt modelId="{932AB516-2F0F-4C81-A30E-617475E44260}" cxnId="{3868ACAA-4E81-4B3D-8293-A89425CB813B}" type="parTrans">
+    <dgm:pt modelId="{932AB516-2F0F-4C81-A30E-617475E44260}" type="parTrans" cxnId="{3868ACAA-4E81-4B3D-8293-A89425CB813B}">
       <dgm:prSet/>
       <dgm:spPr/>
       <dgm:t>
@@ -6587,7 +6613,7 @@
         </a:p>
       </dgm:t>
     </dgm:pt>
-    <dgm:pt modelId="{7F360EB0-D393-496D-AAF4-CB53A9CB9607}" cxnId="{3868ACAA-4E81-4B3D-8293-A89425CB813B}" type="sibTrans">
+    <dgm:pt modelId="{7F360EB0-D393-496D-AAF4-CB53A9CB9607}" type="sibTrans" cxnId="{3868ACAA-4E81-4B3D-8293-A89425CB813B}">
       <dgm:prSet/>
       <dgm:spPr/>
       <dgm:t>
@@ -6612,7 +6638,7 @@
         </a:p>
       </dgm:t>
     </dgm:pt>
-    <dgm:pt modelId="{ADC1B901-8AC7-497A-AE75-9EC49F5CF8EF}" cxnId="{84F33A17-2AAD-4B01-9D63-BCED56139407}" type="parTrans">
+    <dgm:pt modelId="{ADC1B901-8AC7-497A-AE75-9EC49F5CF8EF}" type="parTrans" cxnId="{84F33A17-2AAD-4B01-9D63-BCED56139407}">
       <dgm:prSet/>
       <dgm:spPr/>
       <dgm:t>
@@ -6623,7 +6649,7 @@
         </a:p>
       </dgm:t>
     </dgm:pt>
-    <dgm:pt modelId="{F12493FC-ADB0-4711-B412-BB660AFD09AF}" cxnId="{84F33A17-2AAD-4B01-9D63-BCED56139407}" type="sibTrans">
+    <dgm:pt modelId="{F12493FC-ADB0-4711-B412-BB660AFD09AF}" type="sibTrans" cxnId="{84F33A17-2AAD-4B01-9D63-BCED56139407}">
       <dgm:prSet/>
       <dgm:spPr/>
       <dgm:t>
@@ -6648,7 +6674,7 @@
         </a:p>
       </dgm:t>
     </dgm:pt>
-    <dgm:pt modelId="{F4463590-EF46-4F04-A6CA-A5CACE8C2155}" cxnId="{8769E9E7-A037-4DC4-BD8D-361B8556D6C7}" type="parTrans">
+    <dgm:pt modelId="{F4463590-EF46-4F04-A6CA-A5CACE8C2155}" type="parTrans" cxnId="{8769E9E7-A037-4DC4-BD8D-361B8556D6C7}">
       <dgm:prSet/>
       <dgm:spPr/>
       <dgm:t>
@@ -6659,7 +6685,7 @@
         </a:p>
       </dgm:t>
     </dgm:pt>
-    <dgm:pt modelId="{EA0C8204-9EF0-41F3-901C-7B06DB3DC720}" cxnId="{8769E9E7-A037-4DC4-BD8D-361B8556D6C7}" type="sibTrans">
+    <dgm:pt modelId="{EA0C8204-9EF0-41F3-901C-7B06DB3DC720}" type="sibTrans" cxnId="{8769E9E7-A037-4DC4-BD8D-361B8556D6C7}">
       <dgm:prSet/>
       <dgm:spPr/>
       <dgm:t>
@@ -6684,7 +6710,7 @@
         </a:p>
       </dgm:t>
     </dgm:pt>
-    <dgm:pt modelId="{8106D28A-9150-4A38-9AE7-50E983863028}" cxnId="{D5ADFDB6-3ECD-41BD-B905-D110C90BC98B}" type="parTrans">
+    <dgm:pt modelId="{8106D28A-9150-4A38-9AE7-50E983863028}" type="parTrans" cxnId="{D5ADFDB6-3ECD-41BD-B905-D110C90BC98B}">
       <dgm:prSet/>
       <dgm:spPr/>
       <dgm:t>
@@ -6695,7 +6721,7 @@
         </a:p>
       </dgm:t>
     </dgm:pt>
-    <dgm:pt modelId="{C44A23A4-4E1E-4A7A-8451-3D4189274CC9}" cxnId="{D5ADFDB6-3ECD-41BD-B905-D110C90BC98B}" type="sibTrans">
+    <dgm:pt modelId="{C44A23A4-4E1E-4A7A-8451-3D4189274CC9}" type="sibTrans" cxnId="{D5ADFDB6-3ECD-41BD-B905-D110C90BC98B}">
       <dgm:prSet/>
       <dgm:spPr/>
       <dgm:t>
@@ -6720,7 +6746,7 @@
         </a:p>
       </dgm:t>
     </dgm:pt>
-    <dgm:pt modelId="{695A29EB-F930-4124-A677-22F69FEBA617}" cxnId="{3677EF41-D9F9-483B-B62F-A6CAB472D4D5}" type="parTrans">
+    <dgm:pt modelId="{695A29EB-F930-4124-A677-22F69FEBA617}" type="parTrans" cxnId="{3677EF41-D9F9-483B-B62F-A6CAB472D4D5}">
       <dgm:prSet/>
       <dgm:spPr/>
       <dgm:t>
@@ -6731,7 +6757,7 @@
         </a:p>
       </dgm:t>
     </dgm:pt>
-    <dgm:pt modelId="{164B0E34-DD87-445F-8A53-4A152005AFCC}" cxnId="{3677EF41-D9F9-483B-B62F-A6CAB472D4D5}" type="sibTrans">
+    <dgm:pt modelId="{164B0E34-DD87-445F-8A53-4A152005AFCC}" type="sibTrans" cxnId="{3677EF41-D9F9-483B-B62F-A6CAB472D4D5}">
       <dgm:prSet/>
       <dgm:spPr/>
       <dgm:t>
@@ -6756,7 +6782,7 @@
         </a:p>
       </dgm:t>
     </dgm:pt>
-    <dgm:pt modelId="{F86FAE34-127A-450B-AD54-1314F474A165}" cxnId="{16075EC3-F7F5-4C75-807A-4342728FB4D0}" type="parTrans">
+    <dgm:pt modelId="{F86FAE34-127A-450B-AD54-1314F474A165}" type="parTrans" cxnId="{16075EC3-F7F5-4C75-807A-4342728FB4D0}">
       <dgm:prSet/>
       <dgm:spPr/>
       <dgm:t>
@@ -6767,7 +6793,7 @@
         </a:p>
       </dgm:t>
     </dgm:pt>
-    <dgm:pt modelId="{700B23BF-E86E-4876-9621-89A63584E2CC}" cxnId="{16075EC3-F7F5-4C75-807A-4342728FB4D0}" type="sibTrans">
+    <dgm:pt modelId="{700B23BF-E86E-4876-9621-89A63584E2CC}" type="sibTrans" cxnId="{16075EC3-F7F5-4C75-807A-4342728FB4D0}">
       <dgm:prSet/>
       <dgm:spPr/>
       <dgm:t>
@@ -6792,7 +6818,7 @@
         </a:p>
       </dgm:t>
     </dgm:pt>
-    <dgm:pt modelId="{AA780B94-2EDC-4FEF-98E5-48F4BD60B7CA}" cxnId="{AF3B50C4-67E8-499E-9B01-7C2E2B65175A}" type="parTrans">
+    <dgm:pt modelId="{AA780B94-2EDC-4FEF-98E5-48F4BD60B7CA}" type="parTrans" cxnId="{AF3B50C4-67E8-499E-9B01-7C2E2B65175A}">
       <dgm:prSet/>
       <dgm:spPr/>
       <dgm:t>
@@ -6803,7 +6829,7 @@
         </a:p>
       </dgm:t>
     </dgm:pt>
-    <dgm:pt modelId="{F9592096-19F5-4E09-9EFA-05F78E7718E4}" cxnId="{AF3B50C4-67E8-499E-9B01-7C2E2B65175A}" type="sibTrans">
+    <dgm:pt modelId="{F9592096-19F5-4E09-9EFA-05F78E7718E4}" type="sibTrans" cxnId="{AF3B50C4-67E8-499E-9B01-7C2E2B65175A}">
       <dgm:prSet/>
       <dgm:spPr/>
       <dgm:t>
@@ -6951,94 +6977,108 @@
     </dgm:pt>
   </dgm:ptLst>
   <dgm:cxnLst>
-    <dgm:cxn modelId="{4E8ACE0B-155A-4AAD-9C64-70DA88663C66}" type="presOf" srcId="{DA08743A-A009-40D9-8438-FF0748B49A01}" destId="{8906A31E-01D8-437F-9D0D-E0E89C8116FC}" srcOrd="0" destOrd="0" presId="urn:microsoft.com/office/officeart/2005/8/layout/vList2"/>
+    <dgm:cxn modelId="{4E8ACE0B-155A-4AAD-9C64-70DA88663C66}" type="presOf" srcId="{DA08743A-A009-40D9-8438-FF0748B49A01}" destId="{8906A31E-01D8-437F-9D0D-E0E89C8116FC}" srcOrd="0" destOrd="0" presId="urn:microsoft.com/office/officeart/2005/8/layout/vList2#2"/>
     <dgm:cxn modelId="{84F33A17-2AAD-4B01-9D63-BCED56139407}" srcId="{1CF457D4-5D5F-4520-A01B-BF41AF83AA12}" destId="{32CA0705-BC6F-466F-85AC-93FB16E98490}" srcOrd="4" destOrd="0" parTransId="{ADC1B901-8AC7-497A-AE75-9EC49F5CF8EF}" sibTransId="{F12493FC-ADB0-4711-B412-BB660AFD09AF}"/>
-    <dgm:cxn modelId="{9C6C803E-E752-44FD-BC6B-919C37BFAE01}" type="presOf" srcId="{1632CE38-41EA-49B6-A0FC-78B325016DAD}" destId="{F83FB398-B7FF-4F92-9DD6-5849D890C810}" srcOrd="0" destOrd="0" presId="urn:microsoft.com/office/officeart/2005/8/layout/vList2"/>
-    <dgm:cxn modelId="{2DE14B3F-5919-4152-AC36-E5012769488B}" type="presOf" srcId="{FCCAAD8A-C72F-42C4-A91F-6DCA91978713}" destId="{E0989815-11E7-4828-A62D-E7E89D52D67E}" srcOrd="0" destOrd="0" presId="urn:microsoft.com/office/officeart/2005/8/layout/vList2"/>
+    <dgm:cxn modelId="{9C6C803E-E752-44FD-BC6B-919C37BFAE01}" type="presOf" srcId="{1632CE38-41EA-49B6-A0FC-78B325016DAD}" destId="{F83FB398-B7FF-4F92-9DD6-5849D890C810}" srcOrd="0" destOrd="0" presId="urn:microsoft.com/office/officeart/2005/8/layout/vList2#2"/>
+    <dgm:cxn modelId="{2DE14B3F-5919-4152-AC36-E5012769488B}" type="presOf" srcId="{FCCAAD8A-C72F-42C4-A91F-6DCA91978713}" destId="{E0989815-11E7-4828-A62D-E7E89D52D67E}" srcOrd="0" destOrd="0" presId="urn:microsoft.com/office/officeart/2005/8/layout/vList2#2"/>
     <dgm:cxn modelId="{A5E09D40-C386-4E9A-8173-114F7078F2AF}" srcId="{1CF457D4-5D5F-4520-A01B-BF41AF83AA12}" destId="{DA08743A-A009-40D9-8438-FF0748B49A01}" srcOrd="1" destOrd="0" parTransId="{C4460A08-5BB8-4845-B55B-C054B9B6F54F}" sibTransId="{81C457C6-C51E-423D-B48C-57D0907C39A6}"/>
     <dgm:cxn modelId="{3677EF41-D9F9-483B-B62F-A6CAB472D4D5}" srcId="{1CF457D4-5D5F-4520-A01B-BF41AF83AA12}" destId="{54BDDF8A-E298-42D4-9CFA-0CF658683106}" srcOrd="7" destOrd="0" parTransId="{695A29EB-F930-4124-A677-22F69FEBA617}" sibTransId="{164B0E34-DD87-445F-8A53-4A152005AFCC}"/>
-    <dgm:cxn modelId="{4CAF7745-F569-4EDE-B0A4-DBCD024C8BB8}" type="presOf" srcId="{54BDDF8A-E298-42D4-9CFA-0CF658683106}" destId="{F4436A3B-E174-46B2-9517-A5972D7C0F59}" srcOrd="0" destOrd="0" presId="urn:microsoft.com/office/officeart/2005/8/layout/vList2"/>
+    <dgm:cxn modelId="{4CAF7745-F569-4EDE-B0A4-DBCD024C8BB8}" type="presOf" srcId="{54BDDF8A-E298-42D4-9CFA-0CF658683106}" destId="{F4436A3B-E174-46B2-9517-A5972D7C0F59}" srcOrd="0" destOrd="0" presId="urn:microsoft.com/office/officeart/2005/8/layout/vList2#2"/>
     <dgm:cxn modelId="{B460B851-711B-4430-A761-614A96EF9B96}" srcId="{1CF457D4-5D5F-4520-A01B-BF41AF83AA12}" destId="{FCCAAD8A-C72F-42C4-A91F-6DCA91978713}" srcOrd="2" destOrd="0" parTransId="{0E8ED937-857B-4A36-BE8B-2854F86C0F1F}" sibTransId="{F4D62477-08C4-4BB5-91C8-77FE23232A39}"/>
-    <dgm:cxn modelId="{FFDB1E83-A574-4360-8CD4-5A8A911CE981}" type="presOf" srcId="{AD2FB5FA-E343-4DEA-A65B-4C2598D8B141}" destId="{123528CB-3533-4298-B339-DCDF90B45B22}" srcOrd="0" destOrd="0" presId="urn:microsoft.com/office/officeart/2005/8/layout/vList2"/>
-    <dgm:cxn modelId="{C331C08B-0F73-4F4F-9ECC-65D3275AC788}" type="presOf" srcId="{4976DB94-6BFA-4952-B285-DDCAB62B70CD}" destId="{A3D24CB8-A71C-48E0-82C7-F2EE2D8263C5}" srcOrd="0" destOrd="0" presId="urn:microsoft.com/office/officeart/2005/8/layout/vList2"/>
-    <dgm:cxn modelId="{13B6AD8D-DF99-49D8-BD3F-7EBF6A1628F3}" type="presOf" srcId="{5554E373-0BD0-4077-8682-D04D5B81BC5D}" destId="{EE8B5FE4-DE05-4CB5-A6EE-A4113A339AF8}" srcOrd="0" destOrd="0" presId="urn:microsoft.com/office/officeart/2005/8/layout/vList2"/>
+    <dgm:cxn modelId="{FFDB1E83-A574-4360-8CD4-5A8A911CE981}" type="presOf" srcId="{AD2FB5FA-E343-4DEA-A65B-4C2598D8B141}" destId="{123528CB-3533-4298-B339-DCDF90B45B22}" srcOrd="0" destOrd="0" presId="urn:microsoft.com/office/officeart/2005/8/layout/vList2#2"/>
+    <dgm:cxn modelId="{C331C08B-0F73-4F4F-9ECC-65D3275AC788}" type="presOf" srcId="{4976DB94-6BFA-4952-B285-DDCAB62B70CD}" destId="{A3D24CB8-A71C-48E0-82C7-F2EE2D8263C5}" srcOrd="0" destOrd="0" presId="urn:microsoft.com/office/officeart/2005/8/layout/vList2#2"/>
+    <dgm:cxn modelId="{13B6AD8D-DF99-49D8-BD3F-7EBF6A1628F3}" type="presOf" srcId="{5554E373-0BD0-4077-8682-D04D5B81BC5D}" destId="{EE8B5FE4-DE05-4CB5-A6EE-A4113A339AF8}" srcOrd="0" destOrd="0" presId="urn:microsoft.com/office/officeart/2005/8/layout/vList2#2"/>
     <dgm:cxn modelId="{3868ACAA-4E81-4B3D-8293-A89425CB813B}" srcId="{1CF457D4-5D5F-4520-A01B-BF41AF83AA12}" destId="{9F4D1ACA-7B49-46B8-A5D3-A4EF0C2C5E85}" srcOrd="3" destOrd="0" parTransId="{932AB516-2F0F-4C81-A30E-617475E44260}" sibTransId="{7F360EB0-D393-496D-AAF4-CB53A9CB9607}"/>
-    <dgm:cxn modelId="{467DD5B5-45D4-4134-B893-54659BDFBBCE}" type="presOf" srcId="{32CA0705-BC6F-466F-85AC-93FB16E98490}" destId="{196DEF08-E55A-4CE8-8B76-0E9B2BADA155}" srcOrd="0" destOrd="0" presId="urn:microsoft.com/office/officeart/2005/8/layout/vList2"/>
+    <dgm:cxn modelId="{467DD5B5-45D4-4134-B893-54659BDFBBCE}" type="presOf" srcId="{32CA0705-BC6F-466F-85AC-93FB16E98490}" destId="{196DEF08-E55A-4CE8-8B76-0E9B2BADA155}" srcOrd="0" destOrd="0" presId="urn:microsoft.com/office/officeart/2005/8/layout/vList2#2"/>
     <dgm:cxn modelId="{D5ADFDB6-3ECD-41BD-B905-D110C90BC98B}" srcId="{1CF457D4-5D5F-4520-A01B-BF41AF83AA12}" destId="{AD2FB5FA-E343-4DEA-A65B-4C2598D8B141}" srcOrd="6" destOrd="0" parTransId="{8106D28A-9150-4A38-9AE7-50E983863028}" sibTransId="{C44A23A4-4E1E-4A7A-8451-3D4189274CC9}"/>
-    <dgm:cxn modelId="{85E980C1-9DB1-4B32-96D7-ACD09D2DCBEA}" type="presOf" srcId="{1CF457D4-5D5F-4520-A01B-BF41AF83AA12}" destId="{CD48B197-DB9D-40B6-8367-2AAC7BB69A4C}" srcOrd="0" destOrd="0" presId="urn:microsoft.com/office/officeart/2005/8/layout/vList2"/>
+    <dgm:cxn modelId="{85E980C1-9DB1-4B32-96D7-ACD09D2DCBEA}" type="presOf" srcId="{1CF457D4-5D5F-4520-A01B-BF41AF83AA12}" destId="{CD48B197-DB9D-40B6-8367-2AAC7BB69A4C}" srcOrd="0" destOrd="0" presId="urn:microsoft.com/office/officeart/2005/8/layout/vList2#2"/>
     <dgm:cxn modelId="{16075EC3-F7F5-4C75-807A-4342728FB4D0}" srcId="{1CF457D4-5D5F-4520-A01B-BF41AF83AA12}" destId="{488E14E5-272A-49D9-89A7-AFE002F6D22D}" srcOrd="8" destOrd="0" parTransId="{F86FAE34-127A-450B-AD54-1314F474A165}" sibTransId="{700B23BF-E86E-4876-9621-89A63584E2CC}"/>
     <dgm:cxn modelId="{AF3B50C4-67E8-499E-9B01-7C2E2B65175A}" srcId="{1CF457D4-5D5F-4520-A01B-BF41AF83AA12}" destId="{1632CE38-41EA-49B6-A0FC-78B325016DAD}" srcOrd="9" destOrd="0" parTransId="{AA780B94-2EDC-4FEF-98E5-48F4BD60B7CA}" sibTransId="{F9592096-19F5-4E09-9EFA-05F78E7718E4}"/>
-    <dgm:cxn modelId="{2F46F9DE-8B63-4B77-865C-CEB2F695FC4A}" type="presOf" srcId="{488E14E5-272A-49D9-89A7-AFE002F6D22D}" destId="{93CD74BD-1CA4-4A14-A489-B09E5F623D52}" srcOrd="0" destOrd="0" presId="urn:microsoft.com/office/officeart/2005/8/layout/vList2"/>
-    <dgm:cxn modelId="{A26873DF-1CCC-43DC-BBEA-5DBAD701807B}" type="presOf" srcId="{9F4D1ACA-7B49-46B8-A5D3-A4EF0C2C5E85}" destId="{6D6D350E-2EBF-4E91-8399-41B3E990AE05}" srcOrd="0" destOrd="0" presId="urn:microsoft.com/office/officeart/2005/8/layout/vList2"/>
+    <dgm:cxn modelId="{2F46F9DE-8B63-4B77-865C-CEB2F695FC4A}" type="presOf" srcId="{488E14E5-272A-49D9-89A7-AFE002F6D22D}" destId="{93CD74BD-1CA4-4A14-A489-B09E5F623D52}" srcOrd="0" destOrd="0" presId="urn:microsoft.com/office/officeart/2005/8/layout/vList2#2"/>
+    <dgm:cxn modelId="{A26873DF-1CCC-43DC-BBEA-5DBAD701807B}" type="presOf" srcId="{9F4D1ACA-7B49-46B8-A5D3-A4EF0C2C5E85}" destId="{6D6D350E-2EBF-4E91-8399-41B3E990AE05}" srcOrd="0" destOrd="0" presId="urn:microsoft.com/office/officeart/2005/8/layout/vList2#2"/>
     <dgm:cxn modelId="{8769E9E7-A037-4DC4-BD8D-361B8556D6C7}" srcId="{1CF457D4-5D5F-4520-A01B-BF41AF83AA12}" destId="{4976DB94-6BFA-4952-B285-DDCAB62B70CD}" srcOrd="5" destOrd="0" parTransId="{F4463590-EF46-4F04-A6CA-A5CACE8C2155}" sibTransId="{EA0C8204-9EF0-41F3-901C-7B06DB3DC720}"/>
     <dgm:cxn modelId="{51A7C1EE-3C20-4A96-9B24-E7E1448CBF37}" srcId="{1CF457D4-5D5F-4520-A01B-BF41AF83AA12}" destId="{5554E373-0BD0-4077-8682-D04D5B81BC5D}" srcOrd="0" destOrd="0" parTransId="{4FC33FF4-34D9-4489-B1E9-A89DEBAE9E6E}" sibTransId="{DD1F815E-60DC-4F3A-936B-E23FCD182D12}"/>
-    <dgm:cxn modelId="{D76CB42C-103C-47D5-8D23-05C8DFB1A3F8}" type="presParOf" srcId="{CD48B197-DB9D-40B6-8367-2AAC7BB69A4C}" destId="{EE8B5FE4-DE05-4CB5-A6EE-A4113A339AF8}" srcOrd="0" destOrd="0" presId="urn:microsoft.com/office/officeart/2005/8/layout/vList2"/>
-    <dgm:cxn modelId="{04EB1486-2B90-471C-A7BB-74639B194C2B}" type="presParOf" srcId="{CD48B197-DB9D-40B6-8367-2AAC7BB69A4C}" destId="{41695D84-805E-4760-821E-0C0C368203D7}" srcOrd="1" destOrd="0" presId="urn:microsoft.com/office/officeart/2005/8/layout/vList2"/>
-    <dgm:cxn modelId="{424AD85C-1588-4598-8B63-7B0665B579DA}" type="presParOf" srcId="{CD48B197-DB9D-40B6-8367-2AAC7BB69A4C}" destId="{8906A31E-01D8-437F-9D0D-E0E89C8116FC}" srcOrd="2" destOrd="0" presId="urn:microsoft.com/office/officeart/2005/8/layout/vList2"/>
-    <dgm:cxn modelId="{EEEC6C85-A0A7-4702-8273-C8A3A0D7101F}" type="presParOf" srcId="{CD48B197-DB9D-40B6-8367-2AAC7BB69A4C}" destId="{33765572-2D9C-4F4D-8209-DB8631D2BFB4}" srcOrd="3" destOrd="0" presId="urn:microsoft.com/office/officeart/2005/8/layout/vList2"/>
-    <dgm:cxn modelId="{E24B6E8B-92D6-4BFA-AF47-114F63FB500B}" type="presParOf" srcId="{CD48B197-DB9D-40B6-8367-2AAC7BB69A4C}" destId="{E0989815-11E7-4828-A62D-E7E89D52D67E}" srcOrd="4" destOrd="0" presId="urn:microsoft.com/office/officeart/2005/8/layout/vList2"/>
-    <dgm:cxn modelId="{16F990CE-C469-49C3-B434-8ABD1689AB8E}" type="presParOf" srcId="{CD48B197-DB9D-40B6-8367-2AAC7BB69A4C}" destId="{D7C717D9-9C14-426E-8A1D-78D6C83003FB}" srcOrd="5" destOrd="0" presId="urn:microsoft.com/office/officeart/2005/8/layout/vList2"/>
-    <dgm:cxn modelId="{12E33374-5984-4912-A150-455432EDDD16}" type="presParOf" srcId="{CD48B197-DB9D-40B6-8367-2AAC7BB69A4C}" destId="{6D6D350E-2EBF-4E91-8399-41B3E990AE05}" srcOrd="6" destOrd="0" presId="urn:microsoft.com/office/officeart/2005/8/layout/vList2"/>
-    <dgm:cxn modelId="{415B1748-D229-4151-96D5-1BF48F297998}" type="presParOf" srcId="{CD48B197-DB9D-40B6-8367-2AAC7BB69A4C}" destId="{43202B67-F804-4641-9AB3-63A6832CC00A}" srcOrd="7" destOrd="0" presId="urn:microsoft.com/office/officeart/2005/8/layout/vList2"/>
-    <dgm:cxn modelId="{6BA9080B-908C-4CEC-99AD-2C961B0366E7}" type="presParOf" srcId="{CD48B197-DB9D-40B6-8367-2AAC7BB69A4C}" destId="{196DEF08-E55A-4CE8-8B76-0E9B2BADA155}" srcOrd="8" destOrd="0" presId="urn:microsoft.com/office/officeart/2005/8/layout/vList2"/>
-    <dgm:cxn modelId="{0960E6B3-F104-4F1D-8F98-5A5C0FF8023C}" type="presParOf" srcId="{CD48B197-DB9D-40B6-8367-2AAC7BB69A4C}" destId="{2ED031EB-3BE7-4A3E-862A-A966F24D3CAD}" srcOrd="9" destOrd="0" presId="urn:microsoft.com/office/officeart/2005/8/layout/vList2"/>
-    <dgm:cxn modelId="{15FFFC26-C7C0-44AE-8B22-89F6808DA9A3}" type="presParOf" srcId="{CD48B197-DB9D-40B6-8367-2AAC7BB69A4C}" destId="{A3D24CB8-A71C-48E0-82C7-F2EE2D8263C5}" srcOrd="10" destOrd="0" presId="urn:microsoft.com/office/officeart/2005/8/layout/vList2"/>
-    <dgm:cxn modelId="{ACF887E7-9E15-4592-9ADE-4A586F530E03}" type="presParOf" srcId="{CD48B197-DB9D-40B6-8367-2AAC7BB69A4C}" destId="{188476CE-8D1A-435C-9F56-27B99E16CE12}" srcOrd="11" destOrd="0" presId="urn:microsoft.com/office/officeart/2005/8/layout/vList2"/>
-    <dgm:cxn modelId="{D573B3E8-E36C-4408-B274-5F6BFBF539D0}" type="presParOf" srcId="{CD48B197-DB9D-40B6-8367-2AAC7BB69A4C}" destId="{123528CB-3533-4298-B339-DCDF90B45B22}" srcOrd="12" destOrd="0" presId="urn:microsoft.com/office/officeart/2005/8/layout/vList2"/>
-    <dgm:cxn modelId="{D5C79243-B929-47B4-A951-946427EC96B6}" type="presParOf" srcId="{CD48B197-DB9D-40B6-8367-2AAC7BB69A4C}" destId="{FE6F3B1B-F745-433F-8DEA-88E554CF3F14}" srcOrd="13" destOrd="0" presId="urn:microsoft.com/office/officeart/2005/8/layout/vList2"/>
-    <dgm:cxn modelId="{EEB07C58-3BFE-4762-B190-09D8E1ADA0A9}" type="presParOf" srcId="{CD48B197-DB9D-40B6-8367-2AAC7BB69A4C}" destId="{F4436A3B-E174-46B2-9517-A5972D7C0F59}" srcOrd="14" destOrd="0" presId="urn:microsoft.com/office/officeart/2005/8/layout/vList2"/>
-    <dgm:cxn modelId="{1FCAAF11-1259-4135-B48E-5FFED05BEA9D}" type="presParOf" srcId="{CD48B197-DB9D-40B6-8367-2AAC7BB69A4C}" destId="{5455ADB9-5753-4AA5-AB82-FB3C78365657}" srcOrd="15" destOrd="0" presId="urn:microsoft.com/office/officeart/2005/8/layout/vList2"/>
-    <dgm:cxn modelId="{E980C17F-EA0D-41AF-9255-52B1B58217E9}" type="presParOf" srcId="{CD48B197-DB9D-40B6-8367-2AAC7BB69A4C}" destId="{93CD74BD-1CA4-4A14-A489-B09E5F623D52}" srcOrd="16" destOrd="0" presId="urn:microsoft.com/office/officeart/2005/8/layout/vList2"/>
-    <dgm:cxn modelId="{1FC7FA4D-5C9A-4C3A-9E3E-A487927355DE}" type="presParOf" srcId="{CD48B197-DB9D-40B6-8367-2AAC7BB69A4C}" destId="{C861A55F-C0FC-4AAC-B487-1C59F075A3C0}" srcOrd="17" destOrd="0" presId="urn:microsoft.com/office/officeart/2005/8/layout/vList2"/>
-    <dgm:cxn modelId="{500B3911-9830-4ABA-B45C-9C2E7B459550}" type="presParOf" srcId="{CD48B197-DB9D-40B6-8367-2AAC7BB69A4C}" destId="{F83FB398-B7FF-4F92-9DD6-5849D890C810}" srcOrd="18" destOrd="0" presId="urn:microsoft.com/office/officeart/2005/8/layout/vList2"/>
+    <dgm:cxn modelId="{D76CB42C-103C-47D5-8D23-05C8DFB1A3F8}" type="presParOf" srcId="{CD48B197-DB9D-40B6-8367-2AAC7BB69A4C}" destId="{EE8B5FE4-DE05-4CB5-A6EE-A4113A339AF8}" srcOrd="0" destOrd="0" presId="urn:microsoft.com/office/officeart/2005/8/layout/vList2#2"/>
+    <dgm:cxn modelId="{04EB1486-2B90-471C-A7BB-74639B194C2B}" type="presParOf" srcId="{CD48B197-DB9D-40B6-8367-2AAC7BB69A4C}" destId="{41695D84-805E-4760-821E-0C0C368203D7}" srcOrd="1" destOrd="0" presId="urn:microsoft.com/office/officeart/2005/8/layout/vList2#2"/>
+    <dgm:cxn modelId="{424AD85C-1588-4598-8B63-7B0665B579DA}" type="presParOf" srcId="{CD48B197-DB9D-40B6-8367-2AAC7BB69A4C}" destId="{8906A31E-01D8-437F-9D0D-E0E89C8116FC}" srcOrd="2" destOrd="0" presId="urn:microsoft.com/office/officeart/2005/8/layout/vList2#2"/>
+    <dgm:cxn modelId="{EEEC6C85-A0A7-4702-8273-C8A3A0D7101F}" type="presParOf" srcId="{CD48B197-DB9D-40B6-8367-2AAC7BB69A4C}" destId="{33765572-2D9C-4F4D-8209-DB8631D2BFB4}" srcOrd="3" destOrd="0" presId="urn:microsoft.com/office/officeart/2005/8/layout/vList2#2"/>
+    <dgm:cxn modelId="{E24B6E8B-92D6-4BFA-AF47-114F63FB500B}" type="presParOf" srcId="{CD48B197-DB9D-40B6-8367-2AAC7BB69A4C}" destId="{E0989815-11E7-4828-A62D-E7E89D52D67E}" srcOrd="4" destOrd="0" presId="urn:microsoft.com/office/officeart/2005/8/layout/vList2#2"/>
+    <dgm:cxn modelId="{16F990CE-C469-49C3-B434-8ABD1689AB8E}" type="presParOf" srcId="{CD48B197-DB9D-40B6-8367-2AAC7BB69A4C}" destId="{D7C717D9-9C14-426E-8A1D-78D6C83003FB}" srcOrd="5" destOrd="0" presId="urn:microsoft.com/office/officeart/2005/8/layout/vList2#2"/>
+    <dgm:cxn modelId="{12E33374-5984-4912-A150-455432EDDD16}" type="presParOf" srcId="{CD48B197-DB9D-40B6-8367-2AAC7BB69A4C}" destId="{6D6D350E-2EBF-4E91-8399-41B3E990AE05}" srcOrd="6" destOrd="0" presId="urn:microsoft.com/office/officeart/2005/8/layout/vList2#2"/>
+    <dgm:cxn modelId="{415B1748-D229-4151-96D5-1BF48F297998}" type="presParOf" srcId="{CD48B197-DB9D-40B6-8367-2AAC7BB69A4C}" destId="{43202B67-F804-4641-9AB3-63A6832CC00A}" srcOrd="7" destOrd="0" presId="urn:microsoft.com/office/officeart/2005/8/layout/vList2#2"/>
+    <dgm:cxn modelId="{6BA9080B-908C-4CEC-99AD-2C961B0366E7}" type="presParOf" srcId="{CD48B197-DB9D-40B6-8367-2AAC7BB69A4C}" destId="{196DEF08-E55A-4CE8-8B76-0E9B2BADA155}" srcOrd="8" destOrd="0" presId="urn:microsoft.com/office/officeart/2005/8/layout/vList2#2"/>
+    <dgm:cxn modelId="{0960E6B3-F104-4F1D-8F98-5A5C0FF8023C}" type="presParOf" srcId="{CD48B197-DB9D-40B6-8367-2AAC7BB69A4C}" destId="{2ED031EB-3BE7-4A3E-862A-A966F24D3CAD}" srcOrd="9" destOrd="0" presId="urn:microsoft.com/office/officeart/2005/8/layout/vList2#2"/>
+    <dgm:cxn modelId="{15FFFC26-C7C0-44AE-8B22-89F6808DA9A3}" type="presParOf" srcId="{CD48B197-DB9D-40B6-8367-2AAC7BB69A4C}" destId="{A3D24CB8-A71C-48E0-82C7-F2EE2D8263C5}" srcOrd="10" destOrd="0" presId="urn:microsoft.com/office/officeart/2005/8/layout/vList2#2"/>
+    <dgm:cxn modelId="{ACF887E7-9E15-4592-9ADE-4A586F530E03}" type="presParOf" srcId="{CD48B197-DB9D-40B6-8367-2AAC7BB69A4C}" destId="{188476CE-8D1A-435C-9F56-27B99E16CE12}" srcOrd="11" destOrd="0" presId="urn:microsoft.com/office/officeart/2005/8/layout/vList2#2"/>
+    <dgm:cxn modelId="{D573B3E8-E36C-4408-B274-5F6BFBF539D0}" type="presParOf" srcId="{CD48B197-DB9D-40B6-8367-2AAC7BB69A4C}" destId="{123528CB-3533-4298-B339-DCDF90B45B22}" srcOrd="12" destOrd="0" presId="urn:microsoft.com/office/officeart/2005/8/layout/vList2#2"/>
+    <dgm:cxn modelId="{D5C79243-B929-47B4-A951-946427EC96B6}" type="presParOf" srcId="{CD48B197-DB9D-40B6-8367-2AAC7BB69A4C}" destId="{FE6F3B1B-F745-433F-8DEA-88E554CF3F14}" srcOrd="13" destOrd="0" presId="urn:microsoft.com/office/officeart/2005/8/layout/vList2#2"/>
+    <dgm:cxn modelId="{EEB07C58-3BFE-4762-B190-09D8E1ADA0A9}" type="presParOf" srcId="{CD48B197-DB9D-40B6-8367-2AAC7BB69A4C}" destId="{F4436A3B-E174-46B2-9517-A5972D7C0F59}" srcOrd="14" destOrd="0" presId="urn:microsoft.com/office/officeart/2005/8/layout/vList2#2"/>
+    <dgm:cxn modelId="{1FCAAF11-1259-4135-B48E-5FFED05BEA9D}" type="presParOf" srcId="{CD48B197-DB9D-40B6-8367-2AAC7BB69A4C}" destId="{5455ADB9-5753-4AA5-AB82-FB3C78365657}" srcOrd="15" destOrd="0" presId="urn:microsoft.com/office/officeart/2005/8/layout/vList2#2"/>
+    <dgm:cxn modelId="{E980C17F-EA0D-41AF-9255-52B1B58217E9}" type="presParOf" srcId="{CD48B197-DB9D-40B6-8367-2AAC7BB69A4C}" destId="{93CD74BD-1CA4-4A14-A489-B09E5F623D52}" srcOrd="16" destOrd="0" presId="urn:microsoft.com/office/officeart/2005/8/layout/vList2#2"/>
+    <dgm:cxn modelId="{1FC7FA4D-5C9A-4C3A-9E3E-A487927355DE}" type="presParOf" srcId="{CD48B197-DB9D-40B6-8367-2AAC7BB69A4C}" destId="{C861A55F-C0FC-4AAC-B487-1C59F075A3C0}" srcOrd="17" destOrd="0" presId="urn:microsoft.com/office/officeart/2005/8/layout/vList2#2"/>
+    <dgm:cxn modelId="{500B3911-9830-4ABA-B45C-9C2E7B459550}" type="presParOf" srcId="{CD48B197-DB9D-40B6-8367-2AAC7BB69A4C}" destId="{F83FB398-B7FF-4F92-9DD6-5849D890C810}" srcOrd="18" destOrd="0" presId="urn:microsoft.com/office/officeart/2005/8/layout/vList2#2"/>
   </dgm:cxnLst>
   <dgm:bg/>
   <dgm:whole/>
   <dgm:extLst>
     <a:ext uri="http://schemas.microsoft.com/office/drawing/2008/diagram">
-      <dsp:dataModelExt xmlns:dsp="http://schemas.microsoft.com/office/drawing/2008/diagram" relId="rId5" minVer="http://schemas.openxmlformats.org/drawingml/2006/diagram"/>
+      <dsp:dataModelExt xmlns:dsp="http://schemas.microsoft.com/office/drawing/2008/diagram" relId="rId6" minVer="http://schemas.openxmlformats.org/drawingml/2006/diagram"/>
     </a:ext>
   </dgm:extLst>
 </dgm:dataModel>
 </file>
 
 <file path=ppt/diagrams/drawing1.xml><?xml version="1.0" encoding="utf-8"?>
-<dsp:drawing xmlns:dgm="http://schemas.openxmlformats.org/drawingml/2006/diagram" xmlns:dsp="http://schemas.microsoft.com/office/drawing/2008/diagram" xmlns:a="http://schemas.openxmlformats.org/drawingml/2006/main" xmlns:r="http://schemas.openxmlformats.org/officeDocument/2006/relationships">
+<dsp:drawing xmlns:dgm="http://schemas.openxmlformats.org/drawingml/2006/diagram" xmlns:dsp="http://schemas.microsoft.com/office/drawing/2008/diagram" xmlns:a="http://schemas.openxmlformats.org/drawingml/2006/main">
   <dsp:spTree>
     <dsp:nvGrpSpPr>
-      <dsp:cNvPr id="2" name="Group 1"/>
+      <dsp:cNvPr id="0" name=""/>
       <dsp:cNvGrpSpPr/>
     </dsp:nvGrpSpPr>
-    <dsp:grpSpPr>
-      <a:xfrm>
-        <a:off x="0" y="0"/>
-        <a:ext cx="5769224" cy="3759434"/>
-        <a:chOff x="0" y="0"/>
-        <a:chExt cx="5769224" cy="3759434"/>
-      </a:xfrm>
-    </dsp:grpSpPr>
+    <dsp:grpSpPr/>
     <dsp:sp modelId="{06F812D9-200B-4F96-B54B-B928BFB32A3D}">
       <dsp:nvSpPr>
-        <dsp:cNvPr id="3" name="Rounded Rectangle 2"/>
+        <dsp:cNvPr id="0" name=""/>
         <dsp:cNvSpPr/>
       </dsp:nvSpPr>
-      <dsp:spPr bwMode="white">
+      <dsp:spPr>
         <a:xfrm>
-          <a:off x="0" y="964196"/>
-          <a:ext cx="2472525" cy="1570053"/>
+          <a:off x="704" y="964419"/>
+          <a:ext cx="2471920" cy="1569669"/>
         </a:xfrm>
         <a:prstGeom prst="roundRect">
           <a:avLst>
             <a:gd name="adj" fmla="val 10000"/>
           </a:avLst>
         </a:prstGeom>
+        <a:solidFill>
+          <a:schemeClr val="accent1">
+            <a:hueOff val="0"/>
+            <a:satOff val="0"/>
+            <a:lumOff val="0"/>
+            <a:alphaOff val="0"/>
+          </a:schemeClr>
+        </a:solidFill>
+        <a:ln w="12700" cap="flat" cmpd="sng" algn="ctr">
+          <a:solidFill>
+            <a:schemeClr val="lt1">
+              <a:hueOff val="0"/>
+              <a:satOff val="0"/>
+              <a:lumOff val="0"/>
+              <a:alphaOff val="0"/>
+            </a:schemeClr>
+          </a:solidFill>
+          <a:prstDash val="solid"/>
+          <a:miter lim="800000"/>
+        </a:ln>
+        <a:effectLst/>
       </dsp:spPr>
       <dsp:style>
         <a:lnRef idx="2">
-          <a:schemeClr val="lt1"/>
+          <a:scrgbClr r="0" g="0" b="0"/>
         </a:lnRef>
         <a:fillRef idx="1">
-          <a:schemeClr val="accent1"/>
+          <a:scrgbClr r="0" g="0" b="0"/>
         </a:fillRef>
         <a:effectRef idx="0">
           <a:scrgbClr r="0" g="0" b="0"/>
@@ -7047,35 +7087,51 @@
           <a:schemeClr val="lt1"/>
         </a:fontRef>
       </dsp:style>
-      <dsp:txXfrm>
-        <a:off x="0" y="964196"/>
-        <a:ext cx="2472525" cy="1570053"/>
-      </dsp:txXfrm>
     </dsp:sp>
     <dsp:sp modelId="{3B1AD05F-F088-48C1-ABAC-BC0CF832F62B}">
       <dsp:nvSpPr>
-        <dsp:cNvPr id="4" name="Rounded Rectangle 3"/>
+        <dsp:cNvPr id="0" name=""/>
         <dsp:cNvSpPr/>
       </dsp:nvSpPr>
       <dsp:spPr bwMode="white">
         <a:xfrm>
-          <a:off x="274725" y="1225185"/>
-          <a:ext cx="2472525" cy="1570053"/>
+          <a:off x="275362" y="1225344"/>
+          <a:ext cx="2471920" cy="1569669"/>
         </a:xfrm>
         <a:prstGeom prst="roundRect">
           <a:avLst>
             <a:gd name="adj" fmla="val 10000"/>
           </a:avLst>
         </a:prstGeom>
+        <a:solidFill>
+          <a:schemeClr val="lt1">
+            <a:alpha val="90000"/>
+            <a:hueOff val="0"/>
+            <a:satOff val="0"/>
+            <a:lumOff val="0"/>
+            <a:alphaOff val="0"/>
+          </a:schemeClr>
+        </a:solidFill>
+        <a:ln w="12700" cap="flat" cmpd="sng" algn="ctr">
+          <a:solidFill>
+            <a:schemeClr val="accent1">
+              <a:hueOff val="0"/>
+              <a:satOff val="0"/>
+              <a:lumOff val="0"/>
+              <a:alphaOff val="0"/>
+            </a:schemeClr>
+          </a:solidFill>
+          <a:prstDash val="solid"/>
+          <a:miter lim="800000"/>
+        </a:ln>
+        <a:effectLst/>
       </dsp:spPr>
       <dsp:style>
         <a:lnRef idx="2">
-          <a:schemeClr val="accent1"/>
+          <a:scrgbClr r="0" g="0" b="0"/>
         </a:lnRef>
         <a:fillRef idx="1">
-          <a:schemeClr val="lt1">
-            <a:alpha val="90000"/>
-          </a:schemeClr>
+          <a:scrgbClr r="0" g="0" b="0"/>
         </a:fillRef>
         <a:effectRef idx="0">
           <a:scrgbClr r="0" g="0" b="0"/>
@@ -7083,40 +7139,14 @@
         <a:fontRef idx="minor"/>
       </dsp:style>
       <dsp:txBody>
-        <a:bodyPr lIns="133350" tIns="133350" rIns="133350" bIns="133350" anchor="ctr"/>
-        <a:lstStyle>
-          <a:lvl1pPr algn="ctr">
-            <a:defRPr sz="3500"/>
-          </a:lvl1pPr>
-          <a:lvl2pPr marL="228600" indent="-228600" algn="ctr">
-            <a:defRPr sz="2700"/>
-          </a:lvl2pPr>
-          <a:lvl3pPr marL="457200" indent="-228600" algn="ctr">
-            <a:defRPr sz="2700"/>
-          </a:lvl3pPr>
-          <a:lvl4pPr marL="685800" indent="-228600" algn="ctr">
-            <a:defRPr sz="2700"/>
-          </a:lvl4pPr>
-          <a:lvl5pPr marL="914400" indent="-228600" algn="ctr">
-            <a:defRPr sz="2700"/>
-          </a:lvl5pPr>
-          <a:lvl6pPr marL="1143000" indent="-228600" algn="ctr">
-            <a:defRPr sz="2700"/>
-          </a:lvl6pPr>
-          <a:lvl7pPr marL="1371600" indent="-228600" algn="ctr">
-            <a:defRPr sz="2700"/>
-          </a:lvl7pPr>
-          <a:lvl8pPr marL="1600200" indent="-228600" algn="ctr">
-            <a:defRPr sz="2700"/>
-          </a:lvl8pPr>
-          <a:lvl9pPr marL="1828800" indent="-228600" algn="ctr">
-            <a:defRPr sz="2700"/>
-          </a:lvl9pPr>
-        </a:lstStyle>
+        <a:bodyPr spcFirstLastPara="0" vert="horz" wrap="square" lIns="133350" tIns="133350" rIns="133350" bIns="133350" numCol="1" spcCol="1270" anchor="ctr" anchorCtr="0">
+          <a:noAutofit/>
+        </a:bodyPr>
+        <a:lstStyle/>
         <a:p>
-          <a:pPr lvl="0">
+          <a:pPr marL="0" lvl="0" indent="0" algn="ctr" defTabSz="1555750">
             <a:lnSpc>
-              <a:spcPct val="100000"/>
+              <a:spcPct val="90000"/>
             </a:lnSpc>
             <a:spcBef>
               <a:spcPct val="0"/>
@@ -7124,49 +7154,62 @@
             <a:spcAft>
               <a:spcPct val="35000"/>
             </a:spcAft>
+            <a:buNone/>
           </a:pPr>
           <a:r>
-            <a:rPr lang="en-US">
-              <a:solidFill>
-                <a:schemeClr val="dk1"/>
-              </a:solidFill>
-            </a:rPr>
+            <a:rPr lang="en-US" sz="3500" kern="1200"/>
             <a:t>Notepad</a:t>
           </a:r>
-          <a:endParaRPr>
-            <a:solidFill>
-              <a:schemeClr val="dk1"/>
-            </a:solidFill>
-          </a:endParaRPr>
         </a:p>
       </dsp:txBody>
       <dsp:txXfrm>
-        <a:off x="274725" y="1225185"/>
-        <a:ext cx="2472525" cy="1570053"/>
+        <a:off x="321336" y="1271318"/>
+        <a:ext cx="2379972" cy="1477721"/>
       </dsp:txXfrm>
     </dsp:sp>
     <dsp:sp modelId="{AD2BFD88-D60F-4A3F-A288-680EC0E1B39F}">
       <dsp:nvSpPr>
-        <dsp:cNvPr id="5" name="Rounded Rectangle 4"/>
+        <dsp:cNvPr id="0" name=""/>
         <dsp:cNvSpPr/>
       </dsp:nvSpPr>
-      <dsp:spPr bwMode="white">
+      <dsp:spPr>
         <a:xfrm>
-          <a:off x="3021974" y="964196"/>
-          <a:ext cx="2472525" cy="1570053"/>
+          <a:off x="3021940" y="964419"/>
+          <a:ext cx="2471920" cy="1569669"/>
         </a:xfrm>
         <a:prstGeom prst="roundRect">
           <a:avLst>
             <a:gd name="adj" fmla="val 10000"/>
           </a:avLst>
         </a:prstGeom>
+        <a:solidFill>
+          <a:schemeClr val="accent1">
+            <a:hueOff val="0"/>
+            <a:satOff val="0"/>
+            <a:lumOff val="0"/>
+            <a:alphaOff val="0"/>
+          </a:schemeClr>
+        </a:solidFill>
+        <a:ln w="12700" cap="flat" cmpd="sng" algn="ctr">
+          <a:solidFill>
+            <a:schemeClr val="lt1">
+              <a:hueOff val="0"/>
+              <a:satOff val="0"/>
+              <a:lumOff val="0"/>
+              <a:alphaOff val="0"/>
+            </a:schemeClr>
+          </a:solidFill>
+          <a:prstDash val="solid"/>
+          <a:miter lim="800000"/>
+        </a:ln>
+        <a:effectLst/>
       </dsp:spPr>
       <dsp:style>
         <a:lnRef idx="2">
-          <a:schemeClr val="lt1"/>
+          <a:scrgbClr r="0" g="0" b="0"/>
         </a:lnRef>
         <a:fillRef idx="1">
-          <a:schemeClr val="accent1"/>
+          <a:scrgbClr r="0" g="0" b="0"/>
         </a:fillRef>
         <a:effectRef idx="0">
           <a:scrgbClr r="0" g="0" b="0"/>
@@ -7175,35 +7218,51 @@
           <a:schemeClr val="lt1"/>
         </a:fontRef>
       </dsp:style>
-      <dsp:txXfrm>
-        <a:off x="3021974" y="964196"/>
-        <a:ext cx="2472525" cy="1570053"/>
-      </dsp:txXfrm>
     </dsp:sp>
     <dsp:sp modelId="{FD99FD76-C729-421F-9BD3-2B4AD54A7C48}">
       <dsp:nvSpPr>
-        <dsp:cNvPr id="6" name="Rounded Rectangle 5"/>
+        <dsp:cNvPr id="0" name=""/>
         <dsp:cNvSpPr/>
       </dsp:nvSpPr>
       <dsp:spPr bwMode="white">
         <a:xfrm>
-          <a:off x="3296699" y="1225185"/>
-          <a:ext cx="2472525" cy="1570053"/>
+          <a:off x="3296598" y="1225344"/>
+          <a:ext cx="2471920" cy="1569669"/>
         </a:xfrm>
         <a:prstGeom prst="roundRect">
           <a:avLst>
             <a:gd name="adj" fmla="val 10000"/>
           </a:avLst>
         </a:prstGeom>
+        <a:solidFill>
+          <a:schemeClr val="lt1">
+            <a:alpha val="90000"/>
+            <a:hueOff val="0"/>
+            <a:satOff val="0"/>
+            <a:lumOff val="0"/>
+            <a:alphaOff val="0"/>
+          </a:schemeClr>
+        </a:solidFill>
+        <a:ln w="12700" cap="flat" cmpd="sng" algn="ctr">
+          <a:solidFill>
+            <a:schemeClr val="accent1">
+              <a:hueOff val="0"/>
+              <a:satOff val="0"/>
+              <a:lumOff val="0"/>
+              <a:alphaOff val="0"/>
+            </a:schemeClr>
+          </a:solidFill>
+          <a:prstDash val="solid"/>
+          <a:miter lim="800000"/>
+        </a:ln>
+        <a:effectLst/>
       </dsp:spPr>
       <dsp:style>
         <a:lnRef idx="2">
-          <a:schemeClr val="accent1"/>
+          <a:scrgbClr r="0" g="0" b="0"/>
         </a:lnRef>
         <a:fillRef idx="1">
-          <a:schemeClr val="lt1">
-            <a:alpha val="90000"/>
-          </a:schemeClr>
+          <a:scrgbClr r="0" g="0" b="0"/>
         </a:fillRef>
         <a:effectRef idx="0">
           <a:scrgbClr r="0" g="0" b="0"/>
@@ -7211,40 +7270,14 @@
         <a:fontRef idx="minor"/>
       </dsp:style>
       <dsp:txBody>
-        <a:bodyPr lIns="133350" tIns="133350" rIns="133350" bIns="133350" anchor="ctr"/>
-        <a:lstStyle>
-          <a:lvl1pPr algn="ctr">
-            <a:defRPr sz="3500"/>
-          </a:lvl1pPr>
-          <a:lvl2pPr marL="228600" indent="-228600" algn="ctr">
-            <a:defRPr sz="2700"/>
-          </a:lvl2pPr>
-          <a:lvl3pPr marL="457200" indent="-228600" algn="ctr">
-            <a:defRPr sz="2700"/>
-          </a:lvl3pPr>
-          <a:lvl4pPr marL="685800" indent="-228600" algn="ctr">
-            <a:defRPr sz="2700"/>
-          </a:lvl4pPr>
-          <a:lvl5pPr marL="914400" indent="-228600" algn="ctr">
-            <a:defRPr sz="2700"/>
-          </a:lvl5pPr>
-          <a:lvl6pPr marL="1143000" indent="-228600" algn="ctr">
-            <a:defRPr sz="2700"/>
-          </a:lvl6pPr>
-          <a:lvl7pPr marL="1371600" indent="-228600" algn="ctr">
-            <a:defRPr sz="2700"/>
-          </a:lvl7pPr>
-          <a:lvl8pPr marL="1600200" indent="-228600" algn="ctr">
-            <a:defRPr sz="2700"/>
-          </a:lvl8pPr>
-          <a:lvl9pPr marL="1828800" indent="-228600" algn="ctr">
-            <a:defRPr sz="2700"/>
-          </a:lvl9pPr>
-        </a:lstStyle>
+        <a:bodyPr spcFirstLastPara="0" vert="horz" wrap="square" lIns="133350" tIns="133350" rIns="133350" bIns="133350" numCol="1" spcCol="1270" anchor="ctr" anchorCtr="0">
+          <a:noAutofit/>
+        </a:bodyPr>
+        <a:lstStyle/>
         <a:p>
-          <a:pPr lvl="0">
+          <a:pPr marL="0" lvl="0" indent="0" algn="ctr" defTabSz="1555750">
             <a:lnSpc>
-              <a:spcPct val="100000"/>
+              <a:spcPct val="90000"/>
             </a:lnSpc>
             <a:spcBef>
               <a:spcPct val="0"/>
@@ -7252,25 +7285,17 @@
             <a:spcAft>
               <a:spcPct val="35000"/>
             </a:spcAft>
+            <a:buNone/>
           </a:pPr>
           <a:r>
-            <a:rPr lang="en-US">
-              <a:solidFill>
-                <a:schemeClr val="dk1"/>
-              </a:solidFill>
-            </a:rPr>
+            <a:rPr lang="en-US" sz="3500" kern="1200"/>
             <a:t>Visual Studio .NET</a:t>
           </a:r>
-          <a:endParaRPr>
-            <a:solidFill>
-              <a:schemeClr val="dk1"/>
-            </a:solidFill>
-          </a:endParaRPr>
         </a:p>
       </dsp:txBody>
       <dsp:txXfrm>
-        <a:off x="3296699" y="1225185"/>
-        <a:ext cx="2472525" cy="1570053"/>
+        <a:off x="3342572" y="1271318"/>
+        <a:ext cx="2379972" cy="1477721"/>
       </dsp:txXfrm>
     </dsp:sp>
   </dsp:spTree>
@@ -7278,40 +7303,54 @@
 </file>
 
 <file path=ppt/diagrams/drawing2.xml><?xml version="1.0" encoding="utf-8"?>
-<dsp:drawing xmlns:dgm="http://schemas.openxmlformats.org/drawingml/2006/diagram" xmlns:dsp="http://schemas.microsoft.com/office/drawing/2008/diagram" xmlns:a="http://schemas.openxmlformats.org/drawingml/2006/main" xmlns:r="http://schemas.openxmlformats.org/officeDocument/2006/relationships">
+<dsp:drawing xmlns:dgm="http://schemas.openxmlformats.org/drawingml/2006/diagram" xmlns:dsp="http://schemas.microsoft.com/office/drawing/2008/diagram" xmlns:a="http://schemas.openxmlformats.org/drawingml/2006/main">
   <dsp:spTree>
     <dsp:nvGrpSpPr>
-      <dsp:cNvPr id="2" name="Group 1"/>
+      <dsp:cNvPr id="0" name=""/>
       <dsp:cNvGrpSpPr/>
     </dsp:nvGrpSpPr>
-    <dsp:grpSpPr>
-      <a:xfrm>
-        <a:off x="0" y="0"/>
-        <a:ext cx="10515600" cy="4352544"/>
-        <a:chOff x="0" y="0"/>
-        <a:chExt cx="10515600" cy="4352544"/>
-      </a:xfrm>
-    </dsp:grpSpPr>
+    <dsp:grpSpPr/>
     <dsp:sp modelId="{AAC018E5-2DA9-46F7-B114-5D708CB92E35}">
       <dsp:nvSpPr>
-        <dsp:cNvPr id="3" name="Rounded Rectangle 2"/>
+        <dsp:cNvPr id="0" name=""/>
         <dsp:cNvSpPr/>
       </dsp:nvSpPr>
       <dsp:spPr bwMode="white">
         <a:xfrm>
-          <a:off x="0" y="855569"/>
-          <a:ext cx="10515600" cy="484505"/>
+          <a:off x="0" y="74814"/>
+          <a:ext cx="10515600" cy="794503"/>
         </a:xfrm>
         <a:prstGeom prst="roundRect">
           <a:avLst/>
         </a:prstGeom>
+        <a:solidFill>
+          <a:schemeClr val="accent4">
+            <a:hueOff val="0"/>
+            <a:satOff val="0"/>
+            <a:lumOff val="0"/>
+            <a:alphaOff val="0"/>
+          </a:schemeClr>
+        </a:solidFill>
+        <a:ln w="12700" cap="flat" cmpd="sng" algn="ctr">
+          <a:solidFill>
+            <a:schemeClr val="lt1">
+              <a:hueOff val="0"/>
+              <a:satOff val="0"/>
+              <a:lumOff val="0"/>
+              <a:alphaOff val="0"/>
+            </a:schemeClr>
+          </a:solidFill>
+          <a:prstDash val="solid"/>
+          <a:miter lim="800000"/>
+        </a:ln>
+        <a:effectLst/>
       </dsp:spPr>
       <dsp:style>
         <a:lnRef idx="2">
-          <a:schemeClr val="lt1"/>
+          <a:scrgbClr r="0" g="0" b="0"/>
         </a:lnRef>
         <a:fillRef idx="1">
-          <a:schemeClr val="accent4"/>
+          <a:scrgbClr r="0" g="0" b="0"/>
         </a:fillRef>
         <a:effectRef idx="0">
           <a:scrgbClr r="0" g="0" b="0"/>
@@ -7321,40 +7360,14 @@
         </a:fontRef>
       </dsp:style>
       <dsp:txBody>
-        <a:bodyPr lIns="72390" tIns="72390" rIns="72390" bIns="72390" anchor="ctr"/>
-        <a:lstStyle>
-          <a:lvl1pPr algn="l">
-            <a:defRPr sz="1900"/>
-          </a:lvl1pPr>
-          <a:lvl2pPr marL="114300" indent="-114300" algn="l">
-            <a:defRPr sz="1400"/>
-          </a:lvl2pPr>
-          <a:lvl3pPr marL="228600" indent="-114300" algn="l">
-            <a:defRPr sz="1400"/>
-          </a:lvl3pPr>
-          <a:lvl4pPr marL="342900" indent="-114300" algn="l">
-            <a:defRPr sz="1400"/>
-          </a:lvl4pPr>
-          <a:lvl5pPr marL="457200" indent="-114300" algn="l">
-            <a:defRPr sz="1400"/>
-          </a:lvl5pPr>
-          <a:lvl6pPr marL="571500" indent="-114300" algn="l">
-            <a:defRPr sz="1400"/>
-          </a:lvl6pPr>
-          <a:lvl7pPr marL="685800" indent="-114300" algn="l">
-            <a:defRPr sz="1400"/>
-          </a:lvl7pPr>
-          <a:lvl8pPr marL="800100" indent="-114300" algn="l">
-            <a:defRPr sz="1400"/>
-          </a:lvl8pPr>
-          <a:lvl9pPr marL="914400" indent="-114300" algn="l">
-            <a:defRPr sz="1400"/>
-          </a:lvl9pPr>
-        </a:lstStyle>
+        <a:bodyPr spcFirstLastPara="0" vert="horz" wrap="square" lIns="76200" tIns="76200" rIns="76200" bIns="76200" numCol="1" spcCol="1270" anchor="ctr" anchorCtr="0">
+          <a:noAutofit/>
+        </a:bodyPr>
+        <a:lstStyle/>
         <a:p>
-          <a:pPr lvl="0">
+          <a:pPr marL="0" lvl="0" indent="0" algn="l" defTabSz="889000">
             <a:lnSpc>
-              <a:spcPct val="100000"/>
+              <a:spcPct val="90000"/>
             </a:lnSpc>
             <a:spcBef>
               <a:spcPct val="0"/>
@@ -7362,38 +7375,60 @@
             <a:spcAft>
               <a:spcPct val="35000"/>
             </a:spcAft>
+            <a:buNone/>
           </a:pPr>
           <a:r>
-            <a:rPr lang="en-US"/>
+            <a:rPr lang="en-US" sz="2000" kern="1200"/>
             <a:t>Class Library:- Creates a project for creating classes that can be used in other applications.</a:t>
           </a:r>
         </a:p>
       </dsp:txBody>
       <dsp:txXfrm>
-        <a:off x="0" y="855569"/>
-        <a:ext cx="10515600" cy="484505"/>
+        <a:off x="38784" y="113598"/>
+        <a:ext cx="10438032" cy="716935"/>
       </dsp:txXfrm>
     </dsp:sp>
     <dsp:sp modelId="{82B9378C-E2BA-4C2A-BEBE-F9794C051F6B}">
       <dsp:nvSpPr>
-        <dsp:cNvPr id="4" name="Rounded Rectangle 3"/>
+        <dsp:cNvPr id="0" name=""/>
         <dsp:cNvSpPr/>
       </dsp:nvSpPr>
       <dsp:spPr bwMode="white">
         <a:xfrm>
-          <a:off x="0" y="1394795"/>
-          <a:ext cx="10515600" cy="484505"/>
+          <a:off x="0" y="926917"/>
+          <a:ext cx="10515600" cy="794503"/>
         </a:xfrm>
         <a:prstGeom prst="roundRect">
           <a:avLst/>
         </a:prstGeom>
+        <a:solidFill>
+          <a:schemeClr val="accent4">
+            <a:hueOff val="0"/>
+            <a:satOff val="0"/>
+            <a:lumOff val="0"/>
+            <a:alphaOff val="0"/>
+          </a:schemeClr>
+        </a:solidFill>
+        <a:ln w="12700" cap="flat" cmpd="sng" algn="ctr">
+          <a:solidFill>
+            <a:schemeClr val="lt1">
+              <a:hueOff val="0"/>
+              <a:satOff val="0"/>
+              <a:lumOff val="0"/>
+              <a:alphaOff val="0"/>
+            </a:schemeClr>
+          </a:solidFill>
+          <a:prstDash val="solid"/>
+          <a:miter lim="800000"/>
+        </a:ln>
+        <a:effectLst/>
       </dsp:spPr>
       <dsp:style>
         <a:lnRef idx="2">
-          <a:schemeClr val="lt1"/>
+          <a:scrgbClr r="0" g="0" b="0"/>
         </a:lnRef>
         <a:fillRef idx="1">
-          <a:schemeClr val="accent4"/>
+          <a:scrgbClr r="0" g="0" b="0"/>
         </a:fillRef>
         <a:effectRef idx="0">
           <a:scrgbClr r="0" g="0" b="0"/>
@@ -7403,40 +7438,14 @@
         </a:fontRef>
       </dsp:style>
       <dsp:txBody>
-        <a:bodyPr lIns="72390" tIns="72390" rIns="72390" bIns="72390" anchor="ctr"/>
-        <a:lstStyle>
-          <a:lvl1pPr algn="l">
-            <a:defRPr sz="1900"/>
-          </a:lvl1pPr>
-          <a:lvl2pPr marL="114300" indent="-114300" algn="l">
-            <a:defRPr sz="1400"/>
-          </a:lvl2pPr>
-          <a:lvl3pPr marL="228600" indent="-114300" algn="l">
-            <a:defRPr sz="1400"/>
-          </a:lvl3pPr>
-          <a:lvl4pPr marL="342900" indent="-114300" algn="l">
-            <a:defRPr sz="1400"/>
-          </a:lvl4pPr>
-          <a:lvl5pPr marL="457200" indent="-114300" algn="l">
-            <a:defRPr sz="1400"/>
-          </a:lvl5pPr>
-          <a:lvl6pPr marL="571500" indent="-114300" algn="l">
-            <a:defRPr sz="1400"/>
-          </a:lvl6pPr>
-          <a:lvl7pPr marL="685800" indent="-114300" algn="l">
-            <a:defRPr sz="1400"/>
-          </a:lvl7pPr>
-          <a:lvl8pPr marL="800100" indent="-114300" algn="l">
-            <a:defRPr sz="1400"/>
-          </a:lvl8pPr>
-          <a:lvl9pPr marL="914400" indent="-114300" algn="l">
-            <a:defRPr sz="1400"/>
-          </a:lvl9pPr>
-        </a:lstStyle>
+        <a:bodyPr spcFirstLastPara="0" vert="horz" wrap="square" lIns="76200" tIns="76200" rIns="76200" bIns="76200" numCol="1" spcCol="1270" anchor="ctr" anchorCtr="0">
+          <a:noAutofit/>
+        </a:bodyPr>
+        <a:lstStyle/>
         <a:p>
-          <a:pPr lvl="0">
+          <a:pPr marL="0" lvl="0" indent="0" algn="l" defTabSz="889000">
             <a:lnSpc>
-              <a:spcPct val="100000"/>
+              <a:spcPct val="90000"/>
             </a:lnSpc>
             <a:spcBef>
               <a:spcPct val="0"/>
@@ -7444,38 +7453,60 @@
             <a:spcAft>
               <a:spcPct val="35000"/>
             </a:spcAft>
+            <a:buNone/>
           </a:pPr>
           <a:r>
-            <a:rPr lang="en-US"/>
+            <a:rPr lang="en-US" sz="2000" kern="1200"/>
             <a:t>Console Application:- Creates a Visual C# application with a command-line interface.</a:t>
           </a:r>
         </a:p>
       </dsp:txBody>
       <dsp:txXfrm>
-        <a:off x="0" y="1394795"/>
-        <a:ext cx="10515600" cy="484505"/>
+        <a:off x="38784" y="965701"/>
+        <a:ext cx="10438032" cy="716935"/>
       </dsp:txXfrm>
     </dsp:sp>
     <dsp:sp modelId="{D48F633E-C89C-4BE1-AE92-A20CAA7CAB33}">
       <dsp:nvSpPr>
-        <dsp:cNvPr id="5" name="Rounded Rectangle 4"/>
+        <dsp:cNvPr id="0" name=""/>
         <dsp:cNvSpPr/>
       </dsp:nvSpPr>
       <dsp:spPr bwMode="white">
         <a:xfrm>
-          <a:off x="0" y="1934020"/>
-          <a:ext cx="10515600" cy="484505"/>
+          <a:off x="0" y="1779020"/>
+          <a:ext cx="10515600" cy="794503"/>
         </a:xfrm>
         <a:prstGeom prst="roundRect">
           <a:avLst/>
         </a:prstGeom>
+        <a:solidFill>
+          <a:schemeClr val="accent4">
+            <a:hueOff val="0"/>
+            <a:satOff val="0"/>
+            <a:lumOff val="0"/>
+            <a:alphaOff val="0"/>
+          </a:schemeClr>
+        </a:solidFill>
+        <a:ln w="12700" cap="flat" cmpd="sng" algn="ctr">
+          <a:solidFill>
+            <a:schemeClr val="lt1">
+              <a:hueOff val="0"/>
+              <a:satOff val="0"/>
+              <a:lumOff val="0"/>
+              <a:alphaOff val="0"/>
+            </a:schemeClr>
+          </a:solidFill>
+          <a:prstDash val="solid"/>
+          <a:miter lim="800000"/>
+        </a:ln>
+        <a:effectLst/>
       </dsp:spPr>
       <dsp:style>
         <a:lnRef idx="2">
-          <a:schemeClr val="lt1"/>
+          <a:scrgbClr r="0" g="0" b="0"/>
         </a:lnRef>
         <a:fillRef idx="1">
-          <a:schemeClr val="accent4"/>
+          <a:scrgbClr r="0" g="0" b="0"/>
         </a:fillRef>
         <a:effectRef idx="0">
           <a:scrgbClr r="0" g="0" b="0"/>
@@ -7485,40 +7516,14 @@
         </a:fontRef>
       </dsp:style>
       <dsp:txBody>
-        <a:bodyPr lIns="72390" tIns="72390" rIns="72390" bIns="72390" anchor="ctr"/>
-        <a:lstStyle>
-          <a:lvl1pPr algn="l">
-            <a:defRPr sz="1900"/>
-          </a:lvl1pPr>
-          <a:lvl2pPr marL="114300" indent="-114300" algn="l">
-            <a:defRPr sz="1400"/>
-          </a:lvl2pPr>
-          <a:lvl3pPr marL="228600" indent="-114300" algn="l">
-            <a:defRPr sz="1400"/>
-          </a:lvl3pPr>
-          <a:lvl4pPr marL="342900" indent="-114300" algn="l">
-            <a:defRPr sz="1400"/>
-          </a:lvl4pPr>
-          <a:lvl5pPr marL="457200" indent="-114300" algn="l">
-            <a:defRPr sz="1400"/>
-          </a:lvl5pPr>
-          <a:lvl6pPr marL="571500" indent="-114300" algn="l">
-            <a:defRPr sz="1400"/>
-          </a:lvl6pPr>
-          <a:lvl7pPr marL="685800" indent="-114300" algn="l">
-            <a:defRPr sz="1400"/>
-          </a:lvl7pPr>
-          <a:lvl8pPr marL="800100" indent="-114300" algn="l">
-            <a:defRPr sz="1400"/>
-          </a:lvl8pPr>
-          <a:lvl9pPr marL="914400" indent="-114300" algn="l">
-            <a:defRPr sz="1400"/>
-          </a:lvl9pPr>
-        </a:lstStyle>
+        <a:bodyPr spcFirstLastPara="0" vert="horz" wrap="square" lIns="76200" tIns="76200" rIns="76200" bIns="76200" numCol="1" spcCol="1270" anchor="ctr" anchorCtr="0">
+          <a:noAutofit/>
+        </a:bodyPr>
+        <a:lstStyle/>
         <a:p>
-          <a:pPr lvl="0">
+          <a:pPr marL="0" lvl="0" indent="0" algn="l" defTabSz="889000">
             <a:lnSpc>
-              <a:spcPct val="100000"/>
+              <a:spcPct val="90000"/>
             </a:lnSpc>
             <a:spcBef>
               <a:spcPct val="0"/>
@@ -7526,42 +7531,64 @@
             <a:spcAft>
               <a:spcPct val="35000"/>
             </a:spcAft>
+            <a:buNone/>
           </a:pPr>
           <a:r>
-            <a:rPr lang="en-US" err="1"/>
+            <a:rPr lang="en-US" sz="2000" kern="1200" err="1"/>
             <a:t>Asp.Net</a:t>
           </a:r>
           <a:r>
-            <a:rPr lang="en-US"/>
+            <a:rPr lang="en-US" sz="2000" kern="1200"/>
             <a:t> Web Application:- Creates a Visual C# application with a Web user interface.</a:t>
           </a:r>
         </a:p>
       </dsp:txBody>
       <dsp:txXfrm>
-        <a:off x="0" y="1934020"/>
-        <a:ext cx="10515600" cy="484505"/>
+        <a:off x="38784" y="1817804"/>
+        <a:ext cx="10438032" cy="716935"/>
       </dsp:txXfrm>
     </dsp:sp>
     <dsp:sp modelId="{5985FA55-D32D-45DB-9B7C-FD1E35061EAD}">
       <dsp:nvSpPr>
-        <dsp:cNvPr id="6" name="Rounded Rectangle 5"/>
+        <dsp:cNvPr id="0" name=""/>
         <dsp:cNvSpPr/>
       </dsp:nvSpPr>
       <dsp:spPr bwMode="white">
         <a:xfrm>
-          <a:off x="0" y="2473245"/>
-          <a:ext cx="10515600" cy="484505"/>
+          <a:off x="0" y="2631123"/>
+          <a:ext cx="10515600" cy="794503"/>
         </a:xfrm>
         <a:prstGeom prst="roundRect">
           <a:avLst/>
         </a:prstGeom>
+        <a:solidFill>
+          <a:schemeClr val="accent4">
+            <a:hueOff val="0"/>
+            <a:satOff val="0"/>
+            <a:lumOff val="0"/>
+            <a:alphaOff val="0"/>
+          </a:schemeClr>
+        </a:solidFill>
+        <a:ln w="12700" cap="flat" cmpd="sng" algn="ctr">
+          <a:solidFill>
+            <a:schemeClr val="lt1">
+              <a:hueOff val="0"/>
+              <a:satOff val="0"/>
+              <a:lumOff val="0"/>
+              <a:alphaOff val="0"/>
+            </a:schemeClr>
+          </a:solidFill>
+          <a:prstDash val="solid"/>
+          <a:miter lim="800000"/>
+        </a:ln>
+        <a:effectLst/>
       </dsp:spPr>
       <dsp:style>
         <a:lnRef idx="2">
-          <a:schemeClr val="lt1"/>
+          <a:scrgbClr r="0" g="0" b="0"/>
         </a:lnRef>
         <a:fillRef idx="1">
-          <a:schemeClr val="accent4"/>
+          <a:scrgbClr r="0" g="0" b="0"/>
         </a:fillRef>
         <a:effectRef idx="0">
           <a:scrgbClr r="0" g="0" b="0"/>
@@ -7571,40 +7598,14 @@
         </a:fontRef>
       </dsp:style>
       <dsp:txBody>
-        <a:bodyPr lIns="72390" tIns="72390" rIns="72390" bIns="72390" anchor="ctr"/>
-        <a:lstStyle>
-          <a:lvl1pPr algn="l">
-            <a:defRPr sz="1900"/>
-          </a:lvl1pPr>
-          <a:lvl2pPr marL="114300" indent="-114300" algn="l">
-            <a:defRPr sz="1400"/>
-          </a:lvl2pPr>
-          <a:lvl3pPr marL="228600" indent="-114300" algn="l">
-            <a:defRPr sz="1400"/>
-          </a:lvl3pPr>
-          <a:lvl4pPr marL="342900" indent="-114300" algn="l">
-            <a:defRPr sz="1400"/>
-          </a:lvl4pPr>
-          <a:lvl5pPr marL="457200" indent="-114300" algn="l">
-            <a:defRPr sz="1400"/>
-          </a:lvl5pPr>
-          <a:lvl6pPr marL="571500" indent="-114300" algn="l">
-            <a:defRPr sz="1400"/>
-          </a:lvl6pPr>
-          <a:lvl7pPr marL="685800" indent="-114300" algn="l">
-            <a:defRPr sz="1400"/>
-          </a:lvl7pPr>
-          <a:lvl8pPr marL="800100" indent="-114300" algn="l">
-            <a:defRPr sz="1400"/>
-          </a:lvl8pPr>
-          <a:lvl9pPr marL="914400" indent="-114300" algn="l">
-            <a:defRPr sz="1400"/>
-          </a:lvl9pPr>
-        </a:lstStyle>
+        <a:bodyPr spcFirstLastPara="0" vert="horz" wrap="square" lIns="76200" tIns="76200" rIns="76200" bIns="76200" numCol="1" spcCol="1270" anchor="ctr" anchorCtr="0">
+          <a:noAutofit/>
+        </a:bodyPr>
+        <a:lstStyle/>
         <a:p>
-          <a:pPr lvl="0">
+          <a:pPr marL="0" lvl="0" indent="0" algn="l" defTabSz="889000">
             <a:lnSpc>
-              <a:spcPct val="100000"/>
+              <a:spcPct val="90000"/>
             </a:lnSpc>
             <a:spcBef>
               <a:spcPct val="0"/>
@@ -7612,42 +7613,64 @@
             <a:spcAft>
               <a:spcPct val="35000"/>
             </a:spcAft>
+            <a:buNone/>
           </a:pPr>
           <a:r>
-            <a:rPr lang="en-US" err="1"/>
+            <a:rPr lang="en-US" sz="2000" kern="1200" err="1"/>
             <a:t>Asp.Net</a:t>
           </a:r>
           <a:r>
-            <a:rPr lang="en-US"/>
+            <a:rPr lang="en-US" sz="2000" kern="1200"/>
             <a:t> Web Service:- Creates an XML Web service with Visual C# that other applications can access.</a:t>
           </a:r>
         </a:p>
       </dsp:txBody>
       <dsp:txXfrm>
-        <a:off x="0" y="2473245"/>
-        <a:ext cx="10515600" cy="484505"/>
+        <a:off x="38784" y="2669907"/>
+        <a:ext cx="10438032" cy="716935"/>
       </dsp:txXfrm>
     </dsp:sp>
     <dsp:sp modelId="{8985D69E-6F82-4ED5-91F5-67E793476F29}">
       <dsp:nvSpPr>
-        <dsp:cNvPr id="7" name="Rounded Rectangle 6"/>
+        <dsp:cNvPr id="0" name=""/>
         <dsp:cNvSpPr/>
       </dsp:nvSpPr>
       <dsp:spPr bwMode="white">
         <a:xfrm>
-          <a:off x="0" y="3012470"/>
-          <a:ext cx="10515600" cy="484505"/>
+          <a:off x="0" y="3483226"/>
+          <a:ext cx="10515600" cy="794503"/>
         </a:xfrm>
         <a:prstGeom prst="roundRect">
           <a:avLst/>
         </a:prstGeom>
+        <a:solidFill>
+          <a:schemeClr val="accent4">
+            <a:hueOff val="0"/>
+            <a:satOff val="0"/>
+            <a:lumOff val="0"/>
+            <a:alphaOff val="0"/>
+          </a:schemeClr>
+        </a:solidFill>
+        <a:ln w="12700" cap="flat" cmpd="sng" algn="ctr">
+          <a:solidFill>
+            <a:schemeClr val="lt1">
+              <a:hueOff val="0"/>
+              <a:satOff val="0"/>
+              <a:lumOff val="0"/>
+              <a:alphaOff val="0"/>
+            </a:schemeClr>
+          </a:solidFill>
+          <a:prstDash val="solid"/>
+          <a:miter lim="800000"/>
+        </a:ln>
+        <a:effectLst/>
       </dsp:spPr>
       <dsp:style>
         <a:lnRef idx="2">
-          <a:schemeClr val="lt1"/>
+          <a:scrgbClr r="0" g="0" b="0"/>
         </a:lnRef>
         <a:fillRef idx="1">
-          <a:schemeClr val="accent4"/>
+          <a:scrgbClr r="0" g="0" b="0"/>
         </a:fillRef>
         <a:effectRef idx="0">
           <a:scrgbClr r="0" g="0" b="0"/>
@@ -7657,40 +7680,14 @@
         </a:fontRef>
       </dsp:style>
       <dsp:txBody>
-        <a:bodyPr lIns="72390" tIns="72390" rIns="72390" bIns="72390" anchor="ctr"/>
-        <a:lstStyle>
-          <a:lvl1pPr algn="l">
-            <a:defRPr sz="1900"/>
-          </a:lvl1pPr>
-          <a:lvl2pPr marL="114300" indent="-114300" algn="l">
-            <a:defRPr sz="1400"/>
-          </a:lvl2pPr>
-          <a:lvl3pPr marL="228600" indent="-114300" algn="l">
-            <a:defRPr sz="1400"/>
-          </a:lvl3pPr>
-          <a:lvl4pPr marL="342900" indent="-114300" algn="l">
-            <a:defRPr sz="1400"/>
-          </a:lvl4pPr>
-          <a:lvl5pPr marL="457200" indent="-114300" algn="l">
-            <a:defRPr sz="1400"/>
-          </a:lvl5pPr>
-          <a:lvl6pPr marL="571500" indent="-114300" algn="l">
-            <a:defRPr sz="1400"/>
-          </a:lvl6pPr>
-          <a:lvl7pPr marL="685800" indent="-114300" algn="l">
-            <a:defRPr sz="1400"/>
-          </a:lvl7pPr>
-          <a:lvl8pPr marL="800100" indent="-114300" algn="l">
-            <a:defRPr sz="1400"/>
-          </a:lvl8pPr>
-          <a:lvl9pPr marL="914400" indent="-114300" algn="l">
-            <a:defRPr sz="1400"/>
-          </a:lvl9pPr>
-        </a:lstStyle>
+        <a:bodyPr spcFirstLastPara="0" vert="horz" wrap="square" lIns="76200" tIns="76200" rIns="76200" bIns="76200" numCol="1" spcCol="1270" anchor="ctr" anchorCtr="0">
+          <a:noAutofit/>
+        </a:bodyPr>
+        <a:lstStyle/>
         <a:p>
-          <a:pPr lvl="0">
+          <a:pPr marL="0" lvl="0" indent="0" algn="l" defTabSz="889000">
             <a:lnSpc>
-              <a:spcPct val="100000"/>
+              <a:spcPct val="90000"/>
             </a:lnSpc>
             <a:spcBef>
               <a:spcPct val="0"/>
@@ -7698,16 +7695,17 @@
             <a:spcAft>
               <a:spcPct val="35000"/>
             </a:spcAft>
+            <a:buNone/>
           </a:pPr>
           <a:r>
-            <a:rPr lang="en-US"/>
+            <a:rPr lang="en-US" sz="2000" kern="1200"/>
             <a:t>Mobile Application:- Creates an application for  mobile devices.</a:t>
           </a:r>
         </a:p>
       </dsp:txBody>
       <dsp:txXfrm>
-        <a:off x="0" y="3012470"/>
-        <a:ext cx="10515600" cy="484505"/>
+        <a:off x="38784" y="3522010"/>
+        <a:ext cx="10438032" cy="716935"/>
       </dsp:txXfrm>
     </dsp:sp>
   </dsp:spTree>
@@ -7715,40 +7713,54 @@
 </file>
 
 <file path=ppt/diagrams/drawing3.xml><?xml version="1.0" encoding="utf-8"?>
-<dsp:drawing xmlns:dgm="http://schemas.openxmlformats.org/drawingml/2006/diagram" xmlns:dsp="http://schemas.microsoft.com/office/drawing/2008/diagram" xmlns:a="http://schemas.openxmlformats.org/drawingml/2006/main" xmlns:r="http://schemas.openxmlformats.org/officeDocument/2006/relationships">
+<dsp:drawing xmlns:dgm="http://schemas.openxmlformats.org/drawingml/2006/diagram" xmlns:dsp="http://schemas.microsoft.com/office/drawing/2008/diagram" xmlns:a="http://schemas.openxmlformats.org/drawingml/2006/main">
   <dsp:spTree>
     <dsp:nvGrpSpPr>
-      <dsp:cNvPr id="2" name="Group 1"/>
+      <dsp:cNvPr id="0" name=""/>
       <dsp:cNvGrpSpPr/>
     </dsp:nvGrpSpPr>
-    <dsp:grpSpPr>
-      <a:xfrm>
-        <a:off x="0" y="0"/>
-        <a:ext cx="4780416" cy="4480726"/>
-        <a:chOff x="0" y="0"/>
-        <a:chExt cx="4780416" cy="4480726"/>
-      </a:xfrm>
-    </dsp:grpSpPr>
+    <dsp:grpSpPr/>
     <dsp:sp modelId="{BA7CD53A-4E30-45C1-9354-ADC1F53C3D30}">
       <dsp:nvSpPr>
-        <dsp:cNvPr id="3" name="Rounded Rectangle 2"/>
+        <dsp:cNvPr id="0" name=""/>
         <dsp:cNvSpPr/>
       </dsp:nvSpPr>
       <dsp:spPr bwMode="white">
         <a:xfrm>
-          <a:off x="1434051" y="158974"/>
-          <a:ext cx="1912314" cy="1243004"/>
+          <a:off x="1435525" y="159069"/>
+          <a:ext cx="1909365" cy="1241087"/>
         </a:xfrm>
         <a:prstGeom prst="roundRect">
           <a:avLst/>
         </a:prstGeom>
+        <a:solidFill>
+          <a:schemeClr val="accent2">
+            <a:hueOff val="0"/>
+            <a:satOff val="0"/>
+            <a:lumOff val="0"/>
+            <a:alphaOff val="0"/>
+          </a:schemeClr>
+        </a:solidFill>
+        <a:ln w="12700" cap="flat" cmpd="sng" algn="ctr">
+          <a:solidFill>
+            <a:schemeClr val="lt1">
+              <a:hueOff val="0"/>
+              <a:satOff val="0"/>
+              <a:lumOff val="0"/>
+              <a:alphaOff val="0"/>
+            </a:schemeClr>
+          </a:solidFill>
+          <a:prstDash val="solid"/>
+          <a:miter lim="800000"/>
+        </a:ln>
+        <a:effectLst/>
       </dsp:spPr>
       <dsp:style>
         <a:lnRef idx="2">
-          <a:schemeClr val="lt1"/>
+          <a:scrgbClr r="0" g="0" b="0"/>
         </a:lnRef>
         <a:fillRef idx="1">
-          <a:schemeClr val="accent2"/>
+          <a:scrgbClr r="0" g="0" b="0"/>
         </a:fillRef>
         <a:effectRef idx="0">
           <a:scrgbClr r="0" g="0" b="0"/>
@@ -7758,40 +7770,14 @@
         </a:fontRef>
       </dsp:style>
       <dsp:txBody>
-        <a:bodyPr lIns="41910" tIns="41910" rIns="41910" bIns="41910" anchor="ctr"/>
-        <a:lstStyle>
-          <a:lvl1pPr algn="ctr">
-            <a:defRPr sz="1100"/>
-          </a:lvl1pPr>
-          <a:lvl2pPr marL="57150" indent="-57150" algn="ctr">
-            <a:defRPr sz="800"/>
-          </a:lvl2pPr>
-          <a:lvl3pPr marL="114300" indent="-57150" algn="ctr">
-            <a:defRPr sz="800"/>
-          </a:lvl3pPr>
-          <a:lvl4pPr marL="171450" indent="-57150" algn="ctr">
-            <a:defRPr sz="800"/>
-          </a:lvl4pPr>
-          <a:lvl5pPr marL="228600" indent="-57150" algn="ctr">
-            <a:defRPr sz="800"/>
-          </a:lvl5pPr>
-          <a:lvl6pPr marL="285750" indent="-57150" algn="ctr">
-            <a:defRPr sz="800"/>
-          </a:lvl6pPr>
-          <a:lvl7pPr marL="342900" indent="-57150" algn="ctr">
-            <a:defRPr sz="800"/>
-          </a:lvl7pPr>
-          <a:lvl8pPr marL="400050" indent="-57150" algn="ctr">
-            <a:defRPr sz="800"/>
-          </a:lvl8pPr>
-          <a:lvl9pPr marL="457200" indent="-57150" algn="ctr">
-            <a:defRPr sz="800"/>
-          </a:lvl9pPr>
-        </a:lstStyle>
+        <a:bodyPr spcFirstLastPara="0" vert="horz" wrap="square" lIns="45720" tIns="45720" rIns="45720" bIns="45720" numCol="1" spcCol="1270" anchor="ctr" anchorCtr="0">
+          <a:noAutofit/>
+        </a:bodyPr>
+        <a:lstStyle/>
         <a:p>
-          <a:pPr lvl="0">
+          <a:pPr marL="0" lvl="0" indent="0" algn="ctr" defTabSz="533400">
             <a:lnSpc>
-              <a:spcPct val="100000"/>
+              <a:spcPct val="90000"/>
             </a:lnSpc>
             <a:spcBef>
               <a:spcPct val="0"/>
@@ -7799,75 +7785,114 @@
             <a:spcAft>
               <a:spcPct val="35000"/>
             </a:spcAft>
+            <a:buNone/>
           </a:pPr>
           <a:r>
-            <a:rPr lang="en-US"/>
+            <a:rPr lang="en-US" sz="1200" kern="1200"/>
             <a:t>The- source code for a C# program is typically stored in one text files with a file extension of .cs, </a:t>
           </a:r>
         </a:p>
       </dsp:txBody>
       <dsp:txXfrm>
-        <a:off x="1434051" y="158974"/>
-        <a:ext cx="1912314" cy="1243004"/>
+        <a:off x="1496110" y="219654"/>
+        <a:ext cx="1788195" cy="1119917"/>
       </dsp:txXfrm>
     </dsp:sp>
     <dsp:sp modelId="{BD5FB491-1686-43B5-9FCC-E21BBAC0CF9E}">
       <dsp:nvSpPr>
-        <dsp:cNvPr id="4" name="Arc 3"/>
+        <dsp:cNvPr id="0" name=""/>
         <dsp:cNvSpPr/>
       </dsp:nvSpPr>
-      <dsp:spPr bwMode="white">
+      <dsp:spPr>
         <a:xfrm>
-          <a:off x="734308" y="780475"/>
-          <a:ext cx="3311799" cy="3311799"/>
+          <a:off x="733748" y="779613"/>
+          <a:ext cx="3312918" cy="3312918"/>
         </a:xfrm>
-        <a:prstGeom prst="arc">
-          <a:avLst>
-            <a:gd name="adj1" fmla="val 19058883"/>
-            <a:gd name="adj2" fmla="val 21287008"/>
-          </a:avLst>
-        </a:prstGeom>
-        <a:ln>
-          <a:tailEnd type="arrow" w="lg" len="med"/>
+        <a:custGeom>
+          <a:avLst/>
+          <a:gdLst/>
+          <a:ahLst/>
+          <a:cxnLst/>
+          <a:rect l="0" t="0" r="0" b="0"/>
+          <a:pathLst>
+            <a:path>
+              <a:moveTo>
+                <a:pt x="2867894" y="526732"/>
+              </a:moveTo>
+              <a:arcTo wR="1656459" hR="1656459" stAng="19019932" swAng="2303906"/>
+            </a:path>
+          </a:pathLst>
+        </a:custGeom>
+        <a:noFill/>
+        <a:ln w="6350" cap="flat" cmpd="sng" algn="ctr">
+          <a:solidFill>
+            <a:schemeClr val="accent2">
+              <a:hueOff val="0"/>
+              <a:satOff val="0"/>
+              <a:lumOff val="0"/>
+              <a:alphaOff val="0"/>
+            </a:schemeClr>
+          </a:solidFill>
+          <a:prstDash val="solid"/>
+          <a:miter lim="800000"/>
+          <a:tailEnd type="arrow"/>
         </a:ln>
+        <a:effectLst/>
       </dsp:spPr>
       <dsp:style>
         <a:lnRef idx="1">
-          <a:schemeClr val="accent2"/>
+          <a:scrgbClr r="0" g="0" b="0"/>
         </a:lnRef>
         <a:fillRef idx="0">
-          <a:schemeClr val="accent2"/>
+          <a:scrgbClr r="0" g="0" b="0"/>
         </a:fillRef>
         <a:effectRef idx="0">
           <a:scrgbClr r="0" g="0" b="0"/>
         </a:effectRef>
         <a:fontRef idx="minor"/>
       </dsp:style>
-      <dsp:txXfrm>
-        <a:off x="734308" y="780475"/>
-        <a:ext cx="3311799" cy="3311799"/>
-      </dsp:txXfrm>
     </dsp:sp>
     <dsp:sp modelId="{B18B6B1F-D521-48DD-9238-ED72F06E0084}">
       <dsp:nvSpPr>
-        <dsp:cNvPr id="5" name="Rounded Rectangle 4"/>
+        <dsp:cNvPr id="0" name=""/>
         <dsp:cNvSpPr/>
       </dsp:nvSpPr>
       <dsp:spPr bwMode="white">
         <a:xfrm>
-          <a:off x="2868102" y="2642823"/>
-          <a:ext cx="1912314" cy="1243004"/>
+          <a:off x="2870061" y="2643758"/>
+          <a:ext cx="1909365" cy="1241087"/>
         </a:xfrm>
         <a:prstGeom prst="roundRect">
           <a:avLst/>
         </a:prstGeom>
+        <a:solidFill>
+          <a:schemeClr val="accent3">
+            <a:hueOff val="0"/>
+            <a:satOff val="0"/>
+            <a:lumOff val="0"/>
+            <a:alphaOff val="0"/>
+          </a:schemeClr>
+        </a:solidFill>
+        <a:ln w="12700" cap="flat" cmpd="sng" algn="ctr">
+          <a:solidFill>
+            <a:schemeClr val="lt1">
+              <a:hueOff val="0"/>
+              <a:satOff val="0"/>
+              <a:lumOff val="0"/>
+              <a:alphaOff val="0"/>
+            </a:schemeClr>
+          </a:solidFill>
+          <a:prstDash val="solid"/>
+          <a:miter lim="800000"/>
+        </a:ln>
+        <a:effectLst/>
       </dsp:spPr>
       <dsp:style>
         <a:lnRef idx="2">
-          <a:schemeClr val="lt1"/>
+          <a:scrgbClr r="0" g="0" b="0"/>
         </a:lnRef>
         <a:fillRef idx="1">
-          <a:schemeClr val="accent3"/>
+          <a:scrgbClr r="0" g="0" b="0"/>
         </a:fillRef>
         <a:effectRef idx="0">
           <a:scrgbClr r="0" g="0" b="0"/>
@@ -7877,40 +7902,14 @@
         </a:fontRef>
       </dsp:style>
       <dsp:txBody>
-        <a:bodyPr lIns="41910" tIns="41910" rIns="41910" bIns="41910" anchor="ctr"/>
-        <a:lstStyle>
-          <a:lvl1pPr algn="ctr">
-            <a:defRPr sz="1100"/>
-          </a:lvl1pPr>
-          <a:lvl2pPr marL="57150" indent="-57150" algn="ctr">
-            <a:defRPr sz="800"/>
-          </a:lvl2pPr>
-          <a:lvl3pPr marL="114300" indent="-57150" algn="ctr">
-            <a:defRPr sz="800"/>
-          </a:lvl3pPr>
-          <a:lvl4pPr marL="171450" indent="-57150" algn="ctr">
-            <a:defRPr sz="800"/>
-          </a:lvl4pPr>
-          <a:lvl5pPr marL="228600" indent="-57150" algn="ctr">
-            <a:defRPr sz="800"/>
-          </a:lvl5pPr>
-          <a:lvl6pPr marL="285750" indent="-57150" algn="ctr">
-            <a:defRPr sz="800"/>
-          </a:lvl6pPr>
-          <a:lvl7pPr marL="342900" indent="-57150" algn="ctr">
-            <a:defRPr sz="800"/>
-          </a:lvl7pPr>
-          <a:lvl8pPr marL="400050" indent="-57150" algn="ctr">
-            <a:defRPr sz="800"/>
-          </a:lvl8pPr>
-          <a:lvl9pPr marL="457200" indent="-57150" algn="ctr">
-            <a:defRPr sz="800"/>
-          </a:lvl9pPr>
-        </a:lstStyle>
+        <a:bodyPr spcFirstLastPara="0" vert="horz" wrap="square" lIns="45720" tIns="45720" rIns="45720" bIns="45720" numCol="1" spcCol="1270" anchor="ctr" anchorCtr="0">
+          <a:noAutofit/>
+        </a:bodyPr>
+        <a:lstStyle/>
         <a:p>
-          <a:pPr lvl="0">
+          <a:pPr marL="0" lvl="0" indent="0" algn="ctr" defTabSz="533400">
             <a:lnSpc>
-              <a:spcPct val="100000"/>
+              <a:spcPct val="90000"/>
             </a:lnSpc>
             <a:spcBef>
               <a:spcPct val="0"/>
@@ -7918,75 +7917,114 @@
             <a:spcAft>
               <a:spcPct val="35000"/>
             </a:spcAft>
+            <a:buNone/>
           </a:pPr>
           <a:r>
-            <a:rPr lang="en-US"/>
+            <a:rPr lang="en-US" sz="1200" kern="1200"/>
             <a:t>say in welcome.cs.</a:t>
           </a:r>
         </a:p>
       </dsp:txBody>
       <dsp:txXfrm>
-        <a:off x="2868102" y="2642823"/>
-        <a:ext cx="1912314" cy="1243004"/>
+        <a:off x="2930646" y="2704343"/>
+        <a:ext cx="1788195" cy="1119917"/>
       </dsp:txXfrm>
     </dsp:sp>
     <dsp:sp modelId="{9F0FFF29-0972-437D-B4ED-A7FC8DBBF894}">
       <dsp:nvSpPr>
-        <dsp:cNvPr id="6" name="Arc 5"/>
+        <dsp:cNvPr id="0" name=""/>
         <dsp:cNvSpPr/>
       </dsp:nvSpPr>
-      <dsp:spPr bwMode="white">
+      <dsp:spPr>
         <a:xfrm>
-          <a:off x="734308" y="780475"/>
-          <a:ext cx="3311799" cy="3311799"/>
+          <a:off x="733748" y="779613"/>
+          <a:ext cx="3312918" cy="3312918"/>
         </a:xfrm>
-        <a:prstGeom prst="arc">
-          <a:avLst>
-            <a:gd name="adj1" fmla="val 4359008"/>
-            <a:gd name="adj2" fmla="val 6440991"/>
-          </a:avLst>
-        </a:prstGeom>
-        <a:ln>
-          <a:tailEnd type="arrow" w="lg" len="med"/>
+        <a:custGeom>
+          <a:avLst/>
+          <a:gdLst/>
+          <a:ahLst/>
+          <a:cxnLst/>
+          <a:rect l="0" t="0" r="0" b="0"/>
+          <a:pathLst>
+            <a:path>
+              <a:moveTo>
+                <a:pt x="2165278" y="3232835"/>
+              </a:moveTo>
+              <a:arcTo wR="1656459" hR="1656459" stAng="4326665" swAng="2146670"/>
+            </a:path>
+          </a:pathLst>
+        </a:custGeom>
+        <a:noFill/>
+        <a:ln w="6350" cap="flat" cmpd="sng" algn="ctr">
+          <a:solidFill>
+            <a:schemeClr val="accent3">
+              <a:hueOff val="0"/>
+              <a:satOff val="0"/>
+              <a:lumOff val="0"/>
+              <a:alphaOff val="0"/>
+            </a:schemeClr>
+          </a:solidFill>
+          <a:prstDash val="solid"/>
+          <a:miter lim="800000"/>
+          <a:tailEnd type="arrow"/>
         </a:ln>
+        <a:effectLst/>
       </dsp:spPr>
       <dsp:style>
         <a:lnRef idx="1">
-          <a:schemeClr val="accent3"/>
+          <a:scrgbClr r="0" g="0" b="0"/>
         </a:lnRef>
         <a:fillRef idx="0">
-          <a:schemeClr val="accent3"/>
+          <a:scrgbClr r="0" g="0" b="0"/>
         </a:fillRef>
         <a:effectRef idx="0">
           <a:scrgbClr r="0" g="0" b="0"/>
         </a:effectRef>
         <a:fontRef idx="minor"/>
       </dsp:style>
-      <dsp:txXfrm>
-        <a:off x="734308" y="780475"/>
-        <a:ext cx="3311799" cy="3311799"/>
-      </dsp:txXfrm>
     </dsp:sp>
     <dsp:sp modelId="{974FD36F-3A38-4688-8DB1-B1FC086E0431}">
       <dsp:nvSpPr>
-        <dsp:cNvPr id="7" name="Rounded Rectangle 6"/>
+        <dsp:cNvPr id="0" name=""/>
         <dsp:cNvSpPr/>
       </dsp:nvSpPr>
       <dsp:spPr bwMode="white">
         <a:xfrm>
-          <a:off x="0" y="2642823"/>
-          <a:ext cx="1912314" cy="1243004"/>
+          <a:off x="989" y="2643758"/>
+          <a:ext cx="1909365" cy="1241087"/>
         </a:xfrm>
         <a:prstGeom prst="roundRect">
           <a:avLst/>
         </a:prstGeom>
+        <a:solidFill>
+          <a:schemeClr val="accent4">
+            <a:hueOff val="0"/>
+            <a:satOff val="0"/>
+            <a:lumOff val="0"/>
+            <a:alphaOff val="0"/>
+          </a:schemeClr>
+        </a:solidFill>
+        <a:ln w="12700" cap="flat" cmpd="sng" algn="ctr">
+          <a:solidFill>
+            <a:schemeClr val="lt1">
+              <a:hueOff val="0"/>
+              <a:satOff val="0"/>
+              <a:lumOff val="0"/>
+              <a:alphaOff val="0"/>
+            </a:schemeClr>
+          </a:solidFill>
+          <a:prstDash val="solid"/>
+          <a:miter lim="800000"/>
+        </a:ln>
+        <a:effectLst/>
       </dsp:spPr>
       <dsp:style>
         <a:lnRef idx="2">
-          <a:schemeClr val="lt1"/>
+          <a:scrgbClr r="0" g="0" b="0"/>
         </a:lnRef>
         <a:fillRef idx="1">
-          <a:schemeClr val="accent4"/>
+          <a:scrgbClr r="0" g="0" b="0"/>
         </a:fillRef>
         <a:effectRef idx="0">
           <a:scrgbClr r="0" g="0" b="0"/>
@@ -7996,40 +8034,14 @@
         </a:fontRef>
       </dsp:style>
       <dsp:txBody>
-        <a:bodyPr lIns="41910" tIns="41910" rIns="41910" bIns="41910" anchor="t"/>
-        <a:lstStyle>
-          <a:lvl1pPr algn="l">
-            <a:defRPr sz="1100"/>
-          </a:lvl1pPr>
-          <a:lvl2pPr marL="57150" indent="-57150" algn="l">
-            <a:defRPr sz="800"/>
-          </a:lvl2pPr>
-          <a:lvl3pPr marL="114300" indent="-57150" algn="l">
-            <a:defRPr sz="800"/>
-          </a:lvl3pPr>
-          <a:lvl4pPr marL="171450" indent="-57150" algn="l">
-            <a:defRPr sz="800"/>
-          </a:lvl4pPr>
-          <a:lvl5pPr marL="228600" indent="-57150" algn="l">
-            <a:defRPr sz="800"/>
-          </a:lvl5pPr>
-          <a:lvl6pPr marL="285750" indent="-57150" algn="l">
-            <a:defRPr sz="800"/>
-          </a:lvl6pPr>
-          <a:lvl7pPr marL="342900" indent="-57150" algn="l">
-            <a:defRPr sz="800"/>
-          </a:lvl7pPr>
-          <a:lvl8pPr marL="400050" indent="-57150" algn="l">
-            <a:defRPr sz="800"/>
-          </a:lvl8pPr>
-          <a:lvl9pPr marL="457200" indent="-57150" algn="l">
-            <a:defRPr sz="800"/>
-          </a:lvl9pPr>
-        </a:lstStyle>
+        <a:bodyPr spcFirstLastPara="0" vert="horz" wrap="square" lIns="45720" tIns="45720" rIns="45720" bIns="45720" numCol="1" spcCol="1270" anchor="t" anchorCtr="0">
+          <a:noAutofit/>
+        </a:bodyPr>
+        <a:lstStyle/>
         <a:p>
-          <a:pPr lvl="0">
+          <a:pPr marL="0" lvl="0" indent="0" algn="l" defTabSz="533400">
             <a:lnSpc>
-              <a:spcPct val="100000"/>
+              <a:spcPct val="90000"/>
             </a:lnSpc>
             <a:spcBef>
               <a:spcPct val="0"/>
@@ -8037,17 +8049,17 @@
             <a:spcAft>
               <a:spcPct val="35000"/>
             </a:spcAft>
+            <a:buNone/>
           </a:pPr>
           <a:r>
-            <a:rPr lang="en-US"/>
+            <a:rPr lang="en-US" sz="1200" kern="1200"/>
             <a:t>4 primary elements</a:t>
           </a:r>
-          <a:endParaRPr lang="en-US"/>
         </a:p>
         <a:p>
-          <a:pPr lvl="1">
+          <a:pPr marL="57150" lvl="1" indent="-57150" algn="l" defTabSz="400050">
             <a:lnSpc>
-              <a:spcPct val="100000"/>
+              <a:spcPct val="90000"/>
             </a:lnSpc>
             <a:spcBef>
               <a:spcPct val="0"/>
@@ -8058,15 +8070,14 @@
             <a:buChar char="•"/>
           </a:pPr>
           <a:r>
-            <a:rPr lang="en-US"/>
+            <a:rPr lang="en-US" sz="900" kern="1200"/>
             <a:t>a namespace declaration.</a:t>
           </a:r>
-          <a:endParaRPr lang="en-US"/>
         </a:p>
         <a:p>
-          <a:pPr lvl="1">
+          <a:pPr marL="57150" lvl="1" indent="-57150" algn="l" defTabSz="400050">
             <a:lnSpc>
-              <a:spcPct val="100000"/>
+              <a:spcPct val="90000"/>
             </a:lnSpc>
             <a:spcBef>
               <a:spcPct val="0"/>
@@ -8077,15 +8088,14 @@
             <a:buChar char="•"/>
           </a:pPr>
           <a:r>
-            <a:rPr lang="en-US"/>
+            <a:rPr lang="en-US" sz="900" kern="1200"/>
             <a:t>a class.</a:t>
           </a:r>
-          <a:endParaRPr lang="en-US"/>
         </a:p>
         <a:p>
-          <a:pPr lvl="1">
+          <a:pPr marL="57150" lvl="1" indent="-57150" algn="l" defTabSz="400050">
             <a:lnSpc>
-              <a:spcPct val="100000"/>
+              <a:spcPct val="90000"/>
             </a:lnSpc>
             <a:spcBef>
               <a:spcPct val="0"/>
@@ -8096,15 +8106,14 @@
             <a:buChar char="•"/>
           </a:pPr>
           <a:r>
-            <a:rPr lang="en-US"/>
+            <a:rPr lang="en-US" sz="900" kern="1200"/>
             <a:t>a Main method.</a:t>
           </a:r>
-          <a:endParaRPr lang="en-US"/>
         </a:p>
         <a:p>
-          <a:pPr lvl="1">
+          <a:pPr marL="57150" lvl="1" indent="-57150" algn="l" defTabSz="400050">
             <a:lnSpc>
-              <a:spcPct val="100000"/>
+              <a:spcPct val="90000"/>
             </a:lnSpc>
             <a:spcBef>
               <a:spcPct val="0"/>
@@ -8115,15 +8124,14 @@
             <a:buChar char="•"/>
           </a:pPr>
           <a:r>
-            <a:rPr lang="en-US"/>
+            <a:rPr lang="en-US" sz="900" kern="1200"/>
             <a:t>a program statement.</a:t>
           </a:r>
-          <a:endParaRPr lang="en-US"/>
         </a:p>
         <a:p>
-          <a:pPr lvl="1">
+          <a:pPr marL="57150" lvl="1" indent="-57150" algn="l" defTabSz="400050">
             <a:lnSpc>
-              <a:spcPct val="100000"/>
+              <a:spcPct val="90000"/>
             </a:lnSpc>
             <a:spcBef>
               <a:spcPct val="0"/>
@@ -8134,81 +8142,91 @@
             <a:buChar char="•"/>
           </a:pPr>
           <a:r>
-            <a:rPr lang="en-US"/>
+            <a:rPr lang="en-US" sz="900" kern="1200"/>
             <a:t>a comments</a:t>
           </a:r>
         </a:p>
       </dsp:txBody>
       <dsp:txXfrm>
-        <a:off x="0" y="2642823"/>
-        <a:ext cx="1912314" cy="1243004"/>
+        <a:off x="61574" y="2704343"/>
+        <a:ext cx="1788195" cy="1119917"/>
       </dsp:txXfrm>
     </dsp:sp>
     <dsp:sp modelId="{1C9BB015-3E05-4590-939B-219F319EA517}">
       <dsp:nvSpPr>
-        <dsp:cNvPr id="8" name="Arc 7"/>
+        <dsp:cNvPr id="0" name=""/>
         <dsp:cNvSpPr/>
       </dsp:nvSpPr>
-      <dsp:spPr bwMode="white">
+      <dsp:spPr>
         <a:xfrm>
-          <a:off x="734308" y="780475"/>
-          <a:ext cx="3311799" cy="3311799"/>
+          <a:off x="733748" y="779613"/>
+          <a:ext cx="3312918" cy="3312918"/>
         </a:xfrm>
-        <a:prstGeom prst="arc">
-          <a:avLst>
-            <a:gd name="adj1" fmla="val 11112991"/>
-            <a:gd name="adj2" fmla="val 13341116"/>
-          </a:avLst>
-        </a:prstGeom>
-        <a:ln>
-          <a:tailEnd type="arrow" w="lg" len="med"/>
+        <a:custGeom>
+          <a:avLst/>
+          <a:gdLst/>
+          <a:ahLst/>
+          <a:cxnLst/>
+          <a:rect l="0" t="0" r="0" b="0"/>
+          <a:pathLst>
+            <a:path>
+              <a:moveTo>
+                <a:pt x="5341" y="1523534"/>
+              </a:moveTo>
+              <a:arcTo wR="1656459" hR="1656459" stAng="11076163" swAng="2303906"/>
+            </a:path>
+          </a:pathLst>
+        </a:custGeom>
+        <a:noFill/>
+        <a:ln w="6350" cap="flat" cmpd="sng" algn="ctr">
+          <a:solidFill>
+            <a:schemeClr val="accent4">
+              <a:hueOff val="0"/>
+              <a:satOff val="0"/>
+              <a:lumOff val="0"/>
+              <a:alphaOff val="0"/>
+            </a:schemeClr>
+          </a:solidFill>
+          <a:prstDash val="solid"/>
+          <a:miter lim="800000"/>
+          <a:tailEnd type="arrow"/>
         </a:ln>
+        <a:effectLst/>
       </dsp:spPr>
       <dsp:style>
         <a:lnRef idx="1">
-          <a:schemeClr val="accent4"/>
+          <a:scrgbClr r="0" g="0" b="0"/>
         </a:lnRef>
         <a:fillRef idx="0">
-          <a:schemeClr val="accent4"/>
+          <a:scrgbClr r="0" g="0" b="0"/>
         </a:fillRef>
         <a:effectRef idx="0">
           <a:scrgbClr r="0" g="0" b="0"/>
         </a:effectRef>
         <a:fontRef idx="minor"/>
       </dsp:style>
-      <dsp:txXfrm>
-        <a:off x="734308" y="780475"/>
-        <a:ext cx="3311799" cy="3311799"/>
-      </dsp:txXfrm>
     </dsp:sp>
   </dsp:spTree>
 </dsp:drawing>
 </file>
 
 <file path=ppt/diagrams/drawing4.xml><?xml version="1.0" encoding="utf-8"?>
-<dsp:drawing xmlns:dgm="http://schemas.openxmlformats.org/drawingml/2006/diagram" xmlns:dsp="http://schemas.microsoft.com/office/drawing/2008/diagram" xmlns:a="http://schemas.openxmlformats.org/drawingml/2006/main" xmlns:r="http://schemas.openxmlformats.org/officeDocument/2006/relationships">
+<dsp:drawing xmlns:dgm="http://schemas.openxmlformats.org/drawingml/2006/diagram" xmlns:dsp="http://schemas.microsoft.com/office/drawing/2008/diagram" xmlns:a="http://schemas.openxmlformats.org/drawingml/2006/main">
   <dsp:spTree>
     <dsp:nvGrpSpPr>
-      <dsp:cNvPr id="2" name="Group 1"/>
+      <dsp:cNvPr id="0" name=""/>
       <dsp:cNvGrpSpPr/>
     </dsp:nvGrpSpPr>
-    <dsp:grpSpPr>
-      <a:xfrm>
-        <a:off x="0" y="0"/>
-        <a:ext cx="4480726" cy="4480726"/>
-        <a:chOff x="0" y="0"/>
-        <a:chExt cx="4480726" cy="4480726"/>
-      </a:xfrm>
-    </dsp:grpSpPr>
+    <dsp:grpSpPr/>
     <dsp:sp modelId="{8399E1FA-BD11-4C91-9151-70488BA589C6}">
       <dsp:nvSpPr>
-        <dsp:cNvPr id="3" name="Pie 2"/>
+        <dsp:cNvPr id="0" name=""/>
         <dsp:cNvSpPr/>
       </dsp:nvSpPr>
       <dsp:spPr bwMode="white">
         <a:xfrm>
-          <a:off x="605311" y="302449"/>
-          <a:ext cx="3763810" cy="3763810"/>
+          <a:off x="605310" y="302449"/>
+          <a:ext cx="3763809" cy="3763809"/>
         </a:xfrm>
         <a:prstGeom prst="pie">
           <a:avLst>
@@ -8216,13 +8234,34 @@
             <a:gd name="adj2" fmla="val 1800000"/>
           </a:avLst>
         </a:prstGeom>
+        <a:solidFill>
+          <a:schemeClr val="accent2">
+            <a:hueOff val="0"/>
+            <a:satOff val="0"/>
+            <a:lumOff val="0"/>
+            <a:alphaOff val="0"/>
+          </a:schemeClr>
+        </a:solidFill>
+        <a:ln w="12700" cap="flat" cmpd="sng" algn="ctr">
+          <a:solidFill>
+            <a:schemeClr val="lt1">
+              <a:hueOff val="0"/>
+              <a:satOff val="0"/>
+              <a:lumOff val="0"/>
+              <a:alphaOff val="0"/>
+            </a:schemeClr>
+          </a:solidFill>
+          <a:prstDash val="solid"/>
+          <a:miter lim="800000"/>
+        </a:ln>
+        <a:effectLst/>
       </dsp:spPr>
       <dsp:style>
         <a:lnRef idx="2">
-          <a:schemeClr val="lt1"/>
+          <a:scrgbClr r="0" g="0" b="0"/>
         </a:lnRef>
         <a:fillRef idx="1">
-          <a:schemeClr val="accent2"/>
+          <a:scrgbClr r="0" g="0" b="0"/>
         </a:fillRef>
         <a:effectRef idx="0">
           <a:scrgbClr r="0" g="0" b="0"/>
@@ -8232,40 +8271,14 @@
         </a:fontRef>
       </dsp:style>
       <dsp:txBody>
-        <a:bodyPr lIns="13970" tIns="13970" rIns="13970" bIns="13970" anchor="ctr"/>
-        <a:lstStyle>
-          <a:lvl1pPr algn="ctr">
-            <a:defRPr sz="1100"/>
-          </a:lvl1pPr>
-          <a:lvl2pPr marL="57150" indent="-57150" algn="ctr">
-            <a:defRPr sz="800"/>
-          </a:lvl2pPr>
-          <a:lvl3pPr marL="114300" indent="-57150" algn="ctr">
-            <a:defRPr sz="800"/>
-          </a:lvl3pPr>
-          <a:lvl4pPr marL="171450" indent="-57150" algn="ctr">
-            <a:defRPr sz="800"/>
-          </a:lvl4pPr>
-          <a:lvl5pPr marL="228600" indent="-57150" algn="ctr">
-            <a:defRPr sz="800"/>
-          </a:lvl5pPr>
-          <a:lvl6pPr marL="285750" indent="-57150" algn="ctr">
-            <a:defRPr sz="800"/>
-          </a:lvl6pPr>
-          <a:lvl7pPr marL="342900" indent="-57150" algn="ctr">
-            <a:defRPr sz="800"/>
-          </a:lvl7pPr>
-          <a:lvl8pPr marL="400050" indent="-57150" algn="ctr">
-            <a:defRPr sz="800"/>
-          </a:lvl8pPr>
-          <a:lvl9pPr marL="457200" indent="-57150" algn="ctr">
-            <a:defRPr sz="800"/>
-          </a:lvl9pPr>
-        </a:lstStyle>
+        <a:bodyPr spcFirstLastPara="0" vert="horz" wrap="square" lIns="13970" tIns="13970" rIns="13970" bIns="13970" numCol="1" spcCol="1270" anchor="ctr" anchorCtr="0">
+          <a:noAutofit/>
+        </a:bodyPr>
+        <a:lstStyle/>
         <a:p>
-          <a:pPr lvl="0">
+          <a:pPr marL="0" lvl="0" indent="0" algn="ctr" defTabSz="488950">
             <a:lnSpc>
-              <a:spcPct val="100000"/>
+              <a:spcPct val="90000"/>
             </a:lnSpc>
             <a:spcBef>
               <a:spcPct val="0"/>
@@ -8273,27 +8286,28 @@
             <a:spcAft>
               <a:spcPct val="35000"/>
             </a:spcAft>
+            <a:buNone/>
           </a:pPr>
           <a:r>
-            <a:rPr lang="en-US"/>
+            <a:rPr lang="en-US" sz="1100" kern="1200"/>
             <a:t>Value types reference the actual data.</a:t>
           </a:r>
         </a:p>
       </dsp:txBody>
       <dsp:txXfrm>
-        <a:off x="605311" y="302449"/>
-        <a:ext cx="3763810" cy="3763810"/>
+        <a:off x="2651658" y="996961"/>
+        <a:ext cx="1277006" cy="1254603"/>
       </dsp:txXfrm>
     </dsp:sp>
     <dsp:sp modelId="{B23142B4-EDC1-4DDF-9454-D85B03D9BBCC}">
       <dsp:nvSpPr>
-        <dsp:cNvPr id="4" name="Pie 3"/>
+        <dsp:cNvPr id="0" name=""/>
         <dsp:cNvSpPr/>
       </dsp:nvSpPr>
       <dsp:spPr bwMode="white">
         <a:xfrm>
           <a:off x="411295" y="414467"/>
-          <a:ext cx="3763810" cy="3763810"/>
+          <a:ext cx="3763809" cy="3763809"/>
         </a:xfrm>
         <a:prstGeom prst="pie">
           <a:avLst>
@@ -8301,13 +8315,34 @@
             <a:gd name="adj2" fmla="val 9000000"/>
           </a:avLst>
         </a:prstGeom>
+        <a:solidFill>
+          <a:schemeClr val="accent3">
+            <a:hueOff val="0"/>
+            <a:satOff val="0"/>
+            <a:lumOff val="0"/>
+            <a:alphaOff val="0"/>
+          </a:schemeClr>
+        </a:solidFill>
+        <a:ln w="12700" cap="flat" cmpd="sng" algn="ctr">
+          <a:solidFill>
+            <a:schemeClr val="lt1">
+              <a:hueOff val="0"/>
+              <a:satOff val="0"/>
+              <a:lumOff val="0"/>
+              <a:alphaOff val="0"/>
+            </a:schemeClr>
+          </a:solidFill>
+          <a:prstDash val="solid"/>
+          <a:miter lim="800000"/>
+        </a:ln>
+        <a:effectLst/>
       </dsp:spPr>
       <dsp:style>
         <a:lnRef idx="2">
-          <a:schemeClr val="lt1"/>
+          <a:scrgbClr r="0" g="0" b="0"/>
         </a:lnRef>
         <a:fillRef idx="1">
-          <a:schemeClr val="accent3"/>
+          <a:scrgbClr r="0" g="0" b="0"/>
         </a:fillRef>
         <a:effectRef idx="0">
           <a:scrgbClr r="0" g="0" b="0"/>
@@ -8317,40 +8352,14 @@
         </a:fontRef>
       </dsp:style>
       <dsp:txBody>
-        <a:bodyPr lIns="13970" tIns="13970" rIns="13970" bIns="13970" anchor="ctr"/>
-        <a:lstStyle>
-          <a:lvl1pPr algn="ctr">
-            <a:defRPr sz="1100"/>
-          </a:lvl1pPr>
-          <a:lvl2pPr marL="57150" indent="-57150" algn="ctr">
-            <a:defRPr sz="800"/>
-          </a:lvl2pPr>
-          <a:lvl3pPr marL="114300" indent="-57150" algn="ctr">
-            <a:defRPr sz="800"/>
-          </a:lvl3pPr>
-          <a:lvl4pPr marL="171450" indent="-57150" algn="ctr">
-            <a:defRPr sz="800"/>
-          </a:lvl4pPr>
-          <a:lvl5pPr marL="228600" indent="-57150" algn="ctr">
-            <a:defRPr sz="800"/>
-          </a:lvl5pPr>
-          <a:lvl6pPr marL="285750" indent="-57150" algn="ctr">
-            <a:defRPr sz="800"/>
-          </a:lvl6pPr>
-          <a:lvl7pPr marL="342900" indent="-57150" algn="ctr">
-            <a:defRPr sz="800"/>
-          </a:lvl7pPr>
-          <a:lvl8pPr marL="400050" indent="-57150" algn="ctr">
-            <a:defRPr sz="800"/>
-          </a:lvl8pPr>
-          <a:lvl9pPr marL="457200" indent="-57150" algn="ctr">
-            <a:defRPr sz="800"/>
-          </a:lvl9pPr>
-        </a:lstStyle>
+        <a:bodyPr spcFirstLastPara="0" vert="horz" wrap="square" lIns="13970" tIns="13970" rIns="13970" bIns="13970" numCol="1" spcCol="1270" anchor="ctr" anchorCtr="0">
+          <a:noAutofit/>
+        </a:bodyPr>
+        <a:lstStyle/>
         <a:p>
-          <a:pPr lvl="0">
+          <a:pPr marL="0" lvl="0" indent="0" algn="ctr" defTabSz="488950">
             <a:lnSpc>
-              <a:spcPct val="100000"/>
+              <a:spcPct val="90000"/>
             </a:lnSpc>
             <a:spcBef>
               <a:spcPct val="0"/>
@@ -8358,27 +8367,28 @@
             <a:spcAft>
               <a:spcPct val="35000"/>
             </a:spcAft>
+            <a:buNone/>
           </a:pPr>
           <a:r>
-            <a:rPr lang="en-US"/>
+            <a:rPr lang="en-US" sz="1100" kern="1200"/>
             <a:t>A value type variable contains the data itself.</a:t>
           </a:r>
         </a:p>
       </dsp:txBody>
       <dsp:txXfrm>
-        <a:off x="411295" y="414467"/>
-        <a:ext cx="3763810" cy="3763810"/>
+        <a:off x="1441862" y="2789251"/>
+        <a:ext cx="1702675" cy="1164988"/>
       </dsp:txXfrm>
     </dsp:sp>
     <dsp:sp modelId="{14FD8F79-13DD-4B49-958A-E6EFF890B894}">
       <dsp:nvSpPr>
-        <dsp:cNvPr id="5" name="Pie 4"/>
+        <dsp:cNvPr id="0" name=""/>
         <dsp:cNvSpPr/>
       </dsp:nvSpPr>
       <dsp:spPr bwMode="white">
         <a:xfrm>
           <a:off x="411295" y="414467"/>
-          <a:ext cx="3763810" cy="3763810"/>
+          <a:ext cx="3763809" cy="3763809"/>
         </a:xfrm>
         <a:prstGeom prst="pie">
           <a:avLst>
@@ -8386,13 +8396,34 @@
             <a:gd name="adj2" fmla="val 16200000"/>
           </a:avLst>
         </a:prstGeom>
+        <a:solidFill>
+          <a:schemeClr val="accent4">
+            <a:hueOff val="0"/>
+            <a:satOff val="0"/>
+            <a:lumOff val="0"/>
+            <a:alphaOff val="0"/>
+          </a:schemeClr>
+        </a:solidFill>
+        <a:ln w="12700" cap="flat" cmpd="sng" algn="ctr">
+          <a:solidFill>
+            <a:schemeClr val="lt1">
+              <a:hueOff val="0"/>
+              <a:satOff val="0"/>
+              <a:lumOff val="0"/>
+              <a:alphaOff val="0"/>
+            </a:schemeClr>
+          </a:solidFill>
+          <a:prstDash val="solid"/>
+          <a:miter lim="800000"/>
+        </a:ln>
+        <a:effectLst/>
       </dsp:spPr>
       <dsp:style>
         <a:lnRef idx="2">
-          <a:schemeClr val="lt1"/>
+          <a:scrgbClr r="0" g="0" b="0"/>
         </a:lnRef>
         <a:fillRef idx="1">
-          <a:schemeClr val="accent4"/>
+          <a:scrgbClr r="0" g="0" b="0"/>
         </a:fillRef>
         <a:effectRef idx="0">
           <a:scrgbClr r="0" g="0" b="0"/>
@@ -8402,40 +8433,14 @@
         </a:fontRef>
       </dsp:style>
       <dsp:txBody>
-        <a:bodyPr lIns="13970" tIns="13970" rIns="13970" bIns="13970" anchor="ctr"/>
-        <a:lstStyle>
-          <a:lvl1pPr algn="ctr">
-            <a:defRPr sz="1100"/>
-          </a:lvl1pPr>
-          <a:lvl2pPr marL="57150" indent="-57150" algn="ctr">
-            <a:defRPr sz="800"/>
-          </a:lvl2pPr>
-          <a:lvl3pPr marL="114300" indent="-57150" algn="ctr">
-            <a:defRPr sz="800"/>
-          </a:lvl3pPr>
-          <a:lvl4pPr marL="171450" indent="-57150" algn="ctr">
-            <a:defRPr sz="800"/>
-          </a:lvl4pPr>
-          <a:lvl5pPr marL="228600" indent="-57150" algn="ctr">
-            <a:defRPr sz="800"/>
-          </a:lvl5pPr>
-          <a:lvl6pPr marL="285750" indent="-57150" algn="ctr">
-            <a:defRPr sz="800"/>
-          </a:lvl6pPr>
-          <a:lvl7pPr marL="342900" indent="-57150" algn="ctr">
-            <a:defRPr sz="800"/>
-          </a:lvl7pPr>
-          <a:lvl8pPr marL="400050" indent="-57150" algn="ctr">
-            <a:defRPr sz="800"/>
-          </a:lvl8pPr>
-          <a:lvl9pPr marL="457200" indent="-57150" algn="ctr">
-            <a:defRPr sz="800"/>
-          </a:lvl9pPr>
-        </a:lstStyle>
+        <a:bodyPr spcFirstLastPara="0" vert="horz" wrap="square" lIns="13970" tIns="13970" rIns="13970" bIns="13970" numCol="1" spcCol="1270" anchor="ctr" anchorCtr="0">
+          <a:noAutofit/>
+        </a:bodyPr>
+        <a:lstStyle/>
         <a:p>
-          <a:pPr lvl="0">
+          <a:pPr marL="0" lvl="0" indent="0" algn="ctr" defTabSz="488950">
             <a:lnSpc>
-              <a:spcPct val="100000"/>
+              <a:spcPct val="90000"/>
             </a:lnSpc>
             <a:spcBef>
               <a:spcPct val="0"/>
@@ -8443,16 +8448,17 @@
             <a:spcAft>
               <a:spcPct val="35000"/>
             </a:spcAft>
+            <a:buNone/>
           </a:pPr>
           <a:r>
-            <a:rPr lang="en-US"/>
+            <a:rPr lang="en-US" sz="1100" kern="1200"/>
             <a:t>When we copy a value type variable to another one, the actual data is copied and each variable can be independently manipulated.</a:t>
           </a:r>
         </a:p>
       </dsp:txBody>
       <dsp:txXfrm>
-        <a:off x="411295" y="414467"/>
-        <a:ext cx="3763810" cy="3763810"/>
+        <a:off x="814560" y="1153786"/>
+        <a:ext cx="1277006" cy="1254603"/>
       </dsp:txXfrm>
     </dsp:sp>
   </dsp:spTree>
@@ -8460,40 +8466,54 @@
 </file>
 
 <file path=ppt/diagrams/drawing5.xml><?xml version="1.0" encoding="utf-8"?>
-<dsp:drawing xmlns:dgm="http://schemas.openxmlformats.org/drawingml/2006/diagram" xmlns:dsp="http://schemas.microsoft.com/office/drawing/2008/diagram" xmlns:a="http://schemas.openxmlformats.org/drawingml/2006/main" xmlns:r="http://schemas.openxmlformats.org/officeDocument/2006/relationships">
+<dsp:drawing xmlns:dgm="http://schemas.openxmlformats.org/drawingml/2006/diagram" xmlns:dsp="http://schemas.microsoft.com/office/drawing/2008/diagram" xmlns:a="http://schemas.openxmlformats.org/drawingml/2006/main">
   <dsp:spTree>
     <dsp:nvGrpSpPr>
-      <dsp:cNvPr id="2" name="Group 1"/>
+      <dsp:cNvPr id="0" name=""/>
       <dsp:cNvGrpSpPr/>
     </dsp:nvGrpSpPr>
-    <dsp:grpSpPr>
-      <a:xfrm>
-        <a:off x="0" y="0"/>
-        <a:ext cx="4780416" cy="4480726"/>
-        <a:chOff x="0" y="0"/>
-        <a:chExt cx="4780416" cy="4480726"/>
-      </a:xfrm>
-    </dsp:grpSpPr>
+    <dsp:grpSpPr/>
     <dsp:sp modelId="{8346A5A0-428A-4612-8896-CB27033D46C3}">
       <dsp:nvSpPr>
-        <dsp:cNvPr id="3" name="Oval 2"/>
+        <dsp:cNvPr id="0" name=""/>
         <dsp:cNvSpPr/>
       </dsp:nvSpPr>
-      <dsp:spPr bwMode="white">
+      <dsp:spPr>
         <a:xfrm>
-          <a:off x="1434125" y="42291"/>
-          <a:ext cx="1912166" cy="1912166"/>
+          <a:off x="1434358" y="42709"/>
+          <a:ext cx="1911699" cy="1911699"/>
         </a:xfrm>
         <a:prstGeom prst="ellipse">
           <a:avLst/>
         </a:prstGeom>
+        <a:solidFill>
+          <a:schemeClr val="accent2">
+            <a:hueOff val="0"/>
+            <a:satOff val="0"/>
+            <a:lumOff val="0"/>
+            <a:alphaOff val="0"/>
+          </a:schemeClr>
+        </a:solidFill>
+        <a:ln w="12700" cap="flat" cmpd="sng" algn="ctr">
+          <a:solidFill>
+            <a:schemeClr val="lt1">
+              <a:hueOff val="0"/>
+              <a:satOff val="0"/>
+              <a:lumOff val="0"/>
+              <a:alphaOff val="0"/>
+            </a:schemeClr>
+          </a:solidFill>
+          <a:prstDash val="solid"/>
+          <a:miter lim="800000"/>
+        </a:ln>
+        <a:effectLst/>
       </dsp:spPr>
       <dsp:style>
         <a:lnRef idx="2">
-          <a:schemeClr val="lt1"/>
+          <a:scrgbClr r="0" g="0" b="0"/>
         </a:lnRef>
         <a:fillRef idx="1">
-          <a:schemeClr val="accent2"/>
+          <a:scrgbClr r="0" g="0" b="0"/>
         </a:fillRef>
         <a:effectRef idx="0">
           <a:scrgbClr r="0" g="0" b="0"/>
@@ -8503,40 +8523,14 @@
         </a:fontRef>
       </dsp:style>
       <dsp:txBody>
-        <a:bodyPr lIns="17780" tIns="17780" rIns="17780" bIns="17780" anchor="ctr"/>
-        <a:lstStyle>
-          <a:lvl1pPr algn="ctr">
-            <a:defRPr sz="1400"/>
-          </a:lvl1pPr>
-          <a:lvl2pPr marL="57150" indent="-57150" algn="ctr">
-            <a:defRPr sz="1000"/>
-          </a:lvl2pPr>
-          <a:lvl3pPr marL="114300" indent="-57150" algn="ctr">
-            <a:defRPr sz="1000"/>
-          </a:lvl3pPr>
-          <a:lvl4pPr marL="171450" indent="-57150" algn="ctr">
-            <a:defRPr sz="1000"/>
-          </a:lvl4pPr>
-          <a:lvl5pPr marL="228600" indent="-57150" algn="ctr">
-            <a:defRPr sz="1000"/>
-          </a:lvl5pPr>
-          <a:lvl6pPr marL="285750" indent="-57150" algn="ctr">
-            <a:defRPr sz="1000"/>
-          </a:lvl6pPr>
-          <a:lvl7pPr marL="342900" indent="-57150" algn="ctr">
-            <a:defRPr sz="1000"/>
-          </a:lvl7pPr>
-          <a:lvl8pPr marL="400050" indent="-57150" algn="ctr">
-            <a:defRPr sz="1000"/>
-          </a:lvl8pPr>
-          <a:lvl9pPr marL="457200" indent="-57150" algn="ctr">
-            <a:defRPr sz="1000"/>
-          </a:lvl9pPr>
-        </a:lstStyle>
+        <a:bodyPr spcFirstLastPara="0" vert="horz" wrap="square" lIns="17780" tIns="17780" rIns="17780" bIns="17780" numCol="1" spcCol="1270" anchor="ctr" anchorCtr="0">
+          <a:noAutofit/>
+        </a:bodyPr>
+        <a:lstStyle/>
         <a:p>
-          <a:pPr lvl="0">
+          <a:pPr marL="0" lvl="0" indent="0" algn="ctr" defTabSz="622300">
             <a:lnSpc>
-              <a:spcPct val="100000"/>
+              <a:spcPct val="90000"/>
             </a:lnSpc>
             <a:spcBef>
               <a:spcPct val="0"/>
@@ -8544,27 +8538,28 @@
             <a:spcAft>
               <a:spcPct val="35000"/>
             </a:spcAft>
+            <a:buNone/>
           </a:pPr>
           <a:r>
-            <a:rPr lang="en-US"/>
+            <a:rPr lang="en-US" sz="1400" kern="1200"/>
             <a:t>A reference type is a reference to an instance type. </a:t>
           </a:r>
         </a:p>
       </dsp:txBody>
       <dsp:txXfrm>
-        <a:off x="1434125" y="42291"/>
-        <a:ext cx="1912166" cy="1912166"/>
+        <a:off x="1714320" y="322671"/>
+        <a:ext cx="1351775" cy="1351775"/>
       </dsp:txXfrm>
     </dsp:sp>
     <dsp:sp modelId="{EF8E6846-0F0F-43C2-A66F-B9BC74AB1F4C}">
       <dsp:nvSpPr>
-        <dsp:cNvPr id="4" name="Right Arrow 3"/>
+        <dsp:cNvPr id="0" name=""/>
         <dsp:cNvSpPr/>
       </dsp:nvSpPr>
-      <dsp:spPr bwMode="white">
-        <a:xfrm rot="3599999">
-          <a:off x="2853908" y="1917685"/>
-          <a:ext cx="506724" cy="645356"/>
+      <dsp:spPr>
+        <a:xfrm rot="3600000">
+          <a:off x="2846620" y="1905343"/>
+          <a:ext cx="506745" cy="645198"/>
         </a:xfrm>
         <a:prstGeom prst="rightArrow">
           <a:avLst>
@@ -8572,18 +8567,25 @@
             <a:gd name="adj2" fmla="val 50000"/>
           </a:avLst>
         </a:prstGeom>
+        <a:solidFill>
+          <a:schemeClr val="accent2">
+            <a:hueOff val="0"/>
+            <a:satOff val="0"/>
+            <a:lumOff val="0"/>
+            <a:alphaOff val="0"/>
+          </a:schemeClr>
+        </a:solidFill>
+        <a:ln>
+          <a:noFill/>
+        </a:ln>
+        <a:effectLst/>
       </dsp:spPr>
       <dsp:style>
         <a:lnRef idx="0">
-          <a:schemeClr val="lt1">
-            <a:hueOff val="0"/>
-            <a:satOff val="0"/>
-            <a:lumOff val="0"/>
-            <a:alpha val="100000"/>
-          </a:schemeClr>
+          <a:scrgbClr r="0" g="0" b="0"/>
         </a:lnRef>
         <a:fillRef idx="1">
-          <a:schemeClr val="accent2"/>
+          <a:scrgbClr r="0" g="0" b="0"/>
         </a:fillRef>
         <a:effectRef idx="0">
           <a:scrgbClr r="0" g="0" b="0"/>
@@ -8593,40 +8595,14 @@
         </a:fontRef>
       </dsp:style>
       <dsp:txBody>
-        <a:bodyPr lIns="0" tIns="0" rIns="0" bIns="0" anchor="ctr"/>
-        <a:lstStyle>
-          <a:lvl1pPr algn="ctr">
-            <a:defRPr sz="2500"/>
-          </a:lvl1pPr>
-          <a:lvl2pPr marL="228600" indent="-228600" algn="ctr">
-            <a:defRPr sz="2000"/>
-          </a:lvl2pPr>
-          <a:lvl3pPr marL="457200" indent="-228600" algn="ctr">
-            <a:defRPr sz="2000"/>
-          </a:lvl3pPr>
-          <a:lvl4pPr marL="685800" indent="-228600" algn="ctr">
-            <a:defRPr sz="2000"/>
-          </a:lvl4pPr>
-          <a:lvl5pPr marL="914400" indent="-228600" algn="ctr">
-            <a:defRPr sz="2000"/>
-          </a:lvl5pPr>
-          <a:lvl6pPr marL="1143000" indent="-228600" algn="ctr">
-            <a:defRPr sz="2000"/>
-          </a:lvl6pPr>
-          <a:lvl7pPr marL="1371600" indent="-228600" algn="ctr">
-            <a:defRPr sz="2000"/>
-          </a:lvl7pPr>
-          <a:lvl8pPr marL="1600200" indent="-228600" algn="ctr">
-            <a:defRPr sz="2000"/>
-          </a:lvl8pPr>
-          <a:lvl9pPr marL="1828800" indent="-228600" algn="ctr">
-            <a:defRPr sz="2000"/>
-          </a:lvl9pPr>
-        </a:lstStyle>
+        <a:bodyPr spcFirstLastPara="0" vert="horz" wrap="square" lIns="0" tIns="0" rIns="0" bIns="0" numCol="1" spcCol="1270" anchor="ctr" anchorCtr="0">
+          <a:noAutofit/>
+        </a:bodyPr>
+        <a:lstStyle/>
         <a:p>
-          <a:pPr lvl="0">
+          <a:pPr marL="0" lvl="0" indent="0" algn="ctr" defTabSz="488950">
             <a:lnSpc>
-              <a:spcPct val="100000"/>
+              <a:spcPct val="90000"/>
             </a:lnSpc>
             <a:spcBef>
               <a:spcPct val="0"/>
@@ -8634,35 +8610,57 @@
             <a:spcAft>
               <a:spcPct val="35000"/>
             </a:spcAft>
+            <a:buNone/>
           </a:pPr>
-          <a:endParaRPr lang="en-US"/>
+          <a:endParaRPr lang="en-US" sz="1100" kern="1200"/>
         </a:p>
       </dsp:txBody>
-      <dsp:txXfrm rot="3599999">
-        <a:off x="2853908" y="1917685"/>
-        <a:ext cx="506724" cy="645356"/>
+      <dsp:txXfrm>
+        <a:off x="2884626" y="1968555"/>
+        <a:ext cx="354722" cy="387118"/>
       </dsp:txXfrm>
     </dsp:sp>
     <dsp:sp modelId="{D651EB5E-2F3B-4693-B80A-C89D73D00DFC}">
       <dsp:nvSpPr>
-        <dsp:cNvPr id="5" name="Oval 4"/>
+        <dsp:cNvPr id="0" name=""/>
         <dsp:cNvSpPr/>
       </dsp:nvSpPr>
-      <dsp:spPr bwMode="white">
+      <dsp:spPr>
         <a:xfrm>
-          <a:off x="2868250" y="2526268"/>
-          <a:ext cx="1912166" cy="1912166"/>
+          <a:off x="2868269" y="2526317"/>
+          <a:ext cx="1911699" cy="1911699"/>
         </a:xfrm>
         <a:prstGeom prst="ellipse">
           <a:avLst/>
         </a:prstGeom>
+        <a:solidFill>
+          <a:schemeClr val="accent3">
+            <a:hueOff val="0"/>
+            <a:satOff val="0"/>
+            <a:lumOff val="0"/>
+            <a:alphaOff val="0"/>
+          </a:schemeClr>
+        </a:solidFill>
+        <a:ln w="12700" cap="flat" cmpd="sng" algn="ctr">
+          <a:solidFill>
+            <a:schemeClr val="lt1">
+              <a:hueOff val="0"/>
+              <a:satOff val="0"/>
+              <a:lumOff val="0"/>
+              <a:alphaOff val="0"/>
+            </a:schemeClr>
+          </a:solidFill>
+          <a:prstDash val="solid"/>
+          <a:miter lim="800000"/>
+        </a:ln>
+        <a:effectLst/>
       </dsp:spPr>
       <dsp:style>
         <a:lnRef idx="2">
-          <a:schemeClr val="lt1"/>
+          <a:scrgbClr r="0" g="0" b="0"/>
         </a:lnRef>
         <a:fillRef idx="1">
-          <a:schemeClr val="accent3"/>
+          <a:scrgbClr r="0" g="0" b="0"/>
         </a:fillRef>
         <a:effectRef idx="0">
           <a:scrgbClr r="0" g="0" b="0"/>
@@ -8672,40 +8670,14 @@
         </a:fontRef>
       </dsp:style>
       <dsp:txBody>
-        <a:bodyPr lIns="17780" tIns="17780" rIns="17780" bIns="17780" anchor="ctr"/>
-        <a:lstStyle>
-          <a:lvl1pPr algn="ctr">
-            <a:defRPr sz="1400"/>
-          </a:lvl1pPr>
-          <a:lvl2pPr marL="57150" indent="-57150" algn="ctr">
-            <a:defRPr sz="1000"/>
-          </a:lvl2pPr>
-          <a:lvl3pPr marL="114300" indent="-57150" algn="ctr">
-            <a:defRPr sz="1000"/>
-          </a:lvl3pPr>
-          <a:lvl4pPr marL="171450" indent="-57150" algn="ctr">
-            <a:defRPr sz="1000"/>
-          </a:lvl4pPr>
-          <a:lvl5pPr marL="228600" indent="-57150" algn="ctr">
-            <a:defRPr sz="1000"/>
-          </a:lvl5pPr>
-          <a:lvl6pPr marL="285750" indent="-57150" algn="ctr">
-            <a:defRPr sz="1000"/>
-          </a:lvl6pPr>
-          <a:lvl7pPr marL="342900" indent="-57150" algn="ctr">
-            <a:defRPr sz="1000"/>
-          </a:lvl7pPr>
-          <a:lvl8pPr marL="400050" indent="-57150" algn="ctr">
-            <a:defRPr sz="1000"/>
-          </a:lvl8pPr>
-          <a:lvl9pPr marL="457200" indent="-57150" algn="ctr">
-            <a:defRPr sz="1000"/>
-          </a:lvl9pPr>
-        </a:lstStyle>
+        <a:bodyPr spcFirstLastPara="0" vert="horz" wrap="square" lIns="17780" tIns="17780" rIns="17780" bIns="17780" numCol="1" spcCol="1270" anchor="ctr" anchorCtr="0">
+          <a:noAutofit/>
+        </a:bodyPr>
+        <a:lstStyle/>
         <a:p>
-          <a:pPr lvl="0">
+          <a:pPr marL="0" lvl="0" indent="0" algn="ctr" defTabSz="622300">
             <a:lnSpc>
-              <a:spcPct val="100000"/>
+              <a:spcPct val="90000"/>
             </a:lnSpc>
             <a:spcBef>
               <a:spcPct val="0"/>
@@ -8713,27 +8685,28 @@
             <a:spcAft>
               <a:spcPct val="35000"/>
             </a:spcAft>
+            <a:buNone/>
           </a:pPr>
           <a:r>
-            <a:rPr lang="en-US"/>
+            <a:rPr lang="en-US" sz="1400" kern="1200"/>
             <a:t>Reference type variable contains the address of memory location where data is actually stored</a:t>
           </a:r>
         </a:p>
       </dsp:txBody>
       <dsp:txXfrm>
-        <a:off x="2868250" y="2526268"/>
-        <a:ext cx="1912166" cy="1912166"/>
+        <a:off x="3148231" y="2806279"/>
+        <a:ext cx="1351775" cy="1351775"/>
       </dsp:txXfrm>
     </dsp:sp>
     <dsp:sp modelId="{DAF5F45A-0F9D-4AF9-8196-9B066D73FC8B}">
       <dsp:nvSpPr>
-        <dsp:cNvPr id="6" name="Right Arrow 5"/>
+        <dsp:cNvPr id="0" name=""/>
         <dsp:cNvSpPr/>
       </dsp:nvSpPr>
-      <dsp:spPr bwMode="white">
+      <dsp:spPr>
         <a:xfrm rot="10800000">
-          <a:off x="2136846" y="3159673"/>
-          <a:ext cx="506724" cy="645356"/>
+          <a:off x="2151177" y="3159567"/>
+          <a:ext cx="506745" cy="645198"/>
         </a:xfrm>
         <a:prstGeom prst="rightArrow">
           <a:avLst>
@@ -8741,18 +8714,25 @@
             <a:gd name="adj2" fmla="val 50000"/>
           </a:avLst>
         </a:prstGeom>
+        <a:solidFill>
+          <a:schemeClr val="accent3">
+            <a:hueOff val="0"/>
+            <a:satOff val="0"/>
+            <a:lumOff val="0"/>
+            <a:alphaOff val="0"/>
+          </a:schemeClr>
+        </a:solidFill>
+        <a:ln>
+          <a:noFill/>
+        </a:ln>
+        <a:effectLst/>
       </dsp:spPr>
       <dsp:style>
         <a:lnRef idx="0">
-          <a:schemeClr val="lt1">
-            <a:hueOff val="0"/>
-            <a:satOff val="0"/>
-            <a:lumOff val="0"/>
-            <a:alpha val="100000"/>
-          </a:schemeClr>
+          <a:scrgbClr r="0" g="0" b="0"/>
         </a:lnRef>
         <a:fillRef idx="1">
-          <a:schemeClr val="accent3"/>
+          <a:scrgbClr r="0" g="0" b="0"/>
         </a:fillRef>
         <a:effectRef idx="0">
           <a:scrgbClr r="0" g="0" b="0"/>
@@ -8762,40 +8742,14 @@
         </a:fontRef>
       </dsp:style>
       <dsp:txBody>
-        <a:bodyPr rot="10800000" lIns="0" tIns="0" rIns="0" bIns="0" anchor="ctr"/>
-        <a:lstStyle>
-          <a:lvl1pPr algn="ctr">
-            <a:defRPr sz="2500"/>
-          </a:lvl1pPr>
-          <a:lvl2pPr marL="228600" indent="-228600" algn="ctr">
-            <a:defRPr sz="2000"/>
-          </a:lvl2pPr>
-          <a:lvl3pPr marL="457200" indent="-228600" algn="ctr">
-            <a:defRPr sz="2000"/>
-          </a:lvl3pPr>
-          <a:lvl4pPr marL="685800" indent="-228600" algn="ctr">
-            <a:defRPr sz="2000"/>
-          </a:lvl4pPr>
-          <a:lvl5pPr marL="914400" indent="-228600" algn="ctr">
-            <a:defRPr sz="2000"/>
-          </a:lvl5pPr>
-          <a:lvl6pPr marL="1143000" indent="-228600" algn="ctr">
-            <a:defRPr sz="2000"/>
-          </a:lvl6pPr>
-          <a:lvl7pPr marL="1371600" indent="-228600" algn="ctr">
-            <a:defRPr sz="2000"/>
-          </a:lvl7pPr>
-          <a:lvl8pPr marL="1600200" indent="-228600" algn="ctr">
-            <a:defRPr sz="2000"/>
-          </a:lvl8pPr>
-          <a:lvl9pPr marL="1828800" indent="-228600" algn="ctr">
-            <a:defRPr sz="2000"/>
-          </a:lvl9pPr>
-        </a:lstStyle>
+        <a:bodyPr spcFirstLastPara="0" vert="horz" wrap="square" lIns="0" tIns="0" rIns="0" bIns="0" numCol="1" spcCol="1270" anchor="ctr" anchorCtr="0">
+          <a:noAutofit/>
+        </a:bodyPr>
+        <a:lstStyle/>
         <a:p>
-          <a:pPr lvl="0">
+          <a:pPr marL="0" lvl="0" indent="0" algn="ctr" defTabSz="488950">
             <a:lnSpc>
-              <a:spcPct val="100000"/>
+              <a:spcPct val="90000"/>
             </a:lnSpc>
             <a:spcBef>
               <a:spcPct val="0"/>
@@ -8803,35 +8757,57 @@
             <a:spcAft>
               <a:spcPct val="35000"/>
             </a:spcAft>
+            <a:buNone/>
           </a:pPr>
-          <a:endParaRPr lang="en-US"/>
+          <a:endParaRPr lang="en-US" sz="1100" kern="1200"/>
         </a:p>
       </dsp:txBody>
       <dsp:txXfrm rot="10800000">
-        <a:off x="2136846" y="3159673"/>
-        <a:ext cx="506724" cy="645356"/>
+        <a:off x="2303200" y="3288607"/>
+        <a:ext cx="354722" cy="387118"/>
       </dsp:txXfrm>
     </dsp:sp>
     <dsp:sp modelId="{FC4623FC-408B-4F2F-A611-B829EFDCA3B8}">
       <dsp:nvSpPr>
-        <dsp:cNvPr id="7" name="Oval 6"/>
+        <dsp:cNvPr id="0" name=""/>
         <dsp:cNvSpPr/>
       </dsp:nvSpPr>
-      <dsp:spPr bwMode="white">
+      <dsp:spPr>
         <a:xfrm>
-          <a:off x="0" y="2526268"/>
-          <a:ext cx="1912166" cy="1912166"/>
+          <a:off x="446" y="2526317"/>
+          <a:ext cx="1911699" cy="1911699"/>
         </a:xfrm>
         <a:prstGeom prst="ellipse">
           <a:avLst/>
         </a:prstGeom>
+        <a:solidFill>
+          <a:schemeClr val="accent4">
+            <a:hueOff val="0"/>
+            <a:satOff val="0"/>
+            <a:lumOff val="0"/>
+            <a:alphaOff val="0"/>
+          </a:schemeClr>
+        </a:solidFill>
+        <a:ln w="12700" cap="flat" cmpd="sng" algn="ctr">
+          <a:solidFill>
+            <a:schemeClr val="lt1">
+              <a:hueOff val="0"/>
+              <a:satOff val="0"/>
+              <a:lumOff val="0"/>
+              <a:alphaOff val="0"/>
+            </a:schemeClr>
+          </a:solidFill>
+          <a:prstDash val="solid"/>
+          <a:miter lim="800000"/>
+        </a:ln>
+        <a:effectLst/>
       </dsp:spPr>
       <dsp:style>
         <a:lnRef idx="2">
-          <a:schemeClr val="lt1"/>
+          <a:scrgbClr r="0" g="0" b="0"/>
         </a:lnRef>
         <a:fillRef idx="1">
-          <a:schemeClr val="accent4"/>
+          <a:scrgbClr r="0" g="0" b="0"/>
         </a:fillRef>
         <a:effectRef idx="0">
           <a:scrgbClr r="0" g="0" b="0"/>
@@ -8841,40 +8817,14 @@
         </a:fontRef>
       </dsp:style>
       <dsp:txBody>
-        <a:bodyPr lIns="17780" tIns="17780" rIns="17780" bIns="17780" anchor="ctr"/>
-        <a:lstStyle>
-          <a:lvl1pPr algn="ctr">
-            <a:defRPr sz="1400"/>
-          </a:lvl1pPr>
-          <a:lvl2pPr marL="57150" indent="-57150" algn="ctr">
-            <a:defRPr sz="1000"/>
-          </a:lvl2pPr>
-          <a:lvl3pPr marL="114300" indent="-57150" algn="ctr">
-            <a:defRPr sz="1000"/>
-          </a:lvl3pPr>
-          <a:lvl4pPr marL="171450" indent="-57150" algn="ctr">
-            <a:defRPr sz="1000"/>
-          </a:lvl4pPr>
-          <a:lvl5pPr marL="228600" indent="-57150" algn="ctr">
-            <a:defRPr sz="1000"/>
-          </a:lvl5pPr>
-          <a:lvl6pPr marL="285750" indent="-57150" algn="ctr">
-            <a:defRPr sz="1000"/>
-          </a:lvl6pPr>
-          <a:lvl7pPr marL="342900" indent="-57150" algn="ctr">
-            <a:defRPr sz="1000"/>
-          </a:lvl7pPr>
-          <a:lvl8pPr marL="400050" indent="-57150" algn="ctr">
-            <a:defRPr sz="1000"/>
-          </a:lvl8pPr>
-          <a:lvl9pPr marL="457200" indent="-57150" algn="ctr">
-            <a:defRPr sz="1000"/>
-          </a:lvl9pPr>
-        </a:lstStyle>
+        <a:bodyPr spcFirstLastPara="0" vert="horz" wrap="square" lIns="17780" tIns="17780" rIns="17780" bIns="17780" numCol="1" spcCol="1270" anchor="ctr" anchorCtr="0">
+          <a:noAutofit/>
+        </a:bodyPr>
+        <a:lstStyle/>
         <a:p>
-          <a:pPr lvl="0">
+          <a:pPr marL="0" lvl="0" indent="0" algn="ctr" defTabSz="622300">
             <a:lnSpc>
-              <a:spcPct val="100000"/>
+              <a:spcPct val="90000"/>
             </a:lnSpc>
             <a:spcBef>
               <a:spcPct val="0"/>
@@ -8882,27 +8832,28 @@
             <a:spcAft>
               <a:spcPct val="35000"/>
             </a:spcAft>
+            <a:buNone/>
           </a:pPr>
           <a:r>
-            <a:rPr lang="en-US"/>
+            <a:rPr lang="en-US" sz="1400" kern="1200"/>
             <a:t>A null value is assigned to a reference type by default.</a:t>
           </a:r>
         </a:p>
       </dsp:txBody>
       <dsp:txXfrm>
-        <a:off x="0" y="2526268"/>
-        <a:ext cx="1912166" cy="1912166"/>
+        <a:off x="280408" y="2806279"/>
+        <a:ext cx="1351775" cy="1351775"/>
       </dsp:txXfrm>
     </dsp:sp>
     <dsp:sp modelId="{A5B0BEE4-B9B3-4939-B2C1-5A2DC05FAA07}">
       <dsp:nvSpPr>
-        <dsp:cNvPr id="8" name="Right Arrow 7"/>
+        <dsp:cNvPr id="0" name=""/>
         <dsp:cNvSpPr/>
       </dsp:nvSpPr>
-      <dsp:spPr bwMode="white">
-        <a:xfrm rot="-3599999">
-          <a:off x="1419784" y="1917685"/>
-          <a:ext cx="506724" cy="645356"/>
+      <dsp:spPr>
+        <a:xfrm rot="18000000">
+          <a:off x="1412708" y="1930184"/>
+          <a:ext cx="506745" cy="645198"/>
         </a:xfrm>
         <a:prstGeom prst="rightArrow">
           <a:avLst>
@@ -8910,18 +8861,25 @@
             <a:gd name="adj2" fmla="val 50000"/>
           </a:avLst>
         </a:prstGeom>
+        <a:solidFill>
+          <a:schemeClr val="accent4">
+            <a:hueOff val="0"/>
+            <a:satOff val="0"/>
+            <a:lumOff val="0"/>
+            <a:alphaOff val="0"/>
+          </a:schemeClr>
+        </a:solidFill>
+        <a:ln>
+          <a:noFill/>
+        </a:ln>
+        <a:effectLst/>
       </dsp:spPr>
       <dsp:style>
         <a:lnRef idx="0">
-          <a:schemeClr val="lt1">
-            <a:hueOff val="0"/>
-            <a:satOff val="0"/>
-            <a:lumOff val="0"/>
-            <a:alpha val="100000"/>
-          </a:schemeClr>
+          <a:scrgbClr r="0" g="0" b="0"/>
         </a:lnRef>
         <a:fillRef idx="1">
-          <a:schemeClr val="accent4"/>
+          <a:scrgbClr r="0" g="0" b="0"/>
         </a:fillRef>
         <a:effectRef idx="0">
           <a:scrgbClr r="0" g="0" b="0"/>
@@ -8931,40 +8889,14 @@
         </a:fontRef>
       </dsp:style>
       <dsp:txBody>
-        <a:bodyPr lIns="0" tIns="0" rIns="0" bIns="0" anchor="ctr"/>
-        <a:lstStyle>
-          <a:lvl1pPr algn="ctr">
-            <a:defRPr sz="2500"/>
-          </a:lvl1pPr>
-          <a:lvl2pPr marL="228600" indent="-228600" algn="ctr">
-            <a:defRPr sz="2000"/>
-          </a:lvl2pPr>
-          <a:lvl3pPr marL="457200" indent="-228600" algn="ctr">
-            <a:defRPr sz="2000"/>
-          </a:lvl3pPr>
-          <a:lvl4pPr marL="685800" indent="-228600" algn="ctr">
-            <a:defRPr sz="2000"/>
-          </a:lvl4pPr>
-          <a:lvl5pPr marL="914400" indent="-228600" algn="ctr">
-            <a:defRPr sz="2000"/>
-          </a:lvl5pPr>
-          <a:lvl6pPr marL="1143000" indent="-228600" algn="ctr">
-            <a:defRPr sz="2000"/>
-          </a:lvl6pPr>
-          <a:lvl7pPr marL="1371600" indent="-228600" algn="ctr">
-            <a:defRPr sz="2000"/>
-          </a:lvl7pPr>
-          <a:lvl8pPr marL="1600200" indent="-228600" algn="ctr">
-            <a:defRPr sz="2000"/>
-          </a:lvl8pPr>
-          <a:lvl9pPr marL="1828800" indent="-228600" algn="ctr">
-            <a:defRPr sz="2000"/>
-          </a:lvl9pPr>
-        </a:lstStyle>
+        <a:bodyPr spcFirstLastPara="0" vert="horz" wrap="square" lIns="0" tIns="0" rIns="0" bIns="0" numCol="1" spcCol="1270" anchor="ctr" anchorCtr="0">
+          <a:noAutofit/>
+        </a:bodyPr>
+        <a:lstStyle/>
         <a:p>
-          <a:pPr lvl="0">
+          <a:pPr marL="0" lvl="0" indent="0" algn="ctr" defTabSz="488950">
             <a:lnSpc>
-              <a:spcPct val="100000"/>
+              <a:spcPct val="90000"/>
             </a:lnSpc>
             <a:spcBef>
               <a:spcPct val="0"/>
@@ -8972,13 +8904,14 @@
             <a:spcAft>
               <a:spcPct val="35000"/>
             </a:spcAft>
+            <a:buNone/>
           </a:pPr>
-          <a:endParaRPr lang="en-US"/>
+          <a:endParaRPr lang="en-US" sz="1100" kern="1200"/>
         </a:p>
       </dsp:txBody>
-      <dsp:txXfrm rot="-3599999">
-        <a:off x="1419784" y="1917685"/>
-        <a:ext cx="506724" cy="645356"/>
+      <dsp:txXfrm>
+        <a:off x="1450714" y="2125052"/>
+        <a:ext cx="354722" cy="387118"/>
       </dsp:txXfrm>
     </dsp:sp>
   </dsp:spTree>
@@ -8986,23 +8919,16 @@
 </file>
 
 <file path=ppt/diagrams/drawing6.xml><?xml version="1.0" encoding="utf-8"?>
-<dsp:drawing xmlns:dgm="http://schemas.openxmlformats.org/drawingml/2006/diagram" xmlns:dsp="http://schemas.microsoft.com/office/drawing/2008/diagram" xmlns:a="http://schemas.openxmlformats.org/drawingml/2006/main" xmlns:r="http://schemas.openxmlformats.org/officeDocument/2006/relationships">
+<dsp:drawing xmlns:dgm="http://schemas.openxmlformats.org/drawingml/2006/diagram" xmlns:dsp="http://schemas.microsoft.com/office/drawing/2008/diagram" xmlns:a="http://schemas.openxmlformats.org/drawingml/2006/main">
   <dsp:spTree>
     <dsp:nvGrpSpPr>
-      <dsp:cNvPr id="2" name="Group 1"/>
+      <dsp:cNvPr id="0" name=""/>
       <dsp:cNvGrpSpPr/>
     </dsp:nvGrpSpPr>
-    <dsp:grpSpPr>
-      <a:xfrm>
-        <a:off x="0" y="0"/>
-        <a:ext cx="9827182" cy="4572544"/>
-        <a:chOff x="0" y="0"/>
-        <a:chExt cx="9827182" cy="4572544"/>
-      </a:xfrm>
-    </dsp:grpSpPr>
+    <dsp:grpSpPr/>
     <dsp:sp modelId="{EE8B5FE4-DE05-4CB5-A6EE-A4113A339AF8}">
       <dsp:nvSpPr>
-        <dsp:cNvPr id="3" name="Rounded Rectangle 2"/>
+        <dsp:cNvPr id="0" name=""/>
         <dsp:cNvSpPr/>
       </dsp:nvSpPr>
       <dsp:spPr bwMode="white">
@@ -9013,6 +8939,27 @@
         <a:prstGeom prst="roundRect">
           <a:avLst/>
         </a:prstGeom>
+        <a:solidFill>
+          <a:schemeClr val="accent4">
+            <a:hueOff val="0"/>
+            <a:satOff val="0"/>
+            <a:lumOff val="0"/>
+            <a:alphaOff val="0"/>
+          </a:schemeClr>
+        </a:solidFill>
+        <a:ln w="19050" cap="flat" cmpd="sng" algn="ctr">
+          <a:solidFill>
+            <a:schemeClr val="lt1">
+              <a:hueOff val="0"/>
+              <a:satOff val="0"/>
+              <a:lumOff val="0"/>
+              <a:alphaOff val="0"/>
+            </a:schemeClr>
+          </a:solidFill>
+          <a:prstDash val="solid"/>
+          <a:miter lim="800000"/>
+        </a:ln>
+        <a:effectLst/>
       </dsp:spPr>
       <dsp:style>
         <a:lnRef idx="3">
@@ -9029,40 +8976,14 @@
         </a:fontRef>
       </dsp:style>
       <dsp:txBody>
-        <a:bodyPr lIns="60960" tIns="60960" rIns="60960" bIns="60960" anchor="ctr"/>
-        <a:lstStyle>
-          <a:lvl1pPr algn="l">
-            <a:defRPr sz="1600"/>
-          </a:lvl1pPr>
-          <a:lvl2pPr marL="114300" indent="-114300" algn="l">
-            <a:defRPr sz="1200"/>
-          </a:lvl2pPr>
-          <a:lvl3pPr marL="228600" indent="-114300" algn="l">
-            <a:defRPr sz="1200"/>
-          </a:lvl3pPr>
-          <a:lvl4pPr marL="342900" indent="-114300" algn="l">
-            <a:defRPr sz="1200"/>
-          </a:lvl4pPr>
-          <a:lvl5pPr marL="457200" indent="-114300" algn="l">
-            <a:defRPr sz="1200"/>
-          </a:lvl5pPr>
-          <a:lvl6pPr marL="571500" indent="-114300" algn="l">
-            <a:defRPr sz="1200"/>
-          </a:lvl6pPr>
-          <a:lvl7pPr marL="685800" indent="-114300" algn="l">
-            <a:defRPr sz="1200"/>
-          </a:lvl7pPr>
-          <a:lvl8pPr marL="800100" indent="-114300" algn="l">
-            <a:defRPr sz="1200"/>
-          </a:lvl8pPr>
-          <a:lvl9pPr marL="914400" indent="-114300" algn="l">
-            <a:defRPr sz="1200"/>
-          </a:lvl9pPr>
-        </a:lstStyle>
+        <a:bodyPr spcFirstLastPara="0" vert="horz" wrap="square" lIns="60960" tIns="60960" rIns="60960" bIns="60960" numCol="1" spcCol="1270" anchor="ctr" anchorCtr="0">
+          <a:noAutofit/>
+        </a:bodyPr>
+        <a:lstStyle/>
         <a:p>
-          <a:pPr lvl="0">
+          <a:pPr marL="0" lvl="0" indent="0" algn="l" defTabSz="1600200">
             <a:lnSpc>
-              <a:spcPct val="100000"/>
+              <a:spcPct val="90000"/>
             </a:lnSpc>
             <a:spcBef>
               <a:spcPct val="0"/>
@@ -9070,9 +8991,10 @@
             <a:spcAft>
               <a:spcPct val="35000"/>
             </a:spcAft>
+            <a:buNone/>
           </a:pPr>
           <a:r>
-            <a:rPr lang="en-US"/>
+            <a:rPr lang="en-US" sz="3600" kern="1200"/>
             <a:t>An array is a data structure.</a:t>
           </a:r>
         </a:p>
@@ -9084,7 +9006,7 @@
     </dsp:sp>
     <dsp:sp modelId="{8906A31E-01D8-437F-9D0D-E0E89C8116FC}">
       <dsp:nvSpPr>
-        <dsp:cNvPr id="4" name="Rounded Rectangle 3"/>
+        <dsp:cNvPr id="0" name=""/>
         <dsp:cNvSpPr/>
       </dsp:nvSpPr>
       <dsp:spPr bwMode="white">
@@ -9095,6 +9017,27 @@
         <a:prstGeom prst="roundRect">
           <a:avLst/>
         </a:prstGeom>
+        <a:solidFill>
+          <a:schemeClr val="accent4">
+            <a:hueOff val="0"/>
+            <a:satOff val="0"/>
+            <a:lumOff val="0"/>
+            <a:alphaOff val="0"/>
+          </a:schemeClr>
+        </a:solidFill>
+        <a:ln w="19050" cap="flat" cmpd="sng" algn="ctr">
+          <a:solidFill>
+            <a:schemeClr val="lt1">
+              <a:hueOff val="0"/>
+              <a:satOff val="0"/>
+              <a:lumOff val="0"/>
+              <a:alphaOff val="0"/>
+            </a:schemeClr>
+          </a:solidFill>
+          <a:prstDash val="solid"/>
+          <a:miter lim="800000"/>
+        </a:ln>
+        <a:effectLst/>
       </dsp:spPr>
       <dsp:style>
         <a:lnRef idx="3">
@@ -9111,40 +9054,14 @@
         </a:fontRef>
       </dsp:style>
       <dsp:txBody>
-        <a:bodyPr lIns="60960" tIns="60960" rIns="60960" bIns="60960" anchor="ctr"/>
-        <a:lstStyle>
-          <a:lvl1pPr algn="l">
-            <a:defRPr sz="1600"/>
-          </a:lvl1pPr>
-          <a:lvl2pPr marL="114300" indent="-114300" algn="l">
-            <a:defRPr sz="1200"/>
-          </a:lvl2pPr>
-          <a:lvl3pPr marL="228600" indent="-114300" algn="l">
-            <a:defRPr sz="1200"/>
-          </a:lvl3pPr>
-          <a:lvl4pPr marL="342900" indent="-114300" algn="l">
-            <a:defRPr sz="1200"/>
-          </a:lvl4pPr>
-          <a:lvl5pPr marL="457200" indent="-114300" algn="l">
-            <a:defRPr sz="1200"/>
-          </a:lvl5pPr>
-          <a:lvl6pPr marL="571500" indent="-114300" algn="l">
-            <a:defRPr sz="1200"/>
-          </a:lvl6pPr>
-          <a:lvl7pPr marL="685800" indent="-114300" algn="l">
-            <a:defRPr sz="1200"/>
-          </a:lvl7pPr>
-          <a:lvl8pPr marL="800100" indent="-114300" algn="l">
-            <a:defRPr sz="1200"/>
-          </a:lvl8pPr>
-          <a:lvl9pPr marL="914400" indent="-114300" algn="l">
-            <a:defRPr sz="1200"/>
-          </a:lvl9pPr>
-        </a:lstStyle>
+        <a:bodyPr spcFirstLastPara="0" vert="horz" wrap="square" lIns="60960" tIns="60960" rIns="60960" bIns="60960" numCol="1" spcCol="1270" anchor="ctr" anchorCtr="0">
+          <a:noAutofit/>
+        </a:bodyPr>
+        <a:lstStyle/>
         <a:p>
-          <a:pPr lvl="0">
+          <a:pPr marL="0" lvl="0" indent="0" algn="l" defTabSz="1600200">
             <a:lnSpc>
-              <a:spcPct val="100000"/>
+              <a:spcPct val="90000"/>
             </a:lnSpc>
             <a:spcBef>
               <a:spcPct val="0"/>
@@ -9152,9 +9069,10 @@
             <a:spcAft>
               <a:spcPct val="35000"/>
             </a:spcAft>
+            <a:buNone/>
           </a:pPr>
           <a:r>
-            <a:rPr lang="en-US" dirty="0"/>
+            <a:rPr lang="en-US" sz="3600" kern="1200" dirty="0"/>
             <a:t>The variables contained in an array, also called the elements of the array.</a:t>
           </a:r>
         </a:p>
@@ -9166,7 +9084,7 @@
     </dsp:sp>
     <dsp:sp modelId="{E0989815-11E7-4828-A62D-E7E89D52D67E}">
       <dsp:nvSpPr>
-        <dsp:cNvPr id="5" name="Rounded Rectangle 4"/>
+        <dsp:cNvPr id="0" name=""/>
         <dsp:cNvSpPr/>
       </dsp:nvSpPr>
       <dsp:spPr bwMode="white">
@@ -9177,6 +9095,27 @@
         <a:prstGeom prst="roundRect">
           <a:avLst/>
         </a:prstGeom>
+        <a:solidFill>
+          <a:schemeClr val="accent4">
+            <a:hueOff val="0"/>
+            <a:satOff val="0"/>
+            <a:lumOff val="0"/>
+            <a:alphaOff val="0"/>
+          </a:schemeClr>
+        </a:solidFill>
+        <a:ln w="19050" cap="flat" cmpd="sng" algn="ctr">
+          <a:solidFill>
+            <a:schemeClr val="lt1">
+              <a:hueOff val="0"/>
+              <a:satOff val="0"/>
+              <a:lumOff val="0"/>
+              <a:alphaOff val="0"/>
+            </a:schemeClr>
+          </a:solidFill>
+          <a:prstDash val="solid"/>
+          <a:miter lim="800000"/>
+        </a:ln>
+        <a:effectLst/>
       </dsp:spPr>
       <dsp:style>
         <a:lnRef idx="3">
@@ -9193,40 +9132,14 @@
         </a:fontRef>
       </dsp:style>
       <dsp:txBody>
-        <a:bodyPr lIns="60960" tIns="60960" rIns="60960" bIns="60960" anchor="ctr"/>
-        <a:lstStyle>
-          <a:lvl1pPr algn="l">
-            <a:defRPr sz="1600"/>
-          </a:lvl1pPr>
-          <a:lvl2pPr marL="114300" indent="-114300" algn="l">
-            <a:defRPr sz="1200"/>
-          </a:lvl2pPr>
-          <a:lvl3pPr marL="228600" indent="-114300" algn="l">
-            <a:defRPr sz="1200"/>
-          </a:lvl3pPr>
-          <a:lvl4pPr marL="342900" indent="-114300" algn="l">
-            <a:defRPr sz="1200"/>
-          </a:lvl4pPr>
-          <a:lvl5pPr marL="457200" indent="-114300" algn="l">
-            <a:defRPr sz="1200"/>
-          </a:lvl5pPr>
-          <a:lvl6pPr marL="571500" indent="-114300" algn="l">
-            <a:defRPr sz="1200"/>
-          </a:lvl6pPr>
-          <a:lvl7pPr marL="685800" indent="-114300" algn="l">
-            <a:defRPr sz="1200"/>
-          </a:lvl7pPr>
-          <a:lvl8pPr marL="800100" indent="-114300" algn="l">
-            <a:defRPr sz="1200"/>
-          </a:lvl8pPr>
-          <a:lvl9pPr marL="914400" indent="-114300" algn="l">
-            <a:defRPr sz="1200"/>
-          </a:lvl9pPr>
-        </a:lstStyle>
+        <a:bodyPr spcFirstLastPara="0" vert="horz" wrap="square" lIns="60960" tIns="60960" rIns="60960" bIns="60960" numCol="1" spcCol="1270" anchor="ctr" anchorCtr="0">
+          <a:noAutofit/>
+        </a:bodyPr>
+        <a:lstStyle/>
         <a:p>
-          <a:pPr lvl="0">
+          <a:pPr marL="0" lvl="0" indent="0" algn="l" defTabSz="1600200">
             <a:lnSpc>
-              <a:spcPct val="100000"/>
+              <a:spcPct val="90000"/>
             </a:lnSpc>
             <a:spcBef>
               <a:spcPct val="0"/>
@@ -9234,9 +9147,10 @@
             <a:spcAft>
               <a:spcPct val="35000"/>
             </a:spcAft>
+            <a:buNone/>
           </a:pPr>
           <a:r>
-            <a:rPr lang="en-US" dirty="0"/>
+            <a:rPr lang="en-US" sz="3600" kern="1200" dirty="0"/>
             <a:t>The variables contained in an array all of the same type.</a:t>
           </a:r>
         </a:p>
@@ -9248,7 +9162,7 @@
     </dsp:sp>
     <dsp:sp modelId="{6D6D350E-2EBF-4E91-8399-41B3E990AE05}">
       <dsp:nvSpPr>
-        <dsp:cNvPr id="6" name="Rounded Rectangle 5"/>
+        <dsp:cNvPr id="0" name=""/>
         <dsp:cNvSpPr/>
       </dsp:nvSpPr>
       <dsp:spPr bwMode="white">
@@ -9259,6 +9173,27 @@
         <a:prstGeom prst="roundRect">
           <a:avLst/>
         </a:prstGeom>
+        <a:solidFill>
+          <a:schemeClr val="accent4">
+            <a:hueOff val="0"/>
+            <a:satOff val="0"/>
+            <a:lumOff val="0"/>
+            <a:alphaOff val="0"/>
+          </a:schemeClr>
+        </a:solidFill>
+        <a:ln w="19050" cap="flat" cmpd="sng" algn="ctr">
+          <a:solidFill>
+            <a:schemeClr val="lt1">
+              <a:hueOff val="0"/>
+              <a:satOff val="0"/>
+              <a:lumOff val="0"/>
+              <a:alphaOff val="0"/>
+            </a:schemeClr>
+          </a:solidFill>
+          <a:prstDash val="solid"/>
+          <a:miter lim="800000"/>
+        </a:ln>
+        <a:effectLst/>
       </dsp:spPr>
       <dsp:style>
         <a:lnRef idx="3">
@@ -9275,40 +9210,14 @@
         </a:fontRef>
       </dsp:style>
       <dsp:txBody>
-        <a:bodyPr lIns="60960" tIns="60960" rIns="60960" bIns="60960" anchor="ctr"/>
-        <a:lstStyle>
-          <a:lvl1pPr algn="l">
-            <a:defRPr sz="1600"/>
-          </a:lvl1pPr>
-          <a:lvl2pPr marL="114300" indent="-114300" algn="l">
-            <a:defRPr sz="1200"/>
-          </a:lvl2pPr>
-          <a:lvl3pPr marL="228600" indent="-114300" algn="l">
-            <a:defRPr sz="1200"/>
-          </a:lvl3pPr>
-          <a:lvl4pPr marL="342900" indent="-114300" algn="l">
-            <a:defRPr sz="1200"/>
-          </a:lvl4pPr>
-          <a:lvl5pPr marL="457200" indent="-114300" algn="l">
-            <a:defRPr sz="1200"/>
-          </a:lvl5pPr>
-          <a:lvl6pPr marL="571500" indent="-114300" algn="l">
-            <a:defRPr sz="1200"/>
-          </a:lvl6pPr>
-          <a:lvl7pPr marL="685800" indent="-114300" algn="l">
-            <a:defRPr sz="1200"/>
-          </a:lvl7pPr>
-          <a:lvl8pPr marL="800100" indent="-114300" algn="l">
-            <a:defRPr sz="1200"/>
-          </a:lvl8pPr>
-          <a:lvl9pPr marL="914400" indent="-114300" algn="l">
-            <a:defRPr sz="1200"/>
-          </a:lvl9pPr>
-        </a:lstStyle>
+        <a:bodyPr spcFirstLastPara="0" vert="horz" wrap="square" lIns="60960" tIns="60960" rIns="60960" bIns="60960" numCol="1" spcCol="1270" anchor="ctr" anchorCtr="0">
+          <a:noAutofit/>
+        </a:bodyPr>
+        <a:lstStyle/>
         <a:p>
-          <a:pPr lvl="0">
+          <a:pPr marL="0" lvl="0" indent="0" algn="l" defTabSz="1600200">
             <a:lnSpc>
-              <a:spcPct val="100000"/>
+              <a:spcPct val="90000"/>
             </a:lnSpc>
             <a:spcBef>
               <a:spcPct val="0"/>
@@ -9316,9 +9225,10 @@
             <a:spcAft>
               <a:spcPct val="35000"/>
             </a:spcAft>
+            <a:buNone/>
           </a:pPr>
           <a:r>
-            <a:rPr lang="en-US"/>
+            <a:rPr lang="en-US" sz="3600" kern="1200"/>
             <a:t>Array types are reference types.</a:t>
           </a:r>
         </a:p>
@@ -9330,7 +9240,7 @@
     </dsp:sp>
     <dsp:sp modelId="{196DEF08-E55A-4CE8-8B76-0E9B2BADA155}">
       <dsp:nvSpPr>
-        <dsp:cNvPr id="7" name="Rounded Rectangle 6"/>
+        <dsp:cNvPr id="0" name=""/>
         <dsp:cNvSpPr/>
       </dsp:nvSpPr>
       <dsp:spPr bwMode="white">
@@ -9341,6 +9251,27 @@
         <a:prstGeom prst="roundRect">
           <a:avLst/>
         </a:prstGeom>
+        <a:solidFill>
+          <a:schemeClr val="accent4">
+            <a:hueOff val="0"/>
+            <a:satOff val="0"/>
+            <a:lumOff val="0"/>
+            <a:alphaOff val="0"/>
+          </a:schemeClr>
+        </a:solidFill>
+        <a:ln w="19050" cap="flat" cmpd="sng" algn="ctr">
+          <a:solidFill>
+            <a:schemeClr val="lt1">
+              <a:hueOff val="0"/>
+              <a:satOff val="0"/>
+              <a:lumOff val="0"/>
+              <a:alphaOff val="0"/>
+            </a:schemeClr>
+          </a:solidFill>
+          <a:prstDash val="solid"/>
+          <a:miter lim="800000"/>
+        </a:ln>
+        <a:effectLst/>
       </dsp:spPr>
       <dsp:style>
         <a:lnRef idx="3">
@@ -9357,40 +9288,14 @@
         </a:fontRef>
       </dsp:style>
       <dsp:txBody>
-        <a:bodyPr lIns="60960" tIns="60960" rIns="60960" bIns="60960" anchor="ctr"/>
-        <a:lstStyle>
-          <a:lvl1pPr algn="l">
-            <a:defRPr sz="1600"/>
-          </a:lvl1pPr>
-          <a:lvl2pPr marL="114300" indent="-114300" algn="l">
-            <a:defRPr sz="1200"/>
-          </a:lvl2pPr>
-          <a:lvl3pPr marL="228600" indent="-114300" algn="l">
-            <a:defRPr sz="1200"/>
-          </a:lvl3pPr>
-          <a:lvl4pPr marL="342900" indent="-114300" algn="l">
-            <a:defRPr sz="1200"/>
-          </a:lvl4pPr>
-          <a:lvl5pPr marL="457200" indent="-114300" algn="l">
-            <a:defRPr sz="1200"/>
-          </a:lvl5pPr>
-          <a:lvl6pPr marL="571500" indent="-114300" algn="l">
-            <a:defRPr sz="1200"/>
-          </a:lvl6pPr>
-          <a:lvl7pPr marL="685800" indent="-114300" algn="l">
-            <a:defRPr sz="1200"/>
-          </a:lvl7pPr>
-          <a:lvl8pPr marL="800100" indent="-114300" algn="l">
-            <a:defRPr sz="1200"/>
-          </a:lvl8pPr>
-          <a:lvl9pPr marL="914400" indent="-114300" algn="l">
-            <a:defRPr sz="1200"/>
-          </a:lvl9pPr>
-        </a:lstStyle>
+        <a:bodyPr spcFirstLastPara="0" vert="horz" wrap="square" lIns="60960" tIns="60960" rIns="60960" bIns="60960" numCol="1" spcCol="1270" anchor="ctr" anchorCtr="0">
+          <a:noAutofit/>
+        </a:bodyPr>
+        <a:lstStyle/>
         <a:p>
-          <a:pPr lvl="0">
+          <a:pPr marL="0" lvl="0" indent="0" algn="l" defTabSz="1600200">
             <a:lnSpc>
-              <a:spcPct val="100000"/>
+              <a:spcPct val="90000"/>
             </a:lnSpc>
             <a:spcBef>
               <a:spcPct val="0"/>
@@ -9398,9 +9303,10 @@
             <a:spcAft>
               <a:spcPct val="35000"/>
             </a:spcAft>
+            <a:buNone/>
           </a:pPr>
           <a:r>
-            <a:rPr lang="en-US"/>
+            <a:rPr lang="en-US" sz="3600" kern="1200"/>
             <a:t>An array index starts at zero.</a:t>
           </a:r>
         </a:p>
@@ -9412,7 +9318,7 @@
     </dsp:sp>
     <dsp:sp modelId="{A3D24CB8-A71C-48E0-82C7-F2EE2D8263C5}">
       <dsp:nvSpPr>
-        <dsp:cNvPr id="8" name="Rounded Rectangle 7"/>
+        <dsp:cNvPr id="0" name=""/>
         <dsp:cNvSpPr/>
       </dsp:nvSpPr>
       <dsp:spPr bwMode="white">
@@ -9423,6 +9329,27 @@
         <a:prstGeom prst="roundRect">
           <a:avLst/>
         </a:prstGeom>
+        <a:solidFill>
+          <a:schemeClr val="accent4">
+            <a:hueOff val="0"/>
+            <a:satOff val="0"/>
+            <a:lumOff val="0"/>
+            <a:alphaOff val="0"/>
+          </a:schemeClr>
+        </a:solidFill>
+        <a:ln w="19050" cap="flat" cmpd="sng" algn="ctr">
+          <a:solidFill>
+            <a:schemeClr val="lt1">
+              <a:hueOff val="0"/>
+              <a:satOff val="0"/>
+              <a:lumOff val="0"/>
+              <a:alphaOff val="0"/>
+            </a:schemeClr>
+          </a:solidFill>
+          <a:prstDash val="solid"/>
+          <a:miter lim="800000"/>
+        </a:ln>
+        <a:effectLst/>
       </dsp:spPr>
       <dsp:style>
         <a:lnRef idx="3">
@@ -9439,40 +9366,14 @@
         </a:fontRef>
       </dsp:style>
       <dsp:txBody>
-        <a:bodyPr lIns="60960" tIns="60960" rIns="60960" bIns="60960" anchor="ctr"/>
-        <a:lstStyle>
-          <a:lvl1pPr algn="l">
-            <a:defRPr sz="1600"/>
-          </a:lvl1pPr>
-          <a:lvl2pPr marL="114300" indent="-114300" algn="l">
-            <a:defRPr sz="1200"/>
-          </a:lvl2pPr>
-          <a:lvl3pPr marL="228600" indent="-114300" algn="l">
-            <a:defRPr sz="1200"/>
-          </a:lvl3pPr>
-          <a:lvl4pPr marL="342900" indent="-114300" algn="l">
-            <a:defRPr sz="1200"/>
-          </a:lvl4pPr>
-          <a:lvl5pPr marL="457200" indent="-114300" algn="l">
-            <a:defRPr sz="1200"/>
-          </a:lvl5pPr>
-          <a:lvl6pPr marL="571500" indent="-114300" algn="l">
-            <a:defRPr sz="1200"/>
-          </a:lvl6pPr>
-          <a:lvl7pPr marL="685800" indent="-114300" algn="l">
-            <a:defRPr sz="1200"/>
-          </a:lvl7pPr>
-          <a:lvl8pPr marL="800100" indent="-114300" algn="l">
-            <a:defRPr sz="1200"/>
-          </a:lvl8pPr>
-          <a:lvl9pPr marL="914400" indent="-114300" algn="l">
-            <a:defRPr sz="1200"/>
-          </a:lvl9pPr>
-        </a:lstStyle>
+        <a:bodyPr spcFirstLastPara="0" vert="horz" wrap="square" lIns="60960" tIns="60960" rIns="60960" bIns="60960" numCol="1" spcCol="1270" anchor="ctr" anchorCtr="0">
+          <a:noAutofit/>
+        </a:bodyPr>
+        <a:lstStyle/>
         <a:p>
-          <a:pPr lvl="0">
+          <a:pPr marL="0" lvl="0" indent="0" algn="l" defTabSz="1600200">
             <a:lnSpc>
-              <a:spcPct val="100000"/>
+              <a:spcPct val="90000"/>
             </a:lnSpc>
             <a:spcBef>
               <a:spcPct val="0"/>
@@ -9480,9 +9381,10 @@
             <a:spcAft>
               <a:spcPct val="35000"/>
             </a:spcAft>
+            <a:buNone/>
           </a:pPr>
           <a:r>
-            <a:rPr lang="en-US"/>
+            <a:rPr lang="en-US" sz="3600" kern="1200"/>
             <a:t>That means the first item of an array starts at the 0th position.</a:t>
           </a:r>
         </a:p>
@@ -9494,7 +9396,7 @@
     </dsp:sp>
     <dsp:sp modelId="{123528CB-3533-4298-B339-DCDF90B45B22}">
       <dsp:nvSpPr>
-        <dsp:cNvPr id="9" name="Rounded Rectangle 8"/>
+        <dsp:cNvPr id="0" name=""/>
         <dsp:cNvSpPr/>
       </dsp:nvSpPr>
       <dsp:spPr bwMode="white">
@@ -9505,6 +9407,27 @@
         <a:prstGeom prst="roundRect">
           <a:avLst/>
         </a:prstGeom>
+        <a:solidFill>
+          <a:schemeClr val="accent4">
+            <a:hueOff val="0"/>
+            <a:satOff val="0"/>
+            <a:lumOff val="0"/>
+            <a:alphaOff val="0"/>
+          </a:schemeClr>
+        </a:solidFill>
+        <a:ln w="19050" cap="flat" cmpd="sng" algn="ctr">
+          <a:solidFill>
+            <a:schemeClr val="lt1">
+              <a:hueOff val="0"/>
+              <a:satOff val="0"/>
+              <a:lumOff val="0"/>
+              <a:alphaOff val="0"/>
+            </a:schemeClr>
+          </a:solidFill>
+          <a:prstDash val="solid"/>
+          <a:miter lim="800000"/>
+        </a:ln>
+        <a:effectLst/>
       </dsp:spPr>
       <dsp:style>
         <a:lnRef idx="3">
@@ -9521,40 +9444,14 @@
         </a:fontRef>
       </dsp:style>
       <dsp:txBody>
-        <a:bodyPr lIns="60960" tIns="60960" rIns="60960" bIns="60960" anchor="ctr"/>
-        <a:lstStyle>
-          <a:lvl1pPr algn="l">
-            <a:defRPr sz="1600"/>
-          </a:lvl1pPr>
-          <a:lvl2pPr marL="114300" indent="-114300" algn="l">
-            <a:defRPr sz="1200"/>
-          </a:lvl2pPr>
-          <a:lvl3pPr marL="228600" indent="-114300" algn="l">
-            <a:defRPr sz="1200"/>
-          </a:lvl3pPr>
-          <a:lvl4pPr marL="342900" indent="-114300" algn="l">
-            <a:defRPr sz="1200"/>
-          </a:lvl4pPr>
-          <a:lvl5pPr marL="457200" indent="-114300" algn="l">
-            <a:defRPr sz="1200"/>
-          </a:lvl5pPr>
-          <a:lvl6pPr marL="571500" indent="-114300" algn="l">
-            <a:defRPr sz="1200"/>
-          </a:lvl6pPr>
-          <a:lvl7pPr marL="685800" indent="-114300" algn="l">
-            <a:defRPr sz="1200"/>
-          </a:lvl7pPr>
-          <a:lvl8pPr marL="800100" indent="-114300" algn="l">
-            <a:defRPr sz="1200"/>
-          </a:lvl8pPr>
-          <a:lvl9pPr marL="914400" indent="-114300" algn="l">
-            <a:defRPr sz="1200"/>
-          </a:lvl9pPr>
-        </a:lstStyle>
+        <a:bodyPr spcFirstLastPara="0" vert="horz" wrap="square" lIns="60960" tIns="60960" rIns="60960" bIns="60960" numCol="1" spcCol="1270" anchor="ctr" anchorCtr="0">
+          <a:noAutofit/>
+        </a:bodyPr>
+        <a:lstStyle/>
         <a:p>
-          <a:pPr lvl="0">
+          <a:pPr marL="0" lvl="0" indent="0" algn="l" defTabSz="1600200">
             <a:lnSpc>
-              <a:spcPct val="100000"/>
+              <a:spcPct val="90000"/>
             </a:lnSpc>
             <a:spcBef>
               <a:spcPct val="0"/>
@@ -9562,9 +9459,10 @@
             <a:spcAft>
               <a:spcPct val="35000"/>
             </a:spcAft>
+            <a:buNone/>
           </a:pPr>
           <a:r>
-            <a:rPr lang="en-US" dirty="0"/>
+            <a:rPr lang="en-US" sz="3600" kern="1200" dirty="0"/>
             <a:t>The position of the last item on an array will be total number of items - 1. </a:t>
           </a:r>
         </a:p>
@@ -9576,7 +9474,7 @@
     </dsp:sp>
     <dsp:sp modelId="{F4436A3B-E174-46B2-9517-A5972D7C0F59}">
       <dsp:nvSpPr>
-        <dsp:cNvPr id="10" name="Rounded Rectangle 9"/>
+        <dsp:cNvPr id="0" name=""/>
         <dsp:cNvSpPr/>
       </dsp:nvSpPr>
       <dsp:spPr bwMode="white">
@@ -9587,6 +9485,27 @@
         <a:prstGeom prst="roundRect">
           <a:avLst/>
         </a:prstGeom>
+        <a:solidFill>
+          <a:schemeClr val="accent4">
+            <a:hueOff val="0"/>
+            <a:satOff val="0"/>
+            <a:lumOff val="0"/>
+            <a:alphaOff val="0"/>
+          </a:schemeClr>
+        </a:solidFill>
+        <a:ln w="19050" cap="flat" cmpd="sng" algn="ctr">
+          <a:solidFill>
+            <a:schemeClr val="lt1">
+              <a:hueOff val="0"/>
+              <a:satOff val="0"/>
+              <a:lumOff val="0"/>
+              <a:alphaOff val="0"/>
+            </a:schemeClr>
+          </a:solidFill>
+          <a:prstDash val="solid"/>
+          <a:miter lim="800000"/>
+        </a:ln>
+        <a:effectLst/>
       </dsp:spPr>
       <dsp:style>
         <a:lnRef idx="3">
@@ -9603,40 +9522,14 @@
         </a:fontRef>
       </dsp:style>
       <dsp:txBody>
-        <a:bodyPr lIns="60960" tIns="60960" rIns="60960" bIns="60960" anchor="ctr"/>
-        <a:lstStyle>
-          <a:lvl1pPr algn="l">
-            <a:defRPr sz="1600"/>
-          </a:lvl1pPr>
-          <a:lvl2pPr marL="114300" indent="-114300" algn="l">
-            <a:defRPr sz="1200"/>
-          </a:lvl2pPr>
-          <a:lvl3pPr marL="228600" indent="-114300" algn="l">
-            <a:defRPr sz="1200"/>
-          </a:lvl3pPr>
-          <a:lvl4pPr marL="342900" indent="-114300" algn="l">
-            <a:defRPr sz="1200"/>
-          </a:lvl4pPr>
-          <a:lvl5pPr marL="457200" indent="-114300" algn="l">
-            <a:defRPr sz="1200"/>
-          </a:lvl5pPr>
-          <a:lvl6pPr marL="571500" indent="-114300" algn="l">
-            <a:defRPr sz="1200"/>
-          </a:lvl6pPr>
-          <a:lvl7pPr marL="685800" indent="-114300" algn="l">
-            <a:defRPr sz="1200"/>
-          </a:lvl7pPr>
-          <a:lvl8pPr marL="800100" indent="-114300" algn="l">
-            <a:defRPr sz="1200"/>
-          </a:lvl8pPr>
-          <a:lvl9pPr marL="914400" indent="-114300" algn="l">
-            <a:defRPr sz="1200"/>
-          </a:lvl9pPr>
-        </a:lstStyle>
+        <a:bodyPr spcFirstLastPara="0" vert="horz" wrap="square" lIns="60960" tIns="60960" rIns="60960" bIns="60960" numCol="1" spcCol="1270" anchor="ctr" anchorCtr="0">
+          <a:noAutofit/>
+        </a:bodyPr>
+        <a:lstStyle/>
         <a:p>
-          <a:pPr lvl="0">
+          <a:pPr marL="0" lvl="0" indent="0" algn="l" defTabSz="1600200">
             <a:lnSpc>
-              <a:spcPct val="100000"/>
+              <a:spcPct val="90000"/>
             </a:lnSpc>
             <a:spcBef>
               <a:spcPct val="0"/>
@@ -9644,9 +9537,10 @@
             <a:spcAft>
               <a:spcPct val="35000"/>
             </a:spcAft>
+            <a:buNone/>
           </a:pPr>
           <a:r>
-            <a:rPr lang="en-US"/>
+            <a:rPr lang="en-US" sz="3600" kern="1200"/>
             <a:t>So if an array has 10 items, the last 10th item is at 9thposition.</a:t>
           </a:r>
         </a:p>
@@ -9658,7 +9552,7 @@
     </dsp:sp>
     <dsp:sp modelId="{93CD74BD-1CA4-4A14-A489-B09E5F623D52}">
       <dsp:nvSpPr>
-        <dsp:cNvPr id="11" name="Rounded Rectangle 10"/>
+        <dsp:cNvPr id="0" name=""/>
         <dsp:cNvSpPr/>
       </dsp:nvSpPr>
       <dsp:spPr bwMode="white">
@@ -9669,6 +9563,27 @@
         <a:prstGeom prst="roundRect">
           <a:avLst/>
         </a:prstGeom>
+        <a:solidFill>
+          <a:schemeClr val="accent4">
+            <a:hueOff val="0"/>
+            <a:satOff val="0"/>
+            <a:lumOff val="0"/>
+            <a:alphaOff val="0"/>
+          </a:schemeClr>
+        </a:solidFill>
+        <a:ln w="19050" cap="flat" cmpd="sng" algn="ctr">
+          <a:solidFill>
+            <a:schemeClr val="lt1">
+              <a:hueOff val="0"/>
+              <a:satOff val="0"/>
+              <a:lumOff val="0"/>
+              <a:alphaOff val="0"/>
+            </a:schemeClr>
+          </a:solidFill>
+          <a:prstDash val="solid"/>
+          <a:miter lim="800000"/>
+        </a:ln>
+        <a:effectLst/>
       </dsp:spPr>
       <dsp:style>
         <a:lnRef idx="3">
@@ -9685,40 +9600,14 @@
         </a:fontRef>
       </dsp:style>
       <dsp:txBody>
-        <a:bodyPr lIns="60960" tIns="60960" rIns="60960" bIns="60960" anchor="ctr"/>
-        <a:lstStyle>
-          <a:lvl1pPr algn="l">
-            <a:defRPr sz="1600"/>
-          </a:lvl1pPr>
-          <a:lvl2pPr marL="114300" indent="-114300" algn="l">
-            <a:defRPr sz="1200"/>
-          </a:lvl2pPr>
-          <a:lvl3pPr marL="228600" indent="-114300" algn="l">
-            <a:defRPr sz="1200"/>
-          </a:lvl3pPr>
-          <a:lvl4pPr marL="342900" indent="-114300" algn="l">
-            <a:defRPr sz="1200"/>
-          </a:lvl4pPr>
-          <a:lvl5pPr marL="457200" indent="-114300" algn="l">
-            <a:defRPr sz="1200"/>
-          </a:lvl5pPr>
-          <a:lvl6pPr marL="571500" indent="-114300" algn="l">
-            <a:defRPr sz="1200"/>
-          </a:lvl6pPr>
-          <a:lvl7pPr marL="685800" indent="-114300" algn="l">
-            <a:defRPr sz="1200"/>
-          </a:lvl7pPr>
-          <a:lvl8pPr marL="800100" indent="-114300" algn="l">
-            <a:defRPr sz="1200"/>
-          </a:lvl8pPr>
-          <a:lvl9pPr marL="914400" indent="-114300" algn="l">
-            <a:defRPr sz="1200"/>
-          </a:lvl9pPr>
-        </a:lstStyle>
+        <a:bodyPr spcFirstLastPara="0" vert="horz" wrap="square" lIns="60960" tIns="60960" rIns="60960" bIns="60960" numCol="1" spcCol="1270" anchor="ctr" anchorCtr="0">
+          <a:noAutofit/>
+        </a:bodyPr>
+        <a:lstStyle/>
         <a:p>
-          <a:pPr lvl="0">
+          <a:pPr marL="0" lvl="0" indent="0" algn="l" defTabSz="1600200">
             <a:lnSpc>
-              <a:spcPct val="100000"/>
+              <a:spcPct val="90000"/>
             </a:lnSpc>
             <a:spcBef>
               <a:spcPct val="0"/>
@@ -9726,9 +9615,10 @@
             <a:spcAft>
               <a:spcPct val="35000"/>
             </a:spcAft>
+            <a:buNone/>
           </a:pPr>
           <a:r>
-            <a:rPr lang="en-US"/>
+            <a:rPr lang="en-US" sz="3600" kern="1200"/>
             <a:t>In C#, arrays can be declared as fixed length or dynamic. </a:t>
           </a:r>
         </a:p>
@@ -9740,7 +9630,7 @@
     </dsp:sp>
     <dsp:sp modelId="{F83FB398-B7FF-4F92-9DD6-5849D890C810}">
       <dsp:nvSpPr>
-        <dsp:cNvPr id="12" name="Rounded Rectangle 11"/>
+        <dsp:cNvPr id="0" name=""/>
         <dsp:cNvSpPr/>
       </dsp:nvSpPr>
       <dsp:spPr bwMode="white">
@@ -9751,6 +9641,27 @@
         <a:prstGeom prst="roundRect">
           <a:avLst/>
         </a:prstGeom>
+        <a:solidFill>
+          <a:schemeClr val="accent4">
+            <a:hueOff val="0"/>
+            <a:satOff val="0"/>
+            <a:lumOff val="0"/>
+            <a:alphaOff val="0"/>
+          </a:schemeClr>
+        </a:solidFill>
+        <a:ln w="19050" cap="flat" cmpd="sng" algn="ctr">
+          <a:solidFill>
+            <a:schemeClr val="lt1">
+              <a:hueOff val="0"/>
+              <a:satOff val="0"/>
+              <a:lumOff val="0"/>
+              <a:alphaOff val="0"/>
+            </a:schemeClr>
+          </a:solidFill>
+          <a:prstDash val="solid"/>
+          <a:miter lim="800000"/>
+        </a:ln>
+        <a:effectLst/>
       </dsp:spPr>
       <dsp:style>
         <a:lnRef idx="3">
@@ -9767,40 +9678,14 @@
         </a:fontRef>
       </dsp:style>
       <dsp:txBody>
-        <a:bodyPr lIns="60960" tIns="60960" rIns="60960" bIns="60960" anchor="ctr"/>
-        <a:lstStyle>
-          <a:lvl1pPr algn="l">
-            <a:defRPr sz="1600"/>
-          </a:lvl1pPr>
-          <a:lvl2pPr marL="114300" indent="-114300" algn="l">
-            <a:defRPr sz="1200"/>
-          </a:lvl2pPr>
-          <a:lvl3pPr marL="228600" indent="-114300" algn="l">
-            <a:defRPr sz="1200"/>
-          </a:lvl3pPr>
-          <a:lvl4pPr marL="342900" indent="-114300" algn="l">
-            <a:defRPr sz="1200"/>
-          </a:lvl4pPr>
-          <a:lvl5pPr marL="457200" indent="-114300" algn="l">
-            <a:defRPr sz="1200"/>
-          </a:lvl5pPr>
-          <a:lvl6pPr marL="571500" indent="-114300" algn="l">
-            <a:defRPr sz="1200"/>
-          </a:lvl6pPr>
-          <a:lvl7pPr marL="685800" indent="-114300" algn="l">
-            <a:defRPr sz="1200"/>
-          </a:lvl7pPr>
-          <a:lvl8pPr marL="800100" indent="-114300" algn="l">
-            <a:defRPr sz="1200"/>
-          </a:lvl8pPr>
-          <a:lvl9pPr marL="914400" indent="-114300" algn="l">
-            <a:defRPr sz="1200"/>
-          </a:lvl9pPr>
-        </a:lstStyle>
+        <a:bodyPr spcFirstLastPara="0" vert="horz" wrap="square" lIns="60960" tIns="60960" rIns="60960" bIns="60960" numCol="1" spcCol="1270" anchor="ctr" anchorCtr="0">
+          <a:noAutofit/>
+        </a:bodyPr>
+        <a:lstStyle/>
         <a:p>
-          <a:pPr lvl="0">
+          <a:pPr marL="0" lvl="0" indent="0" algn="l" defTabSz="1600200">
             <a:lnSpc>
-              <a:spcPct val="100000"/>
+              <a:spcPct val="90000"/>
             </a:lnSpc>
             <a:spcBef>
               <a:spcPct val="0"/>
@@ -9808,9 +9693,10 @@
             <a:spcAft>
               <a:spcPct val="35000"/>
             </a:spcAft>
+            <a:buNone/>
           </a:pPr>
           <a:r>
-            <a:rPr lang="en-US"/>
+            <a:rPr lang="en-US" sz="3600" kern="1200"/>
             <a:t>A fixed length array can store a predefined number of items.</a:t>
           </a:r>
         </a:p>
@@ -9825,7 +9711,7 @@
 </file>
 
 <file path=ppt/diagrams/layout1.xml><?xml version="1.0" encoding="utf-8"?>
-<dgm:layoutDef xmlns:dgm="http://schemas.openxmlformats.org/drawingml/2006/diagram" xmlns:a="http://schemas.openxmlformats.org/drawingml/2006/main" uniqueId="urn:microsoft.com/office/officeart/2005/8/layout/hierarchy1">
+<dgm:layoutDef xmlns:dgm="http://schemas.openxmlformats.org/drawingml/2006/diagram" xmlns:a="http://schemas.openxmlformats.org/drawingml/2006/main" uniqueId="urn:microsoft.com/office/officeart/2005/8/layout/hierarchy1#1">
   <dgm:title val=""/>
   <dgm:desc val=""/>
   <dgm:catLst>
@@ -10388,7 +10274,7 @@
 </file>
 
 <file path=ppt/diagrams/layout2.xml><?xml version="1.0" encoding="utf-8"?>
-<dgm:layoutDef xmlns:dgm="http://schemas.openxmlformats.org/drawingml/2006/diagram" xmlns:a="http://schemas.openxmlformats.org/drawingml/2006/main" uniqueId="urn:microsoft.com/office/officeart/2005/8/layout/vList2">
+<dgm:layoutDef xmlns:dgm="http://schemas.openxmlformats.org/drawingml/2006/diagram" xmlns:a="http://schemas.openxmlformats.org/drawingml/2006/main" uniqueId="urn:microsoft.com/office/officeart/2005/8/layout/vList2#1">
   <dgm:title val=""/>
   <dgm:desc val=""/>
   <dgm:catLst>
@@ -10763,7 +10649,7 @@
 </file>
 
 <file path=ppt/diagrams/layout4.xml><?xml version="1.0" encoding="utf-8"?>
-<dgm:layoutDef xmlns:dgm="http://schemas.openxmlformats.org/drawingml/2006/diagram" xmlns:a="http://schemas.openxmlformats.org/drawingml/2006/main" uniqueId="urn:microsoft.com/office/officeart/2005/8/layout/chart3">
+<dgm:layoutDef xmlns:dgm="http://schemas.openxmlformats.org/drawingml/2006/diagram" xmlns:a="http://schemas.openxmlformats.org/drawingml/2006/main" uniqueId="urn:microsoft.com/office/officeart/2005/8/layout/chart3#1">
   <dgm:title val=""/>
   <dgm:desc val=""/>
   <dgm:catLst>
@@ -12279,7 +12165,7 @@
 </file>
 
 <file path=ppt/diagrams/layout6.xml><?xml version="1.0" encoding="utf-8"?>
-<dgm:layoutDef xmlns:dgm="http://schemas.openxmlformats.org/drawingml/2006/diagram" xmlns:a="http://schemas.openxmlformats.org/drawingml/2006/main" uniqueId="urn:microsoft.com/office/officeart/2005/8/layout/vList2">
+<dgm:layoutDef xmlns:dgm="http://schemas.openxmlformats.org/drawingml/2006/diagram" xmlns:a="http://schemas.openxmlformats.org/drawingml/2006/main" uniqueId="urn:microsoft.com/office/officeart/2005/8/layout/vList2#2">
   <dgm:title val=""/>
   <dgm:desc val=""/>
   <dgm:catLst>
@@ -12446,7 +12332,7 @@
 </file>
 
 <file path=ppt/diagrams/quickStyle1.xml><?xml version="1.0" encoding="utf-8"?>
-<dgm:styleDef xmlns:dgm="http://schemas.openxmlformats.org/drawingml/2006/diagram" xmlns:a="http://schemas.openxmlformats.org/drawingml/2006/main" uniqueId="urn:microsoft.com/office/officeart/2005/8/quickstyle/simple1">
+<dgm:styleDef xmlns:dgm="http://schemas.openxmlformats.org/drawingml/2006/diagram" xmlns:a="http://schemas.openxmlformats.org/drawingml/2006/main" uniqueId="urn:microsoft.com/office/officeart/2005/8/quickstyle/simple1#1">
   <dgm:title val=""/>
   <dgm:desc val=""/>
   <dgm:catLst>
@@ -12461,6 +12347,7 @@
       <a:camera prst="orthographicFront"/>
       <a:lightRig rig="threePt" dir="t"/>
     </dgm:scene3d>
+    <dgm:sp3d/>
     <dgm:txPr/>
     <dgm:style>
       <a:lnRef idx="2">
@@ -12480,6 +12367,7 @@
       <a:camera prst="orthographicFront"/>
       <a:lightRig rig="threePt" dir="t"/>
     </dgm:scene3d>
+    <dgm:sp3d/>
     <dgm:txPr/>
     <dgm:style>
       <a:lnRef idx="2">
@@ -12499,6 +12387,7 @@
       <a:camera prst="orthographicFront"/>
       <a:lightRig rig="threePt" dir="t"/>
     </dgm:scene3d>
+    <dgm:sp3d/>
     <dgm:txPr/>
     <dgm:style>
       <a:lnRef idx="2">
@@ -12518,6 +12407,7 @@
       <a:camera prst="orthographicFront"/>
       <a:lightRig rig="threePt" dir="t"/>
     </dgm:scene3d>
+    <dgm:sp3d/>
     <dgm:txPr/>
     <dgm:style>
       <a:lnRef idx="2">
@@ -12539,6 +12429,7 @@
       <a:camera prst="orthographicFront"/>
       <a:lightRig rig="threePt" dir="t"/>
     </dgm:scene3d>
+    <dgm:sp3d/>
     <dgm:txPr/>
     <dgm:style>
       <a:lnRef idx="2">
@@ -12560,6 +12451,7 @@
       <a:camera prst="orthographicFront"/>
       <a:lightRig rig="threePt" dir="t"/>
     </dgm:scene3d>
+    <dgm:sp3d/>
     <dgm:txPr/>
     <dgm:style>
       <a:lnRef idx="2">
@@ -12581,6 +12473,7 @@
       <a:camera prst="orthographicFront"/>
       <a:lightRig rig="threePt" dir="t"/>
     </dgm:scene3d>
+    <dgm:sp3d/>
     <dgm:txPr/>
     <dgm:style>
       <a:lnRef idx="2">
@@ -12602,6 +12495,7 @@
       <a:camera prst="orthographicFront"/>
       <a:lightRig rig="threePt" dir="t"/>
     </dgm:scene3d>
+    <dgm:sp3d/>
     <dgm:txPr/>
     <dgm:style>
       <a:lnRef idx="2">
@@ -12623,6 +12517,7 @@
       <a:camera prst="orthographicFront"/>
       <a:lightRig rig="threePt" dir="t"/>
     </dgm:scene3d>
+    <dgm:sp3d/>
     <dgm:txPr/>
     <dgm:style>
       <a:lnRef idx="2">
@@ -12644,6 +12539,7 @@
       <a:camera prst="orthographicFront"/>
       <a:lightRig rig="threePt" dir="t"/>
     </dgm:scene3d>
+    <dgm:sp3d/>
     <dgm:txPr/>
     <dgm:style>
       <a:lnRef idx="2">
@@ -12663,6 +12559,7 @@
       <a:camera prst="orthographicFront"/>
       <a:lightRig rig="threePt" dir="t"/>
     </dgm:scene3d>
+    <dgm:sp3d/>
     <dgm:txPr/>
     <dgm:style>
       <a:lnRef idx="2">
@@ -12682,6 +12579,7 @@
       <a:camera prst="orthographicFront"/>
       <a:lightRig rig="threePt" dir="t"/>
     </dgm:scene3d>
+    <dgm:sp3d/>
     <dgm:txPr/>
     <dgm:style>
       <a:lnRef idx="2">
@@ -12701,6 +12599,7 @@
       <a:camera prst="orthographicFront"/>
       <a:lightRig rig="threePt" dir="t"/>
     </dgm:scene3d>
+    <dgm:sp3d/>
     <dgm:txPr/>
     <dgm:style>
       <a:lnRef idx="0">
@@ -12720,6 +12619,7 @@
       <a:camera prst="orthographicFront"/>
       <a:lightRig rig="threePt" dir="t"/>
     </dgm:scene3d>
+    <dgm:sp3d/>
     <dgm:txPr/>
     <dgm:style>
       <a:lnRef idx="0">
@@ -12741,6 +12641,7 @@
       <a:camera prst="orthographicFront"/>
       <a:lightRig rig="threePt" dir="t"/>
     </dgm:scene3d>
+    <dgm:sp3d/>
     <dgm:txPr/>
     <dgm:style>
       <a:lnRef idx="2">
@@ -12760,6 +12661,7 @@
       <a:camera prst="orthographicFront"/>
       <a:lightRig rig="threePt" dir="t"/>
     </dgm:scene3d>
+    <dgm:sp3d/>
     <dgm:txPr/>
     <dgm:style>
       <a:lnRef idx="2">
@@ -12779,6 +12681,7 @@
       <a:camera prst="orthographicFront"/>
       <a:lightRig rig="threePt" dir="t"/>
     </dgm:scene3d>
+    <dgm:sp3d/>
     <dgm:txPr/>
     <dgm:style>
       <a:lnRef idx="0">
@@ -12798,6 +12701,7 @@
       <a:camera prst="orthographicFront"/>
       <a:lightRig rig="threePt" dir="t"/>
     </dgm:scene3d>
+    <dgm:sp3d/>
     <dgm:txPr/>
     <dgm:style>
       <a:lnRef idx="2">
@@ -12817,6 +12721,7 @@
       <a:camera prst="orthographicFront"/>
       <a:lightRig rig="threePt" dir="t"/>
     </dgm:scene3d>
+    <dgm:sp3d/>
     <dgm:txPr/>
     <dgm:style>
       <a:lnRef idx="2">
@@ -12836,6 +12741,7 @@
       <a:camera prst="orthographicFront"/>
       <a:lightRig rig="threePt" dir="t"/>
     </dgm:scene3d>
+    <dgm:sp3d/>
     <dgm:txPr/>
     <dgm:style>
       <a:lnRef idx="2">
@@ -12855,6 +12761,7 @@
       <a:camera prst="orthographicFront"/>
       <a:lightRig rig="threePt" dir="t"/>
     </dgm:scene3d>
+    <dgm:sp3d/>
     <dgm:txPr/>
     <dgm:style>
       <a:lnRef idx="2">
@@ -12874,6 +12781,7 @@
       <a:camera prst="orthographicFront"/>
       <a:lightRig rig="threePt" dir="t"/>
     </dgm:scene3d>
+    <dgm:sp3d/>
     <dgm:txPr/>
     <dgm:style>
       <a:lnRef idx="2">
@@ -12893,6 +12801,7 @@
       <a:camera prst="orthographicFront"/>
       <a:lightRig rig="threePt" dir="t"/>
     </dgm:scene3d>
+    <dgm:sp3d/>
     <dgm:txPr/>
     <dgm:style>
       <a:lnRef idx="2">
@@ -12912,6 +12821,7 @@
       <a:camera prst="orthographicFront"/>
       <a:lightRig rig="threePt" dir="t"/>
     </dgm:scene3d>
+    <dgm:sp3d/>
     <dgm:txPr/>
     <dgm:style>
       <a:lnRef idx="2">
@@ -12931,6 +12841,7 @@
       <a:camera prst="orthographicFront"/>
       <a:lightRig rig="threePt" dir="t"/>
     </dgm:scene3d>
+    <dgm:sp3d/>
     <dgm:txPr/>
     <dgm:style>
       <a:lnRef idx="2">
@@ -12950,6 +12861,7 @@
       <a:camera prst="orthographicFront"/>
       <a:lightRig rig="threePt" dir="t"/>
     </dgm:scene3d>
+    <dgm:sp3d/>
     <dgm:txPr/>
     <dgm:style>
       <a:lnRef idx="0">
@@ -12971,6 +12883,7 @@
       <a:camera prst="orthographicFront"/>
       <a:lightRig rig="threePt" dir="t"/>
     </dgm:scene3d>
+    <dgm:sp3d/>
     <dgm:txPr/>
     <dgm:style>
       <a:lnRef idx="2">
@@ -12992,6 +12905,7 @@
       <a:camera prst="orthographicFront"/>
       <a:lightRig rig="threePt" dir="t"/>
     </dgm:scene3d>
+    <dgm:sp3d/>
     <dgm:txPr/>
     <dgm:style>
       <a:lnRef idx="2">
@@ -13013,6 +12927,7 @@
       <a:camera prst="orthographicFront"/>
       <a:lightRig rig="threePt" dir="t"/>
     </dgm:scene3d>
+    <dgm:sp3d/>
     <dgm:txPr/>
     <dgm:style>
       <a:lnRef idx="2">
@@ -13034,6 +12949,7 @@
       <a:camera prst="orthographicFront"/>
       <a:lightRig rig="threePt" dir="t"/>
     </dgm:scene3d>
+    <dgm:sp3d/>
     <dgm:txPr/>
     <dgm:style>
       <a:lnRef idx="2">
@@ -13055,6 +12971,7 @@
       <a:camera prst="orthographicFront"/>
       <a:lightRig rig="threePt" dir="t"/>
     </dgm:scene3d>
+    <dgm:sp3d/>
     <dgm:txPr/>
     <dgm:style>
       <a:lnRef idx="2">
@@ -13076,6 +12993,7 @@
       <a:camera prst="orthographicFront"/>
       <a:lightRig rig="threePt" dir="t"/>
     </dgm:scene3d>
+    <dgm:sp3d/>
     <dgm:txPr/>
     <dgm:style>
       <a:lnRef idx="2">
@@ -13097,6 +13015,7 @@
       <a:camera prst="orthographicFront"/>
       <a:lightRig rig="threePt" dir="t"/>
     </dgm:scene3d>
+    <dgm:sp3d/>
     <dgm:txPr/>
     <dgm:style>
       <a:lnRef idx="2">
@@ -13116,6 +13035,7 @@
       <a:camera prst="orthographicFront"/>
       <a:lightRig rig="threePt" dir="t"/>
     </dgm:scene3d>
+    <dgm:sp3d/>
     <dgm:txPr/>
     <dgm:style>
       <a:lnRef idx="2">
@@ -13135,6 +13055,7 @@
       <a:camera prst="orthographicFront"/>
       <a:lightRig rig="threePt" dir="t"/>
     </dgm:scene3d>
+    <dgm:sp3d/>
     <dgm:txPr/>
     <dgm:style>
       <a:lnRef idx="2">
@@ -13154,6 +13075,7 @@
       <a:camera prst="orthographicFront"/>
       <a:lightRig rig="threePt" dir="t"/>
     </dgm:scene3d>
+    <dgm:sp3d/>
     <dgm:txPr/>
     <dgm:style>
       <a:lnRef idx="2">
@@ -13173,6 +13095,7 @@
       <a:camera prst="orthographicFront"/>
       <a:lightRig rig="threePt" dir="t"/>
     </dgm:scene3d>
+    <dgm:sp3d/>
     <dgm:txPr/>
     <dgm:style>
       <a:lnRef idx="2">
@@ -13194,6 +13117,7 @@
       <a:camera prst="orthographicFront"/>
       <a:lightRig rig="threePt" dir="t"/>
     </dgm:scene3d>
+    <dgm:sp3d/>
     <dgm:txPr/>
     <dgm:style>
       <a:lnRef idx="2">
@@ -13215,6 +13139,7 @@
       <a:camera prst="orthographicFront"/>
       <a:lightRig rig="threePt" dir="t"/>
     </dgm:scene3d>
+    <dgm:sp3d/>
     <dgm:txPr/>
     <dgm:style>
       <a:lnRef idx="2">
@@ -13236,6 +13161,7 @@
       <a:camera prst="orthographicFront"/>
       <a:lightRig rig="threePt" dir="t"/>
     </dgm:scene3d>
+    <dgm:sp3d/>
     <dgm:txPr/>
     <dgm:style>
       <a:lnRef idx="2">
@@ -13257,6 +13183,7 @@
       <a:camera prst="orthographicFront"/>
       <a:lightRig rig="threePt" dir="t"/>
     </dgm:scene3d>
+    <dgm:sp3d/>
     <dgm:txPr/>
     <dgm:style>
       <a:lnRef idx="0">
@@ -13276,6 +13203,7 @@
       <a:camera prst="orthographicFront"/>
       <a:lightRig rig="threePt" dir="t"/>
     </dgm:scene3d>
+    <dgm:sp3d/>
     <dgm:txPr/>
     <dgm:style>
       <a:lnRef idx="1">
@@ -13295,6 +13223,7 @@
       <a:camera prst="orthographicFront"/>
       <a:lightRig rig="threePt" dir="t"/>
     </dgm:scene3d>
+    <dgm:sp3d/>
     <dgm:txPr/>
     <dgm:style>
       <a:lnRef idx="0">
@@ -13316,6 +13245,7 @@
       <a:camera prst="orthographicFront"/>
       <a:lightRig rig="threePt" dir="t"/>
     </dgm:scene3d>
+    <dgm:sp3d/>
     <dgm:txPr/>
     <dgm:style>
       <a:lnRef idx="2">
@@ -13335,6 +13265,7 @@
       <a:camera prst="orthographicFront"/>
       <a:lightRig rig="threePt" dir="t"/>
     </dgm:scene3d>
+    <dgm:sp3d/>
     <dgm:txPr/>
     <dgm:style>
       <a:lnRef idx="2">
@@ -13354,6 +13285,7 @@
       <a:camera prst="orthographicFront"/>
       <a:lightRig rig="threePt" dir="t"/>
     </dgm:scene3d>
+    <dgm:sp3d/>
     <dgm:txPr/>
     <dgm:style>
       <a:lnRef idx="2">
@@ -13373,6 +13305,7 @@
       <a:camera prst="orthographicFront"/>
       <a:lightRig rig="threePt" dir="t"/>
     </dgm:scene3d>
+    <dgm:sp3d/>
     <dgm:txPr/>
     <dgm:style>
       <a:lnRef idx="1">
@@ -13392,6 +13325,7 @@
       <a:camera prst="orthographicFront"/>
       <a:lightRig rig="threePt" dir="t"/>
     </dgm:scene3d>
+    <dgm:sp3d/>
     <dgm:txPr/>
     <dgm:style>
       <a:lnRef idx="0">
@@ -13411,6 +13345,7 @@
       <a:camera prst="orthographicFront"/>
       <a:lightRig rig="threePt" dir="t"/>
     </dgm:scene3d>
+    <dgm:sp3d/>
     <dgm:txPr/>
     <dgm:style>
       <a:lnRef idx="2">
@@ -13431,7 +13366,7 @@
 </file>
 
 <file path=ppt/diagrams/quickStyle2.xml><?xml version="1.0" encoding="utf-8"?>
-<dgm:styleDef xmlns:dgm="http://schemas.openxmlformats.org/drawingml/2006/diagram" xmlns:a="http://schemas.openxmlformats.org/drawingml/2006/main" uniqueId="urn:microsoft.com/office/officeart/2005/8/quickstyle/simple1">
+<dgm:styleDef xmlns:dgm="http://schemas.openxmlformats.org/drawingml/2006/diagram" xmlns:a="http://schemas.openxmlformats.org/drawingml/2006/main" uniqueId="urn:microsoft.com/office/officeart/2005/8/quickstyle/simple1#2">
   <dgm:title val=""/>
   <dgm:desc val=""/>
   <dgm:catLst>
@@ -13446,6 +13381,7 @@
       <a:camera prst="orthographicFront"/>
       <a:lightRig rig="threePt" dir="t"/>
     </dgm:scene3d>
+    <dgm:sp3d/>
     <dgm:txPr/>
     <dgm:style>
       <a:lnRef idx="2">
@@ -13465,6 +13401,7 @@
       <a:camera prst="orthographicFront"/>
       <a:lightRig rig="threePt" dir="t"/>
     </dgm:scene3d>
+    <dgm:sp3d/>
     <dgm:txPr/>
     <dgm:style>
       <a:lnRef idx="2">
@@ -13484,6 +13421,7 @@
       <a:camera prst="orthographicFront"/>
       <a:lightRig rig="threePt" dir="t"/>
     </dgm:scene3d>
+    <dgm:sp3d/>
     <dgm:txPr/>
     <dgm:style>
       <a:lnRef idx="2">
@@ -13503,6 +13441,7 @@
       <a:camera prst="orthographicFront"/>
       <a:lightRig rig="threePt" dir="t"/>
     </dgm:scene3d>
+    <dgm:sp3d/>
     <dgm:txPr/>
     <dgm:style>
       <a:lnRef idx="2">
@@ -13524,6 +13463,7 @@
       <a:camera prst="orthographicFront"/>
       <a:lightRig rig="threePt" dir="t"/>
     </dgm:scene3d>
+    <dgm:sp3d/>
     <dgm:txPr/>
     <dgm:style>
       <a:lnRef idx="2">
@@ -13545,6 +13485,7 @@
       <a:camera prst="orthographicFront"/>
       <a:lightRig rig="threePt" dir="t"/>
     </dgm:scene3d>
+    <dgm:sp3d/>
     <dgm:txPr/>
     <dgm:style>
       <a:lnRef idx="2">
@@ -13566,6 +13507,7 @@
       <a:camera prst="orthographicFront"/>
       <a:lightRig rig="threePt" dir="t"/>
     </dgm:scene3d>
+    <dgm:sp3d/>
     <dgm:txPr/>
     <dgm:style>
       <a:lnRef idx="2">
@@ -13587,6 +13529,7 @@
       <a:camera prst="orthographicFront"/>
       <a:lightRig rig="threePt" dir="t"/>
     </dgm:scene3d>
+    <dgm:sp3d/>
     <dgm:txPr/>
     <dgm:style>
       <a:lnRef idx="2">
@@ -13608,6 +13551,7 @@
       <a:camera prst="orthographicFront"/>
       <a:lightRig rig="threePt" dir="t"/>
     </dgm:scene3d>
+    <dgm:sp3d/>
     <dgm:txPr/>
     <dgm:style>
       <a:lnRef idx="2">
@@ -13629,6 +13573,7 @@
       <a:camera prst="orthographicFront"/>
       <a:lightRig rig="threePt" dir="t"/>
     </dgm:scene3d>
+    <dgm:sp3d/>
     <dgm:txPr/>
     <dgm:style>
       <a:lnRef idx="2">
@@ -13648,6 +13593,7 @@
       <a:camera prst="orthographicFront"/>
       <a:lightRig rig="threePt" dir="t"/>
     </dgm:scene3d>
+    <dgm:sp3d/>
     <dgm:txPr/>
     <dgm:style>
       <a:lnRef idx="2">
@@ -13667,6 +13613,7 @@
       <a:camera prst="orthographicFront"/>
       <a:lightRig rig="threePt" dir="t"/>
     </dgm:scene3d>
+    <dgm:sp3d/>
     <dgm:txPr/>
     <dgm:style>
       <a:lnRef idx="2">
@@ -13686,6 +13633,7 @@
       <a:camera prst="orthographicFront"/>
       <a:lightRig rig="threePt" dir="t"/>
     </dgm:scene3d>
+    <dgm:sp3d/>
     <dgm:txPr/>
     <dgm:style>
       <a:lnRef idx="0">
@@ -13705,6 +13653,7 @@
       <a:camera prst="orthographicFront"/>
       <a:lightRig rig="threePt" dir="t"/>
     </dgm:scene3d>
+    <dgm:sp3d/>
     <dgm:txPr/>
     <dgm:style>
       <a:lnRef idx="0">
@@ -13726,6 +13675,7 @@
       <a:camera prst="orthographicFront"/>
       <a:lightRig rig="threePt" dir="t"/>
     </dgm:scene3d>
+    <dgm:sp3d/>
     <dgm:txPr/>
     <dgm:style>
       <a:lnRef idx="2">
@@ -13745,6 +13695,7 @@
       <a:camera prst="orthographicFront"/>
       <a:lightRig rig="threePt" dir="t"/>
     </dgm:scene3d>
+    <dgm:sp3d/>
     <dgm:txPr/>
     <dgm:style>
       <a:lnRef idx="2">
@@ -13764,6 +13715,7 @@
       <a:camera prst="orthographicFront"/>
       <a:lightRig rig="threePt" dir="t"/>
     </dgm:scene3d>
+    <dgm:sp3d/>
     <dgm:txPr/>
     <dgm:style>
       <a:lnRef idx="0">
@@ -13783,6 +13735,7 @@
       <a:camera prst="orthographicFront"/>
       <a:lightRig rig="threePt" dir="t"/>
     </dgm:scene3d>
+    <dgm:sp3d/>
     <dgm:txPr/>
     <dgm:style>
       <a:lnRef idx="2">
@@ -13802,6 +13755,7 @@
       <a:camera prst="orthographicFront"/>
       <a:lightRig rig="threePt" dir="t"/>
     </dgm:scene3d>
+    <dgm:sp3d/>
     <dgm:txPr/>
     <dgm:style>
       <a:lnRef idx="2">
@@ -13821,6 +13775,7 @@
       <a:camera prst="orthographicFront"/>
       <a:lightRig rig="threePt" dir="t"/>
     </dgm:scene3d>
+    <dgm:sp3d/>
     <dgm:txPr/>
     <dgm:style>
       <a:lnRef idx="2">
@@ -13840,6 +13795,7 @@
       <a:camera prst="orthographicFront"/>
       <a:lightRig rig="threePt" dir="t"/>
     </dgm:scene3d>
+    <dgm:sp3d/>
     <dgm:txPr/>
     <dgm:style>
       <a:lnRef idx="2">
@@ -13859,6 +13815,7 @@
       <a:camera prst="orthographicFront"/>
       <a:lightRig rig="threePt" dir="t"/>
     </dgm:scene3d>
+    <dgm:sp3d/>
     <dgm:txPr/>
     <dgm:style>
       <a:lnRef idx="2">
@@ -13878,6 +13835,7 @@
       <a:camera prst="orthographicFront"/>
       <a:lightRig rig="threePt" dir="t"/>
     </dgm:scene3d>
+    <dgm:sp3d/>
     <dgm:txPr/>
     <dgm:style>
       <a:lnRef idx="2">
@@ -13897,6 +13855,7 @@
       <a:camera prst="orthographicFront"/>
       <a:lightRig rig="threePt" dir="t"/>
     </dgm:scene3d>
+    <dgm:sp3d/>
     <dgm:txPr/>
     <dgm:style>
       <a:lnRef idx="2">
@@ -13916,6 +13875,7 @@
       <a:camera prst="orthographicFront"/>
       <a:lightRig rig="threePt" dir="t"/>
     </dgm:scene3d>
+    <dgm:sp3d/>
     <dgm:txPr/>
     <dgm:style>
       <a:lnRef idx="2">
@@ -13935,6 +13895,7 @@
       <a:camera prst="orthographicFront"/>
       <a:lightRig rig="threePt" dir="t"/>
     </dgm:scene3d>
+    <dgm:sp3d/>
     <dgm:txPr/>
     <dgm:style>
       <a:lnRef idx="0">
@@ -13956,6 +13917,7 @@
       <a:camera prst="orthographicFront"/>
       <a:lightRig rig="threePt" dir="t"/>
     </dgm:scene3d>
+    <dgm:sp3d/>
     <dgm:txPr/>
     <dgm:style>
       <a:lnRef idx="2">
@@ -13977,6 +13939,7 @@
       <a:camera prst="orthographicFront"/>
       <a:lightRig rig="threePt" dir="t"/>
     </dgm:scene3d>
+    <dgm:sp3d/>
     <dgm:txPr/>
     <dgm:style>
       <a:lnRef idx="2">
@@ -13998,6 +13961,7 @@
       <a:camera prst="orthographicFront"/>
       <a:lightRig rig="threePt" dir="t"/>
     </dgm:scene3d>
+    <dgm:sp3d/>
     <dgm:txPr/>
     <dgm:style>
       <a:lnRef idx="2">
@@ -14019,6 +13983,7 @@
       <a:camera prst="orthographicFront"/>
       <a:lightRig rig="threePt" dir="t"/>
     </dgm:scene3d>
+    <dgm:sp3d/>
     <dgm:txPr/>
     <dgm:style>
       <a:lnRef idx="2">
@@ -14040,6 +14005,7 @@
       <a:camera prst="orthographicFront"/>
       <a:lightRig rig="threePt" dir="t"/>
     </dgm:scene3d>
+    <dgm:sp3d/>
     <dgm:txPr/>
     <dgm:style>
       <a:lnRef idx="2">
@@ -14061,6 +14027,7 @@
       <a:camera prst="orthographicFront"/>
       <a:lightRig rig="threePt" dir="t"/>
     </dgm:scene3d>
+    <dgm:sp3d/>
     <dgm:txPr/>
     <dgm:style>
       <a:lnRef idx="2">
@@ -14082,6 +14049,7 @@
       <a:camera prst="orthographicFront"/>
       <a:lightRig rig="threePt" dir="t"/>
     </dgm:scene3d>
+    <dgm:sp3d/>
     <dgm:txPr/>
     <dgm:style>
       <a:lnRef idx="2">
@@ -14101,6 +14069,7 @@
       <a:camera prst="orthographicFront"/>
       <a:lightRig rig="threePt" dir="t"/>
     </dgm:scene3d>
+    <dgm:sp3d/>
     <dgm:txPr/>
     <dgm:style>
       <a:lnRef idx="2">
@@ -14120,6 +14089,7 @@
       <a:camera prst="orthographicFront"/>
       <a:lightRig rig="threePt" dir="t"/>
     </dgm:scene3d>
+    <dgm:sp3d/>
     <dgm:txPr/>
     <dgm:style>
       <a:lnRef idx="2">
@@ -14139,6 +14109,7 @@
       <a:camera prst="orthographicFront"/>
       <a:lightRig rig="threePt" dir="t"/>
     </dgm:scene3d>
+    <dgm:sp3d/>
     <dgm:txPr/>
     <dgm:style>
       <a:lnRef idx="2">
@@ -14158,6 +14129,7 @@
       <a:camera prst="orthographicFront"/>
       <a:lightRig rig="threePt" dir="t"/>
     </dgm:scene3d>
+    <dgm:sp3d/>
     <dgm:txPr/>
     <dgm:style>
       <a:lnRef idx="2">
@@ -14179,6 +14151,7 @@
       <a:camera prst="orthographicFront"/>
       <a:lightRig rig="threePt" dir="t"/>
     </dgm:scene3d>
+    <dgm:sp3d/>
     <dgm:txPr/>
     <dgm:style>
       <a:lnRef idx="2">
@@ -14200,6 +14173,7 @@
       <a:camera prst="orthographicFront"/>
       <a:lightRig rig="threePt" dir="t"/>
     </dgm:scene3d>
+    <dgm:sp3d/>
     <dgm:txPr/>
     <dgm:style>
       <a:lnRef idx="2">
@@ -14221,6 +14195,7 @@
       <a:camera prst="orthographicFront"/>
       <a:lightRig rig="threePt" dir="t"/>
     </dgm:scene3d>
+    <dgm:sp3d/>
     <dgm:txPr/>
     <dgm:style>
       <a:lnRef idx="2">
@@ -14242,6 +14217,7 @@
       <a:camera prst="orthographicFront"/>
       <a:lightRig rig="threePt" dir="t"/>
     </dgm:scene3d>
+    <dgm:sp3d/>
     <dgm:txPr/>
     <dgm:style>
       <a:lnRef idx="0">
@@ -14261,6 +14237,7 @@
       <a:camera prst="orthographicFront"/>
       <a:lightRig rig="threePt" dir="t"/>
     </dgm:scene3d>
+    <dgm:sp3d/>
     <dgm:txPr/>
     <dgm:style>
       <a:lnRef idx="1">
@@ -14280,6 +14257,7 @@
       <a:camera prst="orthographicFront"/>
       <a:lightRig rig="threePt" dir="t"/>
     </dgm:scene3d>
+    <dgm:sp3d/>
     <dgm:txPr/>
     <dgm:style>
       <a:lnRef idx="0">
@@ -14301,6 +14279,7 @@
       <a:camera prst="orthographicFront"/>
       <a:lightRig rig="threePt" dir="t"/>
     </dgm:scene3d>
+    <dgm:sp3d/>
     <dgm:txPr/>
     <dgm:style>
       <a:lnRef idx="2">
@@ -14320,6 +14299,7 @@
       <a:camera prst="orthographicFront"/>
       <a:lightRig rig="threePt" dir="t"/>
     </dgm:scene3d>
+    <dgm:sp3d/>
     <dgm:txPr/>
     <dgm:style>
       <a:lnRef idx="2">
@@ -14339,6 +14319,7 @@
       <a:camera prst="orthographicFront"/>
       <a:lightRig rig="threePt" dir="t"/>
     </dgm:scene3d>
+    <dgm:sp3d/>
     <dgm:txPr/>
     <dgm:style>
       <a:lnRef idx="2">
@@ -14358,6 +14339,7 @@
       <a:camera prst="orthographicFront"/>
       <a:lightRig rig="threePt" dir="t"/>
     </dgm:scene3d>
+    <dgm:sp3d/>
     <dgm:txPr/>
     <dgm:style>
       <a:lnRef idx="1">
@@ -14377,6 +14359,7 @@
       <a:camera prst="orthographicFront"/>
       <a:lightRig rig="threePt" dir="t"/>
     </dgm:scene3d>
+    <dgm:sp3d/>
     <dgm:txPr/>
     <dgm:style>
       <a:lnRef idx="0">
@@ -14396,6 +14379,7 @@
       <a:camera prst="orthographicFront"/>
       <a:lightRig rig="threePt" dir="t"/>
     </dgm:scene3d>
+    <dgm:sp3d/>
     <dgm:txPr/>
     <dgm:style>
       <a:lnRef idx="2">
@@ -14416,7 +14400,7 @@
 </file>
 
 <file path=ppt/diagrams/quickStyle3.xml><?xml version="1.0" encoding="utf-8"?>
-<dgm:styleDef xmlns:dgm="http://schemas.openxmlformats.org/drawingml/2006/diagram" xmlns:a="http://schemas.openxmlformats.org/drawingml/2006/main" uniqueId="urn:microsoft.com/office/officeart/2005/8/quickstyle/simple1">
+<dgm:styleDef xmlns:dgm="http://schemas.openxmlformats.org/drawingml/2006/diagram" xmlns:a="http://schemas.openxmlformats.org/drawingml/2006/main" uniqueId="urn:microsoft.com/office/officeart/2005/8/quickstyle/simple1#3">
   <dgm:title val=""/>
   <dgm:desc val=""/>
   <dgm:catLst>
@@ -14431,6 +14415,7 @@
       <a:camera prst="orthographicFront"/>
       <a:lightRig rig="threePt" dir="t"/>
     </dgm:scene3d>
+    <dgm:sp3d/>
     <dgm:txPr/>
     <dgm:style>
       <a:lnRef idx="2">
@@ -14450,6 +14435,7 @@
       <a:camera prst="orthographicFront"/>
       <a:lightRig rig="threePt" dir="t"/>
     </dgm:scene3d>
+    <dgm:sp3d/>
     <dgm:txPr/>
     <dgm:style>
       <a:lnRef idx="2">
@@ -14469,6 +14455,7 @@
       <a:camera prst="orthographicFront"/>
       <a:lightRig rig="threePt" dir="t"/>
     </dgm:scene3d>
+    <dgm:sp3d/>
     <dgm:txPr/>
     <dgm:style>
       <a:lnRef idx="2">
@@ -14488,6 +14475,7 @@
       <a:camera prst="orthographicFront"/>
       <a:lightRig rig="threePt" dir="t"/>
     </dgm:scene3d>
+    <dgm:sp3d/>
     <dgm:txPr/>
     <dgm:style>
       <a:lnRef idx="2">
@@ -14509,6 +14497,7 @@
       <a:camera prst="orthographicFront"/>
       <a:lightRig rig="threePt" dir="t"/>
     </dgm:scene3d>
+    <dgm:sp3d/>
     <dgm:txPr/>
     <dgm:style>
       <a:lnRef idx="2">
@@ -14530,6 +14519,7 @@
       <a:camera prst="orthographicFront"/>
       <a:lightRig rig="threePt" dir="t"/>
     </dgm:scene3d>
+    <dgm:sp3d/>
     <dgm:txPr/>
     <dgm:style>
       <a:lnRef idx="2">
@@ -14551,6 +14541,7 @@
       <a:camera prst="orthographicFront"/>
       <a:lightRig rig="threePt" dir="t"/>
     </dgm:scene3d>
+    <dgm:sp3d/>
     <dgm:txPr/>
     <dgm:style>
       <a:lnRef idx="2">
@@ -14572,6 +14563,7 @@
       <a:camera prst="orthographicFront"/>
       <a:lightRig rig="threePt" dir="t"/>
     </dgm:scene3d>
+    <dgm:sp3d/>
     <dgm:txPr/>
     <dgm:style>
       <a:lnRef idx="2">
@@ -14593,6 +14585,7 @@
       <a:camera prst="orthographicFront"/>
       <a:lightRig rig="threePt" dir="t"/>
     </dgm:scene3d>
+    <dgm:sp3d/>
     <dgm:txPr/>
     <dgm:style>
       <a:lnRef idx="2">
@@ -14614,6 +14607,7 @@
       <a:camera prst="orthographicFront"/>
       <a:lightRig rig="threePt" dir="t"/>
     </dgm:scene3d>
+    <dgm:sp3d/>
     <dgm:txPr/>
     <dgm:style>
       <a:lnRef idx="2">
@@ -14633,6 +14627,7 @@
       <a:camera prst="orthographicFront"/>
       <a:lightRig rig="threePt" dir="t"/>
     </dgm:scene3d>
+    <dgm:sp3d/>
     <dgm:txPr/>
     <dgm:style>
       <a:lnRef idx="2">
@@ -14652,6 +14647,7 @@
       <a:camera prst="orthographicFront"/>
       <a:lightRig rig="threePt" dir="t"/>
     </dgm:scene3d>
+    <dgm:sp3d/>
     <dgm:txPr/>
     <dgm:style>
       <a:lnRef idx="2">
@@ -14671,6 +14667,7 @@
       <a:camera prst="orthographicFront"/>
       <a:lightRig rig="threePt" dir="t"/>
     </dgm:scene3d>
+    <dgm:sp3d/>
     <dgm:txPr/>
     <dgm:style>
       <a:lnRef idx="0">
@@ -14690,6 +14687,7 @@
       <a:camera prst="orthographicFront"/>
       <a:lightRig rig="threePt" dir="t"/>
     </dgm:scene3d>
+    <dgm:sp3d/>
     <dgm:txPr/>
     <dgm:style>
       <a:lnRef idx="0">
@@ -14711,6 +14709,7 @@
       <a:camera prst="orthographicFront"/>
       <a:lightRig rig="threePt" dir="t"/>
     </dgm:scene3d>
+    <dgm:sp3d/>
     <dgm:txPr/>
     <dgm:style>
       <a:lnRef idx="2">
@@ -14730,6 +14729,7 @@
       <a:camera prst="orthographicFront"/>
       <a:lightRig rig="threePt" dir="t"/>
     </dgm:scene3d>
+    <dgm:sp3d/>
     <dgm:txPr/>
     <dgm:style>
       <a:lnRef idx="2">
@@ -14749,6 +14749,7 @@
       <a:camera prst="orthographicFront"/>
       <a:lightRig rig="threePt" dir="t"/>
     </dgm:scene3d>
+    <dgm:sp3d/>
     <dgm:txPr/>
     <dgm:style>
       <a:lnRef idx="0">
@@ -14768,6 +14769,7 @@
       <a:camera prst="orthographicFront"/>
       <a:lightRig rig="threePt" dir="t"/>
     </dgm:scene3d>
+    <dgm:sp3d/>
     <dgm:txPr/>
     <dgm:style>
       <a:lnRef idx="2">
@@ -14787,6 +14789,7 @@
       <a:camera prst="orthographicFront"/>
       <a:lightRig rig="threePt" dir="t"/>
     </dgm:scene3d>
+    <dgm:sp3d/>
     <dgm:txPr/>
     <dgm:style>
       <a:lnRef idx="2">
@@ -14806,6 +14809,7 @@
       <a:camera prst="orthographicFront"/>
       <a:lightRig rig="threePt" dir="t"/>
     </dgm:scene3d>
+    <dgm:sp3d/>
     <dgm:txPr/>
     <dgm:style>
       <a:lnRef idx="2">
@@ -14825,6 +14829,7 @@
       <a:camera prst="orthographicFront"/>
       <a:lightRig rig="threePt" dir="t"/>
     </dgm:scene3d>
+    <dgm:sp3d/>
     <dgm:txPr/>
     <dgm:style>
       <a:lnRef idx="2">
@@ -14844,6 +14849,7 @@
       <a:camera prst="orthographicFront"/>
       <a:lightRig rig="threePt" dir="t"/>
     </dgm:scene3d>
+    <dgm:sp3d/>
     <dgm:txPr/>
     <dgm:style>
       <a:lnRef idx="2">
@@ -14863,6 +14869,7 @@
       <a:camera prst="orthographicFront"/>
       <a:lightRig rig="threePt" dir="t"/>
     </dgm:scene3d>
+    <dgm:sp3d/>
     <dgm:txPr/>
     <dgm:style>
       <a:lnRef idx="2">
@@ -14882,6 +14889,7 @@
       <a:camera prst="orthographicFront"/>
       <a:lightRig rig="threePt" dir="t"/>
     </dgm:scene3d>
+    <dgm:sp3d/>
     <dgm:txPr/>
     <dgm:style>
       <a:lnRef idx="2">
@@ -14901,6 +14909,7 @@
       <a:camera prst="orthographicFront"/>
       <a:lightRig rig="threePt" dir="t"/>
     </dgm:scene3d>
+    <dgm:sp3d/>
     <dgm:txPr/>
     <dgm:style>
       <a:lnRef idx="2">
@@ -14920,6 +14929,7 @@
       <a:camera prst="orthographicFront"/>
       <a:lightRig rig="threePt" dir="t"/>
     </dgm:scene3d>
+    <dgm:sp3d/>
     <dgm:txPr/>
     <dgm:style>
       <a:lnRef idx="0">
@@ -14941,6 +14951,7 @@
       <a:camera prst="orthographicFront"/>
       <a:lightRig rig="threePt" dir="t"/>
     </dgm:scene3d>
+    <dgm:sp3d/>
     <dgm:txPr/>
     <dgm:style>
       <a:lnRef idx="2">
@@ -14962,6 +14973,7 @@
       <a:camera prst="orthographicFront"/>
       <a:lightRig rig="threePt" dir="t"/>
     </dgm:scene3d>
+    <dgm:sp3d/>
     <dgm:txPr/>
     <dgm:style>
       <a:lnRef idx="2">
@@ -14983,6 +14995,7 @@
       <a:camera prst="orthographicFront"/>
       <a:lightRig rig="threePt" dir="t"/>
     </dgm:scene3d>
+    <dgm:sp3d/>
     <dgm:txPr/>
     <dgm:style>
       <a:lnRef idx="2">
@@ -15004,6 +15017,7 @@
       <a:camera prst="orthographicFront"/>
       <a:lightRig rig="threePt" dir="t"/>
     </dgm:scene3d>
+    <dgm:sp3d/>
     <dgm:txPr/>
     <dgm:style>
       <a:lnRef idx="2">
@@ -15025,6 +15039,7 @@
       <a:camera prst="orthographicFront"/>
       <a:lightRig rig="threePt" dir="t"/>
     </dgm:scene3d>
+    <dgm:sp3d/>
     <dgm:txPr/>
     <dgm:style>
       <a:lnRef idx="2">
@@ -15046,6 +15061,7 @@
       <a:camera prst="orthographicFront"/>
       <a:lightRig rig="threePt" dir="t"/>
     </dgm:scene3d>
+    <dgm:sp3d/>
     <dgm:txPr/>
     <dgm:style>
       <a:lnRef idx="2">
@@ -15067,6 +15083,7 @@
       <a:camera prst="orthographicFront"/>
       <a:lightRig rig="threePt" dir="t"/>
     </dgm:scene3d>
+    <dgm:sp3d/>
     <dgm:txPr/>
     <dgm:style>
       <a:lnRef idx="2">
@@ -15086,6 +15103,7 @@
       <a:camera prst="orthographicFront"/>
       <a:lightRig rig="threePt" dir="t"/>
     </dgm:scene3d>
+    <dgm:sp3d/>
     <dgm:txPr/>
     <dgm:style>
       <a:lnRef idx="2">
@@ -15105,6 +15123,7 @@
       <a:camera prst="orthographicFront"/>
       <a:lightRig rig="threePt" dir="t"/>
     </dgm:scene3d>
+    <dgm:sp3d/>
     <dgm:txPr/>
     <dgm:style>
       <a:lnRef idx="2">
@@ -15124,6 +15143,7 @@
       <a:camera prst="orthographicFront"/>
       <a:lightRig rig="threePt" dir="t"/>
     </dgm:scene3d>
+    <dgm:sp3d/>
     <dgm:txPr/>
     <dgm:style>
       <a:lnRef idx="2">
@@ -15143,6 +15163,7 @@
       <a:camera prst="orthographicFront"/>
       <a:lightRig rig="threePt" dir="t"/>
     </dgm:scene3d>
+    <dgm:sp3d/>
     <dgm:txPr/>
     <dgm:style>
       <a:lnRef idx="2">
@@ -15164,6 +15185,7 @@
       <a:camera prst="orthographicFront"/>
       <a:lightRig rig="threePt" dir="t"/>
     </dgm:scene3d>
+    <dgm:sp3d/>
     <dgm:txPr/>
     <dgm:style>
       <a:lnRef idx="2">
@@ -15185,6 +15207,7 @@
       <a:camera prst="orthographicFront"/>
       <a:lightRig rig="threePt" dir="t"/>
     </dgm:scene3d>
+    <dgm:sp3d/>
     <dgm:txPr/>
     <dgm:style>
       <a:lnRef idx="2">
@@ -15206,6 +15229,7 @@
       <a:camera prst="orthographicFront"/>
       <a:lightRig rig="threePt" dir="t"/>
     </dgm:scene3d>
+    <dgm:sp3d/>
     <dgm:txPr/>
     <dgm:style>
       <a:lnRef idx="2">
@@ -15227,6 +15251,7 @@
       <a:camera prst="orthographicFront"/>
       <a:lightRig rig="threePt" dir="t"/>
     </dgm:scene3d>
+    <dgm:sp3d/>
     <dgm:txPr/>
     <dgm:style>
       <a:lnRef idx="0">
@@ -15246,6 +15271,7 @@
       <a:camera prst="orthographicFront"/>
       <a:lightRig rig="threePt" dir="t"/>
     </dgm:scene3d>
+    <dgm:sp3d/>
     <dgm:txPr/>
     <dgm:style>
       <a:lnRef idx="1">
@@ -15265,6 +15291,7 @@
       <a:camera prst="orthographicFront"/>
       <a:lightRig rig="threePt" dir="t"/>
     </dgm:scene3d>
+    <dgm:sp3d/>
     <dgm:txPr/>
     <dgm:style>
       <a:lnRef idx="0">
@@ -15286,6 +15313,7 @@
       <a:camera prst="orthographicFront"/>
       <a:lightRig rig="threePt" dir="t"/>
     </dgm:scene3d>
+    <dgm:sp3d/>
     <dgm:txPr/>
     <dgm:style>
       <a:lnRef idx="2">
@@ -15305,6 +15333,7 @@
       <a:camera prst="orthographicFront"/>
       <a:lightRig rig="threePt" dir="t"/>
     </dgm:scene3d>
+    <dgm:sp3d/>
     <dgm:txPr/>
     <dgm:style>
       <a:lnRef idx="2">
@@ -15324,6 +15353,7 @@
       <a:camera prst="orthographicFront"/>
       <a:lightRig rig="threePt" dir="t"/>
     </dgm:scene3d>
+    <dgm:sp3d/>
     <dgm:txPr/>
     <dgm:style>
       <a:lnRef idx="2">
@@ -15343,6 +15373,7 @@
       <a:camera prst="orthographicFront"/>
       <a:lightRig rig="threePt" dir="t"/>
     </dgm:scene3d>
+    <dgm:sp3d/>
     <dgm:txPr/>
     <dgm:style>
       <a:lnRef idx="1">
@@ -15362,6 +15393,7 @@
       <a:camera prst="orthographicFront"/>
       <a:lightRig rig="threePt" dir="t"/>
     </dgm:scene3d>
+    <dgm:sp3d/>
     <dgm:txPr/>
     <dgm:style>
       <a:lnRef idx="0">
@@ -15381,6 +15413,7 @@
       <a:camera prst="orthographicFront"/>
       <a:lightRig rig="threePt" dir="t"/>
     </dgm:scene3d>
+    <dgm:sp3d/>
     <dgm:txPr/>
     <dgm:style>
       <a:lnRef idx="2">
@@ -15401,7 +15434,7 @@
 </file>
 
 <file path=ppt/diagrams/quickStyle4.xml><?xml version="1.0" encoding="utf-8"?>
-<dgm:styleDef xmlns:dgm="http://schemas.openxmlformats.org/drawingml/2006/diagram" xmlns:a="http://schemas.openxmlformats.org/drawingml/2006/main" uniqueId="urn:microsoft.com/office/officeart/2005/8/quickstyle/simple1">
+<dgm:styleDef xmlns:dgm="http://schemas.openxmlformats.org/drawingml/2006/diagram" xmlns:a="http://schemas.openxmlformats.org/drawingml/2006/main" uniqueId="urn:microsoft.com/office/officeart/2005/8/quickstyle/simple1#4">
   <dgm:title val=""/>
   <dgm:desc val=""/>
   <dgm:catLst>
@@ -15416,6 +15449,7 @@
       <a:camera prst="orthographicFront"/>
       <a:lightRig rig="threePt" dir="t"/>
     </dgm:scene3d>
+    <dgm:sp3d/>
     <dgm:txPr/>
     <dgm:style>
       <a:lnRef idx="2">
@@ -15435,6 +15469,7 @@
       <a:camera prst="orthographicFront"/>
       <a:lightRig rig="threePt" dir="t"/>
     </dgm:scene3d>
+    <dgm:sp3d/>
     <dgm:txPr/>
     <dgm:style>
       <a:lnRef idx="2">
@@ -15454,6 +15489,7 @@
       <a:camera prst="orthographicFront"/>
       <a:lightRig rig="threePt" dir="t"/>
     </dgm:scene3d>
+    <dgm:sp3d/>
     <dgm:txPr/>
     <dgm:style>
       <a:lnRef idx="2">
@@ -15473,6 +15509,7 @@
       <a:camera prst="orthographicFront"/>
       <a:lightRig rig="threePt" dir="t"/>
     </dgm:scene3d>
+    <dgm:sp3d/>
     <dgm:txPr/>
     <dgm:style>
       <a:lnRef idx="2">
@@ -15494,6 +15531,7 @@
       <a:camera prst="orthographicFront"/>
       <a:lightRig rig="threePt" dir="t"/>
     </dgm:scene3d>
+    <dgm:sp3d/>
     <dgm:txPr/>
     <dgm:style>
       <a:lnRef idx="2">
@@ -15515,6 +15553,7 @@
       <a:camera prst="orthographicFront"/>
       <a:lightRig rig="threePt" dir="t"/>
     </dgm:scene3d>
+    <dgm:sp3d/>
     <dgm:txPr/>
     <dgm:style>
       <a:lnRef idx="2">
@@ -15536,6 +15575,7 @@
       <a:camera prst="orthographicFront"/>
       <a:lightRig rig="threePt" dir="t"/>
     </dgm:scene3d>
+    <dgm:sp3d/>
     <dgm:txPr/>
     <dgm:style>
       <a:lnRef idx="2">
@@ -15557,6 +15597,7 @@
       <a:camera prst="orthographicFront"/>
       <a:lightRig rig="threePt" dir="t"/>
     </dgm:scene3d>
+    <dgm:sp3d/>
     <dgm:txPr/>
     <dgm:style>
       <a:lnRef idx="2">
@@ -15578,6 +15619,7 @@
       <a:camera prst="orthographicFront"/>
       <a:lightRig rig="threePt" dir="t"/>
     </dgm:scene3d>
+    <dgm:sp3d/>
     <dgm:txPr/>
     <dgm:style>
       <a:lnRef idx="2">
@@ -15599,6 +15641,7 @@
       <a:camera prst="orthographicFront"/>
       <a:lightRig rig="threePt" dir="t"/>
     </dgm:scene3d>
+    <dgm:sp3d/>
     <dgm:txPr/>
     <dgm:style>
       <a:lnRef idx="2">
@@ -15618,6 +15661,7 @@
       <a:camera prst="orthographicFront"/>
       <a:lightRig rig="threePt" dir="t"/>
     </dgm:scene3d>
+    <dgm:sp3d/>
     <dgm:txPr/>
     <dgm:style>
       <a:lnRef idx="2">
@@ -15637,6 +15681,7 @@
       <a:camera prst="orthographicFront"/>
       <a:lightRig rig="threePt" dir="t"/>
     </dgm:scene3d>
+    <dgm:sp3d/>
     <dgm:txPr/>
     <dgm:style>
       <a:lnRef idx="2">
@@ -15656,6 +15701,7 @@
       <a:camera prst="orthographicFront"/>
       <a:lightRig rig="threePt" dir="t"/>
     </dgm:scene3d>
+    <dgm:sp3d/>
     <dgm:txPr/>
     <dgm:style>
       <a:lnRef idx="0">
@@ -15675,6 +15721,7 @@
       <a:camera prst="orthographicFront"/>
       <a:lightRig rig="threePt" dir="t"/>
     </dgm:scene3d>
+    <dgm:sp3d/>
     <dgm:txPr/>
     <dgm:style>
       <a:lnRef idx="0">
@@ -15696,6 +15743,7 @@
       <a:camera prst="orthographicFront"/>
       <a:lightRig rig="threePt" dir="t"/>
     </dgm:scene3d>
+    <dgm:sp3d/>
     <dgm:txPr/>
     <dgm:style>
       <a:lnRef idx="2">
@@ -15715,6 +15763,7 @@
       <a:camera prst="orthographicFront"/>
       <a:lightRig rig="threePt" dir="t"/>
     </dgm:scene3d>
+    <dgm:sp3d/>
     <dgm:txPr/>
     <dgm:style>
       <a:lnRef idx="2">
@@ -15734,6 +15783,7 @@
       <a:camera prst="orthographicFront"/>
       <a:lightRig rig="threePt" dir="t"/>
     </dgm:scene3d>
+    <dgm:sp3d/>
     <dgm:txPr/>
     <dgm:style>
       <a:lnRef idx="0">
@@ -15753,6 +15803,7 @@
       <a:camera prst="orthographicFront"/>
       <a:lightRig rig="threePt" dir="t"/>
     </dgm:scene3d>
+    <dgm:sp3d/>
     <dgm:txPr/>
     <dgm:style>
       <a:lnRef idx="2">
@@ -15772,6 +15823,7 @@
       <a:camera prst="orthographicFront"/>
       <a:lightRig rig="threePt" dir="t"/>
     </dgm:scene3d>
+    <dgm:sp3d/>
     <dgm:txPr/>
     <dgm:style>
       <a:lnRef idx="2">
@@ -15791,6 +15843,7 @@
       <a:camera prst="orthographicFront"/>
       <a:lightRig rig="threePt" dir="t"/>
     </dgm:scene3d>
+    <dgm:sp3d/>
     <dgm:txPr/>
     <dgm:style>
       <a:lnRef idx="2">
@@ -15810,6 +15863,7 @@
       <a:camera prst="orthographicFront"/>
       <a:lightRig rig="threePt" dir="t"/>
     </dgm:scene3d>
+    <dgm:sp3d/>
     <dgm:txPr/>
     <dgm:style>
       <a:lnRef idx="2">
@@ -15829,6 +15883,7 @@
       <a:camera prst="orthographicFront"/>
       <a:lightRig rig="threePt" dir="t"/>
     </dgm:scene3d>
+    <dgm:sp3d/>
     <dgm:txPr/>
     <dgm:style>
       <a:lnRef idx="2">
@@ -15848,6 +15903,7 @@
       <a:camera prst="orthographicFront"/>
       <a:lightRig rig="threePt" dir="t"/>
     </dgm:scene3d>
+    <dgm:sp3d/>
     <dgm:txPr/>
     <dgm:style>
       <a:lnRef idx="2">
@@ -15867,6 +15923,7 @@
       <a:camera prst="orthographicFront"/>
       <a:lightRig rig="threePt" dir="t"/>
     </dgm:scene3d>
+    <dgm:sp3d/>
     <dgm:txPr/>
     <dgm:style>
       <a:lnRef idx="2">
@@ -15886,6 +15943,7 @@
       <a:camera prst="orthographicFront"/>
       <a:lightRig rig="threePt" dir="t"/>
     </dgm:scene3d>
+    <dgm:sp3d/>
     <dgm:txPr/>
     <dgm:style>
       <a:lnRef idx="2">
@@ -15905,6 +15963,7 @@
       <a:camera prst="orthographicFront"/>
       <a:lightRig rig="threePt" dir="t"/>
     </dgm:scene3d>
+    <dgm:sp3d/>
     <dgm:txPr/>
     <dgm:style>
       <a:lnRef idx="0">
@@ -15926,6 +15985,7 @@
       <a:camera prst="orthographicFront"/>
       <a:lightRig rig="threePt" dir="t"/>
     </dgm:scene3d>
+    <dgm:sp3d/>
     <dgm:txPr/>
     <dgm:style>
       <a:lnRef idx="2">
@@ -15947,6 +16007,7 @@
       <a:camera prst="orthographicFront"/>
       <a:lightRig rig="threePt" dir="t"/>
     </dgm:scene3d>
+    <dgm:sp3d/>
     <dgm:txPr/>
     <dgm:style>
       <a:lnRef idx="2">
@@ -15968,6 +16029,7 @@
       <a:camera prst="orthographicFront"/>
       <a:lightRig rig="threePt" dir="t"/>
     </dgm:scene3d>
+    <dgm:sp3d/>
     <dgm:txPr/>
     <dgm:style>
       <a:lnRef idx="2">
@@ -15989,6 +16051,7 @@
       <a:camera prst="orthographicFront"/>
       <a:lightRig rig="threePt" dir="t"/>
     </dgm:scene3d>
+    <dgm:sp3d/>
     <dgm:txPr/>
     <dgm:style>
       <a:lnRef idx="2">
@@ -16010,6 +16073,7 @@
       <a:camera prst="orthographicFront"/>
       <a:lightRig rig="threePt" dir="t"/>
     </dgm:scene3d>
+    <dgm:sp3d/>
     <dgm:txPr/>
     <dgm:style>
       <a:lnRef idx="2">
@@ -16031,6 +16095,7 @@
       <a:camera prst="orthographicFront"/>
       <a:lightRig rig="threePt" dir="t"/>
     </dgm:scene3d>
+    <dgm:sp3d/>
     <dgm:txPr/>
     <dgm:style>
       <a:lnRef idx="2">
@@ -16052,6 +16117,7 @@
       <a:camera prst="orthographicFront"/>
       <a:lightRig rig="threePt" dir="t"/>
     </dgm:scene3d>
+    <dgm:sp3d/>
     <dgm:txPr/>
     <dgm:style>
       <a:lnRef idx="2">
@@ -16071,6 +16137,7 @@
       <a:camera prst="orthographicFront"/>
       <a:lightRig rig="threePt" dir="t"/>
     </dgm:scene3d>
+    <dgm:sp3d/>
     <dgm:txPr/>
     <dgm:style>
       <a:lnRef idx="2">
@@ -16090,6 +16157,7 @@
       <a:camera prst="orthographicFront"/>
       <a:lightRig rig="threePt" dir="t"/>
     </dgm:scene3d>
+    <dgm:sp3d/>
     <dgm:txPr/>
     <dgm:style>
       <a:lnRef idx="2">
@@ -16109,6 +16177,7 @@
       <a:camera prst="orthographicFront"/>
       <a:lightRig rig="threePt" dir="t"/>
     </dgm:scene3d>
+    <dgm:sp3d/>
     <dgm:txPr/>
     <dgm:style>
       <a:lnRef idx="2">
@@ -16128,6 +16197,7 @@
       <a:camera prst="orthographicFront"/>
       <a:lightRig rig="threePt" dir="t"/>
     </dgm:scene3d>
+    <dgm:sp3d/>
     <dgm:txPr/>
     <dgm:style>
       <a:lnRef idx="2">
@@ -16149,6 +16219,7 @@
       <a:camera prst="orthographicFront"/>
       <a:lightRig rig="threePt" dir="t"/>
     </dgm:scene3d>
+    <dgm:sp3d/>
     <dgm:txPr/>
     <dgm:style>
       <a:lnRef idx="2">
@@ -16170,6 +16241,7 @@
       <a:camera prst="orthographicFront"/>
       <a:lightRig rig="threePt" dir="t"/>
     </dgm:scene3d>
+    <dgm:sp3d/>
     <dgm:txPr/>
     <dgm:style>
       <a:lnRef idx="2">
@@ -16191,6 +16263,7 @@
       <a:camera prst="orthographicFront"/>
       <a:lightRig rig="threePt" dir="t"/>
     </dgm:scene3d>
+    <dgm:sp3d/>
     <dgm:txPr/>
     <dgm:style>
       <a:lnRef idx="2">
@@ -16212,6 +16285,7 @@
       <a:camera prst="orthographicFront"/>
       <a:lightRig rig="threePt" dir="t"/>
     </dgm:scene3d>
+    <dgm:sp3d/>
     <dgm:txPr/>
     <dgm:style>
       <a:lnRef idx="0">
@@ -16231,6 +16305,7 @@
       <a:camera prst="orthographicFront"/>
       <a:lightRig rig="threePt" dir="t"/>
     </dgm:scene3d>
+    <dgm:sp3d/>
     <dgm:txPr/>
     <dgm:style>
       <a:lnRef idx="1">
@@ -16250,6 +16325,7 @@
       <a:camera prst="orthographicFront"/>
       <a:lightRig rig="threePt" dir="t"/>
     </dgm:scene3d>
+    <dgm:sp3d/>
     <dgm:txPr/>
     <dgm:style>
       <a:lnRef idx="0">
@@ -16271,6 +16347,7 @@
       <a:camera prst="orthographicFront"/>
       <a:lightRig rig="threePt" dir="t"/>
     </dgm:scene3d>
+    <dgm:sp3d/>
     <dgm:txPr/>
     <dgm:style>
       <a:lnRef idx="2">
@@ -16290,6 +16367,7 @@
       <a:camera prst="orthographicFront"/>
       <a:lightRig rig="threePt" dir="t"/>
     </dgm:scene3d>
+    <dgm:sp3d/>
     <dgm:txPr/>
     <dgm:style>
       <a:lnRef idx="2">
@@ -16309,6 +16387,7 @@
       <a:camera prst="orthographicFront"/>
       <a:lightRig rig="threePt" dir="t"/>
     </dgm:scene3d>
+    <dgm:sp3d/>
     <dgm:txPr/>
     <dgm:style>
       <a:lnRef idx="2">
@@ -16328,6 +16407,7 @@
       <a:camera prst="orthographicFront"/>
       <a:lightRig rig="threePt" dir="t"/>
     </dgm:scene3d>
+    <dgm:sp3d/>
     <dgm:txPr/>
     <dgm:style>
       <a:lnRef idx="1">
@@ -16347,6 +16427,7 @@
       <a:camera prst="orthographicFront"/>
       <a:lightRig rig="threePt" dir="t"/>
     </dgm:scene3d>
+    <dgm:sp3d/>
     <dgm:txPr/>
     <dgm:style>
       <a:lnRef idx="0">
@@ -16366,6 +16447,7 @@
       <a:camera prst="orthographicFront"/>
       <a:lightRig rig="threePt" dir="t"/>
     </dgm:scene3d>
+    <dgm:sp3d/>
     <dgm:txPr/>
     <dgm:style>
       <a:lnRef idx="2">
@@ -16386,7 +16468,7 @@
 </file>
 
 <file path=ppt/diagrams/quickStyle5.xml><?xml version="1.0" encoding="utf-8"?>
-<dgm:styleDef xmlns:dgm="http://schemas.openxmlformats.org/drawingml/2006/diagram" xmlns:a="http://schemas.openxmlformats.org/drawingml/2006/main" uniqueId="urn:microsoft.com/office/officeart/2005/8/quickstyle/simple1">
+<dgm:styleDef xmlns:dgm="http://schemas.openxmlformats.org/drawingml/2006/diagram" xmlns:a="http://schemas.openxmlformats.org/drawingml/2006/main" uniqueId="urn:microsoft.com/office/officeart/2005/8/quickstyle/simple1#5">
   <dgm:title val=""/>
   <dgm:desc val=""/>
   <dgm:catLst>
@@ -16401,6 +16483,7 @@
       <a:camera prst="orthographicFront"/>
       <a:lightRig rig="threePt" dir="t"/>
     </dgm:scene3d>
+    <dgm:sp3d/>
     <dgm:txPr/>
     <dgm:style>
       <a:lnRef idx="2">
@@ -16420,6 +16503,7 @@
       <a:camera prst="orthographicFront"/>
       <a:lightRig rig="threePt" dir="t"/>
     </dgm:scene3d>
+    <dgm:sp3d/>
     <dgm:txPr/>
     <dgm:style>
       <a:lnRef idx="2">
@@ -16439,6 +16523,7 @@
       <a:camera prst="orthographicFront"/>
       <a:lightRig rig="threePt" dir="t"/>
     </dgm:scene3d>
+    <dgm:sp3d/>
     <dgm:txPr/>
     <dgm:style>
       <a:lnRef idx="2">
@@ -16458,6 +16543,7 @@
       <a:camera prst="orthographicFront"/>
       <a:lightRig rig="threePt" dir="t"/>
     </dgm:scene3d>
+    <dgm:sp3d/>
     <dgm:txPr/>
     <dgm:style>
       <a:lnRef idx="2">
@@ -16479,6 +16565,7 @@
       <a:camera prst="orthographicFront"/>
       <a:lightRig rig="threePt" dir="t"/>
     </dgm:scene3d>
+    <dgm:sp3d/>
     <dgm:txPr/>
     <dgm:style>
       <a:lnRef idx="2">
@@ -16500,6 +16587,7 @@
       <a:camera prst="orthographicFront"/>
       <a:lightRig rig="threePt" dir="t"/>
     </dgm:scene3d>
+    <dgm:sp3d/>
     <dgm:txPr/>
     <dgm:style>
       <a:lnRef idx="2">
@@ -16521,6 +16609,7 @@
       <a:camera prst="orthographicFront"/>
       <a:lightRig rig="threePt" dir="t"/>
     </dgm:scene3d>
+    <dgm:sp3d/>
     <dgm:txPr/>
     <dgm:style>
       <a:lnRef idx="2">
@@ -16542,6 +16631,7 @@
       <a:camera prst="orthographicFront"/>
       <a:lightRig rig="threePt" dir="t"/>
     </dgm:scene3d>
+    <dgm:sp3d/>
     <dgm:txPr/>
     <dgm:style>
       <a:lnRef idx="2">
@@ -16563,6 +16653,7 @@
       <a:camera prst="orthographicFront"/>
       <a:lightRig rig="threePt" dir="t"/>
     </dgm:scene3d>
+    <dgm:sp3d/>
     <dgm:txPr/>
     <dgm:style>
       <a:lnRef idx="2">
@@ -16584,6 +16675,7 @@
       <a:camera prst="orthographicFront"/>
       <a:lightRig rig="threePt" dir="t"/>
     </dgm:scene3d>
+    <dgm:sp3d/>
     <dgm:txPr/>
     <dgm:style>
       <a:lnRef idx="2">
@@ -16603,6 +16695,7 @@
       <a:camera prst="orthographicFront"/>
       <a:lightRig rig="threePt" dir="t"/>
     </dgm:scene3d>
+    <dgm:sp3d/>
     <dgm:txPr/>
     <dgm:style>
       <a:lnRef idx="2">
@@ -16622,6 +16715,7 @@
       <a:camera prst="orthographicFront"/>
       <a:lightRig rig="threePt" dir="t"/>
     </dgm:scene3d>
+    <dgm:sp3d/>
     <dgm:txPr/>
     <dgm:style>
       <a:lnRef idx="2">
@@ -16641,6 +16735,7 @@
       <a:camera prst="orthographicFront"/>
       <a:lightRig rig="threePt" dir="t"/>
     </dgm:scene3d>
+    <dgm:sp3d/>
     <dgm:txPr/>
     <dgm:style>
       <a:lnRef idx="0">
@@ -16660,6 +16755,7 @@
       <a:camera prst="orthographicFront"/>
       <a:lightRig rig="threePt" dir="t"/>
     </dgm:scene3d>
+    <dgm:sp3d/>
     <dgm:txPr/>
     <dgm:style>
       <a:lnRef idx="0">
@@ -16681,6 +16777,7 @@
       <a:camera prst="orthographicFront"/>
       <a:lightRig rig="threePt" dir="t"/>
     </dgm:scene3d>
+    <dgm:sp3d/>
     <dgm:txPr/>
     <dgm:style>
       <a:lnRef idx="2">
@@ -16700,6 +16797,7 @@
       <a:camera prst="orthographicFront"/>
       <a:lightRig rig="threePt" dir="t"/>
     </dgm:scene3d>
+    <dgm:sp3d/>
     <dgm:txPr/>
     <dgm:style>
       <a:lnRef idx="2">
@@ -16719,6 +16817,7 @@
       <a:camera prst="orthographicFront"/>
       <a:lightRig rig="threePt" dir="t"/>
     </dgm:scene3d>
+    <dgm:sp3d/>
     <dgm:txPr/>
     <dgm:style>
       <a:lnRef idx="0">
@@ -16738,6 +16837,7 @@
       <a:camera prst="orthographicFront"/>
       <a:lightRig rig="threePt" dir="t"/>
     </dgm:scene3d>
+    <dgm:sp3d/>
     <dgm:txPr/>
     <dgm:style>
       <a:lnRef idx="2">
@@ -16757,6 +16857,7 @@
       <a:camera prst="orthographicFront"/>
       <a:lightRig rig="threePt" dir="t"/>
     </dgm:scene3d>
+    <dgm:sp3d/>
     <dgm:txPr/>
     <dgm:style>
       <a:lnRef idx="2">
@@ -16776,6 +16877,7 @@
       <a:camera prst="orthographicFront"/>
       <a:lightRig rig="threePt" dir="t"/>
     </dgm:scene3d>
+    <dgm:sp3d/>
     <dgm:txPr/>
     <dgm:style>
       <a:lnRef idx="2">
@@ -16795,6 +16897,7 @@
       <a:camera prst="orthographicFront"/>
       <a:lightRig rig="threePt" dir="t"/>
     </dgm:scene3d>
+    <dgm:sp3d/>
     <dgm:txPr/>
     <dgm:style>
       <a:lnRef idx="2">
@@ -16814,6 +16917,7 @@
       <a:camera prst="orthographicFront"/>
       <a:lightRig rig="threePt" dir="t"/>
     </dgm:scene3d>
+    <dgm:sp3d/>
     <dgm:txPr/>
     <dgm:style>
       <a:lnRef idx="2">
@@ -16833,6 +16937,7 @@
       <a:camera prst="orthographicFront"/>
       <a:lightRig rig="threePt" dir="t"/>
     </dgm:scene3d>
+    <dgm:sp3d/>
     <dgm:txPr/>
     <dgm:style>
       <a:lnRef idx="2">
@@ -16852,6 +16957,7 @@
       <a:camera prst="orthographicFront"/>
       <a:lightRig rig="threePt" dir="t"/>
     </dgm:scene3d>
+    <dgm:sp3d/>
     <dgm:txPr/>
     <dgm:style>
       <a:lnRef idx="2">
@@ -16871,6 +16977,7 @@
       <a:camera prst="orthographicFront"/>
       <a:lightRig rig="threePt" dir="t"/>
     </dgm:scene3d>
+    <dgm:sp3d/>
     <dgm:txPr/>
     <dgm:style>
       <a:lnRef idx="2">
@@ -16890,6 +16997,7 @@
       <a:camera prst="orthographicFront"/>
       <a:lightRig rig="threePt" dir="t"/>
     </dgm:scene3d>
+    <dgm:sp3d/>
     <dgm:txPr/>
     <dgm:style>
       <a:lnRef idx="0">
@@ -16911,6 +17019,7 @@
       <a:camera prst="orthographicFront"/>
       <a:lightRig rig="threePt" dir="t"/>
     </dgm:scene3d>
+    <dgm:sp3d/>
     <dgm:txPr/>
     <dgm:style>
       <a:lnRef idx="2">
@@ -16932,6 +17041,7 @@
       <a:camera prst="orthographicFront"/>
       <a:lightRig rig="threePt" dir="t"/>
     </dgm:scene3d>
+    <dgm:sp3d/>
     <dgm:txPr/>
     <dgm:style>
       <a:lnRef idx="2">
@@ -16953,6 +17063,7 @@
       <a:camera prst="orthographicFront"/>
       <a:lightRig rig="threePt" dir="t"/>
     </dgm:scene3d>
+    <dgm:sp3d/>
     <dgm:txPr/>
     <dgm:style>
       <a:lnRef idx="2">
@@ -16974,6 +17085,7 @@
       <a:camera prst="orthographicFront"/>
       <a:lightRig rig="threePt" dir="t"/>
     </dgm:scene3d>
+    <dgm:sp3d/>
     <dgm:txPr/>
     <dgm:style>
       <a:lnRef idx="2">
@@ -16995,6 +17107,7 @@
       <a:camera prst="orthographicFront"/>
       <a:lightRig rig="threePt" dir="t"/>
     </dgm:scene3d>
+    <dgm:sp3d/>
     <dgm:txPr/>
     <dgm:style>
       <a:lnRef idx="2">
@@ -17016,6 +17129,7 @@
       <a:camera prst="orthographicFront"/>
       <a:lightRig rig="threePt" dir="t"/>
     </dgm:scene3d>
+    <dgm:sp3d/>
     <dgm:txPr/>
     <dgm:style>
       <a:lnRef idx="2">
@@ -17037,6 +17151,7 @@
       <a:camera prst="orthographicFront"/>
       <a:lightRig rig="threePt" dir="t"/>
     </dgm:scene3d>
+    <dgm:sp3d/>
     <dgm:txPr/>
     <dgm:style>
       <a:lnRef idx="2">
@@ -17056,6 +17171,7 @@
       <a:camera prst="orthographicFront"/>
       <a:lightRig rig="threePt" dir="t"/>
     </dgm:scene3d>
+    <dgm:sp3d/>
     <dgm:txPr/>
     <dgm:style>
       <a:lnRef idx="2">
@@ -17075,6 +17191,7 @@
       <a:camera prst="orthographicFront"/>
       <a:lightRig rig="threePt" dir="t"/>
     </dgm:scene3d>
+    <dgm:sp3d/>
     <dgm:txPr/>
     <dgm:style>
       <a:lnRef idx="2">
@@ -17094,6 +17211,7 @@
       <a:camera prst="orthographicFront"/>
       <a:lightRig rig="threePt" dir="t"/>
     </dgm:scene3d>
+    <dgm:sp3d/>
     <dgm:txPr/>
     <dgm:style>
       <a:lnRef idx="2">
@@ -17113,6 +17231,7 @@
       <a:camera prst="orthographicFront"/>
       <a:lightRig rig="threePt" dir="t"/>
     </dgm:scene3d>
+    <dgm:sp3d/>
     <dgm:txPr/>
     <dgm:style>
       <a:lnRef idx="2">
@@ -17134,6 +17253,7 @@
       <a:camera prst="orthographicFront"/>
       <a:lightRig rig="threePt" dir="t"/>
     </dgm:scene3d>
+    <dgm:sp3d/>
     <dgm:txPr/>
     <dgm:style>
       <a:lnRef idx="2">
@@ -17155,6 +17275,7 @@
       <a:camera prst="orthographicFront"/>
       <a:lightRig rig="threePt" dir="t"/>
     </dgm:scene3d>
+    <dgm:sp3d/>
     <dgm:txPr/>
     <dgm:style>
       <a:lnRef idx="2">
@@ -17176,6 +17297,7 @@
       <a:camera prst="orthographicFront"/>
       <a:lightRig rig="threePt" dir="t"/>
     </dgm:scene3d>
+    <dgm:sp3d/>
     <dgm:txPr/>
     <dgm:style>
       <a:lnRef idx="2">
@@ -17197,6 +17319,7 @@
       <a:camera prst="orthographicFront"/>
       <a:lightRig rig="threePt" dir="t"/>
     </dgm:scene3d>
+    <dgm:sp3d/>
     <dgm:txPr/>
     <dgm:style>
       <a:lnRef idx="0">
@@ -17216,6 +17339,7 @@
       <a:camera prst="orthographicFront"/>
       <a:lightRig rig="threePt" dir="t"/>
     </dgm:scene3d>
+    <dgm:sp3d/>
     <dgm:txPr/>
     <dgm:style>
       <a:lnRef idx="1">
@@ -17235,6 +17359,7 @@
       <a:camera prst="orthographicFront"/>
       <a:lightRig rig="threePt" dir="t"/>
     </dgm:scene3d>
+    <dgm:sp3d/>
     <dgm:txPr/>
     <dgm:style>
       <a:lnRef idx="0">
@@ -17256,6 +17381,7 @@
       <a:camera prst="orthographicFront"/>
       <a:lightRig rig="threePt" dir="t"/>
     </dgm:scene3d>
+    <dgm:sp3d/>
     <dgm:txPr/>
     <dgm:style>
       <a:lnRef idx="2">
@@ -17275,6 +17401,7 @@
       <a:camera prst="orthographicFront"/>
       <a:lightRig rig="threePt" dir="t"/>
     </dgm:scene3d>
+    <dgm:sp3d/>
     <dgm:txPr/>
     <dgm:style>
       <a:lnRef idx="2">
@@ -17294,6 +17421,7 @@
       <a:camera prst="orthographicFront"/>
       <a:lightRig rig="threePt" dir="t"/>
     </dgm:scene3d>
+    <dgm:sp3d/>
     <dgm:txPr/>
     <dgm:style>
       <a:lnRef idx="2">
@@ -17313,6 +17441,7 @@
       <a:camera prst="orthographicFront"/>
       <a:lightRig rig="threePt" dir="t"/>
     </dgm:scene3d>
+    <dgm:sp3d/>
     <dgm:txPr/>
     <dgm:style>
       <a:lnRef idx="1">
@@ -17332,6 +17461,7 @@
       <a:camera prst="orthographicFront"/>
       <a:lightRig rig="threePt" dir="t"/>
     </dgm:scene3d>
+    <dgm:sp3d/>
     <dgm:txPr/>
     <dgm:style>
       <a:lnRef idx="0">
@@ -17351,6 +17481,7 @@
       <a:camera prst="orthographicFront"/>
       <a:lightRig rig="threePt" dir="t"/>
     </dgm:scene3d>
+    <dgm:sp3d/>
     <dgm:txPr/>
     <dgm:style>
       <a:lnRef idx="2">
@@ -17371,7 +17502,7 @@
 </file>
 
 <file path=ppt/diagrams/quickStyle6.xml><?xml version="1.0" encoding="utf-8"?>
-<dgm:styleDef xmlns:dgm="http://schemas.openxmlformats.org/drawingml/2006/diagram" xmlns:a="http://schemas.openxmlformats.org/drawingml/2006/main" uniqueId="urn:microsoft.com/office/officeart/2005/8/quickstyle/simple2">
+<dgm:styleDef xmlns:dgm="http://schemas.openxmlformats.org/drawingml/2006/diagram" xmlns:a="http://schemas.openxmlformats.org/drawingml/2006/main" uniqueId="urn:microsoft.com/office/officeart/2005/8/quickstyle/simple2#1">
   <dgm:title val=""/>
   <dgm:desc val=""/>
   <dgm:catLst>
@@ -17386,6 +17517,7 @@
       <a:camera prst="orthographicFront"/>
       <a:lightRig rig="threePt" dir="t"/>
     </dgm:scene3d>
+    <dgm:sp3d/>
     <dgm:txPr/>
     <dgm:style>
       <a:lnRef idx="2">
@@ -17405,6 +17537,7 @@
       <a:camera prst="orthographicFront"/>
       <a:lightRig rig="threePt" dir="t"/>
     </dgm:scene3d>
+    <dgm:sp3d/>
     <dgm:txPr/>
     <dgm:style>
       <a:lnRef idx="2">
@@ -17424,6 +17557,7 @@
       <a:camera prst="orthographicFront"/>
       <a:lightRig rig="threePt" dir="t"/>
     </dgm:scene3d>
+    <dgm:sp3d/>
     <dgm:txPr/>
     <dgm:style>
       <a:lnRef idx="3">
@@ -17443,6 +17577,7 @@
       <a:camera prst="orthographicFront"/>
       <a:lightRig rig="threePt" dir="t"/>
     </dgm:scene3d>
+    <dgm:sp3d/>
     <dgm:txPr/>
     <dgm:style>
       <a:lnRef idx="2">
@@ -17464,6 +17599,7 @@
       <a:camera prst="orthographicFront"/>
       <a:lightRig rig="threePt" dir="t"/>
     </dgm:scene3d>
+    <dgm:sp3d/>
     <dgm:txPr/>
     <dgm:style>
       <a:lnRef idx="3">
@@ -17485,6 +17621,7 @@
       <a:camera prst="orthographicFront"/>
       <a:lightRig rig="threePt" dir="t"/>
     </dgm:scene3d>
+    <dgm:sp3d/>
     <dgm:txPr/>
     <dgm:style>
       <a:lnRef idx="3">
@@ -17506,6 +17643,7 @@
       <a:camera prst="orthographicFront"/>
       <a:lightRig rig="threePt" dir="t"/>
     </dgm:scene3d>
+    <dgm:sp3d/>
     <dgm:txPr/>
     <dgm:style>
       <a:lnRef idx="3">
@@ -17527,6 +17665,7 @@
       <a:camera prst="orthographicFront"/>
       <a:lightRig rig="threePt" dir="t"/>
     </dgm:scene3d>
+    <dgm:sp3d/>
     <dgm:txPr/>
     <dgm:style>
       <a:lnRef idx="3">
@@ -17548,6 +17687,7 @@
       <a:camera prst="orthographicFront"/>
       <a:lightRig rig="threePt" dir="t"/>
     </dgm:scene3d>
+    <dgm:sp3d/>
     <dgm:txPr/>
     <dgm:style>
       <a:lnRef idx="3">
@@ -17569,6 +17709,7 @@
       <a:camera prst="orthographicFront"/>
       <a:lightRig rig="threePt" dir="t"/>
     </dgm:scene3d>
+    <dgm:sp3d/>
     <dgm:txPr/>
     <dgm:style>
       <a:lnRef idx="2">
@@ -17588,6 +17729,7 @@
       <a:camera prst="orthographicFront"/>
       <a:lightRig rig="threePt" dir="t"/>
     </dgm:scene3d>
+    <dgm:sp3d/>
     <dgm:txPr/>
     <dgm:style>
       <a:lnRef idx="2">
@@ -17607,6 +17749,7 @@
       <a:camera prst="orthographicFront"/>
       <a:lightRig rig="threePt" dir="t"/>
     </dgm:scene3d>
+    <dgm:sp3d/>
     <dgm:txPr/>
     <dgm:style>
       <a:lnRef idx="3">
@@ -17626,6 +17769,7 @@
       <a:camera prst="orthographicFront"/>
       <a:lightRig rig="threePt" dir="t"/>
     </dgm:scene3d>
+    <dgm:sp3d/>
     <dgm:txPr/>
     <dgm:style>
       <a:lnRef idx="0">
@@ -17645,6 +17789,7 @@
       <a:camera prst="orthographicFront"/>
       <a:lightRig rig="threePt" dir="t"/>
     </dgm:scene3d>
+    <dgm:sp3d/>
     <dgm:txPr/>
     <dgm:style>
       <a:lnRef idx="0">
@@ -17666,6 +17811,7 @@
       <a:camera prst="orthographicFront"/>
       <a:lightRig rig="threePt" dir="t"/>
     </dgm:scene3d>
+    <dgm:sp3d/>
     <dgm:txPr/>
     <dgm:style>
       <a:lnRef idx="2">
@@ -17685,6 +17831,7 @@
       <a:camera prst="orthographicFront"/>
       <a:lightRig rig="threePt" dir="t"/>
     </dgm:scene3d>
+    <dgm:sp3d/>
     <dgm:txPr/>
     <dgm:style>
       <a:lnRef idx="2">
@@ -17704,6 +17851,7 @@
       <a:camera prst="orthographicFront"/>
       <a:lightRig rig="threePt" dir="t"/>
     </dgm:scene3d>
+    <dgm:sp3d/>
     <dgm:txPr/>
     <dgm:style>
       <a:lnRef idx="0">
@@ -17723,6 +17871,7 @@
       <a:camera prst="orthographicFront"/>
       <a:lightRig rig="threePt" dir="t"/>
     </dgm:scene3d>
+    <dgm:sp3d/>
     <dgm:txPr/>
     <dgm:style>
       <a:lnRef idx="2">
@@ -17742,6 +17891,7 @@
       <a:camera prst="orthographicFront"/>
       <a:lightRig rig="threePt" dir="t"/>
     </dgm:scene3d>
+    <dgm:sp3d/>
     <dgm:txPr/>
     <dgm:style>
       <a:lnRef idx="2">
@@ -17761,6 +17911,7 @@
       <a:camera prst="orthographicFront"/>
       <a:lightRig rig="threePt" dir="t"/>
     </dgm:scene3d>
+    <dgm:sp3d/>
     <dgm:txPr/>
     <dgm:style>
       <a:lnRef idx="2">
@@ -17780,6 +17931,7 @@
       <a:camera prst="orthographicFront"/>
       <a:lightRig rig="threePt" dir="t"/>
     </dgm:scene3d>
+    <dgm:sp3d/>
     <dgm:txPr/>
     <dgm:style>
       <a:lnRef idx="2">
@@ -17799,6 +17951,7 @@
       <a:camera prst="orthographicFront"/>
       <a:lightRig rig="threePt" dir="t"/>
     </dgm:scene3d>
+    <dgm:sp3d/>
     <dgm:txPr/>
     <dgm:style>
       <a:lnRef idx="2">
@@ -17818,6 +17971,7 @@
       <a:camera prst="orthographicFront"/>
       <a:lightRig rig="threePt" dir="t"/>
     </dgm:scene3d>
+    <dgm:sp3d/>
     <dgm:txPr/>
     <dgm:style>
       <a:lnRef idx="2">
@@ -17837,6 +17991,7 @@
       <a:camera prst="orthographicFront"/>
       <a:lightRig rig="threePt" dir="t"/>
     </dgm:scene3d>
+    <dgm:sp3d/>
     <dgm:txPr/>
     <dgm:style>
       <a:lnRef idx="3">
@@ -17856,6 +18011,7 @@
       <a:camera prst="orthographicFront"/>
       <a:lightRig rig="threePt" dir="t"/>
     </dgm:scene3d>
+    <dgm:sp3d/>
     <dgm:txPr/>
     <dgm:style>
       <a:lnRef idx="3">
@@ -17875,6 +18031,7 @@
       <a:camera prst="orthographicFront"/>
       <a:lightRig rig="threePt" dir="t"/>
     </dgm:scene3d>
+    <dgm:sp3d/>
     <dgm:txPr/>
     <dgm:style>
       <a:lnRef idx="0">
@@ -17896,6 +18053,7 @@
       <a:camera prst="orthographicFront"/>
       <a:lightRig rig="threePt" dir="t"/>
     </dgm:scene3d>
+    <dgm:sp3d/>
     <dgm:txPr/>
     <dgm:style>
       <a:lnRef idx="3">
@@ -17917,6 +18075,7 @@
       <a:camera prst="orthographicFront"/>
       <a:lightRig rig="threePt" dir="t"/>
     </dgm:scene3d>
+    <dgm:sp3d/>
     <dgm:txPr/>
     <dgm:style>
       <a:lnRef idx="3">
@@ -17938,6 +18097,7 @@
       <a:camera prst="orthographicFront"/>
       <a:lightRig rig="threePt" dir="t"/>
     </dgm:scene3d>
+    <dgm:sp3d/>
     <dgm:txPr/>
     <dgm:style>
       <a:lnRef idx="3">
@@ -17959,6 +18119,7 @@
       <a:camera prst="orthographicFront"/>
       <a:lightRig rig="threePt" dir="t"/>
     </dgm:scene3d>
+    <dgm:sp3d/>
     <dgm:txPr/>
     <dgm:style>
       <a:lnRef idx="3">
@@ -17980,6 +18141,7 @@
       <a:camera prst="orthographicFront"/>
       <a:lightRig rig="threePt" dir="t"/>
     </dgm:scene3d>
+    <dgm:sp3d/>
     <dgm:txPr/>
     <dgm:style>
       <a:lnRef idx="3">
@@ -18001,6 +18163,7 @@
       <a:camera prst="orthographicFront"/>
       <a:lightRig rig="threePt" dir="t"/>
     </dgm:scene3d>
+    <dgm:sp3d/>
     <dgm:txPr/>
     <dgm:style>
       <a:lnRef idx="3">
@@ -18022,6 +18185,7 @@
       <a:camera prst="orthographicFront"/>
       <a:lightRig rig="threePt" dir="t"/>
     </dgm:scene3d>
+    <dgm:sp3d/>
     <dgm:txPr/>
     <dgm:style>
       <a:lnRef idx="2">
@@ -18041,6 +18205,7 @@
       <a:camera prst="orthographicFront"/>
       <a:lightRig rig="threePt" dir="t"/>
     </dgm:scene3d>
+    <dgm:sp3d/>
     <dgm:txPr/>
     <dgm:style>
       <a:lnRef idx="2">
@@ -18060,6 +18225,7 @@
       <a:camera prst="orthographicFront"/>
       <a:lightRig rig="threePt" dir="t"/>
     </dgm:scene3d>
+    <dgm:sp3d/>
     <dgm:txPr/>
     <dgm:style>
       <a:lnRef idx="2">
@@ -18079,6 +18245,7 @@
       <a:camera prst="orthographicFront"/>
       <a:lightRig rig="threePt" dir="t"/>
     </dgm:scene3d>
+    <dgm:sp3d/>
     <dgm:txPr/>
     <dgm:style>
       <a:lnRef idx="2">
@@ -18098,6 +18265,7 @@
       <a:camera prst="orthographicFront"/>
       <a:lightRig rig="threePt" dir="t"/>
     </dgm:scene3d>
+    <dgm:sp3d/>
     <dgm:txPr/>
     <dgm:style>
       <a:lnRef idx="3">
@@ -18119,6 +18287,7 @@
       <a:camera prst="orthographicFront"/>
       <a:lightRig rig="threePt" dir="t"/>
     </dgm:scene3d>
+    <dgm:sp3d/>
     <dgm:txPr/>
     <dgm:style>
       <a:lnRef idx="3">
@@ -18140,6 +18309,7 @@
       <a:camera prst="orthographicFront"/>
       <a:lightRig rig="threePt" dir="t"/>
     </dgm:scene3d>
+    <dgm:sp3d/>
     <dgm:txPr/>
     <dgm:style>
       <a:lnRef idx="3">
@@ -18161,6 +18331,7 @@
       <a:camera prst="orthographicFront"/>
       <a:lightRig rig="threePt" dir="t"/>
     </dgm:scene3d>
+    <dgm:sp3d/>
     <dgm:txPr/>
     <dgm:style>
       <a:lnRef idx="3">
@@ -18182,6 +18353,7 @@
       <a:camera prst="orthographicFront"/>
       <a:lightRig rig="threePt" dir="t"/>
     </dgm:scene3d>
+    <dgm:sp3d/>
     <dgm:txPr/>
     <dgm:style>
       <a:lnRef idx="0">
@@ -18201,6 +18373,7 @@
       <a:camera prst="orthographicFront"/>
       <a:lightRig rig="threePt" dir="t"/>
     </dgm:scene3d>
+    <dgm:sp3d/>
     <dgm:txPr/>
     <dgm:style>
       <a:lnRef idx="1">
@@ -18220,6 +18393,7 @@
       <a:camera prst="orthographicFront"/>
       <a:lightRig rig="threePt" dir="t"/>
     </dgm:scene3d>
+    <dgm:sp3d/>
     <dgm:txPr/>
     <dgm:style>
       <a:lnRef idx="0">
@@ -18241,6 +18415,7 @@
       <a:camera prst="orthographicFront"/>
       <a:lightRig rig="threePt" dir="t"/>
     </dgm:scene3d>
+    <dgm:sp3d/>
     <dgm:txPr/>
     <dgm:style>
       <a:lnRef idx="2">
@@ -18260,6 +18435,7 @@
       <a:camera prst="orthographicFront"/>
       <a:lightRig rig="threePt" dir="t"/>
     </dgm:scene3d>
+    <dgm:sp3d/>
     <dgm:txPr/>
     <dgm:style>
       <a:lnRef idx="2">
@@ -18279,6 +18455,7 @@
       <a:camera prst="orthographicFront"/>
       <a:lightRig rig="threePt" dir="t"/>
     </dgm:scene3d>
+    <dgm:sp3d/>
     <dgm:txPr/>
     <dgm:style>
       <a:lnRef idx="2">
@@ -18298,6 +18475,7 @@
       <a:camera prst="orthographicFront"/>
       <a:lightRig rig="threePt" dir="t"/>
     </dgm:scene3d>
+    <dgm:sp3d/>
     <dgm:txPr/>
     <dgm:style>
       <a:lnRef idx="1">
@@ -18317,6 +18495,7 @@
       <a:camera prst="orthographicFront"/>
       <a:lightRig rig="threePt" dir="t"/>
     </dgm:scene3d>
+    <dgm:sp3d/>
     <dgm:txPr/>
     <dgm:style>
       <a:lnRef idx="0">
@@ -18336,6 +18515,7 @@
       <a:camera prst="orthographicFront"/>
       <a:lightRig rig="threePt" dir="t"/>
     </dgm:scene3d>
+    <dgm:sp3d/>
     <dgm:txPr/>
     <dgm:style>
       <a:lnRef idx="3">
@@ -18400,7 +18580,6 @@
               <a:rPr lang="en-US"/>
               <a:t>Click to edit Master title style</a:t>
             </a:r>
-            <a:endParaRPr lang="en-US"/>
           </a:p>
         </p:txBody>
       </p:sp>
@@ -18465,7 +18644,6 @@
               <a:rPr lang="en-US"/>
               <a:t>Click to edit Master subtitle style</a:t>
             </a:r>
-            <a:endParaRPr lang="en-US"/>
           </a:p>
         </p:txBody>
       </p:sp>
@@ -18486,6 +18664,7 @@
           <a:p>
             <a:fld id="{C764DE79-268F-4C1A-8933-263129D2AF90}" type="datetimeFigureOut">
               <a:rPr lang="en-US" dirty="0"/>
+              <a:t>10/21/2025</a:t>
             </a:fld>
             <a:endParaRPr lang="en-US"/>
           </a:p>
@@ -18527,6 +18706,7 @@
           <a:p>
             <a:fld id="{48F63A3B-78C7-47BE-AE5E-E10140E04643}" type="slidenum">
               <a:rPr lang="en-US" dirty="0"/>
+              <a:t>‹#›</a:t>
             </a:fld>
             <a:endParaRPr lang="en-US"/>
           </a:p>
@@ -18576,7 +18756,6 @@
               <a:rPr lang="en-US"/>
               <a:t>Click to edit Master title style</a:t>
             </a:r>
-            <a:endParaRPr lang="en-US"/>
           </a:p>
         </p:txBody>
       </p:sp>
@@ -18600,7 +18779,6 @@
               <a:rPr lang="en-US"/>
               <a:t>Click to edit Master text styles</a:t>
             </a:r>
-            <a:endParaRPr lang="en-US"/>
           </a:p>
           <a:p>
             <a:pPr lvl="1"/>
@@ -18608,7 +18786,6 @@
               <a:rPr lang="en-US"/>
               <a:t>Second level</a:t>
             </a:r>
-            <a:endParaRPr lang="en-US"/>
           </a:p>
           <a:p>
             <a:pPr lvl="2"/>
@@ -18616,7 +18793,6 @@
               <a:rPr lang="en-US"/>
               <a:t>Third level</a:t>
             </a:r>
-            <a:endParaRPr lang="en-US"/>
           </a:p>
           <a:p>
             <a:pPr lvl="3"/>
@@ -18624,7 +18800,6 @@
               <a:rPr lang="en-US"/>
               <a:t>Fourth level</a:t>
             </a:r>
-            <a:endParaRPr lang="en-US"/>
           </a:p>
           <a:p>
             <a:pPr lvl="4"/>
@@ -18632,7 +18807,6 @@
               <a:rPr lang="en-US"/>
               <a:t>Fifth level</a:t>
             </a:r>
-            <a:endParaRPr lang="en-US"/>
           </a:p>
         </p:txBody>
       </p:sp>
@@ -18653,6 +18827,7 @@
           <a:p>
             <a:fld id="{C764DE79-268F-4C1A-8933-263129D2AF90}" type="datetimeFigureOut">
               <a:rPr lang="en-US" dirty="0"/>
+              <a:t>10/21/2025</a:t>
             </a:fld>
             <a:endParaRPr lang="en-US"/>
           </a:p>
@@ -18694,6 +18869,7 @@
           <a:p>
             <a:fld id="{48F63A3B-78C7-47BE-AE5E-E10140E04643}" type="slidenum">
               <a:rPr lang="en-US" dirty="0"/>
+              <a:t>‹#›</a:t>
             </a:fld>
             <a:endParaRPr lang="en-US"/>
           </a:p>
@@ -18748,7 +18924,6 @@
               <a:rPr lang="en-US"/>
               <a:t>Click to edit Master title style</a:t>
             </a:r>
-            <a:endParaRPr lang="en-US"/>
           </a:p>
         </p:txBody>
       </p:sp>
@@ -18777,7 +18952,6 @@
               <a:rPr lang="en-US"/>
               <a:t>Click to edit Master text styles</a:t>
             </a:r>
-            <a:endParaRPr lang="en-US"/>
           </a:p>
           <a:p>
             <a:pPr lvl="1"/>
@@ -18785,7 +18959,6 @@
               <a:rPr lang="en-US"/>
               <a:t>Second level</a:t>
             </a:r>
-            <a:endParaRPr lang="en-US"/>
           </a:p>
           <a:p>
             <a:pPr lvl="2"/>
@@ -18793,7 +18966,6 @@
               <a:rPr lang="en-US"/>
               <a:t>Third level</a:t>
             </a:r>
-            <a:endParaRPr lang="en-US"/>
           </a:p>
           <a:p>
             <a:pPr lvl="3"/>
@@ -18801,7 +18973,6 @@
               <a:rPr lang="en-US"/>
               <a:t>Fourth level</a:t>
             </a:r>
-            <a:endParaRPr lang="en-US"/>
           </a:p>
           <a:p>
             <a:pPr lvl="4"/>
@@ -18809,7 +18980,6 @@
               <a:rPr lang="en-US"/>
               <a:t>Fifth level</a:t>
             </a:r>
-            <a:endParaRPr lang="en-US"/>
           </a:p>
         </p:txBody>
       </p:sp>
@@ -18830,6 +19000,7 @@
           <a:p>
             <a:fld id="{C764DE79-268F-4C1A-8933-263129D2AF90}" type="datetimeFigureOut">
               <a:rPr lang="en-US" dirty="0"/>
+              <a:t>10/21/2025</a:t>
             </a:fld>
             <a:endParaRPr lang="en-US"/>
           </a:p>
@@ -18871,6 +19042,7 @@
           <a:p>
             <a:fld id="{48F63A3B-78C7-47BE-AE5E-E10140E04643}" type="slidenum">
               <a:rPr lang="en-US" dirty="0"/>
+              <a:t>‹#›</a:t>
             </a:fld>
             <a:endParaRPr lang="en-US"/>
           </a:p>
@@ -18920,7 +19092,6 @@
               <a:rPr lang="en-US"/>
               <a:t>Click to edit Master title style</a:t>
             </a:r>
-            <a:endParaRPr lang="en-US"/>
           </a:p>
         </p:txBody>
       </p:sp>
@@ -18944,7 +19115,6 @@
               <a:rPr lang="en-US"/>
               <a:t>Click to edit Master text styles</a:t>
             </a:r>
-            <a:endParaRPr lang="en-US"/>
           </a:p>
           <a:p>
             <a:pPr lvl="1"/>
@@ -18952,7 +19122,6 @@
               <a:rPr lang="en-US"/>
               <a:t>Second level</a:t>
             </a:r>
-            <a:endParaRPr lang="en-US"/>
           </a:p>
           <a:p>
             <a:pPr lvl="2"/>
@@ -18960,7 +19129,6 @@
               <a:rPr lang="en-US"/>
               <a:t>Third level</a:t>
             </a:r>
-            <a:endParaRPr lang="en-US"/>
           </a:p>
           <a:p>
             <a:pPr lvl="3"/>
@@ -18968,7 +19136,6 @@
               <a:rPr lang="en-US"/>
               <a:t>Fourth level</a:t>
             </a:r>
-            <a:endParaRPr lang="en-US"/>
           </a:p>
           <a:p>
             <a:pPr lvl="4"/>
@@ -18976,7 +19143,6 @@
               <a:rPr lang="en-US"/>
               <a:t>Fifth level</a:t>
             </a:r>
-            <a:endParaRPr lang="en-US"/>
           </a:p>
         </p:txBody>
       </p:sp>
@@ -18997,6 +19163,7 @@
           <a:p>
             <a:fld id="{C764DE79-268F-4C1A-8933-263129D2AF90}" type="datetimeFigureOut">
               <a:rPr lang="en-US" dirty="0"/>
+              <a:t>10/21/2025</a:t>
             </a:fld>
             <a:endParaRPr lang="en-US"/>
           </a:p>
@@ -19038,6 +19205,7 @@
           <a:p>
             <a:fld id="{48F63A3B-78C7-47BE-AE5E-E10140E04643}" type="slidenum">
               <a:rPr lang="en-US" dirty="0"/>
+              <a:t>‹#›</a:t>
             </a:fld>
             <a:endParaRPr lang="en-US"/>
           </a:p>
@@ -19096,7 +19264,6 @@
               <a:rPr lang="en-US"/>
               <a:t>Click to edit Master title style</a:t>
             </a:r>
-            <a:endParaRPr lang="en-US"/>
           </a:p>
         </p:txBody>
       </p:sp>
@@ -19216,7 +19383,6 @@
               <a:rPr lang="en-US"/>
               <a:t>Click to edit Master text styles</a:t>
             </a:r>
-            <a:endParaRPr lang="en-US"/>
           </a:p>
         </p:txBody>
       </p:sp>
@@ -19237,6 +19403,7 @@
           <a:p>
             <a:fld id="{C764DE79-268F-4C1A-8933-263129D2AF90}" type="datetimeFigureOut">
               <a:rPr lang="en-US" dirty="0"/>
+              <a:t>10/21/2025</a:t>
             </a:fld>
             <a:endParaRPr lang="en-US"/>
           </a:p>
@@ -19278,6 +19445,7 @@
           <a:p>
             <a:fld id="{48F63A3B-78C7-47BE-AE5E-E10140E04643}" type="slidenum">
               <a:rPr lang="en-US" dirty="0"/>
+              <a:t>‹#›</a:t>
             </a:fld>
             <a:endParaRPr lang="en-US"/>
           </a:p>
@@ -19327,7 +19495,6 @@
               <a:rPr lang="en-US"/>
               <a:t>Click to edit Master title style</a:t>
             </a:r>
-            <a:endParaRPr lang="en-US"/>
           </a:p>
         </p:txBody>
       </p:sp>
@@ -19356,7 +19523,6 @@
               <a:rPr lang="en-US"/>
               <a:t>Click to edit Master text styles</a:t>
             </a:r>
-            <a:endParaRPr lang="en-US"/>
           </a:p>
           <a:p>
             <a:pPr lvl="1"/>
@@ -19364,7 +19530,6 @@
               <a:rPr lang="en-US"/>
               <a:t>Second level</a:t>
             </a:r>
-            <a:endParaRPr lang="en-US"/>
           </a:p>
           <a:p>
             <a:pPr lvl="2"/>
@@ -19372,7 +19537,6 @@
               <a:rPr lang="en-US"/>
               <a:t>Third level</a:t>
             </a:r>
-            <a:endParaRPr lang="en-US"/>
           </a:p>
           <a:p>
             <a:pPr lvl="3"/>
@@ -19380,7 +19544,6 @@
               <a:rPr lang="en-US"/>
               <a:t>Fourth level</a:t>
             </a:r>
-            <a:endParaRPr lang="en-US"/>
           </a:p>
           <a:p>
             <a:pPr lvl="4"/>
@@ -19388,7 +19551,6 @@
               <a:rPr lang="en-US"/>
               <a:t>Fifth level</a:t>
             </a:r>
-            <a:endParaRPr lang="en-US"/>
           </a:p>
         </p:txBody>
       </p:sp>
@@ -19417,7 +19579,6 @@
               <a:rPr lang="en-US"/>
               <a:t>Click to edit Master text styles</a:t>
             </a:r>
-            <a:endParaRPr lang="en-US"/>
           </a:p>
           <a:p>
             <a:pPr lvl="1"/>
@@ -19425,7 +19586,6 @@
               <a:rPr lang="en-US"/>
               <a:t>Second level</a:t>
             </a:r>
-            <a:endParaRPr lang="en-US"/>
           </a:p>
           <a:p>
             <a:pPr lvl="2"/>
@@ -19433,7 +19593,6 @@
               <a:rPr lang="en-US"/>
               <a:t>Third level</a:t>
             </a:r>
-            <a:endParaRPr lang="en-US"/>
           </a:p>
           <a:p>
             <a:pPr lvl="3"/>
@@ -19441,7 +19600,6 @@
               <a:rPr lang="en-US"/>
               <a:t>Fourth level</a:t>
             </a:r>
-            <a:endParaRPr lang="en-US"/>
           </a:p>
           <a:p>
             <a:pPr lvl="4"/>
@@ -19449,7 +19607,6 @@
               <a:rPr lang="en-US"/>
               <a:t>Fifth level</a:t>
             </a:r>
-            <a:endParaRPr lang="en-US"/>
           </a:p>
         </p:txBody>
       </p:sp>
@@ -19470,6 +19627,7 @@
           <a:p>
             <a:fld id="{C764DE79-268F-4C1A-8933-263129D2AF90}" type="datetimeFigureOut">
               <a:rPr lang="en-US" dirty="0"/>
+              <a:t>10/21/2025</a:t>
             </a:fld>
             <a:endParaRPr lang="en-US"/>
           </a:p>
@@ -19511,6 +19669,7 @@
           <a:p>
             <a:fld id="{48F63A3B-78C7-47BE-AE5E-E10140E04643}" type="slidenum">
               <a:rPr lang="en-US" dirty="0"/>
+              <a:t>‹#›</a:t>
             </a:fld>
             <a:endParaRPr lang="en-US"/>
           </a:p>
@@ -19565,7 +19724,6 @@
               <a:rPr lang="en-US"/>
               <a:t>Click to edit Master title style</a:t>
             </a:r>
-            <a:endParaRPr lang="en-US"/>
           </a:p>
         </p:txBody>
       </p:sp>
@@ -19631,7 +19789,6 @@
               <a:rPr lang="en-US"/>
               <a:t>Click to edit Master text styles</a:t>
             </a:r>
-            <a:endParaRPr lang="en-US"/>
           </a:p>
         </p:txBody>
       </p:sp>
@@ -19660,7 +19817,6 @@
               <a:rPr lang="en-US"/>
               <a:t>Click to edit Master text styles</a:t>
             </a:r>
-            <a:endParaRPr lang="en-US"/>
           </a:p>
           <a:p>
             <a:pPr lvl="1"/>
@@ -19668,7 +19824,6 @@
               <a:rPr lang="en-US"/>
               <a:t>Second level</a:t>
             </a:r>
-            <a:endParaRPr lang="en-US"/>
           </a:p>
           <a:p>
             <a:pPr lvl="2"/>
@@ -19676,7 +19831,6 @@
               <a:rPr lang="en-US"/>
               <a:t>Third level</a:t>
             </a:r>
-            <a:endParaRPr lang="en-US"/>
           </a:p>
           <a:p>
             <a:pPr lvl="3"/>
@@ -19684,7 +19838,6 @@
               <a:rPr lang="en-US"/>
               <a:t>Fourth level</a:t>
             </a:r>
-            <a:endParaRPr lang="en-US"/>
           </a:p>
           <a:p>
             <a:pPr lvl="4"/>
@@ -19692,7 +19845,6 @@
               <a:rPr lang="en-US"/>
               <a:t>Fifth level</a:t>
             </a:r>
-            <a:endParaRPr lang="en-US"/>
           </a:p>
         </p:txBody>
       </p:sp>
@@ -19758,7 +19910,6 @@
               <a:rPr lang="en-US"/>
               <a:t>Click to edit Master text styles</a:t>
             </a:r>
-            <a:endParaRPr lang="en-US"/>
           </a:p>
         </p:txBody>
       </p:sp>
@@ -19787,7 +19938,6 @@
               <a:rPr lang="en-US"/>
               <a:t>Click to edit Master text styles</a:t>
             </a:r>
-            <a:endParaRPr lang="en-US"/>
           </a:p>
           <a:p>
             <a:pPr lvl="1"/>
@@ -19795,7 +19945,6 @@
               <a:rPr lang="en-US"/>
               <a:t>Second level</a:t>
             </a:r>
-            <a:endParaRPr lang="en-US"/>
           </a:p>
           <a:p>
             <a:pPr lvl="2"/>
@@ -19803,7 +19952,6 @@
               <a:rPr lang="en-US"/>
               <a:t>Third level</a:t>
             </a:r>
-            <a:endParaRPr lang="en-US"/>
           </a:p>
           <a:p>
             <a:pPr lvl="3"/>
@@ -19811,7 +19959,6 @@
               <a:rPr lang="en-US"/>
               <a:t>Fourth level</a:t>
             </a:r>
-            <a:endParaRPr lang="en-US"/>
           </a:p>
           <a:p>
             <a:pPr lvl="4"/>
@@ -19819,7 +19966,6 @@
               <a:rPr lang="en-US"/>
               <a:t>Fifth level</a:t>
             </a:r>
-            <a:endParaRPr lang="en-US"/>
           </a:p>
         </p:txBody>
       </p:sp>
@@ -19840,6 +19986,7 @@
           <a:p>
             <a:fld id="{C764DE79-268F-4C1A-8933-263129D2AF90}" type="datetimeFigureOut">
               <a:rPr lang="en-US" dirty="0"/>
+              <a:t>10/21/2025</a:t>
             </a:fld>
             <a:endParaRPr lang="en-US"/>
           </a:p>
@@ -19881,6 +20028,7 @@
           <a:p>
             <a:fld id="{48F63A3B-78C7-47BE-AE5E-E10140E04643}" type="slidenum">
               <a:rPr lang="en-US" dirty="0"/>
+              <a:t>‹#›</a:t>
             </a:fld>
             <a:endParaRPr lang="en-US"/>
           </a:p>
@@ -19930,7 +20078,6 @@
               <a:rPr lang="en-US"/>
               <a:t>Click to edit Master title style</a:t>
             </a:r>
-            <a:endParaRPr lang="en-US"/>
           </a:p>
         </p:txBody>
       </p:sp>
@@ -19951,6 +20098,7 @@
           <a:p>
             <a:fld id="{C764DE79-268F-4C1A-8933-263129D2AF90}" type="datetimeFigureOut">
               <a:rPr lang="en-US" dirty="0"/>
+              <a:t>10/21/2025</a:t>
             </a:fld>
             <a:endParaRPr lang="en-US"/>
           </a:p>
@@ -19992,6 +20140,7 @@
           <a:p>
             <a:fld id="{48F63A3B-78C7-47BE-AE5E-E10140E04643}" type="slidenum">
               <a:rPr lang="en-US" dirty="0"/>
+              <a:t>‹#›</a:t>
             </a:fld>
             <a:endParaRPr lang="en-US"/>
           </a:p>
@@ -20039,6 +20188,7 @@
           <a:p>
             <a:fld id="{C764DE79-268F-4C1A-8933-263129D2AF90}" type="datetimeFigureOut">
               <a:rPr lang="en-US" dirty="0"/>
+              <a:t>10/21/2025</a:t>
             </a:fld>
             <a:endParaRPr lang="en-US"/>
           </a:p>
@@ -20080,6 +20230,7 @@
           <a:p>
             <a:fld id="{48F63A3B-78C7-47BE-AE5E-E10140E04643}" type="slidenum">
               <a:rPr lang="en-US" dirty="0"/>
+              <a:t>‹#›</a:t>
             </a:fld>
             <a:endParaRPr lang="en-US"/>
           </a:p>
@@ -20138,7 +20289,6 @@
               <a:rPr lang="en-US"/>
               <a:t>Click to edit Master title style</a:t>
             </a:r>
-            <a:endParaRPr lang="en-US"/>
           </a:p>
         </p:txBody>
       </p:sp>
@@ -20195,7 +20345,6 @@
               <a:rPr lang="en-US"/>
               <a:t>Click to edit Master text styles</a:t>
             </a:r>
-            <a:endParaRPr lang="en-US"/>
           </a:p>
           <a:p>
             <a:pPr lvl="1"/>
@@ -20203,7 +20352,6 @@
               <a:rPr lang="en-US"/>
               <a:t>Second level</a:t>
             </a:r>
-            <a:endParaRPr lang="en-US"/>
           </a:p>
           <a:p>
             <a:pPr lvl="2"/>
@@ -20211,7 +20359,6 @@
               <a:rPr lang="en-US"/>
               <a:t>Third level</a:t>
             </a:r>
-            <a:endParaRPr lang="en-US"/>
           </a:p>
           <a:p>
             <a:pPr lvl="3"/>
@@ -20219,7 +20366,6 @@
               <a:rPr lang="en-US"/>
               <a:t>Fourth level</a:t>
             </a:r>
-            <a:endParaRPr lang="en-US"/>
           </a:p>
           <a:p>
             <a:pPr lvl="4"/>
@@ -20227,7 +20373,6 @@
               <a:rPr lang="en-US"/>
               <a:t>Fifth level</a:t>
             </a:r>
-            <a:endParaRPr lang="en-US"/>
           </a:p>
         </p:txBody>
       </p:sp>
@@ -20293,7 +20438,6 @@
               <a:rPr lang="en-US"/>
               <a:t>Click to edit Master text styles</a:t>
             </a:r>
-            <a:endParaRPr lang="en-US"/>
           </a:p>
         </p:txBody>
       </p:sp>
@@ -20314,6 +20458,7 @@
           <a:p>
             <a:fld id="{C764DE79-268F-4C1A-8933-263129D2AF90}" type="datetimeFigureOut">
               <a:rPr lang="en-US" dirty="0"/>
+              <a:t>10/21/2025</a:t>
             </a:fld>
             <a:endParaRPr lang="en-US"/>
           </a:p>
@@ -20355,6 +20500,7 @@
           <a:p>
             <a:fld id="{48F63A3B-78C7-47BE-AE5E-E10140E04643}" type="slidenum">
               <a:rPr lang="en-US" dirty="0"/>
+              <a:t>‹#›</a:t>
             </a:fld>
             <a:endParaRPr lang="en-US"/>
           </a:p>
@@ -20413,7 +20559,6 @@
               <a:rPr lang="en-US"/>
               <a:t>Click to edit Master title style</a:t>
             </a:r>
-            <a:endParaRPr lang="en-US"/>
           </a:p>
         </p:txBody>
       </p:sp>
@@ -20540,7 +20685,6 @@
               <a:rPr lang="en-US"/>
               <a:t>Click to edit Master text styles</a:t>
             </a:r>
-            <a:endParaRPr lang="en-US"/>
           </a:p>
         </p:txBody>
       </p:sp>
@@ -20561,6 +20705,7 @@
           <a:p>
             <a:fld id="{C764DE79-268F-4C1A-8933-263129D2AF90}" type="datetimeFigureOut">
               <a:rPr lang="en-US" dirty="0"/>
+              <a:t>10/21/2025</a:t>
             </a:fld>
             <a:endParaRPr lang="en-US"/>
           </a:p>
@@ -20602,6 +20747,7 @@
           <a:p>
             <a:fld id="{48F63A3B-78C7-47BE-AE5E-E10140E04643}" type="slidenum">
               <a:rPr lang="en-US" dirty="0"/>
+              <a:t>‹#›</a:t>
             </a:fld>
             <a:endParaRPr lang="en-US"/>
           </a:p>
@@ -20666,7 +20812,6 @@
               <a:rPr lang="en-US"/>
               <a:t>Click to edit Master title style</a:t>
             </a:r>
-            <a:endParaRPr lang="en-US"/>
           </a:p>
         </p:txBody>
       </p:sp>
@@ -20700,7 +20845,6 @@
               <a:rPr lang="en-US"/>
               <a:t>Click to edit Master text styles</a:t>
             </a:r>
-            <a:endParaRPr lang="en-US"/>
           </a:p>
           <a:p>
             <a:pPr lvl="1"/>
@@ -20708,7 +20852,6 @@
               <a:rPr lang="en-US"/>
               <a:t>Second level</a:t>
             </a:r>
-            <a:endParaRPr lang="en-US"/>
           </a:p>
           <a:p>
             <a:pPr lvl="2"/>
@@ -20716,7 +20859,6 @@
               <a:rPr lang="en-US"/>
               <a:t>Third level</a:t>
             </a:r>
-            <a:endParaRPr lang="en-US"/>
           </a:p>
           <a:p>
             <a:pPr lvl="3"/>
@@ -20724,7 +20866,6 @@
               <a:rPr lang="en-US"/>
               <a:t>Fourth level</a:t>
             </a:r>
-            <a:endParaRPr lang="en-US"/>
           </a:p>
           <a:p>
             <a:pPr lvl="4"/>
@@ -20732,7 +20873,6 @@
               <a:rPr lang="en-US"/>
               <a:t>Fifth level</a:t>
             </a:r>
-            <a:endParaRPr lang="en-US"/>
           </a:p>
         </p:txBody>
       </p:sp>
@@ -20771,6 +20911,7 @@
           <a:p>
             <a:fld id="{C764DE79-268F-4C1A-8933-263129D2AF90}" type="datetimeFigureOut">
               <a:rPr lang="en-US" dirty="0"/>
+              <a:t>10/21/2025</a:t>
             </a:fld>
             <a:endParaRPr lang="en-US"/>
           </a:p>
@@ -20848,6 +20989,7 @@
           <a:p>
             <a:fld id="{48F63A3B-78C7-47BE-AE5E-E10140E04643}" type="slidenum">
               <a:rPr lang="en-US" dirty="0"/>
+              <a:t>‹#›</a:t>
             </a:fld>
             <a:endParaRPr lang="en-US"/>
           </a:p>
@@ -21231,7 +21373,7 @@
           <p:nvPr/>
         </p:nvPicPr>
         <p:blipFill rotWithShape="1">
-          <a:blip r:embed="rId1"/>
+          <a:blip r:embed="rId2"/>
           <a:srcRect l="3751" r="24750" b="-1"/>
           <a:stretch>
             <a:fillRect/>
@@ -21416,11 +21558,6 @@
               </a:rPr>
               <a:t>C#</a:t>
             </a:r>
-            <a:endParaRPr lang="en-US" sz="7200">
-              <a:latin typeface="+mj-lt"/>
-              <a:ea typeface="+mj-ea"/>
-              <a:cs typeface="+mj-cs"/>
-            </a:endParaRPr>
           </a:p>
         </p:txBody>
       </p:sp>
@@ -21641,14 +21778,6 @@
               </a:rPr>
               <a:t>Programming structure</a:t>
             </a:r>
-            <a:endParaRPr lang="en-US" sz="4500" kern="1200">
-              <a:solidFill>
-                <a:schemeClr val="tx1"/>
-              </a:solidFill>
-              <a:latin typeface="+mj-lt"/>
-              <a:ea typeface="+mj-ea"/>
-              <a:cs typeface="+mj-cs"/>
-            </a:endParaRPr>
           </a:p>
           <a:p>
             <a:pPr indent="-228600">
@@ -22294,7 +22423,7 @@
         </p:xfrm>
         <a:graphic>
           <a:graphicData uri="http://schemas.openxmlformats.org/drawingml/2006/diagram">
-            <dgm:relIds xmlns:dgm="http://schemas.openxmlformats.org/drawingml/2006/diagram" xmlns:r="http://schemas.openxmlformats.org/officeDocument/2006/relationships" r:dm="rId1" r:lo="rId2" r:qs="rId3" r:cs="rId4"/>
+            <dgm:relIds xmlns:dgm="http://schemas.openxmlformats.org/drawingml/2006/diagram" xmlns:r="http://schemas.openxmlformats.org/officeDocument/2006/relationships" r:dm="rId2" r:lo="rId3" r:qs="rId4" r:cs="rId5"/>
           </a:graphicData>
         </a:graphic>
       </p:graphicFrame>
@@ -22687,14 +22816,6 @@
               </a:rPr>
               <a:t>Data types</a:t>
             </a:r>
-            <a:endParaRPr lang="en-US" sz="6600" kern="1200">
-              <a:solidFill>
-                <a:schemeClr val="tx1"/>
-              </a:solidFill>
-              <a:latin typeface="+mj-lt"/>
-              <a:ea typeface="+mj-ea"/>
-              <a:cs typeface="+mj-cs"/>
-            </a:endParaRPr>
           </a:p>
           <a:p>
             <a:pPr algn="r">
@@ -23354,14 +23475,6 @@
               </a:rPr>
               <a:t>Value type</a:t>
             </a:r>
-            <a:endParaRPr lang="en-US" sz="6600" kern="1200">
-              <a:solidFill>
-                <a:schemeClr val="tx1"/>
-              </a:solidFill>
-              <a:latin typeface="+mj-lt"/>
-              <a:ea typeface="+mj-ea"/>
-              <a:cs typeface="+mj-cs"/>
-            </a:endParaRPr>
           </a:p>
           <a:p>
             <a:pPr algn="r">
@@ -23456,7 +23569,7 @@
         </p:xfrm>
         <a:graphic>
           <a:graphicData uri="http://schemas.openxmlformats.org/drawingml/2006/diagram">
-            <dgm:relIds xmlns:dgm="http://schemas.openxmlformats.org/drawingml/2006/diagram" xmlns:r="http://schemas.openxmlformats.org/officeDocument/2006/relationships" r:dm="rId1" r:lo="rId2" r:qs="rId3" r:cs="rId4"/>
+            <dgm:relIds xmlns:dgm="http://schemas.openxmlformats.org/drawingml/2006/diagram" xmlns:r="http://schemas.openxmlformats.org/officeDocument/2006/relationships" r:dm="rId2" r:lo="rId3" r:qs="rId4" r:cs="rId5"/>
           </a:graphicData>
         </a:graphic>
       </p:graphicFrame>
@@ -23849,14 +23962,6 @@
               </a:rPr>
               <a:t>Reference types</a:t>
             </a:r>
-            <a:endParaRPr lang="en-US" sz="6600" kern="1200">
-              <a:solidFill>
-                <a:schemeClr val="tx1"/>
-              </a:solidFill>
-              <a:latin typeface="+mj-lt"/>
-              <a:ea typeface="+mj-ea"/>
-              <a:cs typeface="+mj-cs"/>
-            </a:endParaRPr>
           </a:p>
           <a:p>
             <a:pPr algn="r">
@@ -23969,7 +24074,7 @@
         </p:xfrm>
         <a:graphic>
           <a:graphicData uri="http://schemas.openxmlformats.org/drawingml/2006/diagram">
-            <dgm:relIds xmlns:dgm="http://schemas.openxmlformats.org/drawingml/2006/diagram" xmlns:r="http://schemas.openxmlformats.org/officeDocument/2006/relationships" r:dm="rId1" r:lo="rId2" r:qs="rId3" r:cs="rId4"/>
+            <dgm:relIds xmlns:dgm="http://schemas.openxmlformats.org/drawingml/2006/diagram" xmlns:r="http://schemas.openxmlformats.org/officeDocument/2006/relationships" r:dm="rId2" r:lo="rId3" r:qs="rId4" r:cs="rId5"/>
           </a:graphicData>
         </a:graphic>
       </p:graphicFrame>
@@ -24247,17 +24352,6 @@
               </a:rPr>
               <a:t>Variables</a:t>
             </a:r>
-            <a:endParaRPr lang="en-US" sz="6600" kern="1200">
-              <a:solidFill>
-                <a:schemeClr val="tx1">
-                  <a:lumMod val="75000"/>
-                  <a:lumOff val="25000"/>
-                </a:schemeClr>
-              </a:solidFill>
-              <a:latin typeface="+mj-lt"/>
-              <a:ea typeface="+mj-ea"/>
-              <a:cs typeface="+mj-cs"/>
-            </a:endParaRPr>
           </a:p>
           <a:p>
             <a:pPr algn="r">
@@ -24749,14 +24843,6 @@
               </a:rPr>
               <a:t>Control Flow Statements</a:t>
             </a:r>
-            <a:endParaRPr lang="en-US" sz="6100" kern="1200">
-              <a:solidFill>
-                <a:schemeClr val="tx1"/>
-              </a:solidFill>
-              <a:latin typeface="+mj-lt"/>
-              <a:ea typeface="+mj-ea"/>
-              <a:cs typeface="+mj-cs"/>
-            </a:endParaRPr>
           </a:p>
         </p:txBody>
       </p:sp>
@@ -25241,11 +25327,6 @@
               </a:rPr>
               <a:t>If Statement</a:t>
             </a:r>
-            <a:endParaRPr lang="en-US" sz="4500" kern="1200">
-              <a:latin typeface="+mj-lt"/>
-              <a:ea typeface="+mj-ea"/>
-              <a:cs typeface="+mj-cs"/>
-            </a:endParaRPr>
           </a:p>
         </p:txBody>
       </p:sp>
@@ -25817,14 +25898,6 @@
               </a:rPr>
               <a:t>If/else statement</a:t>
             </a:r>
-            <a:endParaRPr lang="en-US" sz="6600" kern="1200">
-              <a:solidFill>
-                <a:schemeClr val="tx1"/>
-              </a:solidFill>
-              <a:latin typeface="+mj-lt"/>
-              <a:ea typeface="+mj-ea"/>
-              <a:cs typeface="+mj-cs"/>
-            </a:endParaRPr>
           </a:p>
           <a:p>
             <a:pPr algn="r">
@@ -26678,7 +26751,7 @@
           <p:nvPr/>
         </p:nvPicPr>
         <p:blipFill rotWithShape="1">
-          <a:blip r:embed="rId1"/>
+          <a:blip r:embed="rId2"/>
           <a:srcRect t="1762" r="3" b="1724"/>
           <a:stretch>
             <a:fillRect/>
@@ -26703,7 +26776,7 @@
           <p:nvPr/>
         </p:nvPicPr>
         <p:blipFill rotWithShape="1">
-          <a:blip r:embed="rId2"/>
+          <a:blip r:embed="rId3"/>
           <a:srcRect r="390"/>
           <a:stretch>
             <a:fillRect/>
@@ -26858,11 +26931,6 @@
               </a:rPr>
               <a:t>Overview</a:t>
             </a:r>
-            <a:endParaRPr lang="en-US" sz="5400">
-              <a:latin typeface="+mj-lt"/>
-              <a:ea typeface="+mj-ea"/>
-              <a:cs typeface="+mj-cs"/>
-            </a:endParaRPr>
           </a:p>
         </p:txBody>
       </p:sp>
@@ -26901,7 +26969,6 @@
               <a:rPr lang="en-US" sz="1400" dirty="0"/>
               <a:t>Introduction to C#</a:t>
             </a:r>
-            <a:endParaRPr lang="en-US" sz="1400" dirty="0"/>
           </a:p>
           <a:p>
             <a:pPr indent="-228600">
@@ -26918,7 +26985,6 @@
               <a:rPr lang="en-US" sz="1400" dirty="0"/>
               <a:t>What is C Sharp ?</a:t>
             </a:r>
-            <a:endParaRPr lang="en-US" sz="1400" dirty="0"/>
           </a:p>
           <a:p>
             <a:pPr indent="-228600">
@@ -26935,7 +27001,6 @@
               <a:rPr lang="en-US" sz="1400" dirty="0"/>
               <a:t>Working of C Sharp</a:t>
             </a:r>
-            <a:endParaRPr lang="en-US" sz="1400" dirty="0"/>
           </a:p>
           <a:p>
             <a:pPr indent="-228600">
@@ -26952,7 +27017,6 @@
               <a:rPr lang="en-US" sz="1400" dirty="0"/>
               <a:t>Features of C Sharp</a:t>
             </a:r>
-            <a:endParaRPr lang="en-US" sz="1400" dirty="0"/>
           </a:p>
           <a:p>
             <a:pPr indent="-228600">
@@ -26969,7 +27033,6 @@
               <a:rPr lang="en-US" sz="1400" dirty="0"/>
               <a:t>Basic Programming Structure</a:t>
             </a:r>
-            <a:endParaRPr lang="en-US" sz="1400" dirty="0"/>
           </a:p>
           <a:p>
             <a:pPr indent="-228600">
@@ -26986,7 +27049,6 @@
               <a:rPr lang="en-US" sz="1400" dirty="0"/>
               <a:t>Namespaces</a:t>
             </a:r>
-            <a:endParaRPr lang="en-US" sz="1400" dirty="0"/>
           </a:p>
           <a:p>
             <a:pPr indent="-228600">
@@ -27003,7 +27065,6 @@
               <a:rPr lang="en-US" sz="1400" dirty="0"/>
               <a:t>Data Types</a:t>
             </a:r>
-            <a:endParaRPr lang="en-US" sz="1400" dirty="0"/>
           </a:p>
           <a:p>
             <a:pPr indent="-228600">
@@ -27020,7 +27081,6 @@
               <a:rPr lang="en-US" sz="1400" dirty="0"/>
               <a:t>Variables</a:t>
             </a:r>
-            <a:endParaRPr lang="en-US" sz="1400" dirty="0"/>
           </a:p>
           <a:p>
             <a:pPr indent="-228600">
@@ -27037,7 +27097,6 @@
               <a:rPr lang="en-US" sz="1400" dirty="0"/>
               <a:t>Expressions and Operators</a:t>
             </a:r>
-            <a:endParaRPr lang="en-US" sz="1400" dirty="0"/>
           </a:p>
           <a:p>
             <a:pPr indent="-228600">
@@ -27054,7 +27113,6 @@
               <a:rPr lang="en-US" sz="1400" dirty="0"/>
               <a:t>Control Statement- Select</a:t>
             </a:r>
-            <a:endParaRPr lang="en-US" sz="1400" dirty="0"/>
           </a:p>
           <a:p>
             <a:pPr indent="-228600">
@@ -27071,7 +27129,6 @@
               <a:rPr lang="en-US" sz="1400" dirty="0"/>
               <a:t>Control Statement- Loop</a:t>
             </a:r>
-            <a:endParaRPr lang="en-US" sz="1400" dirty="0"/>
           </a:p>
           <a:p>
             <a:pPr indent="-228600">
@@ -27088,7 +27145,6 @@
               <a:rPr lang="en-US" sz="1400" dirty="0"/>
               <a:t>Array , Enums</a:t>
             </a:r>
-            <a:endParaRPr lang="en-US" sz="1400" dirty="0"/>
           </a:p>
           <a:p>
             <a:pPr indent="-228600">
@@ -27506,14 +27562,6 @@
               </a:rPr>
               <a:t>The switch Statement</a:t>
             </a:r>
-            <a:endParaRPr lang="en-US" sz="6600" kern="1200">
-              <a:solidFill>
-                <a:schemeClr val="tx1"/>
-              </a:solidFill>
-              <a:latin typeface="+mj-lt"/>
-              <a:ea typeface="+mj-ea"/>
-              <a:cs typeface="+mj-cs"/>
-            </a:endParaRPr>
           </a:p>
           <a:p>
             <a:pPr algn="r">
@@ -28121,14 +28169,6 @@
               </a:rPr>
               <a:t>Control Statement- Loop</a:t>
             </a:r>
-            <a:endParaRPr lang="en-US" sz="6000" kern="1200">
-              <a:solidFill>
-                <a:schemeClr val="tx1"/>
-              </a:solidFill>
-              <a:latin typeface="+mj-lt"/>
-              <a:ea typeface="+mj-ea"/>
-              <a:cs typeface="+mj-cs"/>
-            </a:endParaRPr>
           </a:p>
           <a:p>
             <a:pPr indent="-228600">
@@ -28507,11 +28547,6 @@
               </a:rPr>
               <a:t>While-statement</a:t>
             </a:r>
-            <a:endParaRPr lang="en-US" sz="4000" kern="1200">
-              <a:latin typeface="+mj-lt"/>
-              <a:ea typeface="+mj-ea"/>
-              <a:cs typeface="+mj-cs"/>
-            </a:endParaRPr>
           </a:p>
           <a:p>
             <a:pPr algn="r">
@@ -29044,11 +29079,6 @@
               </a:rPr>
               <a:t>statement</a:t>
             </a:r>
-            <a:endParaRPr lang="en-US" sz="4600" kern="1200" dirty="0">
-              <a:latin typeface="+mj-lt"/>
-              <a:ea typeface="+mj-ea"/>
-              <a:cs typeface="+mj-cs"/>
-            </a:endParaRPr>
           </a:p>
           <a:p>
             <a:pPr algn="r">
@@ -29582,14 +29612,6 @@
               </a:rPr>
               <a:t> The for statement</a:t>
             </a:r>
-            <a:endParaRPr lang="en-US" sz="4000" kern="1200">
-              <a:solidFill>
-                <a:schemeClr val="tx1"/>
-              </a:solidFill>
-              <a:latin typeface="+mj-lt"/>
-              <a:ea typeface="+mj-ea"/>
-              <a:cs typeface="+mj-cs"/>
-            </a:endParaRPr>
           </a:p>
           <a:p>
             <a:pPr algn="r">
@@ -30195,17 +30217,6 @@
               </a:rPr>
               <a:t>Example For</a:t>
             </a:r>
-            <a:endParaRPr lang="en-US" sz="6600" kern="1200">
-              <a:solidFill>
-                <a:schemeClr val="tx1">
-                  <a:lumMod val="75000"/>
-                  <a:lumOff val="25000"/>
-                </a:schemeClr>
-              </a:solidFill>
-              <a:latin typeface="+mj-lt"/>
-              <a:ea typeface="+mj-ea"/>
-              <a:cs typeface="+mj-cs"/>
-            </a:endParaRPr>
           </a:p>
           <a:p>
             <a:pPr algn="r">
@@ -30230,17 +30241,6 @@
               </a:rPr>
               <a:t>For loop</a:t>
             </a:r>
-            <a:endParaRPr lang="en-US" sz="6600" kern="1200">
-              <a:solidFill>
-                <a:schemeClr val="tx1">
-                  <a:lumMod val="75000"/>
-                  <a:lumOff val="25000"/>
-                </a:schemeClr>
-              </a:solidFill>
-              <a:latin typeface="+mj-lt"/>
-              <a:ea typeface="+mj-ea"/>
-              <a:cs typeface="+mj-cs"/>
-            </a:endParaRPr>
           </a:p>
           <a:p>
             <a:pPr algn="r">
@@ -30892,14 +30892,6 @@
               </a:rPr>
               <a:t>The foreach-statement</a:t>
             </a:r>
-            <a:endParaRPr lang="en-US" sz="6000" kern="1200" dirty="0">
-              <a:solidFill>
-                <a:schemeClr val="tx1"/>
-              </a:solidFill>
-              <a:latin typeface="+mj-lt"/>
-              <a:ea typeface="+mj-ea"/>
-              <a:cs typeface="+mj-cs"/>
-            </a:endParaRPr>
           </a:p>
           <a:p>
             <a:pPr>
@@ -31650,14 +31642,6 @@
               </a:rPr>
               <a:t>Array</a:t>
             </a:r>
-            <a:endParaRPr lang="en-US" sz="6100" kern="1200">
-              <a:solidFill>
-                <a:schemeClr val="tx1"/>
-              </a:solidFill>
-              <a:latin typeface="+mj-lt"/>
-              <a:ea typeface="+mj-ea"/>
-              <a:cs typeface="+mj-cs"/>
-            </a:endParaRPr>
           </a:p>
           <a:p>
             <a:pPr algn="r">
@@ -32396,11 +32380,6 @@
               </a:rPr>
               <a:t>Array</a:t>
             </a:r>
-            <a:endParaRPr lang="en-US" sz="5600">
-              <a:latin typeface="+mj-lt"/>
-              <a:ea typeface="+mj-ea"/>
-              <a:cs typeface="Calibri Light" panose="020F0302020204030204"/>
-            </a:endParaRPr>
           </a:p>
           <a:p>
             <a:pPr>
@@ -32455,7 +32434,7 @@
         </p:xfrm>
         <a:graphic>
           <a:graphicData uri="http://schemas.openxmlformats.org/drawingml/2006/diagram">
-            <dgm:relIds xmlns:dgm="http://schemas.openxmlformats.org/drawingml/2006/diagram" xmlns:r="http://schemas.openxmlformats.org/officeDocument/2006/relationships" r:dm="rId1" r:lo="rId2" r:qs="rId3" r:cs="rId4"/>
+            <dgm:relIds xmlns:dgm="http://schemas.openxmlformats.org/drawingml/2006/diagram" xmlns:r="http://schemas.openxmlformats.org/officeDocument/2006/relationships" r:dm="rId2" r:lo="rId3" r:qs="rId4" r:cs="rId5"/>
           </a:graphicData>
         </a:graphic>
       </p:graphicFrame>
@@ -32920,14 +32899,6 @@
               </a:rPr>
               <a:t>Initializing Arrays.</a:t>
             </a:r>
-            <a:endParaRPr lang="en-US" sz="5100" kern="1200">
-              <a:solidFill>
-                <a:schemeClr val="tx1"/>
-              </a:solidFill>
-              <a:latin typeface="+mj-lt"/>
-              <a:ea typeface="+mj-ea"/>
-              <a:cs typeface="+mj-cs"/>
-            </a:endParaRPr>
           </a:p>
           <a:p>
             <a:pPr algn="r">
@@ -33350,7 +33321,7 @@
           <p:nvPr/>
         </p:nvPicPr>
         <p:blipFill>
-          <a:blip r:embed="rId1"/>
+          <a:blip r:embed="rId2"/>
           <a:stretch>
             <a:fillRect/>
           </a:stretch>
@@ -34698,14 +34669,6 @@
               </a:rPr>
               <a:t>Array Types</a:t>
             </a:r>
-            <a:endParaRPr lang="en-US" sz="2770" kern="1200">
-              <a:solidFill>
-                <a:schemeClr val="tx1"/>
-              </a:solidFill>
-              <a:latin typeface="+mj-lt"/>
-              <a:ea typeface="+mj-ea"/>
-              <a:cs typeface="+mj-cs"/>
-            </a:endParaRPr>
           </a:p>
           <a:p>
             <a:pPr defTabSz="575945">
@@ -35228,14 +35191,6 @@
               </a:rPr>
               <a:t>Enum</a:t>
             </a:r>
-            <a:endParaRPr lang="en-US" sz="6600" kern="1200">
-              <a:solidFill>
-                <a:schemeClr val="tx1"/>
-              </a:solidFill>
-              <a:latin typeface="+mj-lt"/>
-              <a:ea typeface="+mj-ea"/>
-              <a:cs typeface="+mj-cs"/>
-            </a:endParaRPr>
           </a:p>
         </p:txBody>
       </p:sp>
@@ -35804,14 +35759,6 @@
               </a:rPr>
               <a:t>Enum</a:t>
             </a:r>
-            <a:endParaRPr lang="en-US" sz="6600" kern="1200">
-              <a:solidFill>
-                <a:schemeClr val="tx1"/>
-              </a:solidFill>
-              <a:latin typeface="+mj-lt"/>
-              <a:ea typeface="+mj-ea"/>
-              <a:cs typeface="+mj-cs"/>
-            </a:endParaRPr>
           </a:p>
         </p:txBody>
       </p:sp>
@@ -36253,14 +36200,6 @@
               </a:rPr>
               <a:t>Enum</a:t>
             </a:r>
-            <a:endParaRPr lang="en-US" sz="7200" kern="1200">
-              <a:solidFill>
-                <a:schemeClr val="tx1"/>
-              </a:solidFill>
-              <a:latin typeface="+mj-lt"/>
-              <a:ea typeface="+mj-ea"/>
-              <a:cs typeface="+mj-cs"/>
-            </a:endParaRPr>
           </a:p>
         </p:txBody>
       </p:sp>
@@ -36790,14 +36729,6 @@
               </a:rPr>
               <a:t>Enum</a:t>
             </a:r>
-            <a:endParaRPr lang="en-US" sz="6600" kern="1200">
-              <a:solidFill>
-                <a:schemeClr val="tx1"/>
-              </a:solidFill>
-              <a:latin typeface="+mj-lt"/>
-              <a:ea typeface="+mj-ea"/>
-              <a:cs typeface="+mj-cs"/>
-            </a:endParaRPr>
           </a:p>
         </p:txBody>
       </p:sp>
@@ -37352,14 +37283,6 @@
               </a:rPr>
               <a:t>Type Conversions</a:t>
             </a:r>
-            <a:endParaRPr lang="en-US" sz="6600" kern="1200">
-              <a:solidFill>
-                <a:schemeClr val="tx1"/>
-              </a:solidFill>
-              <a:latin typeface="+mj-lt"/>
-              <a:ea typeface="+mj-ea"/>
-              <a:cs typeface="+mj-cs"/>
-            </a:endParaRPr>
           </a:p>
           <a:p>
             <a:pPr algn="r">
@@ -37724,14 +37647,6 @@
               </a:rPr>
               <a:t>Implicit type conversion</a:t>
             </a:r>
-            <a:endParaRPr lang="en-US" sz="6100" kern="1200">
-              <a:solidFill>
-                <a:schemeClr val="tx1"/>
-              </a:solidFill>
-              <a:latin typeface="+mj-lt"/>
-              <a:ea typeface="+mj-ea"/>
-              <a:cs typeface="+mj-cs"/>
-            </a:endParaRPr>
           </a:p>
           <a:p>
             <a:pPr>
@@ -38067,14 +37982,6 @@
               </a:rPr>
               <a:t> Explicit type conversion</a:t>
             </a:r>
-            <a:endParaRPr lang="en-US" sz="6100" kern="1200">
-              <a:solidFill>
-                <a:schemeClr val="tx1"/>
-              </a:solidFill>
-              <a:latin typeface="+mj-lt"/>
-              <a:ea typeface="+mj-ea"/>
-              <a:cs typeface="+mj-cs"/>
-            </a:endParaRPr>
           </a:p>
           <a:p>
             <a:pPr>
@@ -38319,14 +38226,6 @@
               </a:rPr>
               <a:t>Structures</a:t>
             </a:r>
-            <a:endParaRPr lang="en-US" sz="6600" kern="1200">
-              <a:solidFill>
-                <a:schemeClr val="tx1"/>
-              </a:solidFill>
-              <a:latin typeface="+mj-lt"/>
-              <a:ea typeface="+mj-ea"/>
-              <a:cs typeface="+mj-cs"/>
-            </a:endParaRPr>
           </a:p>
         </p:txBody>
       </p:sp>
@@ -38975,14 +38874,6 @@
               </a:rPr>
               <a:t>Thank You</a:t>
             </a:r>
-            <a:endParaRPr lang="en-US" sz="9600" kern="1200">
-              <a:solidFill>
-                <a:schemeClr val="tx1"/>
-              </a:solidFill>
-              <a:latin typeface="+mj-lt"/>
-              <a:ea typeface="+mj-ea"/>
-              <a:cs typeface="+mj-cs"/>
-            </a:endParaRPr>
           </a:p>
         </p:txBody>
       </p:sp>
@@ -39114,7 +39005,7 @@
           <p:nvPr/>
         </p:nvPicPr>
         <p:blipFill>
-          <a:blip r:embed="rId1"/>
+          <a:blip r:embed="rId2"/>
           <a:stretch>
             <a:fillRect/>
           </a:stretch>
@@ -39261,14 +39152,6 @@
               </a:rPr>
               <a:t>Working of c#</a:t>
             </a:r>
-            <a:endParaRPr lang="en-US" sz="6700" kern="1200">
-              <a:solidFill>
-                <a:schemeClr val="tx1"/>
-              </a:solidFill>
-              <a:latin typeface="+mj-lt"/>
-              <a:ea typeface="+mj-ea"/>
-              <a:cs typeface="+mj-cs"/>
-            </a:endParaRPr>
           </a:p>
         </p:txBody>
       </p:sp>
@@ -39590,9 +39473,6 @@
               </a:rPr>
               <a:t> csc Welcome.cs</a:t>
             </a:r>
-            <a:endParaRPr lang="en-US" sz="2400">
-              <a:cs typeface="Calibri" panose="020F0502020204030204"/>
-            </a:endParaRPr>
           </a:p>
           <a:p>
             <a:pPr>
@@ -39622,9 +39502,6 @@
               </a:rPr>
               <a:t>   This produces a file named Welcome.exe, which can thenbe  executed. </a:t>
             </a:r>
-            <a:endParaRPr lang="en-US" sz="2400">
-              <a:cs typeface="Calibri" panose="020F0502020204030204"/>
-            </a:endParaRPr>
           </a:p>
           <a:p>
             <a:endParaRPr lang="en-US" sz="2400">
@@ -39754,14 +39631,6 @@
               </a:rPr>
               <a:t>What is c#</a:t>
             </a:r>
-            <a:endParaRPr lang="en-US" sz="6600" kern="1200">
-              <a:solidFill>
-                <a:schemeClr val="tx1"/>
-              </a:solidFill>
-              <a:latin typeface="+mj-lt"/>
-              <a:ea typeface="+mj-ea"/>
-              <a:cs typeface="+mj-cs"/>
-            </a:endParaRPr>
           </a:p>
         </p:txBody>
       </p:sp>
@@ -39899,7 +39768,6 @@
               <a:rPr lang="en-US" sz="2200"/>
               <a:t>The C# programming language (pronounced "C-Sharp") .</a:t>
             </a:r>
-            <a:endParaRPr lang="en-US" sz="2200"/>
           </a:p>
           <a:p>
             <a:pPr indent="-228600">
@@ -39916,7 +39784,6 @@
               <a:rPr lang="en-US" sz="2200"/>
               <a:t>C Sharp is a powerful object-oriented programming languages.</a:t>
             </a:r>
-            <a:endParaRPr lang="en-US" sz="2200"/>
           </a:p>
           <a:p>
             <a:pPr indent="-228600">
@@ -39933,7 +39800,6 @@
               <a:rPr lang="en-US" sz="2200"/>
               <a:t>Microsoft developed C#, a new programming language based on the C and C++ languages. </a:t>
             </a:r>
-            <a:endParaRPr lang="en-US" sz="2200"/>
           </a:p>
           <a:p>
             <a:pPr indent="-228600">
@@ -39950,7 +39816,6 @@
               <a:rPr lang="en-US" sz="2200"/>
               <a:t>C# is a case sensitive language.</a:t>
             </a:r>
-            <a:endParaRPr lang="en-US" sz="2200"/>
           </a:p>
           <a:p>
             <a:pPr indent="-228600">
@@ -39967,7 +39832,6 @@
               <a:rPr lang="en-US" sz="2200"/>
               <a:t>C# support component-oriented programming.</a:t>
             </a:r>
-            <a:endParaRPr lang="en-US" sz="2200"/>
           </a:p>
           <a:p>
             <a:pPr indent="-228600">
@@ -40325,14 +40189,6 @@
               </a:rPr>
               <a:t>C# Language Features</a:t>
             </a:r>
-            <a:endParaRPr lang="en-US" sz="4200" kern="1200">
-              <a:solidFill>
-                <a:schemeClr val="tx1"/>
-              </a:solidFill>
-              <a:latin typeface="+mj-lt"/>
-              <a:ea typeface="+mj-ea"/>
-              <a:cs typeface="+mj-cs"/>
-            </a:endParaRPr>
           </a:p>
         </p:txBody>
       </p:sp>
@@ -40371,7 +40227,6 @@
               <a:rPr lang="en-US" sz="2400"/>
               <a:t>Many of the features in C# language are preexisted in various languages such as C++, Java, Pascal, and Visual Basic.</a:t>
             </a:r>
-            <a:endParaRPr lang="en-US" sz="2400"/>
           </a:p>
           <a:p>
             <a:pPr marL="342900" indent="-228600">
@@ -40388,7 +40243,6 @@
               <a:rPr lang="en-US" sz="2400"/>
               <a:t>Object Oriented.</a:t>
             </a:r>
-            <a:endParaRPr lang="en-US" sz="2400"/>
           </a:p>
           <a:p>
             <a:pPr marL="342900" indent="-228600">
@@ -40405,7 +40259,6 @@
               <a:rPr lang="en-US" sz="2400"/>
               <a:t>Simple and Flexible.</a:t>
             </a:r>
-            <a:endParaRPr lang="en-US" sz="2400"/>
           </a:p>
           <a:p>
             <a:pPr marL="342900" indent="-228600">
@@ -40422,7 +40275,6 @@
               <a:rPr lang="en-US" sz="2400"/>
               <a:t>Automatic Memory Management.</a:t>
             </a:r>
-            <a:endParaRPr lang="en-US" sz="2400"/>
           </a:p>
           <a:p>
             <a:pPr marL="342900" indent="-228600">
@@ -40439,7 +40291,6 @@
               <a:rPr lang="en-US" sz="2400"/>
               <a:t>Cross Platform Interoperability.</a:t>
             </a:r>
-            <a:endParaRPr lang="en-US" sz="2400"/>
           </a:p>
           <a:p>
             <a:pPr indent="-228600">
@@ -40797,14 +40648,6 @@
               </a:rPr>
               <a:t>C# Editors and IDEs</a:t>
             </a:r>
-            <a:endParaRPr lang="en-US" sz="6000" kern="1200">
-              <a:solidFill>
-                <a:schemeClr val="tx1"/>
-              </a:solidFill>
-              <a:latin typeface="+mj-lt"/>
-              <a:ea typeface="+mj-ea"/>
-              <a:cs typeface="+mj-cs"/>
-            </a:endParaRPr>
           </a:p>
           <a:p>
             <a:pPr>
@@ -40841,7 +40684,7 @@
         </p:xfrm>
         <a:graphic>
           <a:graphicData uri="http://schemas.openxmlformats.org/drawingml/2006/diagram">
-            <dgm:relIds xmlns:dgm="http://schemas.openxmlformats.org/drawingml/2006/diagram" xmlns:r="http://schemas.openxmlformats.org/officeDocument/2006/relationships" r:dm="rId1" r:lo="rId2" r:qs="rId3" r:cs="rId4"/>
+            <dgm:relIds xmlns:dgm="http://schemas.openxmlformats.org/drawingml/2006/diagram" xmlns:r="http://schemas.openxmlformats.org/officeDocument/2006/relationships" r:dm="rId2" r:lo="rId3" r:qs="rId4" r:cs="rId5"/>
           </a:graphicData>
         </a:graphic>
       </p:graphicFrame>
@@ -40966,14 +40809,6 @@
               </a:rPr>
               <a:t>Application Types In C#</a:t>
             </a:r>
-            <a:endParaRPr lang="en-US" sz="5200" kern="1200">
-              <a:solidFill>
-                <a:schemeClr val="tx1"/>
-              </a:solidFill>
-              <a:latin typeface="+mj-lt"/>
-              <a:ea typeface="+mj-ea"/>
-              <a:cs typeface="+mj-cs"/>
-            </a:endParaRPr>
           </a:p>
         </p:txBody>
       </p:sp>
@@ -40989,7 +40824,7 @@
         </p:xfrm>
         <a:graphic>
           <a:graphicData uri="http://schemas.openxmlformats.org/drawingml/2006/diagram">
-            <dgm:relIds xmlns:dgm="http://schemas.openxmlformats.org/drawingml/2006/diagram" xmlns:r="http://schemas.openxmlformats.org/officeDocument/2006/relationships" r:dm="rId1" r:lo="rId2" r:qs="rId3" r:cs="rId4"/>
+            <dgm:relIds xmlns:dgm="http://schemas.openxmlformats.org/drawingml/2006/diagram" xmlns:r="http://schemas.openxmlformats.org/officeDocument/2006/relationships" r:dm="rId2" r:lo="rId3" r:qs="rId4" r:cs="rId5"/>
           </a:graphicData>
         </a:graphic>
       </p:graphicFrame>
@@ -41252,6 +41087,8 @@
       </a:bgFillStyleLst>
     </a:fmtScheme>
   </a:themeElements>
+  <a:objectDefaults/>
+  <a:extraClrSchemeLst/>
   <a:extLst>
     <a:ext uri="{05A4C25C-085E-4340-85A3-A5531E510DB2}">
       <thm15:themeFamily xmlns:thm15="http://schemas.microsoft.com/office/thememl/2012/main" name="Office Theme" id="{62F939B6-93AF-4DB8-9C6B-D6C7DFDC589F}" vid="{4A3C46E8-61CC-4603-A589-7422A47A8E4A}"/>
